--- a/output/svet-moy-zerkalce-letters.pptx
+++ b/output/svet-moy-zerkalce-letters.pptx
@@ -3103,8 +3103,8 @@
         </p:nvSpPr>
         <p:spPr>
           <a:xfrm>
-            <a:off x="444506" y="184762"/>
-            <a:ext cx="2223662" cy="1720412"/>
+            <a:off x="514302" y="400762"/>
+            <a:ext cx="2177131" cy="1684412"/>
           </a:xfrm>
           <a:prstGeom prst="rect">
             <a:avLst/>
@@ -3130,7 +3130,7 @@
           </a:fontRef>
         </p:style>
         <p:txBody>
-          <a:bodyPr rtlCol="0" anchor="ctr" wrap="none" lIns="58517" rIns="58517" tIns="39011" bIns="39011"/>
+          <a:bodyPr rtlCol="0" anchor="ctr" wrap="none" lIns="57292" rIns="57292" tIns="38195" bIns="38195"/>
           <a:lstStyle/>
           <a:p>
             <a:pPr algn="ctr">
@@ -3161,8 +3161,8 @@
         </p:nvSpPr>
         <p:spPr>
           <a:xfrm>
-            <a:off x="2668168" y="184762"/>
-            <a:ext cx="2223662" cy="1720412"/>
+            <a:off x="2691434" y="400762"/>
+            <a:ext cx="2177131" cy="1684412"/>
           </a:xfrm>
           <a:prstGeom prst="rect">
             <a:avLst/>
@@ -3188,7 +3188,7 @@
           </a:fontRef>
         </p:style>
         <p:txBody>
-          <a:bodyPr rtlCol="0" anchor="ctr" wrap="none" lIns="58517" rIns="58517" tIns="39011" bIns="39011"/>
+          <a:bodyPr rtlCol="0" anchor="ctr" wrap="none" lIns="57292" rIns="57292" tIns="38195" bIns="38195"/>
           <a:lstStyle/>
           <a:p>
             <a:pPr algn="ctr">
@@ -3219,8 +3219,8 @@
         </p:nvSpPr>
         <p:spPr>
           <a:xfrm>
-            <a:off x="4891831" y="184762"/>
-            <a:ext cx="2223662" cy="1720412"/>
+            <a:off x="4868565" y="400762"/>
+            <a:ext cx="2177131" cy="1684412"/>
           </a:xfrm>
           <a:prstGeom prst="rect">
             <a:avLst/>
@@ -3246,7 +3246,7 @@
           </a:fontRef>
         </p:style>
         <p:txBody>
-          <a:bodyPr rtlCol="0" anchor="ctr" wrap="none" lIns="58517" rIns="58517" tIns="39011" bIns="39011"/>
+          <a:bodyPr rtlCol="0" anchor="ctr" wrap="none" lIns="57292" rIns="57292" tIns="38195" bIns="38195"/>
           <a:lstStyle/>
           <a:p>
             <a:pPr algn="ctr">
@@ -3277,8 +3277,8 @@
         </p:nvSpPr>
         <p:spPr>
           <a:xfrm>
-            <a:off x="444506" y="1905175"/>
-            <a:ext cx="2223662" cy="1720412"/>
+            <a:off x="514302" y="2085175"/>
+            <a:ext cx="2177131" cy="1684412"/>
           </a:xfrm>
           <a:prstGeom prst="rect">
             <a:avLst/>
@@ -3304,7 +3304,7 @@
           </a:fontRef>
         </p:style>
         <p:txBody>
-          <a:bodyPr rtlCol="0" anchor="ctr" wrap="none" lIns="58517" rIns="58517" tIns="39011" bIns="39011"/>
+          <a:bodyPr rtlCol="0" anchor="ctr" wrap="none" lIns="57292" rIns="57292" tIns="38195" bIns="38195"/>
           <a:lstStyle/>
           <a:p>
             <a:pPr algn="ctr">
@@ -3335,8 +3335,8 @@
         </p:nvSpPr>
         <p:spPr>
           <a:xfrm>
-            <a:off x="2668168" y="1905175"/>
-            <a:ext cx="2223662" cy="1720412"/>
+            <a:off x="2691434" y="2085175"/>
+            <a:ext cx="2177131" cy="1684412"/>
           </a:xfrm>
           <a:prstGeom prst="rect">
             <a:avLst/>
@@ -3362,7 +3362,7 @@
           </a:fontRef>
         </p:style>
         <p:txBody>
-          <a:bodyPr rtlCol="0" anchor="ctr" wrap="none" lIns="58517" rIns="58517" tIns="39011" bIns="39011"/>
+          <a:bodyPr rtlCol="0" anchor="ctr" wrap="none" lIns="57292" rIns="57292" tIns="38195" bIns="38195"/>
           <a:lstStyle/>
           <a:p>
             <a:pPr algn="ctr">
@@ -3393,8 +3393,8 @@
         </p:nvSpPr>
         <p:spPr>
           <a:xfrm>
-            <a:off x="4891831" y="1905175"/>
-            <a:ext cx="2223662" cy="1720412"/>
+            <a:off x="4868565" y="2085175"/>
+            <a:ext cx="2177131" cy="1684412"/>
           </a:xfrm>
           <a:prstGeom prst="rect">
             <a:avLst/>
@@ -3420,7 +3420,7 @@
           </a:fontRef>
         </p:style>
         <p:txBody>
-          <a:bodyPr rtlCol="0" anchor="ctr" wrap="none" lIns="58517" rIns="58517" tIns="39011" bIns="39011"/>
+          <a:bodyPr rtlCol="0" anchor="ctr" wrap="none" lIns="57292" rIns="57292" tIns="38195" bIns="38195"/>
           <a:lstStyle/>
           <a:p>
             <a:pPr algn="ctr">
@@ -3451,8 +3451,8 @@
         </p:nvSpPr>
         <p:spPr>
           <a:xfrm>
-            <a:off x="444506" y="3625587"/>
-            <a:ext cx="2223662" cy="1720412"/>
+            <a:off x="514302" y="3769587"/>
+            <a:ext cx="2177131" cy="1684412"/>
           </a:xfrm>
           <a:prstGeom prst="rect">
             <a:avLst/>
@@ -3478,7 +3478,7 @@
           </a:fontRef>
         </p:style>
         <p:txBody>
-          <a:bodyPr rtlCol="0" anchor="ctr" wrap="none" lIns="58517" rIns="58517" tIns="39011" bIns="39011"/>
+          <a:bodyPr rtlCol="0" anchor="ctr" wrap="none" lIns="57292" rIns="57292" tIns="38195" bIns="38195"/>
           <a:lstStyle/>
           <a:p>
             <a:pPr algn="ctr">
@@ -3509,8 +3509,8 @@
         </p:nvSpPr>
         <p:spPr>
           <a:xfrm>
-            <a:off x="2668168" y="3625587"/>
-            <a:ext cx="2223662" cy="1720412"/>
+            <a:off x="2691434" y="3769587"/>
+            <a:ext cx="2177131" cy="1684412"/>
           </a:xfrm>
           <a:prstGeom prst="rect">
             <a:avLst/>
@@ -3536,7 +3536,7 @@
           </a:fontRef>
         </p:style>
         <p:txBody>
-          <a:bodyPr rtlCol="0" anchor="ctr" wrap="none" lIns="58517" rIns="58517" tIns="39011" bIns="39011"/>
+          <a:bodyPr rtlCol="0" anchor="ctr" wrap="none" lIns="57292" rIns="57292" tIns="38195" bIns="38195"/>
           <a:lstStyle/>
           <a:p>
             <a:pPr algn="ctr">
@@ -3567,8 +3567,8 @@
         </p:nvSpPr>
         <p:spPr>
           <a:xfrm>
-            <a:off x="4891831" y="3625587"/>
-            <a:ext cx="2223662" cy="1720412"/>
+            <a:off x="4868565" y="3769587"/>
+            <a:ext cx="2177131" cy="1684412"/>
           </a:xfrm>
           <a:prstGeom prst="rect">
             <a:avLst/>
@@ -3594,7 +3594,7 @@
           </a:fontRef>
         </p:style>
         <p:txBody>
-          <a:bodyPr rtlCol="0" anchor="ctr" wrap="none" lIns="58517" rIns="58517" tIns="39011" bIns="39011"/>
+          <a:bodyPr rtlCol="0" anchor="ctr" wrap="none" lIns="57292" rIns="57292" tIns="38195" bIns="38195"/>
           <a:lstStyle/>
           <a:p>
             <a:pPr algn="ctr">
@@ -3625,8 +3625,8 @@
         </p:nvSpPr>
         <p:spPr>
           <a:xfrm>
-            <a:off x="444506" y="5346000"/>
-            <a:ext cx="2223662" cy="1720412"/>
+            <a:off x="514302" y="5454000"/>
+            <a:ext cx="2177131" cy="1684412"/>
           </a:xfrm>
           <a:prstGeom prst="rect">
             <a:avLst/>
@@ -3652,7 +3652,7 @@
           </a:fontRef>
         </p:style>
         <p:txBody>
-          <a:bodyPr rtlCol="0" anchor="ctr" wrap="none" lIns="58517" rIns="58517" tIns="39011" bIns="39011"/>
+          <a:bodyPr rtlCol="0" anchor="ctr" wrap="none" lIns="57292" rIns="57292" tIns="38195" bIns="38195"/>
           <a:lstStyle/>
           <a:p>
             <a:pPr algn="ctr">
@@ -3683,8 +3683,8 @@
         </p:nvSpPr>
         <p:spPr>
           <a:xfrm>
-            <a:off x="2668168" y="5346000"/>
-            <a:ext cx="2223662" cy="1720412"/>
+            <a:off x="2691434" y="5454000"/>
+            <a:ext cx="2177131" cy="1684412"/>
           </a:xfrm>
           <a:prstGeom prst="rect">
             <a:avLst/>
@@ -3710,7 +3710,7 @@
           </a:fontRef>
         </p:style>
         <p:txBody>
-          <a:bodyPr rtlCol="0" anchor="ctr" wrap="none" lIns="58517" rIns="58517" tIns="39011" bIns="39011"/>
+          <a:bodyPr rtlCol="0" anchor="ctr" wrap="none" lIns="57292" rIns="57292" tIns="38195" bIns="38195"/>
           <a:lstStyle/>
           <a:p>
             <a:pPr algn="ctr">
@@ -3741,8 +3741,8 @@
         </p:nvSpPr>
         <p:spPr>
           <a:xfrm>
-            <a:off x="4891831" y="5346000"/>
-            <a:ext cx="2223662" cy="1720412"/>
+            <a:off x="4868565" y="5454000"/>
+            <a:ext cx="2177131" cy="1684412"/>
           </a:xfrm>
           <a:prstGeom prst="rect">
             <a:avLst/>
@@ -3768,7 +3768,7 @@
           </a:fontRef>
         </p:style>
         <p:txBody>
-          <a:bodyPr rtlCol="0" anchor="ctr" wrap="none" lIns="58517" rIns="58517" tIns="39011" bIns="39011"/>
+          <a:bodyPr rtlCol="0" anchor="ctr" wrap="none" lIns="57292" rIns="57292" tIns="38195" bIns="38195"/>
           <a:lstStyle/>
           <a:p>
             <a:pPr algn="ctr">
@@ -3799,8 +3799,8 @@
         </p:nvSpPr>
         <p:spPr>
           <a:xfrm>
-            <a:off x="444506" y="7066412"/>
-            <a:ext cx="2223662" cy="1720412"/>
+            <a:off x="514302" y="7138412"/>
+            <a:ext cx="2177131" cy="1684412"/>
           </a:xfrm>
           <a:prstGeom prst="rect">
             <a:avLst/>
@@ -3826,7 +3826,7 @@
           </a:fontRef>
         </p:style>
         <p:txBody>
-          <a:bodyPr rtlCol="0" anchor="ctr" wrap="none" lIns="58517" rIns="58517" tIns="39011" bIns="39011"/>
+          <a:bodyPr rtlCol="0" anchor="ctr" wrap="none" lIns="57292" rIns="57292" tIns="38195" bIns="38195"/>
           <a:lstStyle/>
           <a:p>
             <a:pPr algn="ctr">
@@ -3857,8 +3857,8 @@
         </p:nvSpPr>
         <p:spPr>
           <a:xfrm>
-            <a:off x="2668168" y="7066412"/>
-            <a:ext cx="2223662" cy="1720412"/>
+            <a:off x="2691434" y="7138412"/>
+            <a:ext cx="2177131" cy="1684412"/>
           </a:xfrm>
           <a:prstGeom prst="rect">
             <a:avLst/>
@@ -3884,7 +3884,7 @@
           </a:fontRef>
         </p:style>
         <p:txBody>
-          <a:bodyPr rtlCol="0" anchor="ctr" wrap="none" lIns="58517" rIns="58517" tIns="39011" bIns="39011"/>
+          <a:bodyPr rtlCol="0" anchor="ctr" wrap="none" lIns="57292" rIns="57292" tIns="38195" bIns="38195"/>
           <a:lstStyle/>
           <a:p>
             <a:pPr algn="ctr">
@@ -3915,8 +3915,8 @@
         </p:nvSpPr>
         <p:spPr>
           <a:xfrm>
-            <a:off x="4891831" y="7066412"/>
-            <a:ext cx="2223662" cy="1720412"/>
+            <a:off x="4868565" y="7138412"/>
+            <a:ext cx="2177131" cy="1684412"/>
           </a:xfrm>
           <a:prstGeom prst="rect">
             <a:avLst/>
@@ -3942,7 +3942,7 @@
           </a:fontRef>
         </p:style>
         <p:txBody>
-          <a:bodyPr rtlCol="0" anchor="ctr" wrap="none" lIns="58517" rIns="58517" tIns="39011" bIns="39011"/>
+          <a:bodyPr rtlCol="0" anchor="ctr" wrap="none" lIns="57292" rIns="57292" tIns="38195" bIns="38195"/>
           <a:lstStyle/>
           <a:p>
             <a:pPr algn="ctr">
@@ -3973,8 +3973,8 @@
         </p:nvSpPr>
         <p:spPr>
           <a:xfrm>
-            <a:off x="444506" y="8786825"/>
-            <a:ext cx="2223662" cy="1720412"/>
+            <a:off x="514302" y="8822825"/>
+            <a:ext cx="2177131" cy="1684412"/>
           </a:xfrm>
           <a:prstGeom prst="rect">
             <a:avLst/>
@@ -4000,7 +4000,7 @@
           </a:fontRef>
         </p:style>
         <p:txBody>
-          <a:bodyPr rtlCol="0" anchor="ctr" wrap="none" lIns="58517" rIns="58517" tIns="39011" bIns="39011"/>
+          <a:bodyPr rtlCol="0" anchor="ctr" wrap="none" lIns="57292" rIns="57292" tIns="38195" bIns="38195"/>
           <a:lstStyle/>
           <a:p>
             <a:pPr algn="ctr">
@@ -4031,8 +4031,8 @@
         </p:nvSpPr>
         <p:spPr>
           <a:xfrm>
-            <a:off x="2668168" y="8786825"/>
-            <a:ext cx="2223662" cy="1720412"/>
+            <a:off x="2691434" y="8822825"/>
+            <a:ext cx="2177131" cy="1684412"/>
           </a:xfrm>
           <a:prstGeom prst="rect">
             <a:avLst/>
@@ -4058,7 +4058,7 @@
           </a:fontRef>
         </p:style>
         <p:txBody>
-          <a:bodyPr rtlCol="0" anchor="ctr" wrap="none" lIns="58517" rIns="58517" tIns="39011" bIns="39011"/>
+          <a:bodyPr rtlCol="0" anchor="ctr" wrap="none" lIns="57292" rIns="57292" tIns="38195" bIns="38195"/>
           <a:lstStyle/>
           <a:p>
             <a:pPr algn="ctr">
@@ -4089,8 +4089,8 @@
         </p:nvSpPr>
         <p:spPr>
           <a:xfrm>
-            <a:off x="4891831" y="8786825"/>
-            <a:ext cx="2223662" cy="1720412"/>
+            <a:off x="4868565" y="8822825"/>
+            <a:ext cx="2177131" cy="1684412"/>
           </a:xfrm>
           <a:prstGeom prst="rect">
             <a:avLst/>
@@ -4116,7 +4116,7 @@
           </a:fontRef>
         </p:style>
         <p:txBody>
-          <a:bodyPr rtlCol="0" anchor="ctr" wrap="none" lIns="58517" rIns="58517" tIns="39011" bIns="39011"/>
+          <a:bodyPr rtlCol="0" anchor="ctr" wrap="none" lIns="57292" rIns="57292" tIns="38195" bIns="38195"/>
           <a:lstStyle/>
           <a:p>
             <a:pPr algn="ctr">
@@ -4147,8 +4147,8 @@
         </p:nvSpPr>
         <p:spPr>
           <a:xfrm>
-            <a:off x="444506" y="180000"/>
-            <a:ext cx="2223662" cy="9525"/>
+            <a:off x="514302" y="396000"/>
+            <a:ext cx="2177131" cy="9525"/>
           </a:xfrm>
           <a:prstGeom prst="rect">
             <a:avLst/>
@@ -4191,8 +4191,8 @@
         </p:nvSpPr>
         <p:spPr>
           <a:xfrm>
-            <a:off x="2668168" y="180000"/>
-            <a:ext cx="2223662" cy="9525"/>
+            <a:off x="2691434" y="396000"/>
+            <a:ext cx="2177131" cy="9525"/>
           </a:xfrm>
           <a:prstGeom prst="rect">
             <a:avLst/>
@@ -4235,8 +4235,8 @@
         </p:nvSpPr>
         <p:spPr>
           <a:xfrm>
-            <a:off x="4891831" y="180000"/>
-            <a:ext cx="2223662" cy="9525"/>
+            <a:off x="4868565" y="396000"/>
+            <a:ext cx="2177131" cy="9525"/>
           </a:xfrm>
           <a:prstGeom prst="rect">
             <a:avLst/>
@@ -4279,8 +4279,8 @@
         </p:nvSpPr>
         <p:spPr>
           <a:xfrm>
-            <a:off x="444506" y="1900412"/>
-            <a:ext cx="2223662" cy="9525"/>
+            <a:off x="514302" y="2080412"/>
+            <a:ext cx="2177131" cy="9525"/>
           </a:xfrm>
           <a:prstGeom prst="rect">
             <a:avLst/>
@@ -4323,8 +4323,8 @@
         </p:nvSpPr>
         <p:spPr>
           <a:xfrm>
-            <a:off x="2668168" y="1900412"/>
-            <a:ext cx="2223662" cy="9525"/>
+            <a:off x="2691434" y="2080412"/>
+            <a:ext cx="2177131" cy="9525"/>
           </a:xfrm>
           <a:prstGeom prst="rect">
             <a:avLst/>
@@ -4367,8 +4367,8 @@
         </p:nvSpPr>
         <p:spPr>
           <a:xfrm>
-            <a:off x="4891831" y="1900412"/>
-            <a:ext cx="2223662" cy="9525"/>
+            <a:off x="4868565" y="2080412"/>
+            <a:ext cx="2177131" cy="9525"/>
           </a:xfrm>
           <a:prstGeom prst="rect">
             <a:avLst/>
@@ -4411,8 +4411,8 @@
         </p:nvSpPr>
         <p:spPr>
           <a:xfrm>
-            <a:off x="444506" y="3620825"/>
-            <a:ext cx="2223662" cy="9525"/>
+            <a:off x="514302" y="3764825"/>
+            <a:ext cx="2177131" cy="9525"/>
           </a:xfrm>
           <a:prstGeom prst="rect">
             <a:avLst/>
@@ -4455,8 +4455,8 @@
         </p:nvSpPr>
         <p:spPr>
           <a:xfrm>
-            <a:off x="2668168" y="3620825"/>
-            <a:ext cx="2223662" cy="9525"/>
+            <a:off x="2691434" y="3764825"/>
+            <a:ext cx="2177131" cy="9525"/>
           </a:xfrm>
           <a:prstGeom prst="rect">
             <a:avLst/>
@@ -4499,8 +4499,8 @@
         </p:nvSpPr>
         <p:spPr>
           <a:xfrm>
-            <a:off x="4891831" y="3620825"/>
-            <a:ext cx="2223662" cy="9525"/>
+            <a:off x="4868565" y="3764825"/>
+            <a:ext cx="2177131" cy="9525"/>
           </a:xfrm>
           <a:prstGeom prst="rect">
             <a:avLst/>
@@ -4543,8 +4543,8 @@
         </p:nvSpPr>
         <p:spPr>
           <a:xfrm>
-            <a:off x="444506" y="5341237"/>
-            <a:ext cx="2223662" cy="9525"/>
+            <a:off x="514302" y="5449237"/>
+            <a:ext cx="2177131" cy="9525"/>
           </a:xfrm>
           <a:prstGeom prst="rect">
             <a:avLst/>
@@ -4587,8 +4587,8 @@
         </p:nvSpPr>
         <p:spPr>
           <a:xfrm>
-            <a:off x="2668168" y="5341237"/>
-            <a:ext cx="2223662" cy="9525"/>
+            <a:off x="2691434" y="5449237"/>
+            <a:ext cx="2177131" cy="9525"/>
           </a:xfrm>
           <a:prstGeom prst="rect">
             <a:avLst/>
@@ -4631,8 +4631,8 @@
         </p:nvSpPr>
         <p:spPr>
           <a:xfrm>
-            <a:off x="4891831" y="5341237"/>
-            <a:ext cx="2223662" cy="9525"/>
+            <a:off x="4868565" y="5449237"/>
+            <a:ext cx="2177131" cy="9525"/>
           </a:xfrm>
           <a:prstGeom prst="rect">
             <a:avLst/>
@@ -4675,8 +4675,8 @@
         </p:nvSpPr>
         <p:spPr>
           <a:xfrm>
-            <a:off x="444506" y="7061650"/>
-            <a:ext cx="2223662" cy="9525"/>
+            <a:off x="514302" y="7133650"/>
+            <a:ext cx="2177131" cy="9525"/>
           </a:xfrm>
           <a:prstGeom prst="rect">
             <a:avLst/>
@@ -4719,8 +4719,8 @@
         </p:nvSpPr>
         <p:spPr>
           <a:xfrm>
-            <a:off x="2668168" y="7061650"/>
-            <a:ext cx="2223662" cy="9525"/>
+            <a:off x="2691434" y="7133650"/>
+            <a:ext cx="2177131" cy="9525"/>
           </a:xfrm>
           <a:prstGeom prst="rect">
             <a:avLst/>
@@ -4763,8 +4763,8 @@
         </p:nvSpPr>
         <p:spPr>
           <a:xfrm>
-            <a:off x="4891831" y="7061650"/>
-            <a:ext cx="2223662" cy="9525"/>
+            <a:off x="4868565" y="7133650"/>
+            <a:ext cx="2177131" cy="9525"/>
           </a:xfrm>
           <a:prstGeom prst="rect">
             <a:avLst/>
@@ -4807,8 +4807,8 @@
         </p:nvSpPr>
         <p:spPr>
           <a:xfrm>
-            <a:off x="444506" y="8782062"/>
-            <a:ext cx="2223662" cy="9525"/>
+            <a:off x="514302" y="8818062"/>
+            <a:ext cx="2177131" cy="9525"/>
           </a:xfrm>
           <a:prstGeom prst="rect">
             <a:avLst/>
@@ -4851,8 +4851,8 @@
         </p:nvSpPr>
         <p:spPr>
           <a:xfrm>
-            <a:off x="2668168" y="8782062"/>
-            <a:ext cx="2223662" cy="9525"/>
+            <a:off x="2691434" y="8818062"/>
+            <a:ext cx="2177131" cy="9525"/>
           </a:xfrm>
           <a:prstGeom prst="rect">
             <a:avLst/>
@@ -4895,8 +4895,8 @@
         </p:nvSpPr>
         <p:spPr>
           <a:xfrm>
-            <a:off x="4891831" y="8782062"/>
-            <a:ext cx="2223662" cy="9525"/>
+            <a:off x="4868565" y="8818062"/>
+            <a:ext cx="2177131" cy="9525"/>
           </a:xfrm>
           <a:prstGeom prst="rect">
             <a:avLst/>
@@ -4939,8 +4939,8 @@
         </p:nvSpPr>
         <p:spPr>
           <a:xfrm>
-            <a:off x="444506" y="10502475"/>
-            <a:ext cx="2223662" cy="9525"/>
+            <a:off x="514302" y="10502475"/>
+            <a:ext cx="2177131" cy="9525"/>
           </a:xfrm>
           <a:prstGeom prst="rect">
             <a:avLst/>
@@ -4983,8 +4983,8 @@
         </p:nvSpPr>
         <p:spPr>
           <a:xfrm>
-            <a:off x="2668168" y="10502475"/>
-            <a:ext cx="2223662" cy="9525"/>
+            <a:off x="2691434" y="10502475"/>
+            <a:ext cx="2177131" cy="9525"/>
           </a:xfrm>
           <a:prstGeom prst="rect">
             <a:avLst/>
@@ -5027,8 +5027,8 @@
         </p:nvSpPr>
         <p:spPr>
           <a:xfrm>
-            <a:off x="4891831" y="10502475"/>
-            <a:ext cx="2223662" cy="9525"/>
+            <a:off x="4868565" y="10502475"/>
+            <a:ext cx="2177131" cy="9525"/>
           </a:xfrm>
           <a:prstGeom prst="rect">
             <a:avLst/>
@@ -5071,8 +5071,8 @@
         </p:nvSpPr>
         <p:spPr>
           <a:xfrm>
-            <a:off x="439743" y="184762"/>
-            <a:ext cx="9525" cy="1720412"/>
+            <a:off x="509539" y="400762"/>
+            <a:ext cx="9525" cy="1684412"/>
           </a:xfrm>
           <a:prstGeom prst="rect">
             <a:avLst/>
@@ -5115,8 +5115,8 @@
         </p:nvSpPr>
         <p:spPr>
           <a:xfrm>
-            <a:off x="439743" y="1905175"/>
-            <a:ext cx="9525" cy="1720412"/>
+            <a:off x="509539" y="2085175"/>
+            <a:ext cx="9525" cy="1684412"/>
           </a:xfrm>
           <a:prstGeom prst="rect">
             <a:avLst/>
@@ -5159,8 +5159,8 @@
         </p:nvSpPr>
         <p:spPr>
           <a:xfrm>
-            <a:off x="439743" y="3625587"/>
-            <a:ext cx="9525" cy="1720412"/>
+            <a:off x="509539" y="3769587"/>
+            <a:ext cx="9525" cy="1684412"/>
           </a:xfrm>
           <a:prstGeom prst="rect">
             <a:avLst/>
@@ -5203,8 +5203,8 @@
         </p:nvSpPr>
         <p:spPr>
           <a:xfrm>
-            <a:off x="439743" y="5346000"/>
-            <a:ext cx="9525" cy="1720412"/>
+            <a:off x="509539" y="5454000"/>
+            <a:ext cx="9525" cy="1684412"/>
           </a:xfrm>
           <a:prstGeom prst="rect">
             <a:avLst/>
@@ -5247,8 +5247,8 @@
         </p:nvSpPr>
         <p:spPr>
           <a:xfrm>
-            <a:off x="439743" y="7066412"/>
-            <a:ext cx="9525" cy="1720412"/>
+            <a:off x="509539" y="7138412"/>
+            <a:ext cx="9525" cy="1684412"/>
           </a:xfrm>
           <a:prstGeom prst="rect">
             <a:avLst/>
@@ -5291,8 +5291,8 @@
         </p:nvSpPr>
         <p:spPr>
           <a:xfrm>
-            <a:off x="439743" y="8786825"/>
-            <a:ext cx="9525" cy="1720412"/>
+            <a:off x="509539" y="8822825"/>
+            <a:ext cx="9525" cy="1684412"/>
           </a:xfrm>
           <a:prstGeom prst="rect">
             <a:avLst/>
@@ -5335,8 +5335,8 @@
         </p:nvSpPr>
         <p:spPr>
           <a:xfrm>
-            <a:off x="2663406" y="184762"/>
-            <a:ext cx="9525" cy="1720412"/>
+            <a:off x="2686671" y="400762"/>
+            <a:ext cx="9525" cy="1684412"/>
           </a:xfrm>
           <a:prstGeom prst="rect">
             <a:avLst/>
@@ -5379,8 +5379,8 @@
         </p:nvSpPr>
         <p:spPr>
           <a:xfrm>
-            <a:off x="2663406" y="1905175"/>
-            <a:ext cx="9525" cy="1720412"/>
+            <a:off x="2686671" y="2085175"/>
+            <a:ext cx="9525" cy="1684412"/>
           </a:xfrm>
           <a:prstGeom prst="rect">
             <a:avLst/>
@@ -5423,8 +5423,8 @@
         </p:nvSpPr>
         <p:spPr>
           <a:xfrm>
-            <a:off x="2663406" y="3625587"/>
-            <a:ext cx="9525" cy="1720412"/>
+            <a:off x="2686671" y="3769587"/>
+            <a:ext cx="9525" cy="1684412"/>
           </a:xfrm>
           <a:prstGeom prst="rect">
             <a:avLst/>
@@ -5467,8 +5467,8 @@
         </p:nvSpPr>
         <p:spPr>
           <a:xfrm>
-            <a:off x="2663406" y="5346000"/>
-            <a:ext cx="9525" cy="1720412"/>
+            <a:off x="2686671" y="5454000"/>
+            <a:ext cx="9525" cy="1684412"/>
           </a:xfrm>
           <a:prstGeom prst="rect">
             <a:avLst/>
@@ -5511,8 +5511,8 @@
         </p:nvSpPr>
         <p:spPr>
           <a:xfrm>
-            <a:off x="2663406" y="7066412"/>
-            <a:ext cx="9525" cy="1720412"/>
+            <a:off x="2686671" y="7138412"/>
+            <a:ext cx="9525" cy="1684412"/>
           </a:xfrm>
           <a:prstGeom prst="rect">
             <a:avLst/>
@@ -5555,8 +5555,8 @@
         </p:nvSpPr>
         <p:spPr>
           <a:xfrm>
-            <a:off x="2663406" y="8786825"/>
-            <a:ext cx="9525" cy="1720412"/>
+            <a:off x="2686671" y="8822825"/>
+            <a:ext cx="9525" cy="1684412"/>
           </a:xfrm>
           <a:prstGeom prst="rect">
             <a:avLst/>
@@ -5599,8 +5599,8 @@
         </p:nvSpPr>
         <p:spPr>
           <a:xfrm>
-            <a:off x="4887068" y="184762"/>
-            <a:ext cx="9525" cy="1720412"/>
+            <a:off x="4863803" y="400762"/>
+            <a:ext cx="9525" cy="1684412"/>
           </a:xfrm>
           <a:prstGeom prst="rect">
             <a:avLst/>
@@ -5643,8 +5643,8 @@
         </p:nvSpPr>
         <p:spPr>
           <a:xfrm>
-            <a:off x="4887068" y="1905175"/>
-            <a:ext cx="9525" cy="1720412"/>
+            <a:off x="4863803" y="2085175"/>
+            <a:ext cx="9525" cy="1684412"/>
           </a:xfrm>
           <a:prstGeom prst="rect">
             <a:avLst/>
@@ -5687,8 +5687,8 @@
         </p:nvSpPr>
         <p:spPr>
           <a:xfrm>
-            <a:off x="4887068" y="3625587"/>
-            <a:ext cx="9525" cy="1720412"/>
+            <a:off x="4863803" y="3769587"/>
+            <a:ext cx="9525" cy="1684412"/>
           </a:xfrm>
           <a:prstGeom prst="rect">
             <a:avLst/>
@@ -5731,8 +5731,8 @@
         </p:nvSpPr>
         <p:spPr>
           <a:xfrm>
-            <a:off x="4887068" y="5346000"/>
-            <a:ext cx="9525" cy="1720412"/>
+            <a:off x="4863803" y="5454000"/>
+            <a:ext cx="9525" cy="1684412"/>
           </a:xfrm>
           <a:prstGeom prst="rect">
             <a:avLst/>
@@ -5775,8 +5775,8 @@
         </p:nvSpPr>
         <p:spPr>
           <a:xfrm>
-            <a:off x="4887068" y="7066412"/>
-            <a:ext cx="9525" cy="1720412"/>
+            <a:off x="4863803" y="7138412"/>
+            <a:ext cx="9525" cy="1684412"/>
           </a:xfrm>
           <a:prstGeom prst="rect">
             <a:avLst/>
@@ -5819,8 +5819,8 @@
         </p:nvSpPr>
         <p:spPr>
           <a:xfrm>
-            <a:off x="4887068" y="8786825"/>
-            <a:ext cx="9525" cy="1720412"/>
+            <a:off x="4863803" y="8822825"/>
+            <a:ext cx="9525" cy="1684412"/>
           </a:xfrm>
           <a:prstGeom prst="rect">
             <a:avLst/>
@@ -5863,8 +5863,8 @@
         </p:nvSpPr>
         <p:spPr>
           <a:xfrm>
-            <a:off x="7110731" y="184762"/>
-            <a:ext cx="9525" cy="1720412"/>
+            <a:off x="7040935" y="400762"/>
+            <a:ext cx="9525" cy="1684412"/>
           </a:xfrm>
           <a:prstGeom prst="rect">
             <a:avLst/>
@@ -5907,8 +5907,8 @@
         </p:nvSpPr>
         <p:spPr>
           <a:xfrm>
-            <a:off x="7110731" y="1905175"/>
-            <a:ext cx="9525" cy="1720412"/>
+            <a:off x="7040935" y="2085175"/>
+            <a:ext cx="9525" cy="1684412"/>
           </a:xfrm>
           <a:prstGeom prst="rect">
             <a:avLst/>
@@ -5951,8 +5951,8 @@
         </p:nvSpPr>
         <p:spPr>
           <a:xfrm>
-            <a:off x="7110731" y="3625587"/>
-            <a:ext cx="9525" cy="1720412"/>
+            <a:off x="7040935" y="3769587"/>
+            <a:ext cx="9525" cy="1684412"/>
           </a:xfrm>
           <a:prstGeom prst="rect">
             <a:avLst/>
@@ -5995,8 +5995,8 @@
         </p:nvSpPr>
         <p:spPr>
           <a:xfrm>
-            <a:off x="7110731" y="5346000"/>
-            <a:ext cx="9525" cy="1720412"/>
+            <a:off x="7040935" y="5454000"/>
+            <a:ext cx="9525" cy="1684412"/>
           </a:xfrm>
           <a:prstGeom prst="rect">
             <a:avLst/>
@@ -6039,8 +6039,8 @@
         </p:nvSpPr>
         <p:spPr>
           <a:xfrm>
-            <a:off x="7110731" y="7066412"/>
-            <a:ext cx="9525" cy="1720412"/>
+            <a:off x="7040935" y="7138412"/>
+            <a:ext cx="9525" cy="1684412"/>
           </a:xfrm>
           <a:prstGeom prst="rect">
             <a:avLst/>
@@ -6083,8 +6083,8 @@
         </p:nvSpPr>
         <p:spPr>
           <a:xfrm>
-            <a:off x="7110731" y="8786825"/>
-            <a:ext cx="9525" cy="1720412"/>
+            <a:off x="7040935" y="8822825"/>
+            <a:ext cx="9525" cy="1684412"/>
           </a:xfrm>
           <a:prstGeom prst="rect">
             <a:avLst/>
@@ -6116,6 +6116,41 @@
           <a:lstStyle/>
           <a:p>
             <a:pPr algn="ctr"/>
+          </a:p>
+        </p:txBody>
+      </p:sp>
+      <p:sp>
+        <p:nvSpPr>
+          <p:cNvPr id="65" name="TextBox 64"/>
+          <p:cNvSpPr txBox="1"/>
+          <p:nvPr/>
+        </p:nvSpPr>
+        <p:spPr>
+          <a:xfrm>
+            <a:off x="184762" y="184762"/>
+            <a:ext cx="7190475" cy="198000"/>
+          </a:xfrm>
+          <a:prstGeom prst="rect">
+            <a:avLst/>
+          </a:prstGeom>
+          <a:noFill/>
+        </p:spPr>
+        <p:txBody>
+          <a:bodyPr wrap="none" lIns="0" rIns="0" tIns="0" bIns="0">
+            <a:spAutoFit/>
+          </a:bodyPr>
+          <a:lstStyle/>
+          <a:p>
+            <a:pPr algn="l"/>
+            <a:r>
+              <a:rPr sz="900" b="0">
+                <a:solidFill>
+                  <a:srgbClr val="555555"/>
+                </a:solidFill>
+                <a:latin typeface="Arial"/>
+              </a:rPr>
+              <a:t>Карты букв · ЛИЦО</a:t>
+            </a:r>
           </a:p>
         </p:txBody>
       </p:sp>
@@ -6145,8 +6180,8 @@
         </p:nvSpPr>
         <p:spPr>
           <a:xfrm>
-            <a:off x="4891831" y="184762"/>
-            <a:ext cx="2223662" cy="1720412"/>
+            <a:off x="4868565" y="400762"/>
+            <a:ext cx="2177131" cy="1684412"/>
           </a:xfrm>
           <a:prstGeom prst="rect">
             <a:avLst/>
@@ -6187,8 +6222,8 @@
         </p:nvSpPr>
         <p:spPr>
           <a:xfrm>
-            <a:off x="2668168" y="184762"/>
-            <a:ext cx="2223662" cy="1720412"/>
+            <a:off x="2691434" y="400762"/>
+            <a:ext cx="2177131" cy="1684412"/>
           </a:xfrm>
           <a:prstGeom prst="rect">
             <a:avLst/>
@@ -6229,8 +6264,8 @@
         </p:nvSpPr>
         <p:spPr>
           <a:xfrm>
-            <a:off x="444506" y="184762"/>
-            <a:ext cx="2223662" cy="1720412"/>
+            <a:off x="514302" y="400762"/>
+            <a:ext cx="2177131" cy="1684412"/>
           </a:xfrm>
           <a:prstGeom prst="rect">
             <a:avLst/>
@@ -6271,8 +6306,8 @@
         </p:nvSpPr>
         <p:spPr>
           <a:xfrm>
-            <a:off x="4891831" y="1905175"/>
-            <a:ext cx="2223662" cy="1720412"/>
+            <a:off x="4868565" y="2085175"/>
+            <a:ext cx="2177131" cy="1684412"/>
           </a:xfrm>
           <a:prstGeom prst="rect">
             <a:avLst/>
@@ -6313,8 +6348,8 @@
         </p:nvSpPr>
         <p:spPr>
           <a:xfrm>
-            <a:off x="2668168" y="1905175"/>
-            <a:ext cx="2223662" cy="1720412"/>
+            <a:off x="2691434" y="2085175"/>
+            <a:ext cx="2177131" cy="1684412"/>
           </a:xfrm>
           <a:prstGeom prst="rect">
             <a:avLst/>
@@ -6355,8 +6390,8 @@
         </p:nvSpPr>
         <p:spPr>
           <a:xfrm>
-            <a:off x="444506" y="1905175"/>
-            <a:ext cx="2223662" cy="1720412"/>
+            <a:off x="514302" y="2085175"/>
+            <a:ext cx="2177131" cy="1684412"/>
           </a:xfrm>
           <a:prstGeom prst="rect">
             <a:avLst/>
@@ -6397,8 +6432,8 @@
         </p:nvSpPr>
         <p:spPr>
           <a:xfrm>
-            <a:off x="4891831" y="3625587"/>
-            <a:ext cx="2223662" cy="1720412"/>
+            <a:off x="4868565" y="3769587"/>
+            <a:ext cx="2177131" cy="1684412"/>
           </a:xfrm>
           <a:prstGeom prst="rect">
             <a:avLst/>
@@ -6439,8 +6474,8 @@
         </p:nvSpPr>
         <p:spPr>
           <a:xfrm>
-            <a:off x="2668168" y="3625587"/>
-            <a:ext cx="2223662" cy="1720412"/>
+            <a:off x="2691434" y="3769587"/>
+            <a:ext cx="2177131" cy="1684412"/>
           </a:xfrm>
           <a:prstGeom prst="rect">
             <a:avLst/>
@@ -6481,8 +6516,8 @@
         </p:nvSpPr>
         <p:spPr>
           <a:xfrm>
-            <a:off x="444506" y="3625587"/>
-            <a:ext cx="2223662" cy="1720412"/>
+            <a:off x="514302" y="3769587"/>
+            <a:ext cx="2177131" cy="1684412"/>
           </a:xfrm>
           <a:prstGeom prst="rect">
             <a:avLst/>
@@ -6523,8 +6558,8 @@
         </p:nvSpPr>
         <p:spPr>
           <a:xfrm>
-            <a:off x="4891831" y="5346000"/>
-            <a:ext cx="2223662" cy="1720412"/>
+            <a:off x="4868565" y="5454000"/>
+            <a:ext cx="2177131" cy="1684412"/>
           </a:xfrm>
           <a:prstGeom prst="rect">
             <a:avLst/>
@@ -6565,8 +6600,8 @@
         </p:nvSpPr>
         <p:spPr>
           <a:xfrm>
-            <a:off x="2668168" y="5346000"/>
-            <a:ext cx="2223662" cy="1720412"/>
+            <a:off x="2691434" y="5454000"/>
+            <a:ext cx="2177131" cy="1684412"/>
           </a:xfrm>
           <a:prstGeom prst="rect">
             <a:avLst/>
@@ -6607,8 +6642,8 @@
         </p:nvSpPr>
         <p:spPr>
           <a:xfrm>
-            <a:off x="444506" y="5346000"/>
-            <a:ext cx="2223662" cy="1720412"/>
+            <a:off x="514302" y="5454000"/>
+            <a:ext cx="2177131" cy="1684412"/>
           </a:xfrm>
           <a:prstGeom prst="rect">
             <a:avLst/>
@@ -6649,8 +6684,8 @@
         </p:nvSpPr>
         <p:spPr>
           <a:xfrm>
-            <a:off x="4891831" y="7066412"/>
-            <a:ext cx="2223662" cy="1720412"/>
+            <a:off x="4868565" y="7138412"/>
+            <a:ext cx="2177131" cy="1684412"/>
           </a:xfrm>
           <a:prstGeom prst="rect">
             <a:avLst/>
@@ -6691,8 +6726,8 @@
         </p:nvSpPr>
         <p:spPr>
           <a:xfrm>
-            <a:off x="2668168" y="7066412"/>
-            <a:ext cx="2223662" cy="1720412"/>
+            <a:off x="2691434" y="7138412"/>
+            <a:ext cx="2177131" cy="1684412"/>
           </a:xfrm>
           <a:prstGeom prst="rect">
             <a:avLst/>
@@ -6733,8 +6768,8 @@
         </p:nvSpPr>
         <p:spPr>
           <a:xfrm>
-            <a:off x="444506" y="7066412"/>
-            <a:ext cx="2223662" cy="1720412"/>
+            <a:off x="514302" y="7138412"/>
+            <a:ext cx="2177131" cy="1684412"/>
           </a:xfrm>
           <a:prstGeom prst="rect">
             <a:avLst/>
@@ -6775,8 +6810,8 @@
         </p:nvSpPr>
         <p:spPr>
           <a:xfrm>
-            <a:off x="4891831" y="8786825"/>
-            <a:ext cx="2223662" cy="1720412"/>
+            <a:off x="4868565" y="8822825"/>
+            <a:ext cx="2177131" cy="1684412"/>
           </a:xfrm>
           <a:prstGeom prst="rect">
             <a:avLst/>
@@ -6817,8 +6852,8 @@
         </p:nvSpPr>
         <p:spPr>
           <a:xfrm>
-            <a:off x="2668168" y="8786825"/>
-            <a:ext cx="2223662" cy="1720412"/>
+            <a:off x="2691434" y="8822825"/>
+            <a:ext cx="2177131" cy="1684412"/>
           </a:xfrm>
           <a:prstGeom prst="rect">
             <a:avLst/>
@@ -6859,8 +6894,8 @@
         </p:nvSpPr>
         <p:spPr>
           <a:xfrm>
-            <a:off x="444506" y="8786825"/>
-            <a:ext cx="2223662" cy="1720412"/>
+            <a:off x="514302" y="8822825"/>
+            <a:ext cx="2177131" cy="1684412"/>
           </a:xfrm>
           <a:prstGeom prst="rect">
             <a:avLst/>
@@ -6890,6 +6925,41 @@
           <a:lstStyle/>
           <a:p>
             <a:pPr algn="ctr"/>
+          </a:p>
+        </p:txBody>
+      </p:sp>
+      <p:sp>
+        <p:nvSpPr>
+          <p:cNvPr id="20" name="TextBox 19"/>
+          <p:cNvSpPr txBox="1"/>
+          <p:nvPr/>
+        </p:nvSpPr>
+        <p:spPr>
+          <a:xfrm>
+            <a:off x="184762" y="184762"/>
+            <a:ext cx="7190475" cy="198000"/>
+          </a:xfrm>
+          <a:prstGeom prst="rect">
+            <a:avLst/>
+          </a:prstGeom>
+          <a:noFill/>
+        </p:spPr>
+        <p:txBody>
+          <a:bodyPr wrap="none" lIns="0" rIns="0" tIns="0" bIns="0">
+            <a:spAutoFit/>
+          </a:bodyPr>
+          <a:lstStyle/>
+          <a:p>
+            <a:pPr algn="l"/>
+            <a:r>
+              <a:rPr sz="900" b="0">
+                <a:solidFill>
+                  <a:srgbClr val="555555"/>
+                </a:solidFill>
+                <a:latin typeface="Arial"/>
+              </a:rPr>
+              <a:t>Карты букв · ОБОРОТ</a:t>
+            </a:r>
           </a:p>
         </p:txBody>
       </p:sp>
@@ -6919,8 +6989,8 @@
         </p:nvSpPr>
         <p:spPr>
           <a:xfrm>
-            <a:off x="444506" y="184762"/>
-            <a:ext cx="2223662" cy="1720412"/>
+            <a:off x="514302" y="400762"/>
+            <a:ext cx="2177131" cy="1684412"/>
           </a:xfrm>
           <a:prstGeom prst="rect">
             <a:avLst/>
@@ -6946,7 +7016,7 @@
           </a:fontRef>
         </p:style>
         <p:txBody>
-          <a:bodyPr rtlCol="0" anchor="ctr" wrap="none" lIns="58517" rIns="58517" tIns="39011" bIns="39011"/>
+          <a:bodyPr rtlCol="0" anchor="ctr" wrap="none" lIns="57292" rIns="57292" tIns="38195" bIns="38195"/>
           <a:lstStyle/>
           <a:p>
             <a:pPr algn="ctr">
@@ -6977,8 +7047,8 @@
         </p:nvSpPr>
         <p:spPr>
           <a:xfrm>
-            <a:off x="2668168" y="184762"/>
-            <a:ext cx="2223662" cy="1720412"/>
+            <a:off x="2691434" y="400762"/>
+            <a:ext cx="2177131" cy="1684412"/>
           </a:xfrm>
           <a:prstGeom prst="rect">
             <a:avLst/>
@@ -7004,7 +7074,7 @@
           </a:fontRef>
         </p:style>
         <p:txBody>
-          <a:bodyPr rtlCol="0" anchor="ctr" wrap="none" lIns="58517" rIns="58517" tIns="39011" bIns="39011"/>
+          <a:bodyPr rtlCol="0" anchor="ctr" wrap="none" lIns="57292" rIns="57292" tIns="38195" bIns="38195"/>
           <a:lstStyle/>
           <a:p>
             <a:pPr algn="ctr">
@@ -7035,8 +7105,8 @@
         </p:nvSpPr>
         <p:spPr>
           <a:xfrm>
-            <a:off x="4891831" y="184762"/>
-            <a:ext cx="2223662" cy="1720412"/>
+            <a:off x="4868565" y="400762"/>
+            <a:ext cx="2177131" cy="1684412"/>
           </a:xfrm>
           <a:prstGeom prst="rect">
             <a:avLst/>
@@ -7062,7 +7132,7 @@
           </a:fontRef>
         </p:style>
         <p:txBody>
-          <a:bodyPr rtlCol="0" anchor="ctr" wrap="none" lIns="58517" rIns="58517" tIns="39011" bIns="39011"/>
+          <a:bodyPr rtlCol="0" anchor="ctr" wrap="none" lIns="57292" rIns="57292" tIns="38195" bIns="38195"/>
           <a:lstStyle/>
           <a:p>
             <a:pPr algn="ctr">
@@ -7093,8 +7163,8 @@
         </p:nvSpPr>
         <p:spPr>
           <a:xfrm>
-            <a:off x="444506" y="1905175"/>
-            <a:ext cx="2223662" cy="1720412"/>
+            <a:off x="514302" y="2085175"/>
+            <a:ext cx="2177131" cy="1684412"/>
           </a:xfrm>
           <a:prstGeom prst="rect">
             <a:avLst/>
@@ -7120,7 +7190,7 @@
           </a:fontRef>
         </p:style>
         <p:txBody>
-          <a:bodyPr rtlCol="0" anchor="ctr" wrap="none" lIns="58517" rIns="58517" tIns="39011" bIns="39011"/>
+          <a:bodyPr rtlCol="0" anchor="ctr" wrap="none" lIns="57292" rIns="57292" tIns="38195" bIns="38195"/>
           <a:lstStyle/>
           <a:p>
             <a:pPr algn="ctr">
@@ -7151,8 +7221,8 @@
         </p:nvSpPr>
         <p:spPr>
           <a:xfrm>
-            <a:off x="2668168" y="1905175"/>
-            <a:ext cx="2223662" cy="1720412"/>
+            <a:off x="2691434" y="2085175"/>
+            <a:ext cx="2177131" cy="1684412"/>
           </a:xfrm>
           <a:prstGeom prst="rect">
             <a:avLst/>
@@ -7178,7 +7248,7 @@
           </a:fontRef>
         </p:style>
         <p:txBody>
-          <a:bodyPr rtlCol="0" anchor="ctr" wrap="none" lIns="58517" rIns="58517" tIns="39011" bIns="39011"/>
+          <a:bodyPr rtlCol="0" anchor="ctr" wrap="none" lIns="57292" rIns="57292" tIns="38195" bIns="38195"/>
           <a:lstStyle/>
           <a:p>
             <a:pPr algn="ctr">
@@ -7209,8 +7279,8 @@
         </p:nvSpPr>
         <p:spPr>
           <a:xfrm>
-            <a:off x="4891831" y="1905175"/>
-            <a:ext cx="2223662" cy="1720412"/>
+            <a:off x="4868565" y="2085175"/>
+            <a:ext cx="2177131" cy="1684412"/>
           </a:xfrm>
           <a:prstGeom prst="rect">
             <a:avLst/>
@@ -7236,7 +7306,7 @@
           </a:fontRef>
         </p:style>
         <p:txBody>
-          <a:bodyPr rtlCol="0" anchor="ctr" wrap="none" lIns="58517" rIns="58517" tIns="39011" bIns="39011"/>
+          <a:bodyPr rtlCol="0" anchor="ctr" wrap="none" lIns="57292" rIns="57292" tIns="38195" bIns="38195"/>
           <a:lstStyle/>
           <a:p>
             <a:pPr algn="ctr">
@@ -7267,8 +7337,8 @@
         </p:nvSpPr>
         <p:spPr>
           <a:xfrm>
-            <a:off x="444506" y="3625587"/>
-            <a:ext cx="2223662" cy="1720412"/>
+            <a:off x="514302" y="3769587"/>
+            <a:ext cx="2177131" cy="1684412"/>
           </a:xfrm>
           <a:prstGeom prst="rect">
             <a:avLst/>
@@ -7294,7 +7364,7 @@
           </a:fontRef>
         </p:style>
         <p:txBody>
-          <a:bodyPr rtlCol="0" anchor="ctr" wrap="none" lIns="58517" rIns="58517" tIns="39011" bIns="39011"/>
+          <a:bodyPr rtlCol="0" anchor="ctr" wrap="none" lIns="57292" rIns="57292" tIns="38195" bIns="38195"/>
           <a:lstStyle/>
           <a:p>
             <a:pPr algn="ctr">
@@ -7325,8 +7395,8 @@
         </p:nvSpPr>
         <p:spPr>
           <a:xfrm>
-            <a:off x="2668168" y="3625587"/>
-            <a:ext cx="2223662" cy="1720412"/>
+            <a:off x="2691434" y="3769587"/>
+            <a:ext cx="2177131" cy="1684412"/>
           </a:xfrm>
           <a:prstGeom prst="rect">
             <a:avLst/>
@@ -7352,7 +7422,7 @@
           </a:fontRef>
         </p:style>
         <p:txBody>
-          <a:bodyPr rtlCol="0" anchor="ctr" wrap="none" lIns="58517" rIns="58517" tIns="39011" bIns="39011"/>
+          <a:bodyPr rtlCol="0" anchor="ctr" wrap="none" lIns="57292" rIns="57292" tIns="38195" bIns="38195"/>
           <a:lstStyle/>
           <a:p>
             <a:pPr algn="ctr">
@@ -7383,8 +7453,8 @@
         </p:nvSpPr>
         <p:spPr>
           <a:xfrm>
-            <a:off x="4891831" y="3625587"/>
-            <a:ext cx="2223662" cy="1720412"/>
+            <a:off x="4868565" y="3769587"/>
+            <a:ext cx="2177131" cy="1684412"/>
           </a:xfrm>
           <a:prstGeom prst="rect">
             <a:avLst/>
@@ -7410,7 +7480,7 @@
           </a:fontRef>
         </p:style>
         <p:txBody>
-          <a:bodyPr rtlCol="0" anchor="ctr" wrap="none" lIns="58517" rIns="58517" tIns="39011" bIns="39011"/>
+          <a:bodyPr rtlCol="0" anchor="ctr" wrap="none" lIns="57292" rIns="57292" tIns="38195" bIns="38195"/>
           <a:lstStyle/>
           <a:p>
             <a:pPr algn="ctr">
@@ -7441,8 +7511,8 @@
         </p:nvSpPr>
         <p:spPr>
           <a:xfrm>
-            <a:off x="444506" y="5346000"/>
-            <a:ext cx="2223662" cy="1720412"/>
+            <a:off x="514302" y="5454000"/>
+            <a:ext cx="2177131" cy="1684412"/>
           </a:xfrm>
           <a:prstGeom prst="rect">
             <a:avLst/>
@@ -7468,7 +7538,7 @@
           </a:fontRef>
         </p:style>
         <p:txBody>
-          <a:bodyPr rtlCol="0" anchor="ctr" wrap="none" lIns="58517" rIns="58517" tIns="39011" bIns="39011"/>
+          <a:bodyPr rtlCol="0" anchor="ctr" wrap="none" lIns="57292" rIns="57292" tIns="38195" bIns="38195"/>
           <a:lstStyle/>
           <a:p>
             <a:pPr algn="ctr">
@@ -7499,8 +7569,8 @@
         </p:nvSpPr>
         <p:spPr>
           <a:xfrm>
-            <a:off x="2668168" y="5346000"/>
-            <a:ext cx="2223662" cy="1720412"/>
+            <a:off x="2691434" y="5454000"/>
+            <a:ext cx="2177131" cy="1684412"/>
           </a:xfrm>
           <a:prstGeom prst="rect">
             <a:avLst/>
@@ -7526,7 +7596,7 @@
           </a:fontRef>
         </p:style>
         <p:txBody>
-          <a:bodyPr rtlCol="0" anchor="ctr" wrap="none" lIns="58517" rIns="58517" tIns="39011" bIns="39011"/>
+          <a:bodyPr rtlCol="0" anchor="ctr" wrap="none" lIns="57292" rIns="57292" tIns="38195" bIns="38195"/>
           <a:lstStyle/>
           <a:p>
             <a:pPr algn="ctr">
@@ -7557,8 +7627,8 @@
         </p:nvSpPr>
         <p:spPr>
           <a:xfrm>
-            <a:off x="4891831" y="5346000"/>
-            <a:ext cx="2223662" cy="1720412"/>
+            <a:off x="4868565" y="5454000"/>
+            <a:ext cx="2177131" cy="1684412"/>
           </a:xfrm>
           <a:prstGeom prst="rect">
             <a:avLst/>
@@ -7584,7 +7654,7 @@
           </a:fontRef>
         </p:style>
         <p:txBody>
-          <a:bodyPr rtlCol="0" anchor="ctr" wrap="none" lIns="58517" rIns="58517" tIns="39011" bIns="39011"/>
+          <a:bodyPr rtlCol="0" anchor="ctr" wrap="none" lIns="57292" rIns="57292" tIns="38195" bIns="38195"/>
           <a:lstStyle/>
           <a:p>
             <a:pPr algn="ctr">
@@ -7615,8 +7685,8 @@
         </p:nvSpPr>
         <p:spPr>
           <a:xfrm>
-            <a:off x="444506" y="7066412"/>
-            <a:ext cx="2223662" cy="1720412"/>
+            <a:off x="514302" y="7138412"/>
+            <a:ext cx="2177131" cy="1684412"/>
           </a:xfrm>
           <a:prstGeom prst="rect">
             <a:avLst/>
@@ -7642,7 +7712,7 @@
           </a:fontRef>
         </p:style>
         <p:txBody>
-          <a:bodyPr rtlCol="0" anchor="ctr" wrap="none" lIns="58517" rIns="58517" tIns="39011" bIns="39011"/>
+          <a:bodyPr rtlCol="0" anchor="ctr" wrap="none" lIns="57292" rIns="57292" tIns="38195" bIns="38195"/>
           <a:lstStyle/>
           <a:p>
             <a:pPr algn="ctr">
@@ -7673,8 +7743,8 @@
         </p:nvSpPr>
         <p:spPr>
           <a:xfrm>
-            <a:off x="2668168" y="7066412"/>
-            <a:ext cx="2223662" cy="1720412"/>
+            <a:off x="2691434" y="7138412"/>
+            <a:ext cx="2177131" cy="1684412"/>
           </a:xfrm>
           <a:prstGeom prst="rect">
             <a:avLst/>
@@ -7700,7 +7770,7 @@
           </a:fontRef>
         </p:style>
         <p:txBody>
-          <a:bodyPr rtlCol="0" anchor="ctr" wrap="none" lIns="58517" rIns="58517" tIns="39011" bIns="39011"/>
+          <a:bodyPr rtlCol="0" anchor="ctr" wrap="none" lIns="57292" rIns="57292" tIns="38195" bIns="38195"/>
           <a:lstStyle/>
           <a:p>
             <a:pPr algn="ctr">
@@ -7731,8 +7801,8 @@
         </p:nvSpPr>
         <p:spPr>
           <a:xfrm>
-            <a:off x="4891831" y="7066412"/>
-            <a:ext cx="2223662" cy="1720412"/>
+            <a:off x="4868565" y="7138412"/>
+            <a:ext cx="2177131" cy="1684412"/>
           </a:xfrm>
           <a:prstGeom prst="rect">
             <a:avLst/>
@@ -7758,7 +7828,7 @@
           </a:fontRef>
         </p:style>
         <p:txBody>
-          <a:bodyPr rtlCol="0" anchor="ctr" wrap="none" lIns="58517" rIns="58517" tIns="39011" bIns="39011"/>
+          <a:bodyPr rtlCol="0" anchor="ctr" wrap="none" lIns="57292" rIns="57292" tIns="38195" bIns="38195"/>
           <a:lstStyle/>
           <a:p>
             <a:pPr algn="ctr">
@@ -7789,8 +7859,8 @@
         </p:nvSpPr>
         <p:spPr>
           <a:xfrm>
-            <a:off x="444506" y="8786825"/>
-            <a:ext cx="2223662" cy="1720412"/>
+            <a:off x="514302" y="8822825"/>
+            <a:ext cx="2177131" cy="1684412"/>
           </a:xfrm>
           <a:prstGeom prst="rect">
             <a:avLst/>
@@ -7816,7 +7886,7 @@
           </a:fontRef>
         </p:style>
         <p:txBody>
-          <a:bodyPr rtlCol="0" anchor="ctr" wrap="none" lIns="58517" rIns="58517" tIns="39011" bIns="39011"/>
+          <a:bodyPr rtlCol="0" anchor="ctr" wrap="none" lIns="57292" rIns="57292" tIns="38195" bIns="38195"/>
           <a:lstStyle/>
           <a:p>
             <a:pPr algn="ctr">
@@ -7847,8 +7917,8 @@
         </p:nvSpPr>
         <p:spPr>
           <a:xfrm>
-            <a:off x="2668168" y="8786825"/>
-            <a:ext cx="2223662" cy="1720412"/>
+            <a:off x="2691434" y="8822825"/>
+            <a:ext cx="2177131" cy="1684412"/>
           </a:xfrm>
           <a:prstGeom prst="rect">
             <a:avLst/>
@@ -7874,7 +7944,7 @@
           </a:fontRef>
         </p:style>
         <p:txBody>
-          <a:bodyPr rtlCol="0" anchor="ctr" wrap="none" lIns="58517" rIns="58517" tIns="39011" bIns="39011"/>
+          <a:bodyPr rtlCol="0" anchor="ctr" wrap="none" lIns="57292" rIns="57292" tIns="38195" bIns="38195"/>
           <a:lstStyle/>
           <a:p>
             <a:pPr algn="ctr">
@@ -7905,8 +7975,8 @@
         </p:nvSpPr>
         <p:spPr>
           <a:xfrm>
-            <a:off x="4891831" y="8786825"/>
-            <a:ext cx="2223662" cy="1720412"/>
+            <a:off x="4868565" y="8822825"/>
+            <a:ext cx="2177131" cy="1684412"/>
           </a:xfrm>
           <a:prstGeom prst="rect">
             <a:avLst/>
@@ -7932,7 +8002,7 @@
           </a:fontRef>
         </p:style>
         <p:txBody>
-          <a:bodyPr rtlCol="0" anchor="ctr" wrap="none" lIns="58517" rIns="58517" tIns="39011" bIns="39011"/>
+          <a:bodyPr rtlCol="0" anchor="ctr" wrap="none" lIns="57292" rIns="57292" tIns="38195" bIns="38195"/>
           <a:lstStyle/>
           <a:p>
             <a:pPr algn="ctr">
@@ -7963,8 +8033,8 @@
         </p:nvSpPr>
         <p:spPr>
           <a:xfrm>
-            <a:off x="444506" y="180000"/>
-            <a:ext cx="2223662" cy="9525"/>
+            <a:off x="514302" y="396000"/>
+            <a:ext cx="2177131" cy="9525"/>
           </a:xfrm>
           <a:prstGeom prst="rect">
             <a:avLst/>
@@ -8007,8 +8077,8 @@
         </p:nvSpPr>
         <p:spPr>
           <a:xfrm>
-            <a:off x="2668168" y="180000"/>
-            <a:ext cx="2223662" cy="9525"/>
+            <a:off x="2691434" y="396000"/>
+            <a:ext cx="2177131" cy="9525"/>
           </a:xfrm>
           <a:prstGeom prst="rect">
             <a:avLst/>
@@ -8051,8 +8121,8 @@
         </p:nvSpPr>
         <p:spPr>
           <a:xfrm>
-            <a:off x="4891831" y="180000"/>
-            <a:ext cx="2223662" cy="9525"/>
+            <a:off x="4868565" y="396000"/>
+            <a:ext cx="2177131" cy="9525"/>
           </a:xfrm>
           <a:prstGeom prst="rect">
             <a:avLst/>
@@ -8095,8 +8165,8 @@
         </p:nvSpPr>
         <p:spPr>
           <a:xfrm>
-            <a:off x="444506" y="1900412"/>
-            <a:ext cx="2223662" cy="9525"/>
+            <a:off x="514302" y="2080412"/>
+            <a:ext cx="2177131" cy="9525"/>
           </a:xfrm>
           <a:prstGeom prst="rect">
             <a:avLst/>
@@ -8139,8 +8209,8 @@
         </p:nvSpPr>
         <p:spPr>
           <a:xfrm>
-            <a:off x="2668168" y="1900412"/>
-            <a:ext cx="2223662" cy="9525"/>
+            <a:off x="2691434" y="2080412"/>
+            <a:ext cx="2177131" cy="9525"/>
           </a:xfrm>
           <a:prstGeom prst="rect">
             <a:avLst/>
@@ -8183,8 +8253,8 @@
         </p:nvSpPr>
         <p:spPr>
           <a:xfrm>
-            <a:off x="4891831" y="1900412"/>
-            <a:ext cx="2223662" cy="9525"/>
+            <a:off x="4868565" y="2080412"/>
+            <a:ext cx="2177131" cy="9525"/>
           </a:xfrm>
           <a:prstGeom prst="rect">
             <a:avLst/>
@@ -8227,8 +8297,8 @@
         </p:nvSpPr>
         <p:spPr>
           <a:xfrm>
-            <a:off x="444506" y="3620825"/>
-            <a:ext cx="2223662" cy="9525"/>
+            <a:off x="514302" y="3764825"/>
+            <a:ext cx="2177131" cy="9525"/>
           </a:xfrm>
           <a:prstGeom prst="rect">
             <a:avLst/>
@@ -8271,8 +8341,8 @@
         </p:nvSpPr>
         <p:spPr>
           <a:xfrm>
-            <a:off x="2668168" y="3620825"/>
-            <a:ext cx="2223662" cy="9525"/>
+            <a:off x="2691434" y="3764825"/>
+            <a:ext cx="2177131" cy="9525"/>
           </a:xfrm>
           <a:prstGeom prst="rect">
             <a:avLst/>
@@ -8315,8 +8385,8 @@
         </p:nvSpPr>
         <p:spPr>
           <a:xfrm>
-            <a:off x="4891831" y="3620825"/>
-            <a:ext cx="2223662" cy="9525"/>
+            <a:off x="4868565" y="3764825"/>
+            <a:ext cx="2177131" cy="9525"/>
           </a:xfrm>
           <a:prstGeom prst="rect">
             <a:avLst/>
@@ -8359,8 +8429,8 @@
         </p:nvSpPr>
         <p:spPr>
           <a:xfrm>
-            <a:off x="444506" y="5341237"/>
-            <a:ext cx="2223662" cy="9525"/>
+            <a:off x="514302" y="5449237"/>
+            <a:ext cx="2177131" cy="9525"/>
           </a:xfrm>
           <a:prstGeom prst="rect">
             <a:avLst/>
@@ -8403,8 +8473,8 @@
         </p:nvSpPr>
         <p:spPr>
           <a:xfrm>
-            <a:off x="2668168" y="5341237"/>
-            <a:ext cx="2223662" cy="9525"/>
+            <a:off x="2691434" y="5449237"/>
+            <a:ext cx="2177131" cy="9525"/>
           </a:xfrm>
           <a:prstGeom prst="rect">
             <a:avLst/>
@@ -8447,8 +8517,8 @@
         </p:nvSpPr>
         <p:spPr>
           <a:xfrm>
-            <a:off x="4891831" y="5341237"/>
-            <a:ext cx="2223662" cy="9525"/>
+            <a:off x="4868565" y="5449237"/>
+            <a:ext cx="2177131" cy="9525"/>
           </a:xfrm>
           <a:prstGeom prst="rect">
             <a:avLst/>
@@ -8491,8 +8561,8 @@
         </p:nvSpPr>
         <p:spPr>
           <a:xfrm>
-            <a:off x="444506" y="7061650"/>
-            <a:ext cx="2223662" cy="9525"/>
+            <a:off x="514302" y="7133650"/>
+            <a:ext cx="2177131" cy="9525"/>
           </a:xfrm>
           <a:prstGeom prst="rect">
             <a:avLst/>
@@ -8535,8 +8605,8 @@
         </p:nvSpPr>
         <p:spPr>
           <a:xfrm>
-            <a:off x="2668168" y="7061650"/>
-            <a:ext cx="2223662" cy="9525"/>
+            <a:off x="2691434" y="7133650"/>
+            <a:ext cx="2177131" cy="9525"/>
           </a:xfrm>
           <a:prstGeom prst="rect">
             <a:avLst/>
@@ -8579,8 +8649,8 @@
         </p:nvSpPr>
         <p:spPr>
           <a:xfrm>
-            <a:off x="4891831" y="7061650"/>
-            <a:ext cx="2223662" cy="9525"/>
+            <a:off x="4868565" y="7133650"/>
+            <a:ext cx="2177131" cy="9525"/>
           </a:xfrm>
           <a:prstGeom prst="rect">
             <a:avLst/>
@@ -8623,8 +8693,8 @@
         </p:nvSpPr>
         <p:spPr>
           <a:xfrm>
-            <a:off x="444506" y="8782062"/>
-            <a:ext cx="2223662" cy="9525"/>
+            <a:off x="514302" y="8818062"/>
+            <a:ext cx="2177131" cy="9525"/>
           </a:xfrm>
           <a:prstGeom prst="rect">
             <a:avLst/>
@@ -8667,8 +8737,8 @@
         </p:nvSpPr>
         <p:spPr>
           <a:xfrm>
-            <a:off x="2668168" y="8782062"/>
-            <a:ext cx="2223662" cy="9525"/>
+            <a:off x="2691434" y="8818062"/>
+            <a:ext cx="2177131" cy="9525"/>
           </a:xfrm>
           <a:prstGeom prst="rect">
             <a:avLst/>
@@ -8711,8 +8781,8 @@
         </p:nvSpPr>
         <p:spPr>
           <a:xfrm>
-            <a:off x="4891831" y="8782062"/>
-            <a:ext cx="2223662" cy="9525"/>
+            <a:off x="4868565" y="8818062"/>
+            <a:ext cx="2177131" cy="9525"/>
           </a:xfrm>
           <a:prstGeom prst="rect">
             <a:avLst/>
@@ -8755,8 +8825,8 @@
         </p:nvSpPr>
         <p:spPr>
           <a:xfrm>
-            <a:off x="444506" y="10502475"/>
-            <a:ext cx="2223662" cy="9525"/>
+            <a:off x="514302" y="10502475"/>
+            <a:ext cx="2177131" cy="9525"/>
           </a:xfrm>
           <a:prstGeom prst="rect">
             <a:avLst/>
@@ -8799,8 +8869,8 @@
         </p:nvSpPr>
         <p:spPr>
           <a:xfrm>
-            <a:off x="2668168" y="10502475"/>
-            <a:ext cx="2223662" cy="9525"/>
+            <a:off x="2691434" y="10502475"/>
+            <a:ext cx="2177131" cy="9525"/>
           </a:xfrm>
           <a:prstGeom prst="rect">
             <a:avLst/>
@@ -8843,8 +8913,8 @@
         </p:nvSpPr>
         <p:spPr>
           <a:xfrm>
-            <a:off x="4891831" y="10502475"/>
-            <a:ext cx="2223662" cy="9525"/>
+            <a:off x="4868565" y="10502475"/>
+            <a:ext cx="2177131" cy="9525"/>
           </a:xfrm>
           <a:prstGeom prst="rect">
             <a:avLst/>
@@ -8887,8 +8957,8 @@
         </p:nvSpPr>
         <p:spPr>
           <a:xfrm>
-            <a:off x="439743" y="184762"/>
-            <a:ext cx="9525" cy="1720412"/>
+            <a:off x="509539" y="400762"/>
+            <a:ext cx="9525" cy="1684412"/>
           </a:xfrm>
           <a:prstGeom prst="rect">
             <a:avLst/>
@@ -8931,8 +9001,8 @@
         </p:nvSpPr>
         <p:spPr>
           <a:xfrm>
-            <a:off x="439743" y="1905175"/>
-            <a:ext cx="9525" cy="1720412"/>
+            <a:off x="509539" y="2085175"/>
+            <a:ext cx="9525" cy="1684412"/>
           </a:xfrm>
           <a:prstGeom prst="rect">
             <a:avLst/>
@@ -8975,8 +9045,8 @@
         </p:nvSpPr>
         <p:spPr>
           <a:xfrm>
-            <a:off x="439743" y="3625587"/>
-            <a:ext cx="9525" cy="1720412"/>
+            <a:off x="509539" y="3769587"/>
+            <a:ext cx="9525" cy="1684412"/>
           </a:xfrm>
           <a:prstGeom prst="rect">
             <a:avLst/>
@@ -9019,8 +9089,8 @@
         </p:nvSpPr>
         <p:spPr>
           <a:xfrm>
-            <a:off x="439743" y="5346000"/>
-            <a:ext cx="9525" cy="1720412"/>
+            <a:off x="509539" y="5454000"/>
+            <a:ext cx="9525" cy="1684412"/>
           </a:xfrm>
           <a:prstGeom prst="rect">
             <a:avLst/>
@@ -9063,8 +9133,8 @@
         </p:nvSpPr>
         <p:spPr>
           <a:xfrm>
-            <a:off x="439743" y="7066412"/>
-            <a:ext cx="9525" cy="1720412"/>
+            <a:off x="509539" y="7138412"/>
+            <a:ext cx="9525" cy="1684412"/>
           </a:xfrm>
           <a:prstGeom prst="rect">
             <a:avLst/>
@@ -9107,8 +9177,8 @@
         </p:nvSpPr>
         <p:spPr>
           <a:xfrm>
-            <a:off x="439743" y="8786825"/>
-            <a:ext cx="9525" cy="1720412"/>
+            <a:off x="509539" y="8822825"/>
+            <a:ext cx="9525" cy="1684412"/>
           </a:xfrm>
           <a:prstGeom prst="rect">
             <a:avLst/>
@@ -9151,8 +9221,8 @@
         </p:nvSpPr>
         <p:spPr>
           <a:xfrm>
-            <a:off x="2663406" y="184762"/>
-            <a:ext cx="9525" cy="1720412"/>
+            <a:off x="2686671" y="400762"/>
+            <a:ext cx="9525" cy="1684412"/>
           </a:xfrm>
           <a:prstGeom prst="rect">
             <a:avLst/>
@@ -9195,8 +9265,8 @@
         </p:nvSpPr>
         <p:spPr>
           <a:xfrm>
-            <a:off x="2663406" y="1905175"/>
-            <a:ext cx="9525" cy="1720412"/>
+            <a:off x="2686671" y="2085175"/>
+            <a:ext cx="9525" cy="1684412"/>
           </a:xfrm>
           <a:prstGeom prst="rect">
             <a:avLst/>
@@ -9239,8 +9309,8 @@
         </p:nvSpPr>
         <p:spPr>
           <a:xfrm>
-            <a:off x="2663406" y="3625587"/>
-            <a:ext cx="9525" cy="1720412"/>
+            <a:off x="2686671" y="3769587"/>
+            <a:ext cx="9525" cy="1684412"/>
           </a:xfrm>
           <a:prstGeom prst="rect">
             <a:avLst/>
@@ -9283,8 +9353,8 @@
         </p:nvSpPr>
         <p:spPr>
           <a:xfrm>
-            <a:off x="2663406" y="5346000"/>
-            <a:ext cx="9525" cy="1720412"/>
+            <a:off x="2686671" y="5454000"/>
+            <a:ext cx="9525" cy="1684412"/>
           </a:xfrm>
           <a:prstGeom prst="rect">
             <a:avLst/>
@@ -9327,8 +9397,8 @@
         </p:nvSpPr>
         <p:spPr>
           <a:xfrm>
-            <a:off x="2663406" y="7066412"/>
-            <a:ext cx="9525" cy="1720412"/>
+            <a:off x="2686671" y="7138412"/>
+            <a:ext cx="9525" cy="1684412"/>
           </a:xfrm>
           <a:prstGeom prst="rect">
             <a:avLst/>
@@ -9371,8 +9441,8 @@
         </p:nvSpPr>
         <p:spPr>
           <a:xfrm>
-            <a:off x="2663406" y="8786825"/>
-            <a:ext cx="9525" cy="1720412"/>
+            <a:off x="2686671" y="8822825"/>
+            <a:ext cx="9525" cy="1684412"/>
           </a:xfrm>
           <a:prstGeom prst="rect">
             <a:avLst/>
@@ -9415,8 +9485,8 @@
         </p:nvSpPr>
         <p:spPr>
           <a:xfrm>
-            <a:off x="4887068" y="184762"/>
-            <a:ext cx="9525" cy="1720412"/>
+            <a:off x="4863803" y="400762"/>
+            <a:ext cx="9525" cy="1684412"/>
           </a:xfrm>
           <a:prstGeom prst="rect">
             <a:avLst/>
@@ -9459,8 +9529,8 @@
         </p:nvSpPr>
         <p:spPr>
           <a:xfrm>
-            <a:off x="4887068" y="1905175"/>
-            <a:ext cx="9525" cy="1720412"/>
+            <a:off x="4863803" y="2085175"/>
+            <a:ext cx="9525" cy="1684412"/>
           </a:xfrm>
           <a:prstGeom prst="rect">
             <a:avLst/>
@@ -9503,8 +9573,8 @@
         </p:nvSpPr>
         <p:spPr>
           <a:xfrm>
-            <a:off x="4887068" y="3625587"/>
-            <a:ext cx="9525" cy="1720412"/>
+            <a:off x="4863803" y="3769587"/>
+            <a:ext cx="9525" cy="1684412"/>
           </a:xfrm>
           <a:prstGeom prst="rect">
             <a:avLst/>
@@ -9547,8 +9617,8 @@
         </p:nvSpPr>
         <p:spPr>
           <a:xfrm>
-            <a:off x="4887068" y="5346000"/>
-            <a:ext cx="9525" cy="1720412"/>
+            <a:off x="4863803" y="5454000"/>
+            <a:ext cx="9525" cy="1684412"/>
           </a:xfrm>
           <a:prstGeom prst="rect">
             <a:avLst/>
@@ -9591,8 +9661,8 @@
         </p:nvSpPr>
         <p:spPr>
           <a:xfrm>
-            <a:off x="4887068" y="7066412"/>
-            <a:ext cx="9525" cy="1720412"/>
+            <a:off x="4863803" y="7138412"/>
+            <a:ext cx="9525" cy="1684412"/>
           </a:xfrm>
           <a:prstGeom prst="rect">
             <a:avLst/>
@@ -9635,8 +9705,8 @@
         </p:nvSpPr>
         <p:spPr>
           <a:xfrm>
-            <a:off x="4887068" y="8786825"/>
-            <a:ext cx="9525" cy="1720412"/>
+            <a:off x="4863803" y="8822825"/>
+            <a:ext cx="9525" cy="1684412"/>
           </a:xfrm>
           <a:prstGeom prst="rect">
             <a:avLst/>
@@ -9679,8 +9749,8 @@
         </p:nvSpPr>
         <p:spPr>
           <a:xfrm>
-            <a:off x="7110731" y="184762"/>
-            <a:ext cx="9525" cy="1720412"/>
+            <a:off x="7040935" y="400762"/>
+            <a:ext cx="9525" cy="1684412"/>
           </a:xfrm>
           <a:prstGeom prst="rect">
             <a:avLst/>
@@ -9723,8 +9793,8 @@
         </p:nvSpPr>
         <p:spPr>
           <a:xfrm>
-            <a:off x="7110731" y="1905175"/>
-            <a:ext cx="9525" cy="1720412"/>
+            <a:off x="7040935" y="2085175"/>
+            <a:ext cx="9525" cy="1684412"/>
           </a:xfrm>
           <a:prstGeom prst="rect">
             <a:avLst/>
@@ -9767,8 +9837,8 @@
         </p:nvSpPr>
         <p:spPr>
           <a:xfrm>
-            <a:off x="7110731" y="3625587"/>
-            <a:ext cx="9525" cy="1720412"/>
+            <a:off x="7040935" y="3769587"/>
+            <a:ext cx="9525" cy="1684412"/>
           </a:xfrm>
           <a:prstGeom prst="rect">
             <a:avLst/>
@@ -9811,8 +9881,8 @@
         </p:nvSpPr>
         <p:spPr>
           <a:xfrm>
-            <a:off x="7110731" y="5346000"/>
-            <a:ext cx="9525" cy="1720412"/>
+            <a:off x="7040935" y="5454000"/>
+            <a:ext cx="9525" cy="1684412"/>
           </a:xfrm>
           <a:prstGeom prst="rect">
             <a:avLst/>
@@ -9855,8 +9925,8 @@
         </p:nvSpPr>
         <p:spPr>
           <a:xfrm>
-            <a:off x="7110731" y="7066412"/>
-            <a:ext cx="9525" cy="1720412"/>
+            <a:off x="7040935" y="7138412"/>
+            <a:ext cx="9525" cy="1684412"/>
           </a:xfrm>
           <a:prstGeom prst="rect">
             <a:avLst/>
@@ -9899,8 +9969,8 @@
         </p:nvSpPr>
         <p:spPr>
           <a:xfrm>
-            <a:off x="7110731" y="8786825"/>
-            <a:ext cx="9525" cy="1720412"/>
+            <a:off x="7040935" y="8822825"/>
+            <a:ext cx="9525" cy="1684412"/>
           </a:xfrm>
           <a:prstGeom prst="rect">
             <a:avLst/>
@@ -9932,6 +10002,41 @@
           <a:lstStyle/>
           <a:p>
             <a:pPr algn="ctr"/>
+          </a:p>
+        </p:txBody>
+      </p:sp>
+      <p:sp>
+        <p:nvSpPr>
+          <p:cNvPr id="65" name="TextBox 64"/>
+          <p:cNvSpPr txBox="1"/>
+          <p:nvPr/>
+        </p:nvSpPr>
+        <p:spPr>
+          <a:xfrm>
+            <a:off x="184762" y="184762"/>
+            <a:ext cx="7190475" cy="198000"/>
+          </a:xfrm>
+          <a:prstGeom prst="rect">
+            <a:avLst/>
+          </a:prstGeom>
+          <a:noFill/>
+        </p:spPr>
+        <p:txBody>
+          <a:bodyPr wrap="none" lIns="0" rIns="0" tIns="0" bIns="0">
+            <a:spAutoFit/>
+          </a:bodyPr>
+          <a:lstStyle/>
+          <a:p>
+            <a:pPr algn="l"/>
+            <a:r>
+              <a:rPr sz="900" b="0">
+                <a:solidFill>
+                  <a:srgbClr val="555555"/>
+                </a:solidFill>
+                <a:latin typeface="Arial"/>
+              </a:rPr>
+              <a:t>Карты букв · ЛИЦО</a:t>
+            </a:r>
           </a:p>
         </p:txBody>
       </p:sp>
@@ -9961,8 +10066,8 @@
         </p:nvSpPr>
         <p:spPr>
           <a:xfrm>
-            <a:off x="4891831" y="184762"/>
-            <a:ext cx="2223662" cy="1720412"/>
+            <a:off x="4868565" y="400762"/>
+            <a:ext cx="2177131" cy="1684412"/>
           </a:xfrm>
           <a:prstGeom prst="rect">
             <a:avLst/>
@@ -10003,8 +10108,8 @@
         </p:nvSpPr>
         <p:spPr>
           <a:xfrm>
-            <a:off x="2668168" y="184762"/>
-            <a:ext cx="2223662" cy="1720412"/>
+            <a:off x="2691434" y="400762"/>
+            <a:ext cx="2177131" cy="1684412"/>
           </a:xfrm>
           <a:prstGeom prst="rect">
             <a:avLst/>
@@ -10045,8 +10150,8 @@
         </p:nvSpPr>
         <p:spPr>
           <a:xfrm>
-            <a:off x="444506" y="184762"/>
-            <a:ext cx="2223662" cy="1720412"/>
+            <a:off x="514302" y="400762"/>
+            <a:ext cx="2177131" cy="1684412"/>
           </a:xfrm>
           <a:prstGeom prst="rect">
             <a:avLst/>
@@ -10087,8 +10192,8 @@
         </p:nvSpPr>
         <p:spPr>
           <a:xfrm>
-            <a:off x="4891831" y="1905175"/>
-            <a:ext cx="2223662" cy="1720412"/>
+            <a:off x="4868565" y="2085175"/>
+            <a:ext cx="2177131" cy="1684412"/>
           </a:xfrm>
           <a:prstGeom prst="rect">
             <a:avLst/>
@@ -10129,8 +10234,8 @@
         </p:nvSpPr>
         <p:spPr>
           <a:xfrm>
-            <a:off x="2668168" y="1905175"/>
-            <a:ext cx="2223662" cy="1720412"/>
+            <a:off x="2691434" y="2085175"/>
+            <a:ext cx="2177131" cy="1684412"/>
           </a:xfrm>
           <a:prstGeom prst="rect">
             <a:avLst/>
@@ -10171,8 +10276,8 @@
         </p:nvSpPr>
         <p:spPr>
           <a:xfrm>
-            <a:off x="444506" y="1905175"/>
-            <a:ext cx="2223662" cy="1720412"/>
+            <a:off x="514302" y="2085175"/>
+            <a:ext cx="2177131" cy="1684412"/>
           </a:xfrm>
           <a:prstGeom prst="rect">
             <a:avLst/>
@@ -10213,8 +10318,8 @@
         </p:nvSpPr>
         <p:spPr>
           <a:xfrm>
-            <a:off x="4891831" y="3625587"/>
-            <a:ext cx="2223662" cy="1720412"/>
+            <a:off x="4868565" y="3769587"/>
+            <a:ext cx="2177131" cy="1684412"/>
           </a:xfrm>
           <a:prstGeom prst="rect">
             <a:avLst/>
@@ -10255,8 +10360,8 @@
         </p:nvSpPr>
         <p:spPr>
           <a:xfrm>
-            <a:off x="2668168" y="3625587"/>
-            <a:ext cx="2223662" cy="1720412"/>
+            <a:off x="2691434" y="3769587"/>
+            <a:ext cx="2177131" cy="1684412"/>
           </a:xfrm>
           <a:prstGeom prst="rect">
             <a:avLst/>
@@ -10297,8 +10402,8 @@
         </p:nvSpPr>
         <p:spPr>
           <a:xfrm>
-            <a:off x="444506" y="3625587"/>
-            <a:ext cx="2223662" cy="1720412"/>
+            <a:off x="514302" y="3769587"/>
+            <a:ext cx="2177131" cy="1684412"/>
           </a:xfrm>
           <a:prstGeom prst="rect">
             <a:avLst/>
@@ -10339,8 +10444,8 @@
         </p:nvSpPr>
         <p:spPr>
           <a:xfrm>
-            <a:off x="4891831" y="5346000"/>
-            <a:ext cx="2223662" cy="1720412"/>
+            <a:off x="4868565" y="5454000"/>
+            <a:ext cx="2177131" cy="1684412"/>
           </a:xfrm>
           <a:prstGeom prst="rect">
             <a:avLst/>
@@ -10381,8 +10486,8 @@
         </p:nvSpPr>
         <p:spPr>
           <a:xfrm>
-            <a:off x="2668168" y="5346000"/>
-            <a:ext cx="2223662" cy="1720412"/>
+            <a:off x="2691434" y="5454000"/>
+            <a:ext cx="2177131" cy="1684412"/>
           </a:xfrm>
           <a:prstGeom prst="rect">
             <a:avLst/>
@@ -10423,8 +10528,8 @@
         </p:nvSpPr>
         <p:spPr>
           <a:xfrm>
-            <a:off x="444506" y="5346000"/>
-            <a:ext cx="2223662" cy="1720412"/>
+            <a:off x="514302" y="5454000"/>
+            <a:ext cx="2177131" cy="1684412"/>
           </a:xfrm>
           <a:prstGeom prst="rect">
             <a:avLst/>
@@ -10465,8 +10570,8 @@
         </p:nvSpPr>
         <p:spPr>
           <a:xfrm>
-            <a:off x="4891831" y="7066412"/>
-            <a:ext cx="2223662" cy="1720412"/>
+            <a:off x="4868565" y="7138412"/>
+            <a:ext cx="2177131" cy="1684412"/>
           </a:xfrm>
           <a:prstGeom prst="rect">
             <a:avLst/>
@@ -10507,8 +10612,8 @@
         </p:nvSpPr>
         <p:spPr>
           <a:xfrm>
-            <a:off x="2668168" y="7066412"/>
-            <a:ext cx="2223662" cy="1720412"/>
+            <a:off x="2691434" y="7138412"/>
+            <a:ext cx="2177131" cy="1684412"/>
           </a:xfrm>
           <a:prstGeom prst="rect">
             <a:avLst/>
@@ -10549,8 +10654,8 @@
         </p:nvSpPr>
         <p:spPr>
           <a:xfrm>
-            <a:off x="444506" y="7066412"/>
-            <a:ext cx="2223662" cy="1720412"/>
+            <a:off x="514302" y="7138412"/>
+            <a:ext cx="2177131" cy="1684412"/>
           </a:xfrm>
           <a:prstGeom prst="rect">
             <a:avLst/>
@@ -10591,8 +10696,8 @@
         </p:nvSpPr>
         <p:spPr>
           <a:xfrm>
-            <a:off x="4891831" y="8786825"/>
-            <a:ext cx="2223662" cy="1720412"/>
+            <a:off x="4868565" y="8822825"/>
+            <a:ext cx="2177131" cy="1684412"/>
           </a:xfrm>
           <a:prstGeom prst="rect">
             <a:avLst/>
@@ -10633,8 +10738,8 @@
         </p:nvSpPr>
         <p:spPr>
           <a:xfrm>
-            <a:off x="2668168" y="8786825"/>
-            <a:ext cx="2223662" cy="1720412"/>
+            <a:off x="2691434" y="8822825"/>
+            <a:ext cx="2177131" cy="1684412"/>
           </a:xfrm>
           <a:prstGeom prst="rect">
             <a:avLst/>
@@ -10675,8 +10780,8 @@
         </p:nvSpPr>
         <p:spPr>
           <a:xfrm>
-            <a:off x="444506" y="8786825"/>
-            <a:ext cx="2223662" cy="1720412"/>
+            <a:off x="514302" y="8822825"/>
+            <a:ext cx="2177131" cy="1684412"/>
           </a:xfrm>
           <a:prstGeom prst="rect">
             <a:avLst/>
@@ -10706,6 +10811,41 @@
           <a:lstStyle/>
           <a:p>
             <a:pPr algn="ctr"/>
+          </a:p>
+        </p:txBody>
+      </p:sp>
+      <p:sp>
+        <p:nvSpPr>
+          <p:cNvPr id="20" name="TextBox 19"/>
+          <p:cNvSpPr txBox="1"/>
+          <p:nvPr/>
+        </p:nvSpPr>
+        <p:spPr>
+          <a:xfrm>
+            <a:off x="184762" y="184762"/>
+            <a:ext cx="7190475" cy="198000"/>
+          </a:xfrm>
+          <a:prstGeom prst="rect">
+            <a:avLst/>
+          </a:prstGeom>
+          <a:noFill/>
+        </p:spPr>
+        <p:txBody>
+          <a:bodyPr wrap="none" lIns="0" rIns="0" tIns="0" bIns="0">
+            <a:spAutoFit/>
+          </a:bodyPr>
+          <a:lstStyle/>
+          <a:p>
+            <a:pPr algn="l"/>
+            <a:r>
+              <a:rPr sz="900" b="0">
+                <a:solidFill>
+                  <a:srgbClr val="555555"/>
+                </a:solidFill>
+                <a:latin typeface="Arial"/>
+              </a:rPr>
+              <a:t>Карты букв · ОБОРОТ</a:t>
+            </a:r>
           </a:p>
         </p:txBody>
       </p:sp>
@@ -10735,8 +10875,8 @@
         </p:nvSpPr>
         <p:spPr>
           <a:xfrm>
-            <a:off x="444506" y="184762"/>
-            <a:ext cx="2223662" cy="1720412"/>
+            <a:off x="514302" y="400762"/>
+            <a:ext cx="2177131" cy="1684412"/>
           </a:xfrm>
           <a:prstGeom prst="rect">
             <a:avLst/>
@@ -10762,7 +10902,7 @@
           </a:fontRef>
         </p:style>
         <p:txBody>
-          <a:bodyPr rtlCol="0" anchor="ctr" wrap="none" lIns="58517" rIns="58517" tIns="39011" bIns="39011"/>
+          <a:bodyPr rtlCol="0" anchor="ctr" wrap="none" lIns="57292" rIns="57292" tIns="38195" bIns="38195"/>
           <a:lstStyle/>
           <a:p>
             <a:pPr algn="ctr">
@@ -10793,8 +10933,8 @@
         </p:nvSpPr>
         <p:spPr>
           <a:xfrm>
-            <a:off x="2668168" y="184762"/>
-            <a:ext cx="2223662" cy="1720412"/>
+            <a:off x="2691434" y="400762"/>
+            <a:ext cx="2177131" cy="1684412"/>
           </a:xfrm>
           <a:prstGeom prst="rect">
             <a:avLst/>
@@ -10820,7 +10960,7 @@
           </a:fontRef>
         </p:style>
         <p:txBody>
-          <a:bodyPr rtlCol="0" anchor="ctr" wrap="none" lIns="58517" rIns="58517" tIns="39011" bIns="39011"/>
+          <a:bodyPr rtlCol="0" anchor="ctr" wrap="none" lIns="57292" rIns="57292" tIns="38195" bIns="38195"/>
           <a:lstStyle/>
           <a:p>
             <a:pPr algn="ctr">
@@ -10851,8 +10991,8 @@
         </p:nvSpPr>
         <p:spPr>
           <a:xfrm>
-            <a:off x="4891831" y="184762"/>
-            <a:ext cx="2223662" cy="1720412"/>
+            <a:off x="4868565" y="400762"/>
+            <a:ext cx="2177131" cy="1684412"/>
           </a:xfrm>
           <a:prstGeom prst="rect">
             <a:avLst/>
@@ -10878,7 +11018,7 @@
           </a:fontRef>
         </p:style>
         <p:txBody>
-          <a:bodyPr rtlCol="0" anchor="ctr" wrap="none" lIns="58517" rIns="58517" tIns="39011" bIns="39011"/>
+          <a:bodyPr rtlCol="0" anchor="ctr" wrap="none" lIns="57292" rIns="57292" tIns="38195" bIns="38195"/>
           <a:lstStyle/>
           <a:p>
             <a:pPr algn="ctr">
@@ -10909,8 +11049,8 @@
         </p:nvSpPr>
         <p:spPr>
           <a:xfrm>
-            <a:off x="444506" y="1905175"/>
-            <a:ext cx="2223662" cy="1720412"/>
+            <a:off x="514302" y="2085175"/>
+            <a:ext cx="2177131" cy="1684412"/>
           </a:xfrm>
           <a:prstGeom prst="rect">
             <a:avLst/>
@@ -10936,7 +11076,7 @@
           </a:fontRef>
         </p:style>
         <p:txBody>
-          <a:bodyPr rtlCol="0" anchor="ctr" wrap="none" lIns="58517" rIns="58517" tIns="39011" bIns="39011"/>
+          <a:bodyPr rtlCol="0" anchor="ctr" wrap="none" lIns="57292" rIns="57292" tIns="38195" bIns="38195"/>
           <a:lstStyle/>
           <a:p>
             <a:pPr algn="ctr">
@@ -10967,8 +11107,8 @@
         </p:nvSpPr>
         <p:spPr>
           <a:xfrm>
-            <a:off x="2668168" y="1905175"/>
-            <a:ext cx="2223662" cy="1720412"/>
+            <a:off x="2691434" y="2085175"/>
+            <a:ext cx="2177131" cy="1684412"/>
           </a:xfrm>
           <a:prstGeom prst="rect">
             <a:avLst/>
@@ -10994,7 +11134,7 @@
           </a:fontRef>
         </p:style>
         <p:txBody>
-          <a:bodyPr rtlCol="0" anchor="ctr" wrap="none" lIns="58517" rIns="58517" tIns="39011" bIns="39011"/>
+          <a:bodyPr rtlCol="0" anchor="ctr" wrap="none" lIns="57292" rIns="57292" tIns="38195" bIns="38195"/>
           <a:lstStyle/>
           <a:p>
             <a:pPr algn="ctr">
@@ -11025,8 +11165,8 @@
         </p:nvSpPr>
         <p:spPr>
           <a:xfrm>
-            <a:off x="4891831" y="1905175"/>
-            <a:ext cx="2223662" cy="1720412"/>
+            <a:off x="4868565" y="2085175"/>
+            <a:ext cx="2177131" cy="1684412"/>
           </a:xfrm>
           <a:prstGeom prst="rect">
             <a:avLst/>
@@ -11052,7 +11192,7 @@
           </a:fontRef>
         </p:style>
         <p:txBody>
-          <a:bodyPr rtlCol="0" anchor="ctr" wrap="none" lIns="58517" rIns="58517" tIns="39011" bIns="39011"/>
+          <a:bodyPr rtlCol="0" anchor="ctr" wrap="none" lIns="57292" rIns="57292" tIns="38195" bIns="38195"/>
           <a:lstStyle/>
           <a:p>
             <a:pPr algn="ctr">
@@ -11083,8 +11223,8 @@
         </p:nvSpPr>
         <p:spPr>
           <a:xfrm>
-            <a:off x="444506" y="3625587"/>
-            <a:ext cx="2223662" cy="1720412"/>
+            <a:off x="514302" y="3769587"/>
+            <a:ext cx="2177131" cy="1684412"/>
           </a:xfrm>
           <a:prstGeom prst="rect">
             <a:avLst/>
@@ -11110,7 +11250,7 @@
           </a:fontRef>
         </p:style>
         <p:txBody>
-          <a:bodyPr rtlCol="0" anchor="ctr" wrap="none" lIns="58517" rIns="58517" tIns="39011" bIns="39011"/>
+          <a:bodyPr rtlCol="0" anchor="ctr" wrap="none" lIns="57292" rIns="57292" tIns="38195" bIns="38195"/>
           <a:lstStyle/>
           <a:p>
             <a:pPr algn="ctr">
@@ -11141,8 +11281,8 @@
         </p:nvSpPr>
         <p:spPr>
           <a:xfrm>
-            <a:off x="2668168" y="3625587"/>
-            <a:ext cx="2223662" cy="1720412"/>
+            <a:off x="2691434" y="3769587"/>
+            <a:ext cx="2177131" cy="1684412"/>
           </a:xfrm>
           <a:prstGeom prst="rect">
             <a:avLst/>
@@ -11168,7 +11308,7 @@
           </a:fontRef>
         </p:style>
         <p:txBody>
-          <a:bodyPr rtlCol="0" anchor="ctr" wrap="none" lIns="58517" rIns="58517" tIns="39011" bIns="39011"/>
+          <a:bodyPr rtlCol="0" anchor="ctr" wrap="none" lIns="57292" rIns="57292" tIns="38195" bIns="38195"/>
           <a:lstStyle/>
           <a:p>
             <a:pPr algn="ctr">
@@ -11199,8 +11339,8 @@
         </p:nvSpPr>
         <p:spPr>
           <a:xfrm>
-            <a:off x="4891831" y="3625587"/>
-            <a:ext cx="2223662" cy="1720412"/>
+            <a:off x="4868565" y="3769587"/>
+            <a:ext cx="2177131" cy="1684412"/>
           </a:xfrm>
           <a:prstGeom prst="rect">
             <a:avLst/>
@@ -11226,7 +11366,7 @@
           </a:fontRef>
         </p:style>
         <p:txBody>
-          <a:bodyPr rtlCol="0" anchor="ctr" wrap="none" lIns="58517" rIns="58517" tIns="39011" bIns="39011"/>
+          <a:bodyPr rtlCol="0" anchor="ctr" wrap="none" lIns="57292" rIns="57292" tIns="38195" bIns="38195"/>
           <a:lstStyle/>
           <a:p>
             <a:pPr algn="ctr">
@@ -11257,8 +11397,8 @@
         </p:nvSpPr>
         <p:spPr>
           <a:xfrm>
-            <a:off x="444506" y="5346000"/>
-            <a:ext cx="2223662" cy="1720412"/>
+            <a:off x="514302" y="5454000"/>
+            <a:ext cx="2177131" cy="1684412"/>
           </a:xfrm>
           <a:prstGeom prst="rect">
             <a:avLst/>
@@ -11284,7 +11424,7 @@
           </a:fontRef>
         </p:style>
         <p:txBody>
-          <a:bodyPr rtlCol="0" anchor="ctr" wrap="none" lIns="58517" rIns="58517" tIns="39011" bIns="39011"/>
+          <a:bodyPr rtlCol="0" anchor="ctr" wrap="none" lIns="57292" rIns="57292" tIns="38195" bIns="38195"/>
           <a:lstStyle/>
           <a:p>
             <a:pPr algn="ctr">
@@ -11315,8 +11455,8 @@
         </p:nvSpPr>
         <p:spPr>
           <a:xfrm>
-            <a:off x="2668168" y="5346000"/>
-            <a:ext cx="2223662" cy="1720412"/>
+            <a:off x="2691434" y="5454000"/>
+            <a:ext cx="2177131" cy="1684412"/>
           </a:xfrm>
           <a:prstGeom prst="rect">
             <a:avLst/>
@@ -11342,7 +11482,7 @@
           </a:fontRef>
         </p:style>
         <p:txBody>
-          <a:bodyPr rtlCol="0" anchor="ctr" wrap="none" lIns="58517" rIns="58517" tIns="39011" bIns="39011"/>
+          <a:bodyPr rtlCol="0" anchor="ctr" wrap="none" lIns="57292" rIns="57292" tIns="38195" bIns="38195"/>
           <a:lstStyle/>
           <a:p>
             <a:pPr algn="ctr">
@@ -11373,8 +11513,8 @@
         </p:nvSpPr>
         <p:spPr>
           <a:xfrm>
-            <a:off x="4891831" y="5346000"/>
-            <a:ext cx="2223662" cy="1720412"/>
+            <a:off x="4868565" y="5454000"/>
+            <a:ext cx="2177131" cy="1684412"/>
           </a:xfrm>
           <a:prstGeom prst="rect">
             <a:avLst/>
@@ -11400,7 +11540,7 @@
           </a:fontRef>
         </p:style>
         <p:txBody>
-          <a:bodyPr rtlCol="0" anchor="ctr" wrap="none" lIns="58517" rIns="58517" tIns="39011" bIns="39011"/>
+          <a:bodyPr rtlCol="0" anchor="ctr" wrap="none" lIns="57292" rIns="57292" tIns="38195" bIns="38195"/>
           <a:lstStyle/>
           <a:p>
             <a:pPr algn="ctr">
@@ -11431,8 +11571,8 @@
         </p:nvSpPr>
         <p:spPr>
           <a:xfrm>
-            <a:off x="444506" y="7066412"/>
-            <a:ext cx="2223662" cy="1720412"/>
+            <a:off x="514302" y="7138412"/>
+            <a:ext cx="2177131" cy="1684412"/>
           </a:xfrm>
           <a:prstGeom prst="rect">
             <a:avLst/>
@@ -11458,7 +11598,7 @@
           </a:fontRef>
         </p:style>
         <p:txBody>
-          <a:bodyPr rtlCol="0" anchor="ctr" wrap="none" lIns="58517" rIns="58517" tIns="39011" bIns="39011"/>
+          <a:bodyPr rtlCol="0" anchor="ctr" wrap="none" lIns="57292" rIns="57292" tIns="38195" bIns="38195"/>
           <a:lstStyle/>
           <a:p>
             <a:pPr algn="ctr">
@@ -11489,8 +11629,8 @@
         </p:nvSpPr>
         <p:spPr>
           <a:xfrm>
-            <a:off x="2668168" y="7066412"/>
-            <a:ext cx="2223662" cy="1720412"/>
+            <a:off x="2691434" y="7138412"/>
+            <a:ext cx="2177131" cy="1684412"/>
           </a:xfrm>
           <a:prstGeom prst="rect">
             <a:avLst/>
@@ -11516,7 +11656,7 @@
           </a:fontRef>
         </p:style>
         <p:txBody>
-          <a:bodyPr rtlCol="0" anchor="ctr" wrap="none" lIns="58517" rIns="58517" tIns="39011" bIns="39011"/>
+          <a:bodyPr rtlCol="0" anchor="ctr" wrap="none" lIns="57292" rIns="57292" tIns="38195" bIns="38195"/>
           <a:lstStyle/>
           <a:p>
             <a:pPr algn="ctr">
@@ -11547,8 +11687,8 @@
         </p:nvSpPr>
         <p:spPr>
           <a:xfrm>
-            <a:off x="4891831" y="7066412"/>
-            <a:ext cx="2223662" cy="1720412"/>
+            <a:off x="4868565" y="7138412"/>
+            <a:ext cx="2177131" cy="1684412"/>
           </a:xfrm>
           <a:prstGeom prst="rect">
             <a:avLst/>
@@ -11574,7 +11714,7 @@
           </a:fontRef>
         </p:style>
         <p:txBody>
-          <a:bodyPr rtlCol="0" anchor="ctr" wrap="none" lIns="58517" rIns="58517" tIns="39011" bIns="39011"/>
+          <a:bodyPr rtlCol="0" anchor="ctr" wrap="none" lIns="57292" rIns="57292" tIns="38195" bIns="38195"/>
           <a:lstStyle/>
           <a:p>
             <a:pPr algn="ctr">
@@ -11605,8 +11745,8 @@
         </p:nvSpPr>
         <p:spPr>
           <a:xfrm>
-            <a:off x="444506" y="8786825"/>
-            <a:ext cx="2223662" cy="1720412"/>
+            <a:off x="514302" y="8822825"/>
+            <a:ext cx="2177131" cy="1684412"/>
           </a:xfrm>
           <a:prstGeom prst="rect">
             <a:avLst/>
@@ -11632,7 +11772,7 @@
           </a:fontRef>
         </p:style>
         <p:txBody>
-          <a:bodyPr rtlCol="0" anchor="ctr" wrap="none" lIns="58517" rIns="58517" tIns="39011" bIns="39011"/>
+          <a:bodyPr rtlCol="0" anchor="ctr" wrap="none" lIns="57292" rIns="57292" tIns="38195" bIns="38195"/>
           <a:lstStyle/>
           <a:p>
             <a:pPr algn="ctr">
@@ -11663,8 +11803,8 @@
         </p:nvSpPr>
         <p:spPr>
           <a:xfrm>
-            <a:off x="2668168" y="8786825"/>
-            <a:ext cx="2223662" cy="1720412"/>
+            <a:off x="2691434" y="8822825"/>
+            <a:ext cx="2177131" cy="1684412"/>
           </a:xfrm>
           <a:prstGeom prst="rect">
             <a:avLst/>
@@ -11690,7 +11830,7 @@
           </a:fontRef>
         </p:style>
         <p:txBody>
-          <a:bodyPr rtlCol="0" anchor="ctr" wrap="none" lIns="58517" rIns="58517" tIns="39011" bIns="39011"/>
+          <a:bodyPr rtlCol="0" anchor="ctr" wrap="none" lIns="57292" rIns="57292" tIns="38195" bIns="38195"/>
           <a:lstStyle/>
           <a:p>
             <a:pPr algn="ctr">
@@ -11721,8 +11861,8 @@
         </p:nvSpPr>
         <p:spPr>
           <a:xfrm>
-            <a:off x="4891831" y="8786825"/>
-            <a:ext cx="2223662" cy="1720412"/>
+            <a:off x="4868565" y="8822825"/>
+            <a:ext cx="2177131" cy="1684412"/>
           </a:xfrm>
           <a:prstGeom prst="rect">
             <a:avLst/>
@@ -11748,7 +11888,7 @@
           </a:fontRef>
         </p:style>
         <p:txBody>
-          <a:bodyPr rtlCol="0" anchor="ctr" wrap="none" lIns="58517" rIns="58517" tIns="39011" bIns="39011"/>
+          <a:bodyPr rtlCol="0" anchor="ctr" wrap="none" lIns="57292" rIns="57292" tIns="38195" bIns="38195"/>
           <a:lstStyle/>
           <a:p>
             <a:pPr algn="ctr">
@@ -11779,8 +11919,8 @@
         </p:nvSpPr>
         <p:spPr>
           <a:xfrm>
-            <a:off x="444506" y="180000"/>
-            <a:ext cx="2223662" cy="9525"/>
+            <a:off x="514302" y="396000"/>
+            <a:ext cx="2177131" cy="9525"/>
           </a:xfrm>
           <a:prstGeom prst="rect">
             <a:avLst/>
@@ -11823,8 +11963,8 @@
         </p:nvSpPr>
         <p:spPr>
           <a:xfrm>
-            <a:off x="2668168" y="180000"/>
-            <a:ext cx="2223662" cy="9525"/>
+            <a:off x="2691434" y="396000"/>
+            <a:ext cx="2177131" cy="9525"/>
           </a:xfrm>
           <a:prstGeom prst="rect">
             <a:avLst/>
@@ -11867,8 +12007,8 @@
         </p:nvSpPr>
         <p:spPr>
           <a:xfrm>
-            <a:off x="4891831" y="180000"/>
-            <a:ext cx="2223662" cy="9525"/>
+            <a:off x="4868565" y="396000"/>
+            <a:ext cx="2177131" cy="9525"/>
           </a:xfrm>
           <a:prstGeom prst="rect">
             <a:avLst/>
@@ -11911,8 +12051,8 @@
         </p:nvSpPr>
         <p:spPr>
           <a:xfrm>
-            <a:off x="444506" y="1900412"/>
-            <a:ext cx="2223662" cy="9525"/>
+            <a:off x="514302" y="2080412"/>
+            <a:ext cx="2177131" cy="9525"/>
           </a:xfrm>
           <a:prstGeom prst="rect">
             <a:avLst/>
@@ -11955,8 +12095,8 @@
         </p:nvSpPr>
         <p:spPr>
           <a:xfrm>
-            <a:off x="2668168" y="1900412"/>
-            <a:ext cx="2223662" cy="9525"/>
+            <a:off x="2691434" y="2080412"/>
+            <a:ext cx="2177131" cy="9525"/>
           </a:xfrm>
           <a:prstGeom prst="rect">
             <a:avLst/>
@@ -11999,8 +12139,8 @@
         </p:nvSpPr>
         <p:spPr>
           <a:xfrm>
-            <a:off x="4891831" y="1900412"/>
-            <a:ext cx="2223662" cy="9525"/>
+            <a:off x="4868565" y="2080412"/>
+            <a:ext cx="2177131" cy="9525"/>
           </a:xfrm>
           <a:prstGeom prst="rect">
             <a:avLst/>
@@ -12043,8 +12183,8 @@
         </p:nvSpPr>
         <p:spPr>
           <a:xfrm>
-            <a:off x="444506" y="3620825"/>
-            <a:ext cx="2223662" cy="9525"/>
+            <a:off x="514302" y="3764825"/>
+            <a:ext cx="2177131" cy="9525"/>
           </a:xfrm>
           <a:prstGeom prst="rect">
             <a:avLst/>
@@ -12087,8 +12227,8 @@
         </p:nvSpPr>
         <p:spPr>
           <a:xfrm>
-            <a:off x="2668168" y="3620825"/>
-            <a:ext cx="2223662" cy="9525"/>
+            <a:off x="2691434" y="3764825"/>
+            <a:ext cx="2177131" cy="9525"/>
           </a:xfrm>
           <a:prstGeom prst="rect">
             <a:avLst/>
@@ -12131,8 +12271,8 @@
         </p:nvSpPr>
         <p:spPr>
           <a:xfrm>
-            <a:off x="4891831" y="3620825"/>
-            <a:ext cx="2223662" cy="9525"/>
+            <a:off x="4868565" y="3764825"/>
+            <a:ext cx="2177131" cy="9525"/>
           </a:xfrm>
           <a:prstGeom prst="rect">
             <a:avLst/>
@@ -12175,8 +12315,8 @@
         </p:nvSpPr>
         <p:spPr>
           <a:xfrm>
-            <a:off x="444506" y="5341237"/>
-            <a:ext cx="2223662" cy="9525"/>
+            <a:off x="514302" y="5449237"/>
+            <a:ext cx="2177131" cy="9525"/>
           </a:xfrm>
           <a:prstGeom prst="rect">
             <a:avLst/>
@@ -12219,8 +12359,8 @@
         </p:nvSpPr>
         <p:spPr>
           <a:xfrm>
-            <a:off x="2668168" y="5341237"/>
-            <a:ext cx="2223662" cy="9525"/>
+            <a:off x="2691434" y="5449237"/>
+            <a:ext cx="2177131" cy="9525"/>
           </a:xfrm>
           <a:prstGeom prst="rect">
             <a:avLst/>
@@ -12263,8 +12403,8 @@
         </p:nvSpPr>
         <p:spPr>
           <a:xfrm>
-            <a:off x="4891831" y="5341237"/>
-            <a:ext cx="2223662" cy="9525"/>
+            <a:off x="4868565" y="5449237"/>
+            <a:ext cx="2177131" cy="9525"/>
           </a:xfrm>
           <a:prstGeom prst="rect">
             <a:avLst/>
@@ -12307,8 +12447,8 @@
         </p:nvSpPr>
         <p:spPr>
           <a:xfrm>
-            <a:off x="444506" y="7061650"/>
-            <a:ext cx="2223662" cy="9525"/>
+            <a:off x="514302" y="7133650"/>
+            <a:ext cx="2177131" cy="9525"/>
           </a:xfrm>
           <a:prstGeom prst="rect">
             <a:avLst/>
@@ -12351,8 +12491,8 @@
         </p:nvSpPr>
         <p:spPr>
           <a:xfrm>
-            <a:off x="2668168" y="7061650"/>
-            <a:ext cx="2223662" cy="9525"/>
+            <a:off x="2691434" y="7133650"/>
+            <a:ext cx="2177131" cy="9525"/>
           </a:xfrm>
           <a:prstGeom prst="rect">
             <a:avLst/>
@@ -12395,8 +12535,8 @@
         </p:nvSpPr>
         <p:spPr>
           <a:xfrm>
-            <a:off x="4891831" y="7061650"/>
-            <a:ext cx="2223662" cy="9525"/>
+            <a:off x="4868565" y="7133650"/>
+            <a:ext cx="2177131" cy="9525"/>
           </a:xfrm>
           <a:prstGeom prst="rect">
             <a:avLst/>
@@ -12439,8 +12579,8 @@
         </p:nvSpPr>
         <p:spPr>
           <a:xfrm>
-            <a:off x="444506" y="8782062"/>
-            <a:ext cx="2223662" cy="9525"/>
+            <a:off x="514302" y="8818062"/>
+            <a:ext cx="2177131" cy="9525"/>
           </a:xfrm>
           <a:prstGeom prst="rect">
             <a:avLst/>
@@ -12483,8 +12623,8 @@
         </p:nvSpPr>
         <p:spPr>
           <a:xfrm>
-            <a:off x="2668168" y="8782062"/>
-            <a:ext cx="2223662" cy="9525"/>
+            <a:off x="2691434" y="8818062"/>
+            <a:ext cx="2177131" cy="9525"/>
           </a:xfrm>
           <a:prstGeom prst="rect">
             <a:avLst/>
@@ -12527,8 +12667,8 @@
         </p:nvSpPr>
         <p:spPr>
           <a:xfrm>
-            <a:off x="4891831" y="8782062"/>
-            <a:ext cx="2223662" cy="9525"/>
+            <a:off x="4868565" y="8818062"/>
+            <a:ext cx="2177131" cy="9525"/>
           </a:xfrm>
           <a:prstGeom prst="rect">
             <a:avLst/>
@@ -12571,8 +12711,8 @@
         </p:nvSpPr>
         <p:spPr>
           <a:xfrm>
-            <a:off x="444506" y="10502475"/>
-            <a:ext cx="2223662" cy="9525"/>
+            <a:off x="514302" y="10502475"/>
+            <a:ext cx="2177131" cy="9525"/>
           </a:xfrm>
           <a:prstGeom prst="rect">
             <a:avLst/>
@@ -12615,8 +12755,8 @@
         </p:nvSpPr>
         <p:spPr>
           <a:xfrm>
-            <a:off x="2668168" y="10502475"/>
-            <a:ext cx="2223662" cy="9525"/>
+            <a:off x="2691434" y="10502475"/>
+            <a:ext cx="2177131" cy="9525"/>
           </a:xfrm>
           <a:prstGeom prst="rect">
             <a:avLst/>
@@ -12659,8 +12799,8 @@
         </p:nvSpPr>
         <p:spPr>
           <a:xfrm>
-            <a:off x="4891831" y="10502475"/>
-            <a:ext cx="2223662" cy="9525"/>
+            <a:off x="4868565" y="10502475"/>
+            <a:ext cx="2177131" cy="9525"/>
           </a:xfrm>
           <a:prstGeom prst="rect">
             <a:avLst/>
@@ -12703,8 +12843,8 @@
         </p:nvSpPr>
         <p:spPr>
           <a:xfrm>
-            <a:off x="439743" y="184762"/>
-            <a:ext cx="9525" cy="1720412"/>
+            <a:off x="509539" y="400762"/>
+            <a:ext cx="9525" cy="1684412"/>
           </a:xfrm>
           <a:prstGeom prst="rect">
             <a:avLst/>
@@ -12747,8 +12887,8 @@
         </p:nvSpPr>
         <p:spPr>
           <a:xfrm>
-            <a:off x="439743" y="1905175"/>
-            <a:ext cx="9525" cy="1720412"/>
+            <a:off x="509539" y="2085175"/>
+            <a:ext cx="9525" cy="1684412"/>
           </a:xfrm>
           <a:prstGeom prst="rect">
             <a:avLst/>
@@ -12791,8 +12931,8 @@
         </p:nvSpPr>
         <p:spPr>
           <a:xfrm>
-            <a:off x="439743" y="3625587"/>
-            <a:ext cx="9525" cy="1720412"/>
+            <a:off x="509539" y="3769587"/>
+            <a:ext cx="9525" cy="1684412"/>
           </a:xfrm>
           <a:prstGeom prst="rect">
             <a:avLst/>
@@ -12835,8 +12975,8 @@
         </p:nvSpPr>
         <p:spPr>
           <a:xfrm>
-            <a:off x="439743" y="5346000"/>
-            <a:ext cx="9525" cy="1720412"/>
+            <a:off x="509539" y="5454000"/>
+            <a:ext cx="9525" cy="1684412"/>
           </a:xfrm>
           <a:prstGeom prst="rect">
             <a:avLst/>
@@ -12879,8 +13019,8 @@
         </p:nvSpPr>
         <p:spPr>
           <a:xfrm>
-            <a:off x="439743" y="7066412"/>
-            <a:ext cx="9525" cy="1720412"/>
+            <a:off x="509539" y="7138412"/>
+            <a:ext cx="9525" cy="1684412"/>
           </a:xfrm>
           <a:prstGeom prst="rect">
             <a:avLst/>
@@ -12923,8 +13063,8 @@
         </p:nvSpPr>
         <p:spPr>
           <a:xfrm>
-            <a:off x="439743" y="8786825"/>
-            <a:ext cx="9525" cy="1720412"/>
+            <a:off x="509539" y="8822825"/>
+            <a:ext cx="9525" cy="1684412"/>
           </a:xfrm>
           <a:prstGeom prst="rect">
             <a:avLst/>
@@ -12967,8 +13107,8 @@
         </p:nvSpPr>
         <p:spPr>
           <a:xfrm>
-            <a:off x="2663406" y="184762"/>
-            <a:ext cx="9525" cy="1720412"/>
+            <a:off x="2686671" y="400762"/>
+            <a:ext cx="9525" cy="1684412"/>
           </a:xfrm>
           <a:prstGeom prst="rect">
             <a:avLst/>
@@ -13011,8 +13151,8 @@
         </p:nvSpPr>
         <p:spPr>
           <a:xfrm>
-            <a:off x="2663406" y="1905175"/>
-            <a:ext cx="9525" cy="1720412"/>
+            <a:off x="2686671" y="2085175"/>
+            <a:ext cx="9525" cy="1684412"/>
           </a:xfrm>
           <a:prstGeom prst="rect">
             <a:avLst/>
@@ -13055,8 +13195,8 @@
         </p:nvSpPr>
         <p:spPr>
           <a:xfrm>
-            <a:off x="2663406" y="3625587"/>
-            <a:ext cx="9525" cy="1720412"/>
+            <a:off x="2686671" y="3769587"/>
+            <a:ext cx="9525" cy="1684412"/>
           </a:xfrm>
           <a:prstGeom prst="rect">
             <a:avLst/>
@@ -13099,8 +13239,8 @@
         </p:nvSpPr>
         <p:spPr>
           <a:xfrm>
-            <a:off x="2663406" y="5346000"/>
-            <a:ext cx="9525" cy="1720412"/>
+            <a:off x="2686671" y="5454000"/>
+            <a:ext cx="9525" cy="1684412"/>
           </a:xfrm>
           <a:prstGeom prst="rect">
             <a:avLst/>
@@ -13143,8 +13283,8 @@
         </p:nvSpPr>
         <p:spPr>
           <a:xfrm>
-            <a:off x="2663406" y="7066412"/>
-            <a:ext cx="9525" cy="1720412"/>
+            <a:off x="2686671" y="7138412"/>
+            <a:ext cx="9525" cy="1684412"/>
           </a:xfrm>
           <a:prstGeom prst="rect">
             <a:avLst/>
@@ -13187,8 +13327,8 @@
         </p:nvSpPr>
         <p:spPr>
           <a:xfrm>
-            <a:off x="2663406" y="8786825"/>
-            <a:ext cx="9525" cy="1720412"/>
+            <a:off x="2686671" y="8822825"/>
+            <a:ext cx="9525" cy="1684412"/>
           </a:xfrm>
           <a:prstGeom prst="rect">
             <a:avLst/>
@@ -13231,8 +13371,8 @@
         </p:nvSpPr>
         <p:spPr>
           <a:xfrm>
-            <a:off x="4887068" y="184762"/>
-            <a:ext cx="9525" cy="1720412"/>
+            <a:off x="4863803" y="400762"/>
+            <a:ext cx="9525" cy="1684412"/>
           </a:xfrm>
           <a:prstGeom prst="rect">
             <a:avLst/>
@@ -13275,8 +13415,8 @@
         </p:nvSpPr>
         <p:spPr>
           <a:xfrm>
-            <a:off x="4887068" y="1905175"/>
-            <a:ext cx="9525" cy="1720412"/>
+            <a:off x="4863803" y="2085175"/>
+            <a:ext cx="9525" cy="1684412"/>
           </a:xfrm>
           <a:prstGeom prst="rect">
             <a:avLst/>
@@ -13319,8 +13459,8 @@
         </p:nvSpPr>
         <p:spPr>
           <a:xfrm>
-            <a:off x="4887068" y="3625587"/>
-            <a:ext cx="9525" cy="1720412"/>
+            <a:off x="4863803" y="3769587"/>
+            <a:ext cx="9525" cy="1684412"/>
           </a:xfrm>
           <a:prstGeom prst="rect">
             <a:avLst/>
@@ -13363,8 +13503,8 @@
         </p:nvSpPr>
         <p:spPr>
           <a:xfrm>
-            <a:off x="4887068" y="5346000"/>
-            <a:ext cx="9525" cy="1720412"/>
+            <a:off x="4863803" y="5454000"/>
+            <a:ext cx="9525" cy="1684412"/>
           </a:xfrm>
           <a:prstGeom prst="rect">
             <a:avLst/>
@@ -13407,8 +13547,8 @@
         </p:nvSpPr>
         <p:spPr>
           <a:xfrm>
-            <a:off x="4887068" y="7066412"/>
-            <a:ext cx="9525" cy="1720412"/>
+            <a:off x="4863803" y="7138412"/>
+            <a:ext cx="9525" cy="1684412"/>
           </a:xfrm>
           <a:prstGeom prst="rect">
             <a:avLst/>
@@ -13451,8 +13591,8 @@
         </p:nvSpPr>
         <p:spPr>
           <a:xfrm>
-            <a:off x="4887068" y="8786825"/>
-            <a:ext cx="9525" cy="1720412"/>
+            <a:off x="4863803" y="8822825"/>
+            <a:ext cx="9525" cy="1684412"/>
           </a:xfrm>
           <a:prstGeom prst="rect">
             <a:avLst/>
@@ -13495,8 +13635,8 @@
         </p:nvSpPr>
         <p:spPr>
           <a:xfrm>
-            <a:off x="7110731" y="184762"/>
-            <a:ext cx="9525" cy="1720412"/>
+            <a:off x="7040935" y="400762"/>
+            <a:ext cx="9525" cy="1684412"/>
           </a:xfrm>
           <a:prstGeom prst="rect">
             <a:avLst/>
@@ -13539,8 +13679,8 @@
         </p:nvSpPr>
         <p:spPr>
           <a:xfrm>
-            <a:off x="7110731" y="1905175"/>
-            <a:ext cx="9525" cy="1720412"/>
+            <a:off x="7040935" y="2085175"/>
+            <a:ext cx="9525" cy="1684412"/>
           </a:xfrm>
           <a:prstGeom prst="rect">
             <a:avLst/>
@@ -13583,8 +13723,8 @@
         </p:nvSpPr>
         <p:spPr>
           <a:xfrm>
-            <a:off x="7110731" y="3625587"/>
-            <a:ext cx="9525" cy="1720412"/>
+            <a:off x="7040935" y="3769587"/>
+            <a:ext cx="9525" cy="1684412"/>
           </a:xfrm>
           <a:prstGeom prst="rect">
             <a:avLst/>
@@ -13627,8 +13767,8 @@
         </p:nvSpPr>
         <p:spPr>
           <a:xfrm>
-            <a:off x="7110731" y="5346000"/>
-            <a:ext cx="9525" cy="1720412"/>
+            <a:off x="7040935" y="5454000"/>
+            <a:ext cx="9525" cy="1684412"/>
           </a:xfrm>
           <a:prstGeom prst="rect">
             <a:avLst/>
@@ -13671,8 +13811,8 @@
         </p:nvSpPr>
         <p:spPr>
           <a:xfrm>
-            <a:off x="7110731" y="7066412"/>
-            <a:ext cx="9525" cy="1720412"/>
+            <a:off x="7040935" y="7138412"/>
+            <a:ext cx="9525" cy="1684412"/>
           </a:xfrm>
           <a:prstGeom prst="rect">
             <a:avLst/>
@@ -13715,8 +13855,8 @@
         </p:nvSpPr>
         <p:spPr>
           <a:xfrm>
-            <a:off x="7110731" y="8786825"/>
-            <a:ext cx="9525" cy="1720412"/>
+            <a:off x="7040935" y="8822825"/>
+            <a:ext cx="9525" cy="1684412"/>
           </a:xfrm>
           <a:prstGeom prst="rect">
             <a:avLst/>
@@ -13748,6 +13888,41 @@
           <a:lstStyle/>
           <a:p>
             <a:pPr algn="ctr"/>
+          </a:p>
+        </p:txBody>
+      </p:sp>
+      <p:sp>
+        <p:nvSpPr>
+          <p:cNvPr id="65" name="TextBox 64"/>
+          <p:cNvSpPr txBox="1"/>
+          <p:nvPr/>
+        </p:nvSpPr>
+        <p:spPr>
+          <a:xfrm>
+            <a:off x="184762" y="184762"/>
+            <a:ext cx="7190475" cy="198000"/>
+          </a:xfrm>
+          <a:prstGeom prst="rect">
+            <a:avLst/>
+          </a:prstGeom>
+          <a:noFill/>
+        </p:spPr>
+        <p:txBody>
+          <a:bodyPr wrap="none" lIns="0" rIns="0" tIns="0" bIns="0">
+            <a:spAutoFit/>
+          </a:bodyPr>
+          <a:lstStyle/>
+          <a:p>
+            <a:pPr algn="l"/>
+            <a:r>
+              <a:rPr sz="900" b="0">
+                <a:solidFill>
+                  <a:srgbClr val="555555"/>
+                </a:solidFill>
+                <a:latin typeface="Arial"/>
+              </a:rPr>
+              <a:t>Карты букв · ЛИЦО</a:t>
+            </a:r>
           </a:p>
         </p:txBody>
       </p:sp>
@@ -13777,8 +13952,8 @@
         </p:nvSpPr>
         <p:spPr>
           <a:xfrm>
-            <a:off x="4891831" y="184762"/>
-            <a:ext cx="2223662" cy="1720412"/>
+            <a:off x="4868565" y="400762"/>
+            <a:ext cx="2177131" cy="1684412"/>
           </a:xfrm>
           <a:prstGeom prst="rect">
             <a:avLst/>
@@ -13819,8 +13994,8 @@
         </p:nvSpPr>
         <p:spPr>
           <a:xfrm>
-            <a:off x="2668168" y="184762"/>
-            <a:ext cx="2223662" cy="1720412"/>
+            <a:off x="2691434" y="400762"/>
+            <a:ext cx="2177131" cy="1684412"/>
           </a:xfrm>
           <a:prstGeom prst="rect">
             <a:avLst/>
@@ -13861,8 +14036,8 @@
         </p:nvSpPr>
         <p:spPr>
           <a:xfrm>
-            <a:off x="444506" y="184762"/>
-            <a:ext cx="2223662" cy="1720412"/>
+            <a:off x="514302" y="400762"/>
+            <a:ext cx="2177131" cy="1684412"/>
           </a:xfrm>
           <a:prstGeom prst="rect">
             <a:avLst/>
@@ -13903,8 +14078,8 @@
         </p:nvSpPr>
         <p:spPr>
           <a:xfrm>
-            <a:off x="4891831" y="1905175"/>
-            <a:ext cx="2223662" cy="1720412"/>
+            <a:off x="4868565" y="2085175"/>
+            <a:ext cx="2177131" cy="1684412"/>
           </a:xfrm>
           <a:prstGeom prst="rect">
             <a:avLst/>
@@ -13945,8 +14120,8 @@
         </p:nvSpPr>
         <p:spPr>
           <a:xfrm>
-            <a:off x="2668168" y="1905175"/>
-            <a:ext cx="2223662" cy="1720412"/>
+            <a:off x="2691434" y="2085175"/>
+            <a:ext cx="2177131" cy="1684412"/>
           </a:xfrm>
           <a:prstGeom prst="rect">
             <a:avLst/>
@@ -13987,8 +14162,8 @@
         </p:nvSpPr>
         <p:spPr>
           <a:xfrm>
-            <a:off x="444506" y="1905175"/>
-            <a:ext cx="2223662" cy="1720412"/>
+            <a:off x="514302" y="2085175"/>
+            <a:ext cx="2177131" cy="1684412"/>
           </a:xfrm>
           <a:prstGeom prst="rect">
             <a:avLst/>
@@ -14029,8 +14204,8 @@
         </p:nvSpPr>
         <p:spPr>
           <a:xfrm>
-            <a:off x="4891831" y="3625587"/>
-            <a:ext cx="2223662" cy="1720412"/>
+            <a:off x="4868565" y="3769587"/>
+            <a:ext cx="2177131" cy="1684412"/>
           </a:xfrm>
           <a:prstGeom prst="rect">
             <a:avLst/>
@@ -14071,8 +14246,8 @@
         </p:nvSpPr>
         <p:spPr>
           <a:xfrm>
-            <a:off x="2668168" y="3625587"/>
-            <a:ext cx="2223662" cy="1720412"/>
+            <a:off x="2691434" y="3769587"/>
+            <a:ext cx="2177131" cy="1684412"/>
           </a:xfrm>
           <a:prstGeom prst="rect">
             <a:avLst/>
@@ -14113,8 +14288,8 @@
         </p:nvSpPr>
         <p:spPr>
           <a:xfrm>
-            <a:off x="444506" y="3625587"/>
-            <a:ext cx="2223662" cy="1720412"/>
+            <a:off x="514302" y="3769587"/>
+            <a:ext cx="2177131" cy="1684412"/>
           </a:xfrm>
           <a:prstGeom prst="rect">
             <a:avLst/>
@@ -14155,8 +14330,8 @@
         </p:nvSpPr>
         <p:spPr>
           <a:xfrm>
-            <a:off x="4891831" y="5346000"/>
-            <a:ext cx="2223662" cy="1720412"/>
+            <a:off x="4868565" y="5454000"/>
+            <a:ext cx="2177131" cy="1684412"/>
           </a:xfrm>
           <a:prstGeom prst="rect">
             <a:avLst/>
@@ -14197,8 +14372,8 @@
         </p:nvSpPr>
         <p:spPr>
           <a:xfrm>
-            <a:off x="2668168" y="5346000"/>
-            <a:ext cx="2223662" cy="1720412"/>
+            <a:off x="2691434" y="5454000"/>
+            <a:ext cx="2177131" cy="1684412"/>
           </a:xfrm>
           <a:prstGeom prst="rect">
             <a:avLst/>
@@ -14239,8 +14414,8 @@
         </p:nvSpPr>
         <p:spPr>
           <a:xfrm>
-            <a:off x="444506" y="5346000"/>
-            <a:ext cx="2223662" cy="1720412"/>
+            <a:off x="514302" y="5454000"/>
+            <a:ext cx="2177131" cy="1684412"/>
           </a:xfrm>
           <a:prstGeom prst="rect">
             <a:avLst/>
@@ -14281,8 +14456,8 @@
         </p:nvSpPr>
         <p:spPr>
           <a:xfrm>
-            <a:off x="4891831" y="7066412"/>
-            <a:ext cx="2223662" cy="1720412"/>
+            <a:off x="4868565" y="7138412"/>
+            <a:ext cx="2177131" cy="1684412"/>
           </a:xfrm>
           <a:prstGeom prst="rect">
             <a:avLst/>
@@ -14323,8 +14498,8 @@
         </p:nvSpPr>
         <p:spPr>
           <a:xfrm>
-            <a:off x="2668168" y="7066412"/>
-            <a:ext cx="2223662" cy="1720412"/>
+            <a:off x="2691434" y="7138412"/>
+            <a:ext cx="2177131" cy="1684412"/>
           </a:xfrm>
           <a:prstGeom prst="rect">
             <a:avLst/>
@@ -14365,8 +14540,8 @@
         </p:nvSpPr>
         <p:spPr>
           <a:xfrm>
-            <a:off x="444506" y="7066412"/>
-            <a:ext cx="2223662" cy="1720412"/>
+            <a:off x="514302" y="7138412"/>
+            <a:ext cx="2177131" cy="1684412"/>
           </a:xfrm>
           <a:prstGeom prst="rect">
             <a:avLst/>
@@ -14407,8 +14582,8 @@
         </p:nvSpPr>
         <p:spPr>
           <a:xfrm>
-            <a:off x="4891831" y="8786825"/>
-            <a:ext cx="2223662" cy="1720412"/>
+            <a:off x="4868565" y="8822825"/>
+            <a:ext cx="2177131" cy="1684412"/>
           </a:xfrm>
           <a:prstGeom prst="rect">
             <a:avLst/>
@@ -14449,8 +14624,8 @@
         </p:nvSpPr>
         <p:spPr>
           <a:xfrm>
-            <a:off x="2668168" y="8786825"/>
-            <a:ext cx="2223662" cy="1720412"/>
+            <a:off x="2691434" y="8822825"/>
+            <a:ext cx="2177131" cy="1684412"/>
           </a:xfrm>
           <a:prstGeom prst="rect">
             <a:avLst/>
@@ -14491,8 +14666,8 @@
         </p:nvSpPr>
         <p:spPr>
           <a:xfrm>
-            <a:off x="444506" y="8786825"/>
-            <a:ext cx="2223662" cy="1720412"/>
+            <a:off x="514302" y="8822825"/>
+            <a:ext cx="2177131" cy="1684412"/>
           </a:xfrm>
           <a:prstGeom prst="rect">
             <a:avLst/>
@@ -14522,6 +14697,41 @@
           <a:lstStyle/>
           <a:p>
             <a:pPr algn="ctr"/>
+          </a:p>
+        </p:txBody>
+      </p:sp>
+      <p:sp>
+        <p:nvSpPr>
+          <p:cNvPr id="20" name="TextBox 19"/>
+          <p:cNvSpPr txBox="1"/>
+          <p:nvPr/>
+        </p:nvSpPr>
+        <p:spPr>
+          <a:xfrm>
+            <a:off x="184762" y="184762"/>
+            <a:ext cx="7190475" cy="198000"/>
+          </a:xfrm>
+          <a:prstGeom prst="rect">
+            <a:avLst/>
+          </a:prstGeom>
+          <a:noFill/>
+        </p:spPr>
+        <p:txBody>
+          <a:bodyPr wrap="none" lIns="0" rIns="0" tIns="0" bIns="0">
+            <a:spAutoFit/>
+          </a:bodyPr>
+          <a:lstStyle/>
+          <a:p>
+            <a:pPr algn="l"/>
+            <a:r>
+              <a:rPr sz="900" b="0">
+                <a:solidFill>
+                  <a:srgbClr val="555555"/>
+                </a:solidFill>
+                <a:latin typeface="Arial"/>
+              </a:rPr>
+              <a:t>Карты букв · ОБОРОТ</a:t>
+            </a:r>
           </a:p>
         </p:txBody>
       </p:sp>
@@ -14551,8 +14761,8 @@
         </p:nvSpPr>
         <p:spPr>
           <a:xfrm>
-            <a:off x="444506" y="184762"/>
-            <a:ext cx="2223662" cy="1720412"/>
+            <a:off x="514302" y="400762"/>
+            <a:ext cx="2177131" cy="1684412"/>
           </a:xfrm>
           <a:prstGeom prst="rect">
             <a:avLst/>
@@ -14578,7 +14788,7 @@
           </a:fontRef>
         </p:style>
         <p:txBody>
-          <a:bodyPr rtlCol="0" anchor="ctr" wrap="none" lIns="58517" rIns="58517" tIns="39011" bIns="39011"/>
+          <a:bodyPr rtlCol="0" anchor="ctr" wrap="none" lIns="57292" rIns="57292" tIns="38195" bIns="38195"/>
           <a:lstStyle/>
           <a:p>
             <a:pPr algn="ctr">
@@ -14609,8 +14819,8 @@
         </p:nvSpPr>
         <p:spPr>
           <a:xfrm>
-            <a:off x="2668168" y="184762"/>
-            <a:ext cx="2223662" cy="1720412"/>
+            <a:off x="2691434" y="400762"/>
+            <a:ext cx="2177131" cy="1684412"/>
           </a:xfrm>
           <a:prstGeom prst="rect">
             <a:avLst/>
@@ -14636,7 +14846,7 @@
           </a:fontRef>
         </p:style>
         <p:txBody>
-          <a:bodyPr rtlCol="0" anchor="ctr" wrap="none" lIns="58517" rIns="58517" tIns="39011" bIns="39011"/>
+          <a:bodyPr rtlCol="0" anchor="ctr" wrap="none" lIns="57292" rIns="57292" tIns="38195" bIns="38195"/>
           <a:lstStyle/>
           <a:p>
             <a:pPr algn="ctr">
@@ -14667,8 +14877,8 @@
         </p:nvSpPr>
         <p:spPr>
           <a:xfrm>
-            <a:off x="4891831" y="184762"/>
-            <a:ext cx="2223662" cy="1720412"/>
+            <a:off x="4868565" y="400762"/>
+            <a:ext cx="2177131" cy="1684412"/>
           </a:xfrm>
           <a:prstGeom prst="rect">
             <a:avLst/>
@@ -14694,7 +14904,7 @@
           </a:fontRef>
         </p:style>
         <p:txBody>
-          <a:bodyPr rtlCol="0" anchor="ctr" wrap="none" lIns="58517" rIns="58517" tIns="39011" bIns="39011"/>
+          <a:bodyPr rtlCol="0" anchor="ctr" wrap="none" lIns="57292" rIns="57292" tIns="38195" bIns="38195"/>
           <a:lstStyle/>
           <a:p>
             <a:pPr algn="ctr">
@@ -14725,8 +14935,8 @@
         </p:nvSpPr>
         <p:spPr>
           <a:xfrm>
-            <a:off x="444506" y="1905175"/>
-            <a:ext cx="2223662" cy="1720412"/>
+            <a:off x="514302" y="2085175"/>
+            <a:ext cx="2177131" cy="1684412"/>
           </a:xfrm>
           <a:prstGeom prst="rect">
             <a:avLst/>
@@ -14752,7 +14962,7 @@
           </a:fontRef>
         </p:style>
         <p:txBody>
-          <a:bodyPr rtlCol="0" anchor="ctr" wrap="none" lIns="58517" rIns="58517" tIns="39011" bIns="39011"/>
+          <a:bodyPr rtlCol="0" anchor="ctr" wrap="none" lIns="57292" rIns="57292" tIns="38195" bIns="38195"/>
           <a:lstStyle/>
           <a:p>
             <a:pPr algn="ctr">
@@ -14783,8 +14993,8 @@
         </p:nvSpPr>
         <p:spPr>
           <a:xfrm>
-            <a:off x="2668168" y="1905175"/>
-            <a:ext cx="2223662" cy="1720412"/>
+            <a:off x="2691434" y="2085175"/>
+            <a:ext cx="2177131" cy="1684412"/>
           </a:xfrm>
           <a:prstGeom prst="rect">
             <a:avLst/>
@@ -14810,7 +15020,7 @@
           </a:fontRef>
         </p:style>
         <p:txBody>
-          <a:bodyPr rtlCol="0" anchor="ctr" wrap="none" lIns="58517" rIns="58517" tIns="39011" bIns="39011"/>
+          <a:bodyPr rtlCol="0" anchor="ctr" wrap="none" lIns="57292" rIns="57292" tIns="38195" bIns="38195"/>
           <a:lstStyle/>
           <a:p>
             <a:pPr algn="ctr">
@@ -14841,8 +15051,8 @@
         </p:nvSpPr>
         <p:spPr>
           <a:xfrm>
-            <a:off x="4891831" y="1905175"/>
-            <a:ext cx="2223662" cy="1720412"/>
+            <a:off x="4868565" y="2085175"/>
+            <a:ext cx="2177131" cy="1684412"/>
           </a:xfrm>
           <a:prstGeom prst="rect">
             <a:avLst/>
@@ -14868,7 +15078,7 @@
           </a:fontRef>
         </p:style>
         <p:txBody>
-          <a:bodyPr rtlCol="0" anchor="ctr" wrap="none" lIns="58517" rIns="58517" tIns="39011" bIns="39011"/>
+          <a:bodyPr rtlCol="0" anchor="ctr" wrap="none" lIns="57292" rIns="57292" tIns="38195" bIns="38195"/>
           <a:lstStyle/>
           <a:p>
             <a:pPr algn="ctr">
@@ -14899,8 +15109,8 @@
         </p:nvSpPr>
         <p:spPr>
           <a:xfrm>
-            <a:off x="444506" y="3625587"/>
-            <a:ext cx="2223662" cy="1720412"/>
+            <a:off x="514302" y="3769587"/>
+            <a:ext cx="2177131" cy="1684412"/>
           </a:xfrm>
           <a:prstGeom prst="rect">
             <a:avLst/>
@@ -14926,7 +15136,7 @@
           </a:fontRef>
         </p:style>
         <p:txBody>
-          <a:bodyPr rtlCol="0" anchor="ctr" wrap="none" lIns="58517" rIns="58517" tIns="39011" bIns="39011"/>
+          <a:bodyPr rtlCol="0" anchor="ctr" wrap="none" lIns="57292" rIns="57292" tIns="38195" bIns="38195"/>
           <a:lstStyle/>
           <a:p>
             <a:pPr algn="ctr">
@@ -14957,8 +15167,8 @@
         </p:nvSpPr>
         <p:spPr>
           <a:xfrm>
-            <a:off x="2668168" y="3625587"/>
-            <a:ext cx="2223662" cy="1720412"/>
+            <a:off x="2691434" y="3769587"/>
+            <a:ext cx="2177131" cy="1684412"/>
           </a:xfrm>
           <a:prstGeom prst="rect">
             <a:avLst/>
@@ -14984,7 +15194,7 @@
           </a:fontRef>
         </p:style>
         <p:txBody>
-          <a:bodyPr rtlCol="0" anchor="ctr" wrap="none" lIns="58517" rIns="58517" tIns="39011" bIns="39011"/>
+          <a:bodyPr rtlCol="0" anchor="ctr" wrap="none" lIns="57292" rIns="57292" tIns="38195" bIns="38195"/>
           <a:lstStyle/>
           <a:p>
             <a:pPr algn="ctr">
@@ -15015,8 +15225,8 @@
         </p:nvSpPr>
         <p:spPr>
           <a:xfrm>
-            <a:off x="4891831" y="3625587"/>
-            <a:ext cx="2223662" cy="1720412"/>
+            <a:off x="4868565" y="3769587"/>
+            <a:ext cx="2177131" cy="1684412"/>
           </a:xfrm>
           <a:prstGeom prst="rect">
             <a:avLst/>
@@ -15042,7 +15252,7 @@
           </a:fontRef>
         </p:style>
         <p:txBody>
-          <a:bodyPr rtlCol="0" anchor="ctr" wrap="none" lIns="58517" rIns="58517" tIns="39011" bIns="39011"/>
+          <a:bodyPr rtlCol="0" anchor="ctr" wrap="none" lIns="57292" rIns="57292" tIns="38195" bIns="38195"/>
           <a:lstStyle/>
           <a:p>
             <a:pPr algn="ctr">
@@ -15073,8 +15283,8 @@
         </p:nvSpPr>
         <p:spPr>
           <a:xfrm>
-            <a:off x="444506" y="5346000"/>
-            <a:ext cx="2223662" cy="1720412"/>
+            <a:off x="514302" y="5454000"/>
+            <a:ext cx="2177131" cy="1684412"/>
           </a:xfrm>
           <a:prstGeom prst="rect">
             <a:avLst/>
@@ -15100,7 +15310,7 @@
           </a:fontRef>
         </p:style>
         <p:txBody>
-          <a:bodyPr rtlCol="0" anchor="ctr" wrap="none" lIns="58517" rIns="58517" tIns="39011" bIns="39011"/>
+          <a:bodyPr rtlCol="0" anchor="ctr" wrap="none" lIns="57292" rIns="57292" tIns="38195" bIns="38195"/>
           <a:lstStyle/>
           <a:p>
             <a:pPr algn="ctr">
@@ -15131,8 +15341,8 @@
         </p:nvSpPr>
         <p:spPr>
           <a:xfrm>
-            <a:off x="2668168" y="5346000"/>
-            <a:ext cx="2223662" cy="1720412"/>
+            <a:off x="2691434" y="5454000"/>
+            <a:ext cx="2177131" cy="1684412"/>
           </a:xfrm>
           <a:prstGeom prst="rect">
             <a:avLst/>
@@ -15158,7 +15368,7 @@
           </a:fontRef>
         </p:style>
         <p:txBody>
-          <a:bodyPr rtlCol="0" anchor="ctr" wrap="none" lIns="58517" rIns="58517" tIns="39011" bIns="39011"/>
+          <a:bodyPr rtlCol="0" anchor="ctr" wrap="none" lIns="57292" rIns="57292" tIns="38195" bIns="38195"/>
           <a:lstStyle/>
           <a:p>
             <a:pPr algn="ctr">
@@ -15189,8 +15399,8 @@
         </p:nvSpPr>
         <p:spPr>
           <a:xfrm>
-            <a:off x="4891831" y="5346000"/>
-            <a:ext cx="2223662" cy="1720412"/>
+            <a:off x="4868565" y="5454000"/>
+            <a:ext cx="2177131" cy="1684412"/>
           </a:xfrm>
           <a:prstGeom prst="rect">
             <a:avLst/>
@@ -15216,7 +15426,7 @@
           </a:fontRef>
         </p:style>
         <p:txBody>
-          <a:bodyPr rtlCol="0" anchor="ctr" wrap="none" lIns="58517" rIns="58517" tIns="39011" bIns="39011"/>
+          <a:bodyPr rtlCol="0" anchor="ctr" wrap="none" lIns="57292" rIns="57292" tIns="38195" bIns="38195"/>
           <a:lstStyle/>
           <a:p>
             <a:pPr algn="ctr">
@@ -15247,8 +15457,8 @@
         </p:nvSpPr>
         <p:spPr>
           <a:xfrm>
-            <a:off x="444506" y="7066412"/>
-            <a:ext cx="2223662" cy="1720412"/>
+            <a:off x="514302" y="7138412"/>
+            <a:ext cx="2177131" cy="1684412"/>
           </a:xfrm>
           <a:prstGeom prst="rect">
             <a:avLst/>
@@ -15274,7 +15484,7 @@
           </a:fontRef>
         </p:style>
         <p:txBody>
-          <a:bodyPr rtlCol="0" anchor="ctr" wrap="none" lIns="58517" rIns="58517" tIns="39011" bIns="39011"/>
+          <a:bodyPr rtlCol="0" anchor="ctr" wrap="none" lIns="57292" rIns="57292" tIns="38195" bIns="38195"/>
           <a:lstStyle/>
           <a:p>
             <a:pPr algn="ctr">
@@ -15305,8 +15515,8 @@
         </p:nvSpPr>
         <p:spPr>
           <a:xfrm>
-            <a:off x="2668168" y="7066412"/>
-            <a:ext cx="2223662" cy="1720412"/>
+            <a:off x="2691434" y="7138412"/>
+            <a:ext cx="2177131" cy="1684412"/>
           </a:xfrm>
           <a:prstGeom prst="rect">
             <a:avLst/>
@@ -15332,7 +15542,7 @@
           </a:fontRef>
         </p:style>
         <p:txBody>
-          <a:bodyPr rtlCol="0" anchor="ctr" wrap="none" lIns="58517" rIns="58517" tIns="39011" bIns="39011"/>
+          <a:bodyPr rtlCol="0" anchor="ctr" wrap="none" lIns="57292" rIns="57292" tIns="38195" bIns="38195"/>
           <a:lstStyle/>
           <a:p>
             <a:pPr algn="ctr">
@@ -15363,8 +15573,8 @@
         </p:nvSpPr>
         <p:spPr>
           <a:xfrm>
-            <a:off x="4891831" y="7066412"/>
-            <a:ext cx="2223662" cy="1720412"/>
+            <a:off x="4868565" y="7138412"/>
+            <a:ext cx="2177131" cy="1684412"/>
           </a:xfrm>
           <a:prstGeom prst="rect">
             <a:avLst/>
@@ -15390,7 +15600,7 @@
           </a:fontRef>
         </p:style>
         <p:txBody>
-          <a:bodyPr rtlCol="0" anchor="ctr" wrap="none" lIns="58517" rIns="58517" tIns="39011" bIns="39011"/>
+          <a:bodyPr rtlCol="0" anchor="ctr" wrap="none" lIns="57292" rIns="57292" tIns="38195" bIns="38195"/>
           <a:lstStyle/>
           <a:p>
             <a:pPr algn="ctr">
@@ -15421,8 +15631,8 @@
         </p:nvSpPr>
         <p:spPr>
           <a:xfrm>
-            <a:off x="444506" y="8786825"/>
-            <a:ext cx="2223662" cy="1720412"/>
+            <a:off x="514302" y="8822825"/>
+            <a:ext cx="2177131" cy="1684412"/>
           </a:xfrm>
           <a:prstGeom prst="rect">
             <a:avLst/>
@@ -15448,7 +15658,7 @@
           </a:fontRef>
         </p:style>
         <p:txBody>
-          <a:bodyPr rtlCol="0" anchor="ctr" wrap="none" lIns="58517" rIns="58517" tIns="39011" bIns="39011"/>
+          <a:bodyPr rtlCol="0" anchor="ctr" wrap="none" lIns="57292" rIns="57292" tIns="38195" bIns="38195"/>
           <a:lstStyle/>
           <a:p>
             <a:pPr algn="ctr">
@@ -15479,8 +15689,8 @@
         </p:nvSpPr>
         <p:spPr>
           <a:xfrm>
-            <a:off x="2668168" y="8786825"/>
-            <a:ext cx="2223662" cy="1720412"/>
+            <a:off x="2691434" y="8822825"/>
+            <a:ext cx="2177131" cy="1684412"/>
           </a:xfrm>
           <a:prstGeom prst="rect">
             <a:avLst/>
@@ -15506,7 +15716,7 @@
           </a:fontRef>
         </p:style>
         <p:txBody>
-          <a:bodyPr rtlCol="0" anchor="ctr" wrap="none" lIns="58517" rIns="58517" tIns="39011" bIns="39011"/>
+          <a:bodyPr rtlCol="0" anchor="ctr" wrap="none" lIns="57292" rIns="57292" tIns="38195" bIns="38195"/>
           <a:lstStyle/>
           <a:p>
             <a:pPr algn="ctr">
@@ -15537,8 +15747,8 @@
         </p:nvSpPr>
         <p:spPr>
           <a:xfrm>
-            <a:off x="4891831" y="8786825"/>
-            <a:ext cx="2223662" cy="1720412"/>
+            <a:off x="4868565" y="8822825"/>
+            <a:ext cx="2177131" cy="1684412"/>
           </a:xfrm>
           <a:prstGeom prst="rect">
             <a:avLst/>
@@ -15564,7 +15774,7 @@
           </a:fontRef>
         </p:style>
         <p:txBody>
-          <a:bodyPr rtlCol="0" anchor="ctr" wrap="none" lIns="58517" rIns="58517" tIns="39011" bIns="39011"/>
+          <a:bodyPr rtlCol="0" anchor="ctr" wrap="none" lIns="57292" rIns="57292" tIns="38195" bIns="38195"/>
           <a:lstStyle/>
           <a:p>
             <a:pPr algn="ctr">
@@ -15595,8 +15805,8 @@
         </p:nvSpPr>
         <p:spPr>
           <a:xfrm>
-            <a:off x="444506" y="180000"/>
-            <a:ext cx="2223662" cy="9525"/>
+            <a:off x="514302" y="396000"/>
+            <a:ext cx="2177131" cy="9525"/>
           </a:xfrm>
           <a:prstGeom prst="rect">
             <a:avLst/>
@@ -15639,8 +15849,8 @@
         </p:nvSpPr>
         <p:spPr>
           <a:xfrm>
-            <a:off x="2668168" y="180000"/>
-            <a:ext cx="2223662" cy="9525"/>
+            <a:off x="2691434" y="396000"/>
+            <a:ext cx="2177131" cy="9525"/>
           </a:xfrm>
           <a:prstGeom prst="rect">
             <a:avLst/>
@@ -15683,8 +15893,8 @@
         </p:nvSpPr>
         <p:spPr>
           <a:xfrm>
-            <a:off x="4891831" y="180000"/>
-            <a:ext cx="2223662" cy="9525"/>
+            <a:off x="4868565" y="396000"/>
+            <a:ext cx="2177131" cy="9525"/>
           </a:xfrm>
           <a:prstGeom prst="rect">
             <a:avLst/>
@@ -15727,8 +15937,8 @@
         </p:nvSpPr>
         <p:spPr>
           <a:xfrm>
-            <a:off x="444506" y="1900412"/>
-            <a:ext cx="2223662" cy="9525"/>
+            <a:off x="514302" y="2080412"/>
+            <a:ext cx="2177131" cy="9525"/>
           </a:xfrm>
           <a:prstGeom prst="rect">
             <a:avLst/>
@@ -15771,8 +15981,8 @@
         </p:nvSpPr>
         <p:spPr>
           <a:xfrm>
-            <a:off x="2668168" y="1900412"/>
-            <a:ext cx="2223662" cy="9525"/>
+            <a:off x="2691434" y="2080412"/>
+            <a:ext cx="2177131" cy="9525"/>
           </a:xfrm>
           <a:prstGeom prst="rect">
             <a:avLst/>
@@ -15815,8 +16025,8 @@
         </p:nvSpPr>
         <p:spPr>
           <a:xfrm>
-            <a:off x="4891831" y="1900412"/>
-            <a:ext cx="2223662" cy="9525"/>
+            <a:off x="4868565" y="2080412"/>
+            <a:ext cx="2177131" cy="9525"/>
           </a:xfrm>
           <a:prstGeom prst="rect">
             <a:avLst/>
@@ -15859,8 +16069,8 @@
         </p:nvSpPr>
         <p:spPr>
           <a:xfrm>
-            <a:off x="444506" y="3620825"/>
-            <a:ext cx="2223662" cy="9525"/>
+            <a:off x="514302" y="3764825"/>
+            <a:ext cx="2177131" cy="9525"/>
           </a:xfrm>
           <a:prstGeom prst="rect">
             <a:avLst/>
@@ -15903,8 +16113,8 @@
         </p:nvSpPr>
         <p:spPr>
           <a:xfrm>
-            <a:off x="2668168" y="3620825"/>
-            <a:ext cx="2223662" cy="9525"/>
+            <a:off x="2691434" y="3764825"/>
+            <a:ext cx="2177131" cy="9525"/>
           </a:xfrm>
           <a:prstGeom prst="rect">
             <a:avLst/>
@@ -15947,8 +16157,8 @@
         </p:nvSpPr>
         <p:spPr>
           <a:xfrm>
-            <a:off x="4891831" y="3620825"/>
-            <a:ext cx="2223662" cy="9525"/>
+            <a:off x="4868565" y="3764825"/>
+            <a:ext cx="2177131" cy="9525"/>
           </a:xfrm>
           <a:prstGeom prst="rect">
             <a:avLst/>
@@ -15991,8 +16201,8 @@
         </p:nvSpPr>
         <p:spPr>
           <a:xfrm>
-            <a:off x="444506" y="5341237"/>
-            <a:ext cx="2223662" cy="9525"/>
+            <a:off x="514302" y="5449237"/>
+            <a:ext cx="2177131" cy="9525"/>
           </a:xfrm>
           <a:prstGeom prst="rect">
             <a:avLst/>
@@ -16035,8 +16245,8 @@
         </p:nvSpPr>
         <p:spPr>
           <a:xfrm>
-            <a:off x="2668168" y="5341237"/>
-            <a:ext cx="2223662" cy="9525"/>
+            <a:off x="2691434" y="5449237"/>
+            <a:ext cx="2177131" cy="9525"/>
           </a:xfrm>
           <a:prstGeom prst="rect">
             <a:avLst/>
@@ -16079,8 +16289,8 @@
         </p:nvSpPr>
         <p:spPr>
           <a:xfrm>
-            <a:off x="4891831" y="5341237"/>
-            <a:ext cx="2223662" cy="9525"/>
+            <a:off x="4868565" y="5449237"/>
+            <a:ext cx="2177131" cy="9525"/>
           </a:xfrm>
           <a:prstGeom prst="rect">
             <a:avLst/>
@@ -16123,8 +16333,8 @@
         </p:nvSpPr>
         <p:spPr>
           <a:xfrm>
-            <a:off x="444506" y="7061650"/>
-            <a:ext cx="2223662" cy="9525"/>
+            <a:off x="514302" y="7133650"/>
+            <a:ext cx="2177131" cy="9525"/>
           </a:xfrm>
           <a:prstGeom prst="rect">
             <a:avLst/>
@@ -16167,8 +16377,8 @@
         </p:nvSpPr>
         <p:spPr>
           <a:xfrm>
-            <a:off x="2668168" y="7061650"/>
-            <a:ext cx="2223662" cy="9525"/>
+            <a:off x="2691434" y="7133650"/>
+            <a:ext cx="2177131" cy="9525"/>
           </a:xfrm>
           <a:prstGeom prst="rect">
             <a:avLst/>
@@ -16211,8 +16421,8 @@
         </p:nvSpPr>
         <p:spPr>
           <a:xfrm>
-            <a:off x="4891831" y="7061650"/>
-            <a:ext cx="2223662" cy="9525"/>
+            <a:off x="4868565" y="7133650"/>
+            <a:ext cx="2177131" cy="9525"/>
           </a:xfrm>
           <a:prstGeom prst="rect">
             <a:avLst/>
@@ -16255,8 +16465,8 @@
         </p:nvSpPr>
         <p:spPr>
           <a:xfrm>
-            <a:off x="444506" y="8782062"/>
-            <a:ext cx="2223662" cy="9525"/>
+            <a:off x="514302" y="8818062"/>
+            <a:ext cx="2177131" cy="9525"/>
           </a:xfrm>
           <a:prstGeom prst="rect">
             <a:avLst/>
@@ -16299,8 +16509,8 @@
         </p:nvSpPr>
         <p:spPr>
           <a:xfrm>
-            <a:off x="2668168" y="8782062"/>
-            <a:ext cx="2223662" cy="9525"/>
+            <a:off x="2691434" y="8818062"/>
+            <a:ext cx="2177131" cy="9525"/>
           </a:xfrm>
           <a:prstGeom prst="rect">
             <a:avLst/>
@@ -16343,8 +16553,8 @@
         </p:nvSpPr>
         <p:spPr>
           <a:xfrm>
-            <a:off x="4891831" y="8782062"/>
-            <a:ext cx="2223662" cy="9525"/>
+            <a:off x="4868565" y="8818062"/>
+            <a:ext cx="2177131" cy="9525"/>
           </a:xfrm>
           <a:prstGeom prst="rect">
             <a:avLst/>
@@ -16387,8 +16597,8 @@
         </p:nvSpPr>
         <p:spPr>
           <a:xfrm>
-            <a:off x="444506" y="10502475"/>
-            <a:ext cx="2223662" cy="9525"/>
+            <a:off x="514302" y="10502475"/>
+            <a:ext cx="2177131" cy="9525"/>
           </a:xfrm>
           <a:prstGeom prst="rect">
             <a:avLst/>
@@ -16431,8 +16641,8 @@
         </p:nvSpPr>
         <p:spPr>
           <a:xfrm>
-            <a:off x="2668168" y="10502475"/>
-            <a:ext cx="2223662" cy="9525"/>
+            <a:off x="2691434" y="10502475"/>
+            <a:ext cx="2177131" cy="9525"/>
           </a:xfrm>
           <a:prstGeom prst="rect">
             <a:avLst/>
@@ -16475,8 +16685,8 @@
         </p:nvSpPr>
         <p:spPr>
           <a:xfrm>
-            <a:off x="4891831" y="10502475"/>
-            <a:ext cx="2223662" cy="9525"/>
+            <a:off x="4868565" y="10502475"/>
+            <a:ext cx="2177131" cy="9525"/>
           </a:xfrm>
           <a:prstGeom prst="rect">
             <a:avLst/>
@@ -16519,8 +16729,8 @@
         </p:nvSpPr>
         <p:spPr>
           <a:xfrm>
-            <a:off x="439743" y="184762"/>
-            <a:ext cx="9525" cy="1720412"/>
+            <a:off x="509539" y="400762"/>
+            <a:ext cx="9525" cy="1684412"/>
           </a:xfrm>
           <a:prstGeom prst="rect">
             <a:avLst/>
@@ -16563,8 +16773,8 @@
         </p:nvSpPr>
         <p:spPr>
           <a:xfrm>
-            <a:off x="439743" y="1905175"/>
-            <a:ext cx="9525" cy="1720412"/>
+            <a:off x="509539" y="2085175"/>
+            <a:ext cx="9525" cy="1684412"/>
           </a:xfrm>
           <a:prstGeom prst="rect">
             <a:avLst/>
@@ -16607,8 +16817,8 @@
         </p:nvSpPr>
         <p:spPr>
           <a:xfrm>
-            <a:off x="439743" y="3625587"/>
-            <a:ext cx="9525" cy="1720412"/>
+            <a:off x="509539" y="3769587"/>
+            <a:ext cx="9525" cy="1684412"/>
           </a:xfrm>
           <a:prstGeom prst="rect">
             <a:avLst/>
@@ -16651,8 +16861,8 @@
         </p:nvSpPr>
         <p:spPr>
           <a:xfrm>
-            <a:off x="439743" y="5346000"/>
-            <a:ext cx="9525" cy="1720412"/>
+            <a:off x="509539" y="5454000"/>
+            <a:ext cx="9525" cy="1684412"/>
           </a:xfrm>
           <a:prstGeom prst="rect">
             <a:avLst/>
@@ -16695,8 +16905,8 @@
         </p:nvSpPr>
         <p:spPr>
           <a:xfrm>
-            <a:off x="439743" y="7066412"/>
-            <a:ext cx="9525" cy="1720412"/>
+            <a:off x="509539" y="7138412"/>
+            <a:ext cx="9525" cy="1684412"/>
           </a:xfrm>
           <a:prstGeom prst="rect">
             <a:avLst/>
@@ -16739,8 +16949,8 @@
         </p:nvSpPr>
         <p:spPr>
           <a:xfrm>
-            <a:off x="439743" y="8786825"/>
-            <a:ext cx="9525" cy="1720412"/>
+            <a:off x="509539" y="8822825"/>
+            <a:ext cx="9525" cy="1684412"/>
           </a:xfrm>
           <a:prstGeom prst="rect">
             <a:avLst/>
@@ -16783,8 +16993,8 @@
         </p:nvSpPr>
         <p:spPr>
           <a:xfrm>
-            <a:off x="2663406" y="184762"/>
-            <a:ext cx="9525" cy="1720412"/>
+            <a:off x="2686671" y="400762"/>
+            <a:ext cx="9525" cy="1684412"/>
           </a:xfrm>
           <a:prstGeom prst="rect">
             <a:avLst/>
@@ -16827,8 +17037,8 @@
         </p:nvSpPr>
         <p:spPr>
           <a:xfrm>
-            <a:off x="2663406" y="1905175"/>
-            <a:ext cx="9525" cy="1720412"/>
+            <a:off x="2686671" y="2085175"/>
+            <a:ext cx="9525" cy="1684412"/>
           </a:xfrm>
           <a:prstGeom prst="rect">
             <a:avLst/>
@@ -16871,8 +17081,8 @@
         </p:nvSpPr>
         <p:spPr>
           <a:xfrm>
-            <a:off x="2663406" y="3625587"/>
-            <a:ext cx="9525" cy="1720412"/>
+            <a:off x="2686671" y="3769587"/>
+            <a:ext cx="9525" cy="1684412"/>
           </a:xfrm>
           <a:prstGeom prst="rect">
             <a:avLst/>
@@ -16915,8 +17125,8 @@
         </p:nvSpPr>
         <p:spPr>
           <a:xfrm>
-            <a:off x="2663406" y="5346000"/>
-            <a:ext cx="9525" cy="1720412"/>
+            <a:off x="2686671" y="5454000"/>
+            <a:ext cx="9525" cy="1684412"/>
           </a:xfrm>
           <a:prstGeom prst="rect">
             <a:avLst/>
@@ -16959,8 +17169,8 @@
         </p:nvSpPr>
         <p:spPr>
           <a:xfrm>
-            <a:off x="2663406" y="7066412"/>
-            <a:ext cx="9525" cy="1720412"/>
+            <a:off x="2686671" y="7138412"/>
+            <a:ext cx="9525" cy="1684412"/>
           </a:xfrm>
           <a:prstGeom prst="rect">
             <a:avLst/>
@@ -17003,8 +17213,8 @@
         </p:nvSpPr>
         <p:spPr>
           <a:xfrm>
-            <a:off x="2663406" y="8786825"/>
-            <a:ext cx="9525" cy="1720412"/>
+            <a:off x="2686671" y="8822825"/>
+            <a:ext cx="9525" cy="1684412"/>
           </a:xfrm>
           <a:prstGeom prst="rect">
             <a:avLst/>
@@ -17047,8 +17257,8 @@
         </p:nvSpPr>
         <p:spPr>
           <a:xfrm>
-            <a:off x="4887068" y="184762"/>
-            <a:ext cx="9525" cy="1720412"/>
+            <a:off x="4863803" y="400762"/>
+            <a:ext cx="9525" cy="1684412"/>
           </a:xfrm>
           <a:prstGeom prst="rect">
             <a:avLst/>
@@ -17091,8 +17301,8 @@
         </p:nvSpPr>
         <p:spPr>
           <a:xfrm>
-            <a:off x="4887068" y="1905175"/>
-            <a:ext cx="9525" cy="1720412"/>
+            <a:off x="4863803" y="2085175"/>
+            <a:ext cx="9525" cy="1684412"/>
           </a:xfrm>
           <a:prstGeom prst="rect">
             <a:avLst/>
@@ -17135,8 +17345,8 @@
         </p:nvSpPr>
         <p:spPr>
           <a:xfrm>
-            <a:off x="4887068" y="3625587"/>
-            <a:ext cx="9525" cy="1720412"/>
+            <a:off x="4863803" y="3769587"/>
+            <a:ext cx="9525" cy="1684412"/>
           </a:xfrm>
           <a:prstGeom prst="rect">
             <a:avLst/>
@@ -17179,8 +17389,8 @@
         </p:nvSpPr>
         <p:spPr>
           <a:xfrm>
-            <a:off x="4887068" y="5346000"/>
-            <a:ext cx="9525" cy="1720412"/>
+            <a:off x="4863803" y="5454000"/>
+            <a:ext cx="9525" cy="1684412"/>
           </a:xfrm>
           <a:prstGeom prst="rect">
             <a:avLst/>
@@ -17223,8 +17433,8 @@
         </p:nvSpPr>
         <p:spPr>
           <a:xfrm>
-            <a:off x="4887068" y="7066412"/>
-            <a:ext cx="9525" cy="1720412"/>
+            <a:off x="4863803" y="7138412"/>
+            <a:ext cx="9525" cy="1684412"/>
           </a:xfrm>
           <a:prstGeom prst="rect">
             <a:avLst/>
@@ -17267,8 +17477,8 @@
         </p:nvSpPr>
         <p:spPr>
           <a:xfrm>
-            <a:off x="4887068" y="8786825"/>
-            <a:ext cx="9525" cy="1720412"/>
+            <a:off x="4863803" y="8822825"/>
+            <a:ext cx="9525" cy="1684412"/>
           </a:xfrm>
           <a:prstGeom prst="rect">
             <a:avLst/>
@@ -17311,8 +17521,8 @@
         </p:nvSpPr>
         <p:spPr>
           <a:xfrm>
-            <a:off x="7110731" y="184762"/>
-            <a:ext cx="9525" cy="1720412"/>
+            <a:off x="7040935" y="400762"/>
+            <a:ext cx="9525" cy="1684412"/>
           </a:xfrm>
           <a:prstGeom prst="rect">
             <a:avLst/>
@@ -17355,8 +17565,8 @@
         </p:nvSpPr>
         <p:spPr>
           <a:xfrm>
-            <a:off x="7110731" y="1905175"/>
-            <a:ext cx="9525" cy="1720412"/>
+            <a:off x="7040935" y="2085175"/>
+            <a:ext cx="9525" cy="1684412"/>
           </a:xfrm>
           <a:prstGeom prst="rect">
             <a:avLst/>
@@ -17399,8 +17609,8 @@
         </p:nvSpPr>
         <p:spPr>
           <a:xfrm>
-            <a:off x="7110731" y="3625587"/>
-            <a:ext cx="9525" cy="1720412"/>
+            <a:off x="7040935" y="3769587"/>
+            <a:ext cx="9525" cy="1684412"/>
           </a:xfrm>
           <a:prstGeom prst="rect">
             <a:avLst/>
@@ -17443,8 +17653,8 @@
         </p:nvSpPr>
         <p:spPr>
           <a:xfrm>
-            <a:off x="7110731" y="5346000"/>
-            <a:ext cx="9525" cy="1720412"/>
+            <a:off x="7040935" y="5454000"/>
+            <a:ext cx="9525" cy="1684412"/>
           </a:xfrm>
           <a:prstGeom prst="rect">
             <a:avLst/>
@@ -17487,8 +17697,8 @@
         </p:nvSpPr>
         <p:spPr>
           <a:xfrm>
-            <a:off x="7110731" y="7066412"/>
-            <a:ext cx="9525" cy="1720412"/>
+            <a:off x="7040935" y="7138412"/>
+            <a:ext cx="9525" cy="1684412"/>
           </a:xfrm>
           <a:prstGeom prst="rect">
             <a:avLst/>
@@ -17531,8 +17741,8 @@
         </p:nvSpPr>
         <p:spPr>
           <a:xfrm>
-            <a:off x="7110731" y="8786825"/>
-            <a:ext cx="9525" cy="1720412"/>
+            <a:off x="7040935" y="8822825"/>
+            <a:ext cx="9525" cy="1684412"/>
           </a:xfrm>
           <a:prstGeom prst="rect">
             <a:avLst/>
@@ -17564,6 +17774,41 @@
           <a:lstStyle/>
           <a:p>
             <a:pPr algn="ctr"/>
+          </a:p>
+        </p:txBody>
+      </p:sp>
+      <p:sp>
+        <p:nvSpPr>
+          <p:cNvPr id="65" name="TextBox 64"/>
+          <p:cNvSpPr txBox="1"/>
+          <p:nvPr/>
+        </p:nvSpPr>
+        <p:spPr>
+          <a:xfrm>
+            <a:off x="184762" y="184762"/>
+            <a:ext cx="7190475" cy="198000"/>
+          </a:xfrm>
+          <a:prstGeom prst="rect">
+            <a:avLst/>
+          </a:prstGeom>
+          <a:noFill/>
+        </p:spPr>
+        <p:txBody>
+          <a:bodyPr wrap="none" lIns="0" rIns="0" tIns="0" bIns="0">
+            <a:spAutoFit/>
+          </a:bodyPr>
+          <a:lstStyle/>
+          <a:p>
+            <a:pPr algn="l"/>
+            <a:r>
+              <a:rPr sz="900" b="0">
+                <a:solidFill>
+                  <a:srgbClr val="555555"/>
+                </a:solidFill>
+                <a:latin typeface="Arial"/>
+              </a:rPr>
+              <a:t>Карты букв · ЛИЦО</a:t>
+            </a:r>
           </a:p>
         </p:txBody>
       </p:sp>
@@ -17593,8 +17838,8 @@
         </p:nvSpPr>
         <p:spPr>
           <a:xfrm>
-            <a:off x="4891831" y="184762"/>
-            <a:ext cx="2223662" cy="1720412"/>
+            <a:off x="4868565" y="400762"/>
+            <a:ext cx="2177131" cy="1684412"/>
           </a:xfrm>
           <a:prstGeom prst="rect">
             <a:avLst/>
@@ -17635,8 +17880,8 @@
         </p:nvSpPr>
         <p:spPr>
           <a:xfrm>
-            <a:off x="2668168" y="184762"/>
-            <a:ext cx="2223662" cy="1720412"/>
+            <a:off x="2691434" y="400762"/>
+            <a:ext cx="2177131" cy="1684412"/>
           </a:xfrm>
           <a:prstGeom prst="rect">
             <a:avLst/>
@@ -17677,8 +17922,8 @@
         </p:nvSpPr>
         <p:spPr>
           <a:xfrm>
-            <a:off x="444506" y="184762"/>
-            <a:ext cx="2223662" cy="1720412"/>
+            <a:off x="514302" y="400762"/>
+            <a:ext cx="2177131" cy="1684412"/>
           </a:xfrm>
           <a:prstGeom prst="rect">
             <a:avLst/>
@@ -17719,8 +17964,8 @@
         </p:nvSpPr>
         <p:spPr>
           <a:xfrm>
-            <a:off x="4891831" y="1905175"/>
-            <a:ext cx="2223662" cy="1720412"/>
+            <a:off x="4868565" y="2085175"/>
+            <a:ext cx="2177131" cy="1684412"/>
           </a:xfrm>
           <a:prstGeom prst="rect">
             <a:avLst/>
@@ -17761,8 +18006,8 @@
         </p:nvSpPr>
         <p:spPr>
           <a:xfrm>
-            <a:off x="2668168" y="1905175"/>
-            <a:ext cx="2223662" cy="1720412"/>
+            <a:off x="2691434" y="2085175"/>
+            <a:ext cx="2177131" cy="1684412"/>
           </a:xfrm>
           <a:prstGeom prst="rect">
             <a:avLst/>
@@ -17803,8 +18048,8 @@
         </p:nvSpPr>
         <p:spPr>
           <a:xfrm>
-            <a:off x="444506" y="1905175"/>
-            <a:ext cx="2223662" cy="1720412"/>
+            <a:off x="514302" y="2085175"/>
+            <a:ext cx="2177131" cy="1684412"/>
           </a:xfrm>
           <a:prstGeom prst="rect">
             <a:avLst/>
@@ -17845,8 +18090,8 @@
         </p:nvSpPr>
         <p:spPr>
           <a:xfrm>
-            <a:off x="4891831" y="3625587"/>
-            <a:ext cx="2223662" cy="1720412"/>
+            <a:off x="4868565" y="3769587"/>
+            <a:ext cx="2177131" cy="1684412"/>
           </a:xfrm>
           <a:prstGeom prst="rect">
             <a:avLst/>
@@ -17887,8 +18132,8 @@
         </p:nvSpPr>
         <p:spPr>
           <a:xfrm>
-            <a:off x="2668168" y="3625587"/>
-            <a:ext cx="2223662" cy="1720412"/>
+            <a:off x="2691434" y="3769587"/>
+            <a:ext cx="2177131" cy="1684412"/>
           </a:xfrm>
           <a:prstGeom prst="rect">
             <a:avLst/>
@@ -17929,8 +18174,8 @@
         </p:nvSpPr>
         <p:spPr>
           <a:xfrm>
-            <a:off x="444506" y="3625587"/>
-            <a:ext cx="2223662" cy="1720412"/>
+            <a:off x="514302" y="3769587"/>
+            <a:ext cx="2177131" cy="1684412"/>
           </a:xfrm>
           <a:prstGeom prst="rect">
             <a:avLst/>
@@ -17971,8 +18216,8 @@
         </p:nvSpPr>
         <p:spPr>
           <a:xfrm>
-            <a:off x="4891831" y="5346000"/>
-            <a:ext cx="2223662" cy="1720412"/>
+            <a:off x="4868565" y="5454000"/>
+            <a:ext cx="2177131" cy="1684412"/>
           </a:xfrm>
           <a:prstGeom prst="rect">
             <a:avLst/>
@@ -18013,8 +18258,8 @@
         </p:nvSpPr>
         <p:spPr>
           <a:xfrm>
-            <a:off x="2668168" y="5346000"/>
-            <a:ext cx="2223662" cy="1720412"/>
+            <a:off x="2691434" y="5454000"/>
+            <a:ext cx="2177131" cy="1684412"/>
           </a:xfrm>
           <a:prstGeom prst="rect">
             <a:avLst/>
@@ -18055,8 +18300,8 @@
         </p:nvSpPr>
         <p:spPr>
           <a:xfrm>
-            <a:off x="444506" y="5346000"/>
-            <a:ext cx="2223662" cy="1720412"/>
+            <a:off x="514302" y="5454000"/>
+            <a:ext cx="2177131" cy="1684412"/>
           </a:xfrm>
           <a:prstGeom prst="rect">
             <a:avLst/>
@@ -18097,8 +18342,8 @@
         </p:nvSpPr>
         <p:spPr>
           <a:xfrm>
-            <a:off x="4891831" y="7066412"/>
-            <a:ext cx="2223662" cy="1720412"/>
+            <a:off x="4868565" y="7138412"/>
+            <a:ext cx="2177131" cy="1684412"/>
           </a:xfrm>
           <a:prstGeom prst="rect">
             <a:avLst/>
@@ -18139,8 +18384,8 @@
         </p:nvSpPr>
         <p:spPr>
           <a:xfrm>
-            <a:off x="2668168" y="7066412"/>
-            <a:ext cx="2223662" cy="1720412"/>
+            <a:off x="2691434" y="7138412"/>
+            <a:ext cx="2177131" cy="1684412"/>
           </a:xfrm>
           <a:prstGeom prst="rect">
             <a:avLst/>
@@ -18181,8 +18426,8 @@
         </p:nvSpPr>
         <p:spPr>
           <a:xfrm>
-            <a:off x="444506" y="7066412"/>
-            <a:ext cx="2223662" cy="1720412"/>
+            <a:off x="514302" y="7138412"/>
+            <a:ext cx="2177131" cy="1684412"/>
           </a:xfrm>
           <a:prstGeom prst="rect">
             <a:avLst/>
@@ -18223,8 +18468,8 @@
         </p:nvSpPr>
         <p:spPr>
           <a:xfrm>
-            <a:off x="4891831" y="8786825"/>
-            <a:ext cx="2223662" cy="1720412"/>
+            <a:off x="4868565" y="8822825"/>
+            <a:ext cx="2177131" cy="1684412"/>
           </a:xfrm>
           <a:prstGeom prst="rect">
             <a:avLst/>
@@ -18265,8 +18510,8 @@
         </p:nvSpPr>
         <p:spPr>
           <a:xfrm>
-            <a:off x="2668168" y="8786825"/>
-            <a:ext cx="2223662" cy="1720412"/>
+            <a:off x="2691434" y="8822825"/>
+            <a:ext cx="2177131" cy="1684412"/>
           </a:xfrm>
           <a:prstGeom prst="rect">
             <a:avLst/>
@@ -18307,8 +18552,8 @@
         </p:nvSpPr>
         <p:spPr>
           <a:xfrm>
-            <a:off x="444506" y="8786825"/>
-            <a:ext cx="2223662" cy="1720412"/>
+            <a:off x="514302" y="8822825"/>
+            <a:ext cx="2177131" cy="1684412"/>
           </a:xfrm>
           <a:prstGeom prst="rect">
             <a:avLst/>
@@ -18338,6 +18583,41 @@
           <a:lstStyle/>
           <a:p>
             <a:pPr algn="ctr"/>
+          </a:p>
+        </p:txBody>
+      </p:sp>
+      <p:sp>
+        <p:nvSpPr>
+          <p:cNvPr id="20" name="TextBox 19"/>
+          <p:cNvSpPr txBox="1"/>
+          <p:nvPr/>
+        </p:nvSpPr>
+        <p:spPr>
+          <a:xfrm>
+            <a:off x="184762" y="184762"/>
+            <a:ext cx="7190475" cy="198000"/>
+          </a:xfrm>
+          <a:prstGeom prst="rect">
+            <a:avLst/>
+          </a:prstGeom>
+          <a:noFill/>
+        </p:spPr>
+        <p:txBody>
+          <a:bodyPr wrap="none" lIns="0" rIns="0" tIns="0" bIns="0">
+            <a:spAutoFit/>
+          </a:bodyPr>
+          <a:lstStyle/>
+          <a:p>
+            <a:pPr algn="l"/>
+            <a:r>
+              <a:rPr sz="900" b="0">
+                <a:solidFill>
+                  <a:srgbClr val="555555"/>
+                </a:solidFill>
+                <a:latin typeface="Arial"/>
+              </a:rPr>
+              <a:t>Карты букв · ОБОРОТ</a:t>
+            </a:r>
           </a:p>
         </p:txBody>
       </p:sp>

--- a/output/svet-moy-zerkalce-letters.pptx
+++ b/output/svet-moy-zerkalce-letters.pptx
@@ -3109,22 +3109,7 @@
           <a:ln>
             <a:noFill/>
           </a:ln>
-          <a:effectLst/>
-        </p:spPr>
-        <p:style>
-          <a:lnRef idx="1">
-            <a:schemeClr val="accent1"/>
-          </a:lnRef>
-          <a:fillRef idx="3">
-            <a:schemeClr val="accent1"/>
-          </a:fillRef>
-          <a:effectRef idx="2">
-            <a:schemeClr val="accent1"/>
-          </a:effectRef>
-          <a:fontRef idx="minor">
-            <a:schemeClr val="lt1"/>
-          </a:fontRef>
-        </p:style>
+        </p:spPr>
         <p:txBody>
           <a:bodyPr rtlCol="0" anchor="ctr" wrap="none" lIns="57292" rIns="57292" tIns="38195" bIns="38195"/>
           <a:lstStyle/>
@@ -3167,22 +3152,7 @@
           <a:ln>
             <a:noFill/>
           </a:ln>
-          <a:effectLst/>
-        </p:spPr>
-        <p:style>
-          <a:lnRef idx="1">
-            <a:schemeClr val="accent1"/>
-          </a:lnRef>
-          <a:fillRef idx="3">
-            <a:schemeClr val="accent1"/>
-          </a:fillRef>
-          <a:effectRef idx="2">
-            <a:schemeClr val="accent1"/>
-          </a:effectRef>
-          <a:fontRef idx="minor">
-            <a:schemeClr val="lt1"/>
-          </a:fontRef>
-        </p:style>
+        </p:spPr>
         <p:txBody>
           <a:bodyPr rtlCol="0" anchor="ctr" wrap="none" lIns="57292" rIns="57292" tIns="38195" bIns="38195"/>
           <a:lstStyle/>
@@ -3225,22 +3195,7 @@
           <a:ln>
             <a:noFill/>
           </a:ln>
-          <a:effectLst/>
-        </p:spPr>
-        <p:style>
-          <a:lnRef idx="1">
-            <a:schemeClr val="accent1"/>
-          </a:lnRef>
-          <a:fillRef idx="3">
-            <a:schemeClr val="accent1"/>
-          </a:fillRef>
-          <a:effectRef idx="2">
-            <a:schemeClr val="accent1"/>
-          </a:effectRef>
-          <a:fontRef idx="minor">
-            <a:schemeClr val="lt1"/>
-          </a:fontRef>
-        </p:style>
+        </p:spPr>
         <p:txBody>
           <a:bodyPr rtlCol="0" anchor="ctr" wrap="none" lIns="57292" rIns="57292" tIns="38195" bIns="38195"/>
           <a:lstStyle/>
@@ -3283,22 +3238,7 @@
           <a:ln>
             <a:noFill/>
           </a:ln>
-          <a:effectLst/>
-        </p:spPr>
-        <p:style>
-          <a:lnRef idx="1">
-            <a:schemeClr val="accent1"/>
-          </a:lnRef>
-          <a:fillRef idx="3">
-            <a:schemeClr val="accent1"/>
-          </a:fillRef>
-          <a:effectRef idx="2">
-            <a:schemeClr val="accent1"/>
-          </a:effectRef>
-          <a:fontRef idx="minor">
-            <a:schemeClr val="lt1"/>
-          </a:fontRef>
-        </p:style>
+        </p:spPr>
         <p:txBody>
           <a:bodyPr rtlCol="0" anchor="ctr" wrap="none" lIns="57292" rIns="57292" tIns="38195" bIns="38195"/>
           <a:lstStyle/>
@@ -3341,22 +3281,7 @@
           <a:ln>
             <a:noFill/>
           </a:ln>
-          <a:effectLst/>
-        </p:spPr>
-        <p:style>
-          <a:lnRef idx="1">
-            <a:schemeClr val="accent1"/>
-          </a:lnRef>
-          <a:fillRef idx="3">
-            <a:schemeClr val="accent1"/>
-          </a:fillRef>
-          <a:effectRef idx="2">
-            <a:schemeClr val="accent1"/>
-          </a:effectRef>
-          <a:fontRef idx="minor">
-            <a:schemeClr val="lt1"/>
-          </a:fontRef>
-        </p:style>
+        </p:spPr>
         <p:txBody>
           <a:bodyPr rtlCol="0" anchor="ctr" wrap="none" lIns="57292" rIns="57292" tIns="38195" bIns="38195"/>
           <a:lstStyle/>
@@ -3399,22 +3324,7 @@
           <a:ln>
             <a:noFill/>
           </a:ln>
-          <a:effectLst/>
-        </p:spPr>
-        <p:style>
-          <a:lnRef idx="1">
-            <a:schemeClr val="accent1"/>
-          </a:lnRef>
-          <a:fillRef idx="3">
-            <a:schemeClr val="accent1"/>
-          </a:fillRef>
-          <a:effectRef idx="2">
-            <a:schemeClr val="accent1"/>
-          </a:effectRef>
-          <a:fontRef idx="minor">
-            <a:schemeClr val="lt1"/>
-          </a:fontRef>
-        </p:style>
+        </p:spPr>
         <p:txBody>
           <a:bodyPr rtlCol="0" anchor="ctr" wrap="none" lIns="57292" rIns="57292" tIns="38195" bIns="38195"/>
           <a:lstStyle/>
@@ -3457,22 +3367,7 @@
           <a:ln>
             <a:noFill/>
           </a:ln>
-          <a:effectLst/>
-        </p:spPr>
-        <p:style>
-          <a:lnRef idx="1">
-            <a:schemeClr val="accent1"/>
-          </a:lnRef>
-          <a:fillRef idx="3">
-            <a:schemeClr val="accent1"/>
-          </a:fillRef>
-          <a:effectRef idx="2">
-            <a:schemeClr val="accent1"/>
-          </a:effectRef>
-          <a:fontRef idx="minor">
-            <a:schemeClr val="lt1"/>
-          </a:fontRef>
-        </p:style>
+        </p:spPr>
         <p:txBody>
           <a:bodyPr rtlCol="0" anchor="ctr" wrap="none" lIns="57292" rIns="57292" tIns="38195" bIns="38195"/>
           <a:lstStyle/>
@@ -3515,22 +3410,7 @@
           <a:ln>
             <a:noFill/>
           </a:ln>
-          <a:effectLst/>
-        </p:spPr>
-        <p:style>
-          <a:lnRef idx="1">
-            <a:schemeClr val="accent1"/>
-          </a:lnRef>
-          <a:fillRef idx="3">
-            <a:schemeClr val="accent1"/>
-          </a:fillRef>
-          <a:effectRef idx="2">
-            <a:schemeClr val="accent1"/>
-          </a:effectRef>
-          <a:fontRef idx="minor">
-            <a:schemeClr val="lt1"/>
-          </a:fontRef>
-        </p:style>
+        </p:spPr>
         <p:txBody>
           <a:bodyPr rtlCol="0" anchor="ctr" wrap="none" lIns="57292" rIns="57292" tIns="38195" bIns="38195"/>
           <a:lstStyle/>
@@ -3573,22 +3453,7 @@
           <a:ln>
             <a:noFill/>
           </a:ln>
-          <a:effectLst/>
-        </p:spPr>
-        <p:style>
-          <a:lnRef idx="1">
-            <a:schemeClr val="accent1"/>
-          </a:lnRef>
-          <a:fillRef idx="3">
-            <a:schemeClr val="accent1"/>
-          </a:fillRef>
-          <a:effectRef idx="2">
-            <a:schemeClr val="accent1"/>
-          </a:effectRef>
-          <a:fontRef idx="minor">
-            <a:schemeClr val="lt1"/>
-          </a:fontRef>
-        </p:style>
+        </p:spPr>
         <p:txBody>
           <a:bodyPr rtlCol="0" anchor="ctr" wrap="none" lIns="57292" rIns="57292" tIns="38195" bIns="38195"/>
           <a:lstStyle/>
@@ -3631,22 +3496,7 @@
           <a:ln>
             <a:noFill/>
           </a:ln>
-          <a:effectLst/>
-        </p:spPr>
-        <p:style>
-          <a:lnRef idx="1">
-            <a:schemeClr val="accent1"/>
-          </a:lnRef>
-          <a:fillRef idx="3">
-            <a:schemeClr val="accent1"/>
-          </a:fillRef>
-          <a:effectRef idx="2">
-            <a:schemeClr val="accent1"/>
-          </a:effectRef>
-          <a:fontRef idx="minor">
-            <a:schemeClr val="lt1"/>
-          </a:fontRef>
-        </p:style>
+        </p:spPr>
         <p:txBody>
           <a:bodyPr rtlCol="0" anchor="ctr" wrap="none" lIns="57292" rIns="57292" tIns="38195" bIns="38195"/>
           <a:lstStyle/>
@@ -3689,22 +3539,7 @@
           <a:ln>
             <a:noFill/>
           </a:ln>
-          <a:effectLst/>
-        </p:spPr>
-        <p:style>
-          <a:lnRef idx="1">
-            <a:schemeClr val="accent1"/>
-          </a:lnRef>
-          <a:fillRef idx="3">
-            <a:schemeClr val="accent1"/>
-          </a:fillRef>
-          <a:effectRef idx="2">
-            <a:schemeClr val="accent1"/>
-          </a:effectRef>
-          <a:fontRef idx="minor">
-            <a:schemeClr val="lt1"/>
-          </a:fontRef>
-        </p:style>
+        </p:spPr>
         <p:txBody>
           <a:bodyPr rtlCol="0" anchor="ctr" wrap="none" lIns="57292" rIns="57292" tIns="38195" bIns="38195"/>
           <a:lstStyle/>
@@ -3747,22 +3582,7 @@
           <a:ln>
             <a:noFill/>
           </a:ln>
-          <a:effectLst/>
-        </p:spPr>
-        <p:style>
-          <a:lnRef idx="1">
-            <a:schemeClr val="accent1"/>
-          </a:lnRef>
-          <a:fillRef idx="3">
-            <a:schemeClr val="accent1"/>
-          </a:fillRef>
-          <a:effectRef idx="2">
-            <a:schemeClr val="accent1"/>
-          </a:effectRef>
-          <a:fontRef idx="minor">
-            <a:schemeClr val="lt1"/>
-          </a:fontRef>
-        </p:style>
+        </p:spPr>
         <p:txBody>
           <a:bodyPr rtlCol="0" anchor="ctr" wrap="none" lIns="57292" rIns="57292" tIns="38195" bIns="38195"/>
           <a:lstStyle/>
@@ -3805,22 +3625,7 @@
           <a:ln>
             <a:noFill/>
           </a:ln>
-          <a:effectLst/>
-        </p:spPr>
-        <p:style>
-          <a:lnRef idx="1">
-            <a:schemeClr val="accent1"/>
-          </a:lnRef>
-          <a:fillRef idx="3">
-            <a:schemeClr val="accent1"/>
-          </a:fillRef>
-          <a:effectRef idx="2">
-            <a:schemeClr val="accent1"/>
-          </a:effectRef>
-          <a:fontRef idx="minor">
-            <a:schemeClr val="lt1"/>
-          </a:fontRef>
-        </p:style>
+        </p:spPr>
         <p:txBody>
           <a:bodyPr rtlCol="0" anchor="ctr" wrap="none" lIns="57292" rIns="57292" tIns="38195" bIns="38195"/>
           <a:lstStyle/>
@@ -3863,22 +3668,7 @@
           <a:ln>
             <a:noFill/>
           </a:ln>
-          <a:effectLst/>
-        </p:spPr>
-        <p:style>
-          <a:lnRef idx="1">
-            <a:schemeClr val="accent1"/>
-          </a:lnRef>
-          <a:fillRef idx="3">
-            <a:schemeClr val="accent1"/>
-          </a:fillRef>
-          <a:effectRef idx="2">
-            <a:schemeClr val="accent1"/>
-          </a:effectRef>
-          <a:fontRef idx="minor">
-            <a:schemeClr val="lt1"/>
-          </a:fontRef>
-        </p:style>
+        </p:spPr>
         <p:txBody>
           <a:bodyPr rtlCol="0" anchor="ctr" wrap="none" lIns="57292" rIns="57292" tIns="38195" bIns="38195"/>
           <a:lstStyle/>
@@ -3921,22 +3711,7 @@
           <a:ln>
             <a:noFill/>
           </a:ln>
-          <a:effectLst/>
-        </p:spPr>
-        <p:style>
-          <a:lnRef idx="1">
-            <a:schemeClr val="accent1"/>
-          </a:lnRef>
-          <a:fillRef idx="3">
-            <a:schemeClr val="accent1"/>
-          </a:fillRef>
-          <a:effectRef idx="2">
-            <a:schemeClr val="accent1"/>
-          </a:effectRef>
-          <a:fontRef idx="minor">
-            <a:schemeClr val="lt1"/>
-          </a:fontRef>
-        </p:style>
+        </p:spPr>
         <p:txBody>
           <a:bodyPr rtlCol="0" anchor="ctr" wrap="none" lIns="57292" rIns="57292" tIns="38195" bIns="38195"/>
           <a:lstStyle/>
@@ -3979,22 +3754,7 @@
           <a:ln>
             <a:noFill/>
           </a:ln>
-          <a:effectLst/>
-        </p:spPr>
-        <p:style>
-          <a:lnRef idx="1">
-            <a:schemeClr val="accent1"/>
-          </a:lnRef>
-          <a:fillRef idx="3">
-            <a:schemeClr val="accent1"/>
-          </a:fillRef>
-          <a:effectRef idx="2">
-            <a:schemeClr val="accent1"/>
-          </a:effectRef>
-          <a:fontRef idx="minor">
-            <a:schemeClr val="lt1"/>
-          </a:fontRef>
-        </p:style>
+        </p:spPr>
         <p:txBody>
           <a:bodyPr rtlCol="0" anchor="ctr" wrap="none" lIns="57292" rIns="57292" tIns="38195" bIns="38195"/>
           <a:lstStyle/>
@@ -4037,22 +3797,7 @@
           <a:ln>
             <a:noFill/>
           </a:ln>
-          <a:effectLst/>
-        </p:spPr>
-        <p:style>
-          <a:lnRef idx="1">
-            <a:schemeClr val="accent1"/>
-          </a:lnRef>
-          <a:fillRef idx="3">
-            <a:schemeClr val="accent1"/>
-          </a:fillRef>
-          <a:effectRef idx="2">
-            <a:schemeClr val="accent1"/>
-          </a:effectRef>
-          <a:fontRef idx="minor">
-            <a:schemeClr val="lt1"/>
-          </a:fontRef>
-        </p:style>
+        </p:spPr>
         <p:txBody>
           <a:bodyPr rtlCol="0" anchor="ctr" wrap="none" lIns="57292" rIns="57292" tIns="38195" bIns="38195"/>
           <a:lstStyle/>
@@ -4095,22 +3840,7 @@
           <a:ln>
             <a:noFill/>
           </a:ln>
-          <a:effectLst/>
-        </p:spPr>
-        <p:style>
-          <a:lnRef idx="1">
-            <a:schemeClr val="accent1"/>
-          </a:lnRef>
-          <a:fillRef idx="3">
-            <a:schemeClr val="accent1"/>
-          </a:fillRef>
-          <a:effectRef idx="2">
-            <a:schemeClr val="accent1"/>
-          </a:effectRef>
-          <a:fontRef idx="minor">
-            <a:schemeClr val="lt1"/>
-          </a:fontRef>
-        </p:style>
+        </p:spPr>
         <p:txBody>
           <a:bodyPr rtlCol="0" anchor="ctr" wrap="none" lIns="57292" rIns="57292" tIns="38195" bIns="38195"/>
           <a:lstStyle/>
@@ -4155,22 +3885,7 @@
           <a:ln>
             <a:noFill/>
           </a:ln>
-          <a:effectLst/>
-        </p:spPr>
-        <p:style>
-          <a:lnRef idx="1">
-            <a:schemeClr val="accent1"/>
-          </a:lnRef>
-          <a:fillRef idx="3">
-            <a:schemeClr val="accent1"/>
-          </a:fillRef>
-          <a:effectRef idx="2">
-            <a:schemeClr val="accent1"/>
-          </a:effectRef>
-          <a:fontRef idx="minor">
-            <a:schemeClr val="lt1"/>
-          </a:fontRef>
-        </p:style>
+        </p:spPr>
         <p:txBody>
           <a:bodyPr rtlCol="0" anchor="ctr"/>
           <a:lstStyle/>
@@ -4199,22 +3914,7 @@
           <a:ln>
             <a:noFill/>
           </a:ln>
-          <a:effectLst/>
-        </p:spPr>
-        <p:style>
-          <a:lnRef idx="1">
-            <a:schemeClr val="accent1"/>
-          </a:lnRef>
-          <a:fillRef idx="3">
-            <a:schemeClr val="accent1"/>
-          </a:fillRef>
-          <a:effectRef idx="2">
-            <a:schemeClr val="accent1"/>
-          </a:effectRef>
-          <a:fontRef idx="minor">
-            <a:schemeClr val="lt1"/>
-          </a:fontRef>
-        </p:style>
+        </p:spPr>
         <p:txBody>
           <a:bodyPr rtlCol="0" anchor="ctr"/>
           <a:lstStyle/>
@@ -4243,22 +3943,7 @@
           <a:ln>
             <a:noFill/>
           </a:ln>
-          <a:effectLst/>
-        </p:spPr>
-        <p:style>
-          <a:lnRef idx="1">
-            <a:schemeClr val="accent1"/>
-          </a:lnRef>
-          <a:fillRef idx="3">
-            <a:schemeClr val="accent1"/>
-          </a:fillRef>
-          <a:effectRef idx="2">
-            <a:schemeClr val="accent1"/>
-          </a:effectRef>
-          <a:fontRef idx="minor">
-            <a:schemeClr val="lt1"/>
-          </a:fontRef>
-        </p:style>
+        </p:spPr>
         <p:txBody>
           <a:bodyPr rtlCol="0" anchor="ctr"/>
           <a:lstStyle/>
@@ -4287,22 +3972,7 @@
           <a:ln>
             <a:noFill/>
           </a:ln>
-          <a:effectLst/>
-        </p:spPr>
-        <p:style>
-          <a:lnRef idx="1">
-            <a:schemeClr val="accent1"/>
-          </a:lnRef>
-          <a:fillRef idx="3">
-            <a:schemeClr val="accent1"/>
-          </a:fillRef>
-          <a:effectRef idx="2">
-            <a:schemeClr val="accent1"/>
-          </a:effectRef>
-          <a:fontRef idx="minor">
-            <a:schemeClr val="lt1"/>
-          </a:fontRef>
-        </p:style>
+        </p:spPr>
         <p:txBody>
           <a:bodyPr rtlCol="0" anchor="ctr"/>
           <a:lstStyle/>
@@ -4331,22 +4001,7 @@
           <a:ln>
             <a:noFill/>
           </a:ln>
-          <a:effectLst/>
-        </p:spPr>
-        <p:style>
-          <a:lnRef idx="1">
-            <a:schemeClr val="accent1"/>
-          </a:lnRef>
-          <a:fillRef idx="3">
-            <a:schemeClr val="accent1"/>
-          </a:fillRef>
-          <a:effectRef idx="2">
-            <a:schemeClr val="accent1"/>
-          </a:effectRef>
-          <a:fontRef idx="minor">
-            <a:schemeClr val="lt1"/>
-          </a:fontRef>
-        </p:style>
+        </p:spPr>
         <p:txBody>
           <a:bodyPr rtlCol="0" anchor="ctr"/>
           <a:lstStyle/>
@@ -4375,22 +4030,7 @@
           <a:ln>
             <a:noFill/>
           </a:ln>
-          <a:effectLst/>
-        </p:spPr>
-        <p:style>
-          <a:lnRef idx="1">
-            <a:schemeClr val="accent1"/>
-          </a:lnRef>
-          <a:fillRef idx="3">
-            <a:schemeClr val="accent1"/>
-          </a:fillRef>
-          <a:effectRef idx="2">
-            <a:schemeClr val="accent1"/>
-          </a:effectRef>
-          <a:fontRef idx="minor">
-            <a:schemeClr val="lt1"/>
-          </a:fontRef>
-        </p:style>
+        </p:spPr>
         <p:txBody>
           <a:bodyPr rtlCol="0" anchor="ctr"/>
           <a:lstStyle/>
@@ -4419,22 +4059,7 @@
           <a:ln>
             <a:noFill/>
           </a:ln>
-          <a:effectLst/>
-        </p:spPr>
-        <p:style>
-          <a:lnRef idx="1">
-            <a:schemeClr val="accent1"/>
-          </a:lnRef>
-          <a:fillRef idx="3">
-            <a:schemeClr val="accent1"/>
-          </a:fillRef>
-          <a:effectRef idx="2">
-            <a:schemeClr val="accent1"/>
-          </a:effectRef>
-          <a:fontRef idx="minor">
-            <a:schemeClr val="lt1"/>
-          </a:fontRef>
-        </p:style>
+        </p:spPr>
         <p:txBody>
           <a:bodyPr rtlCol="0" anchor="ctr"/>
           <a:lstStyle/>
@@ -4463,22 +4088,7 @@
           <a:ln>
             <a:noFill/>
           </a:ln>
-          <a:effectLst/>
-        </p:spPr>
-        <p:style>
-          <a:lnRef idx="1">
-            <a:schemeClr val="accent1"/>
-          </a:lnRef>
-          <a:fillRef idx="3">
-            <a:schemeClr val="accent1"/>
-          </a:fillRef>
-          <a:effectRef idx="2">
-            <a:schemeClr val="accent1"/>
-          </a:effectRef>
-          <a:fontRef idx="minor">
-            <a:schemeClr val="lt1"/>
-          </a:fontRef>
-        </p:style>
+        </p:spPr>
         <p:txBody>
           <a:bodyPr rtlCol="0" anchor="ctr"/>
           <a:lstStyle/>
@@ -4507,22 +4117,7 @@
           <a:ln>
             <a:noFill/>
           </a:ln>
-          <a:effectLst/>
-        </p:spPr>
-        <p:style>
-          <a:lnRef idx="1">
-            <a:schemeClr val="accent1"/>
-          </a:lnRef>
-          <a:fillRef idx="3">
-            <a:schemeClr val="accent1"/>
-          </a:fillRef>
-          <a:effectRef idx="2">
-            <a:schemeClr val="accent1"/>
-          </a:effectRef>
-          <a:fontRef idx="minor">
-            <a:schemeClr val="lt1"/>
-          </a:fontRef>
-        </p:style>
+        </p:spPr>
         <p:txBody>
           <a:bodyPr rtlCol="0" anchor="ctr"/>
           <a:lstStyle/>
@@ -4551,22 +4146,7 @@
           <a:ln>
             <a:noFill/>
           </a:ln>
-          <a:effectLst/>
-        </p:spPr>
-        <p:style>
-          <a:lnRef idx="1">
-            <a:schemeClr val="accent1"/>
-          </a:lnRef>
-          <a:fillRef idx="3">
-            <a:schemeClr val="accent1"/>
-          </a:fillRef>
-          <a:effectRef idx="2">
-            <a:schemeClr val="accent1"/>
-          </a:effectRef>
-          <a:fontRef idx="minor">
-            <a:schemeClr val="lt1"/>
-          </a:fontRef>
-        </p:style>
+        </p:spPr>
         <p:txBody>
           <a:bodyPr rtlCol="0" anchor="ctr"/>
           <a:lstStyle/>
@@ -4595,22 +4175,7 @@
           <a:ln>
             <a:noFill/>
           </a:ln>
-          <a:effectLst/>
-        </p:spPr>
-        <p:style>
-          <a:lnRef idx="1">
-            <a:schemeClr val="accent1"/>
-          </a:lnRef>
-          <a:fillRef idx="3">
-            <a:schemeClr val="accent1"/>
-          </a:fillRef>
-          <a:effectRef idx="2">
-            <a:schemeClr val="accent1"/>
-          </a:effectRef>
-          <a:fontRef idx="minor">
-            <a:schemeClr val="lt1"/>
-          </a:fontRef>
-        </p:style>
+        </p:spPr>
         <p:txBody>
           <a:bodyPr rtlCol="0" anchor="ctr"/>
           <a:lstStyle/>
@@ -4639,22 +4204,7 @@
           <a:ln>
             <a:noFill/>
           </a:ln>
-          <a:effectLst/>
-        </p:spPr>
-        <p:style>
-          <a:lnRef idx="1">
-            <a:schemeClr val="accent1"/>
-          </a:lnRef>
-          <a:fillRef idx="3">
-            <a:schemeClr val="accent1"/>
-          </a:fillRef>
-          <a:effectRef idx="2">
-            <a:schemeClr val="accent1"/>
-          </a:effectRef>
-          <a:fontRef idx="minor">
-            <a:schemeClr val="lt1"/>
-          </a:fontRef>
-        </p:style>
+        </p:spPr>
         <p:txBody>
           <a:bodyPr rtlCol="0" anchor="ctr"/>
           <a:lstStyle/>
@@ -4683,22 +4233,7 @@
           <a:ln>
             <a:noFill/>
           </a:ln>
-          <a:effectLst/>
-        </p:spPr>
-        <p:style>
-          <a:lnRef idx="1">
-            <a:schemeClr val="accent1"/>
-          </a:lnRef>
-          <a:fillRef idx="3">
-            <a:schemeClr val="accent1"/>
-          </a:fillRef>
-          <a:effectRef idx="2">
-            <a:schemeClr val="accent1"/>
-          </a:effectRef>
-          <a:fontRef idx="minor">
-            <a:schemeClr val="lt1"/>
-          </a:fontRef>
-        </p:style>
+        </p:spPr>
         <p:txBody>
           <a:bodyPr rtlCol="0" anchor="ctr"/>
           <a:lstStyle/>
@@ -4727,22 +4262,7 @@
           <a:ln>
             <a:noFill/>
           </a:ln>
-          <a:effectLst/>
-        </p:spPr>
-        <p:style>
-          <a:lnRef idx="1">
-            <a:schemeClr val="accent1"/>
-          </a:lnRef>
-          <a:fillRef idx="3">
-            <a:schemeClr val="accent1"/>
-          </a:fillRef>
-          <a:effectRef idx="2">
-            <a:schemeClr val="accent1"/>
-          </a:effectRef>
-          <a:fontRef idx="minor">
-            <a:schemeClr val="lt1"/>
-          </a:fontRef>
-        </p:style>
+        </p:spPr>
         <p:txBody>
           <a:bodyPr rtlCol="0" anchor="ctr"/>
           <a:lstStyle/>
@@ -4771,22 +4291,7 @@
           <a:ln>
             <a:noFill/>
           </a:ln>
-          <a:effectLst/>
-        </p:spPr>
-        <p:style>
-          <a:lnRef idx="1">
-            <a:schemeClr val="accent1"/>
-          </a:lnRef>
-          <a:fillRef idx="3">
-            <a:schemeClr val="accent1"/>
-          </a:fillRef>
-          <a:effectRef idx="2">
-            <a:schemeClr val="accent1"/>
-          </a:effectRef>
-          <a:fontRef idx="minor">
-            <a:schemeClr val="lt1"/>
-          </a:fontRef>
-        </p:style>
+        </p:spPr>
         <p:txBody>
           <a:bodyPr rtlCol="0" anchor="ctr"/>
           <a:lstStyle/>
@@ -4815,22 +4320,7 @@
           <a:ln>
             <a:noFill/>
           </a:ln>
-          <a:effectLst/>
-        </p:spPr>
-        <p:style>
-          <a:lnRef idx="1">
-            <a:schemeClr val="accent1"/>
-          </a:lnRef>
-          <a:fillRef idx="3">
-            <a:schemeClr val="accent1"/>
-          </a:fillRef>
-          <a:effectRef idx="2">
-            <a:schemeClr val="accent1"/>
-          </a:effectRef>
-          <a:fontRef idx="minor">
-            <a:schemeClr val="lt1"/>
-          </a:fontRef>
-        </p:style>
+        </p:spPr>
         <p:txBody>
           <a:bodyPr rtlCol="0" anchor="ctr"/>
           <a:lstStyle/>
@@ -4859,22 +4349,7 @@
           <a:ln>
             <a:noFill/>
           </a:ln>
-          <a:effectLst/>
-        </p:spPr>
-        <p:style>
-          <a:lnRef idx="1">
-            <a:schemeClr val="accent1"/>
-          </a:lnRef>
-          <a:fillRef idx="3">
-            <a:schemeClr val="accent1"/>
-          </a:fillRef>
-          <a:effectRef idx="2">
-            <a:schemeClr val="accent1"/>
-          </a:effectRef>
-          <a:fontRef idx="minor">
-            <a:schemeClr val="lt1"/>
-          </a:fontRef>
-        </p:style>
+        </p:spPr>
         <p:txBody>
           <a:bodyPr rtlCol="0" anchor="ctr"/>
           <a:lstStyle/>
@@ -4903,22 +4378,7 @@
           <a:ln>
             <a:noFill/>
           </a:ln>
-          <a:effectLst/>
-        </p:spPr>
-        <p:style>
-          <a:lnRef idx="1">
-            <a:schemeClr val="accent1"/>
-          </a:lnRef>
-          <a:fillRef idx="3">
-            <a:schemeClr val="accent1"/>
-          </a:fillRef>
-          <a:effectRef idx="2">
-            <a:schemeClr val="accent1"/>
-          </a:effectRef>
-          <a:fontRef idx="minor">
-            <a:schemeClr val="lt1"/>
-          </a:fontRef>
-        </p:style>
+        </p:spPr>
         <p:txBody>
           <a:bodyPr rtlCol="0" anchor="ctr"/>
           <a:lstStyle/>
@@ -4947,22 +4407,7 @@
           <a:ln>
             <a:noFill/>
           </a:ln>
-          <a:effectLst/>
-        </p:spPr>
-        <p:style>
-          <a:lnRef idx="1">
-            <a:schemeClr val="accent1"/>
-          </a:lnRef>
-          <a:fillRef idx="3">
-            <a:schemeClr val="accent1"/>
-          </a:fillRef>
-          <a:effectRef idx="2">
-            <a:schemeClr val="accent1"/>
-          </a:effectRef>
-          <a:fontRef idx="minor">
-            <a:schemeClr val="lt1"/>
-          </a:fontRef>
-        </p:style>
+        </p:spPr>
         <p:txBody>
           <a:bodyPr rtlCol="0" anchor="ctr"/>
           <a:lstStyle/>
@@ -4991,22 +4436,7 @@
           <a:ln>
             <a:noFill/>
           </a:ln>
-          <a:effectLst/>
-        </p:spPr>
-        <p:style>
-          <a:lnRef idx="1">
-            <a:schemeClr val="accent1"/>
-          </a:lnRef>
-          <a:fillRef idx="3">
-            <a:schemeClr val="accent1"/>
-          </a:fillRef>
-          <a:effectRef idx="2">
-            <a:schemeClr val="accent1"/>
-          </a:effectRef>
-          <a:fontRef idx="minor">
-            <a:schemeClr val="lt1"/>
-          </a:fontRef>
-        </p:style>
+        </p:spPr>
         <p:txBody>
           <a:bodyPr rtlCol="0" anchor="ctr"/>
           <a:lstStyle/>
@@ -5035,22 +4465,7 @@
           <a:ln>
             <a:noFill/>
           </a:ln>
-          <a:effectLst/>
-        </p:spPr>
-        <p:style>
-          <a:lnRef idx="1">
-            <a:schemeClr val="accent1"/>
-          </a:lnRef>
-          <a:fillRef idx="3">
-            <a:schemeClr val="accent1"/>
-          </a:fillRef>
-          <a:effectRef idx="2">
-            <a:schemeClr val="accent1"/>
-          </a:effectRef>
-          <a:fontRef idx="minor">
-            <a:schemeClr val="lt1"/>
-          </a:fontRef>
-        </p:style>
+        </p:spPr>
         <p:txBody>
           <a:bodyPr rtlCol="0" anchor="ctr"/>
           <a:lstStyle/>
@@ -5079,22 +4494,7 @@
           <a:ln>
             <a:noFill/>
           </a:ln>
-          <a:effectLst/>
-        </p:spPr>
-        <p:style>
-          <a:lnRef idx="1">
-            <a:schemeClr val="accent1"/>
-          </a:lnRef>
-          <a:fillRef idx="3">
-            <a:schemeClr val="accent1"/>
-          </a:fillRef>
-          <a:effectRef idx="2">
-            <a:schemeClr val="accent1"/>
-          </a:effectRef>
-          <a:fontRef idx="minor">
-            <a:schemeClr val="lt1"/>
-          </a:fontRef>
-        </p:style>
+        </p:spPr>
         <p:txBody>
           <a:bodyPr rtlCol="0" anchor="ctr"/>
           <a:lstStyle/>
@@ -5123,22 +4523,7 @@
           <a:ln>
             <a:noFill/>
           </a:ln>
-          <a:effectLst/>
-        </p:spPr>
-        <p:style>
-          <a:lnRef idx="1">
-            <a:schemeClr val="accent1"/>
-          </a:lnRef>
-          <a:fillRef idx="3">
-            <a:schemeClr val="accent1"/>
-          </a:fillRef>
-          <a:effectRef idx="2">
-            <a:schemeClr val="accent1"/>
-          </a:effectRef>
-          <a:fontRef idx="minor">
-            <a:schemeClr val="lt1"/>
-          </a:fontRef>
-        </p:style>
+        </p:spPr>
         <p:txBody>
           <a:bodyPr rtlCol="0" anchor="ctr"/>
           <a:lstStyle/>
@@ -5167,22 +4552,7 @@
           <a:ln>
             <a:noFill/>
           </a:ln>
-          <a:effectLst/>
-        </p:spPr>
-        <p:style>
-          <a:lnRef idx="1">
-            <a:schemeClr val="accent1"/>
-          </a:lnRef>
-          <a:fillRef idx="3">
-            <a:schemeClr val="accent1"/>
-          </a:fillRef>
-          <a:effectRef idx="2">
-            <a:schemeClr val="accent1"/>
-          </a:effectRef>
-          <a:fontRef idx="minor">
-            <a:schemeClr val="lt1"/>
-          </a:fontRef>
-        </p:style>
+        </p:spPr>
         <p:txBody>
           <a:bodyPr rtlCol="0" anchor="ctr"/>
           <a:lstStyle/>
@@ -5211,22 +4581,7 @@
           <a:ln>
             <a:noFill/>
           </a:ln>
-          <a:effectLst/>
-        </p:spPr>
-        <p:style>
-          <a:lnRef idx="1">
-            <a:schemeClr val="accent1"/>
-          </a:lnRef>
-          <a:fillRef idx="3">
-            <a:schemeClr val="accent1"/>
-          </a:fillRef>
-          <a:effectRef idx="2">
-            <a:schemeClr val="accent1"/>
-          </a:effectRef>
-          <a:fontRef idx="minor">
-            <a:schemeClr val="lt1"/>
-          </a:fontRef>
-        </p:style>
+        </p:spPr>
         <p:txBody>
           <a:bodyPr rtlCol="0" anchor="ctr"/>
           <a:lstStyle/>
@@ -5255,22 +4610,7 @@
           <a:ln>
             <a:noFill/>
           </a:ln>
-          <a:effectLst/>
-        </p:spPr>
-        <p:style>
-          <a:lnRef idx="1">
-            <a:schemeClr val="accent1"/>
-          </a:lnRef>
-          <a:fillRef idx="3">
-            <a:schemeClr val="accent1"/>
-          </a:fillRef>
-          <a:effectRef idx="2">
-            <a:schemeClr val="accent1"/>
-          </a:effectRef>
-          <a:fontRef idx="minor">
-            <a:schemeClr val="lt1"/>
-          </a:fontRef>
-        </p:style>
+        </p:spPr>
         <p:txBody>
           <a:bodyPr rtlCol="0" anchor="ctr"/>
           <a:lstStyle/>
@@ -5299,22 +4639,7 @@
           <a:ln>
             <a:noFill/>
           </a:ln>
-          <a:effectLst/>
-        </p:spPr>
-        <p:style>
-          <a:lnRef idx="1">
-            <a:schemeClr val="accent1"/>
-          </a:lnRef>
-          <a:fillRef idx="3">
-            <a:schemeClr val="accent1"/>
-          </a:fillRef>
-          <a:effectRef idx="2">
-            <a:schemeClr val="accent1"/>
-          </a:effectRef>
-          <a:fontRef idx="minor">
-            <a:schemeClr val="lt1"/>
-          </a:fontRef>
-        </p:style>
+        </p:spPr>
         <p:txBody>
           <a:bodyPr rtlCol="0" anchor="ctr"/>
           <a:lstStyle/>
@@ -5343,22 +4668,7 @@
           <a:ln>
             <a:noFill/>
           </a:ln>
-          <a:effectLst/>
-        </p:spPr>
-        <p:style>
-          <a:lnRef idx="1">
-            <a:schemeClr val="accent1"/>
-          </a:lnRef>
-          <a:fillRef idx="3">
-            <a:schemeClr val="accent1"/>
-          </a:fillRef>
-          <a:effectRef idx="2">
-            <a:schemeClr val="accent1"/>
-          </a:effectRef>
-          <a:fontRef idx="minor">
-            <a:schemeClr val="lt1"/>
-          </a:fontRef>
-        </p:style>
+        </p:spPr>
         <p:txBody>
           <a:bodyPr rtlCol="0" anchor="ctr"/>
           <a:lstStyle/>
@@ -5387,22 +4697,7 @@
           <a:ln>
             <a:noFill/>
           </a:ln>
-          <a:effectLst/>
-        </p:spPr>
-        <p:style>
-          <a:lnRef idx="1">
-            <a:schemeClr val="accent1"/>
-          </a:lnRef>
-          <a:fillRef idx="3">
-            <a:schemeClr val="accent1"/>
-          </a:fillRef>
-          <a:effectRef idx="2">
-            <a:schemeClr val="accent1"/>
-          </a:effectRef>
-          <a:fontRef idx="minor">
-            <a:schemeClr val="lt1"/>
-          </a:fontRef>
-        </p:style>
+        </p:spPr>
         <p:txBody>
           <a:bodyPr rtlCol="0" anchor="ctr"/>
           <a:lstStyle/>
@@ -5431,22 +4726,7 @@
           <a:ln>
             <a:noFill/>
           </a:ln>
-          <a:effectLst/>
-        </p:spPr>
-        <p:style>
-          <a:lnRef idx="1">
-            <a:schemeClr val="accent1"/>
-          </a:lnRef>
-          <a:fillRef idx="3">
-            <a:schemeClr val="accent1"/>
-          </a:fillRef>
-          <a:effectRef idx="2">
-            <a:schemeClr val="accent1"/>
-          </a:effectRef>
-          <a:fontRef idx="minor">
-            <a:schemeClr val="lt1"/>
-          </a:fontRef>
-        </p:style>
+        </p:spPr>
         <p:txBody>
           <a:bodyPr rtlCol="0" anchor="ctr"/>
           <a:lstStyle/>
@@ -5475,22 +4755,7 @@
           <a:ln>
             <a:noFill/>
           </a:ln>
-          <a:effectLst/>
-        </p:spPr>
-        <p:style>
-          <a:lnRef idx="1">
-            <a:schemeClr val="accent1"/>
-          </a:lnRef>
-          <a:fillRef idx="3">
-            <a:schemeClr val="accent1"/>
-          </a:fillRef>
-          <a:effectRef idx="2">
-            <a:schemeClr val="accent1"/>
-          </a:effectRef>
-          <a:fontRef idx="minor">
-            <a:schemeClr val="lt1"/>
-          </a:fontRef>
-        </p:style>
+        </p:spPr>
         <p:txBody>
           <a:bodyPr rtlCol="0" anchor="ctr"/>
           <a:lstStyle/>
@@ -5519,22 +4784,7 @@
           <a:ln>
             <a:noFill/>
           </a:ln>
-          <a:effectLst/>
-        </p:spPr>
-        <p:style>
-          <a:lnRef idx="1">
-            <a:schemeClr val="accent1"/>
-          </a:lnRef>
-          <a:fillRef idx="3">
-            <a:schemeClr val="accent1"/>
-          </a:fillRef>
-          <a:effectRef idx="2">
-            <a:schemeClr val="accent1"/>
-          </a:effectRef>
-          <a:fontRef idx="minor">
-            <a:schemeClr val="lt1"/>
-          </a:fontRef>
-        </p:style>
+        </p:spPr>
         <p:txBody>
           <a:bodyPr rtlCol="0" anchor="ctr"/>
           <a:lstStyle/>
@@ -5563,22 +4813,7 @@
           <a:ln>
             <a:noFill/>
           </a:ln>
-          <a:effectLst/>
-        </p:spPr>
-        <p:style>
-          <a:lnRef idx="1">
-            <a:schemeClr val="accent1"/>
-          </a:lnRef>
-          <a:fillRef idx="3">
-            <a:schemeClr val="accent1"/>
-          </a:fillRef>
-          <a:effectRef idx="2">
-            <a:schemeClr val="accent1"/>
-          </a:effectRef>
-          <a:fontRef idx="minor">
-            <a:schemeClr val="lt1"/>
-          </a:fontRef>
-        </p:style>
+        </p:spPr>
         <p:txBody>
           <a:bodyPr rtlCol="0" anchor="ctr"/>
           <a:lstStyle/>
@@ -5607,22 +4842,7 @@
           <a:ln>
             <a:noFill/>
           </a:ln>
-          <a:effectLst/>
-        </p:spPr>
-        <p:style>
-          <a:lnRef idx="1">
-            <a:schemeClr val="accent1"/>
-          </a:lnRef>
-          <a:fillRef idx="3">
-            <a:schemeClr val="accent1"/>
-          </a:fillRef>
-          <a:effectRef idx="2">
-            <a:schemeClr val="accent1"/>
-          </a:effectRef>
-          <a:fontRef idx="minor">
-            <a:schemeClr val="lt1"/>
-          </a:fontRef>
-        </p:style>
+        </p:spPr>
         <p:txBody>
           <a:bodyPr rtlCol="0" anchor="ctr"/>
           <a:lstStyle/>
@@ -5651,22 +4871,7 @@
           <a:ln>
             <a:noFill/>
           </a:ln>
-          <a:effectLst/>
-        </p:spPr>
-        <p:style>
-          <a:lnRef idx="1">
-            <a:schemeClr val="accent1"/>
-          </a:lnRef>
-          <a:fillRef idx="3">
-            <a:schemeClr val="accent1"/>
-          </a:fillRef>
-          <a:effectRef idx="2">
-            <a:schemeClr val="accent1"/>
-          </a:effectRef>
-          <a:fontRef idx="minor">
-            <a:schemeClr val="lt1"/>
-          </a:fontRef>
-        </p:style>
+        </p:spPr>
         <p:txBody>
           <a:bodyPr rtlCol="0" anchor="ctr"/>
           <a:lstStyle/>
@@ -5695,22 +4900,7 @@
           <a:ln>
             <a:noFill/>
           </a:ln>
-          <a:effectLst/>
-        </p:spPr>
-        <p:style>
-          <a:lnRef idx="1">
-            <a:schemeClr val="accent1"/>
-          </a:lnRef>
-          <a:fillRef idx="3">
-            <a:schemeClr val="accent1"/>
-          </a:fillRef>
-          <a:effectRef idx="2">
-            <a:schemeClr val="accent1"/>
-          </a:effectRef>
-          <a:fontRef idx="minor">
-            <a:schemeClr val="lt1"/>
-          </a:fontRef>
-        </p:style>
+        </p:spPr>
         <p:txBody>
           <a:bodyPr rtlCol="0" anchor="ctr"/>
           <a:lstStyle/>
@@ -5739,22 +4929,7 @@
           <a:ln>
             <a:noFill/>
           </a:ln>
-          <a:effectLst/>
-        </p:spPr>
-        <p:style>
-          <a:lnRef idx="1">
-            <a:schemeClr val="accent1"/>
-          </a:lnRef>
-          <a:fillRef idx="3">
-            <a:schemeClr val="accent1"/>
-          </a:fillRef>
-          <a:effectRef idx="2">
-            <a:schemeClr val="accent1"/>
-          </a:effectRef>
-          <a:fontRef idx="minor">
-            <a:schemeClr val="lt1"/>
-          </a:fontRef>
-        </p:style>
+        </p:spPr>
         <p:txBody>
           <a:bodyPr rtlCol="0" anchor="ctr"/>
           <a:lstStyle/>
@@ -5783,22 +4958,7 @@
           <a:ln>
             <a:noFill/>
           </a:ln>
-          <a:effectLst/>
-        </p:spPr>
-        <p:style>
-          <a:lnRef idx="1">
-            <a:schemeClr val="accent1"/>
-          </a:lnRef>
-          <a:fillRef idx="3">
-            <a:schemeClr val="accent1"/>
-          </a:fillRef>
-          <a:effectRef idx="2">
-            <a:schemeClr val="accent1"/>
-          </a:effectRef>
-          <a:fontRef idx="minor">
-            <a:schemeClr val="lt1"/>
-          </a:fontRef>
-        </p:style>
+        </p:spPr>
         <p:txBody>
           <a:bodyPr rtlCol="0" anchor="ctr"/>
           <a:lstStyle/>
@@ -5827,22 +4987,7 @@
           <a:ln>
             <a:noFill/>
           </a:ln>
-          <a:effectLst/>
-        </p:spPr>
-        <p:style>
-          <a:lnRef idx="1">
-            <a:schemeClr val="accent1"/>
-          </a:lnRef>
-          <a:fillRef idx="3">
-            <a:schemeClr val="accent1"/>
-          </a:fillRef>
-          <a:effectRef idx="2">
-            <a:schemeClr val="accent1"/>
-          </a:effectRef>
-          <a:fontRef idx="minor">
-            <a:schemeClr val="lt1"/>
-          </a:fontRef>
-        </p:style>
+        </p:spPr>
         <p:txBody>
           <a:bodyPr rtlCol="0" anchor="ctr"/>
           <a:lstStyle/>
@@ -5871,22 +5016,7 @@
           <a:ln>
             <a:noFill/>
           </a:ln>
-          <a:effectLst/>
-        </p:spPr>
-        <p:style>
-          <a:lnRef idx="1">
-            <a:schemeClr val="accent1"/>
-          </a:lnRef>
-          <a:fillRef idx="3">
-            <a:schemeClr val="accent1"/>
-          </a:fillRef>
-          <a:effectRef idx="2">
-            <a:schemeClr val="accent1"/>
-          </a:effectRef>
-          <a:fontRef idx="minor">
-            <a:schemeClr val="lt1"/>
-          </a:fontRef>
-        </p:style>
+        </p:spPr>
         <p:txBody>
           <a:bodyPr rtlCol="0" anchor="ctr"/>
           <a:lstStyle/>
@@ -5915,22 +5045,7 @@
           <a:ln>
             <a:noFill/>
           </a:ln>
-          <a:effectLst/>
-        </p:spPr>
-        <p:style>
-          <a:lnRef idx="1">
-            <a:schemeClr val="accent1"/>
-          </a:lnRef>
-          <a:fillRef idx="3">
-            <a:schemeClr val="accent1"/>
-          </a:fillRef>
-          <a:effectRef idx="2">
-            <a:schemeClr val="accent1"/>
-          </a:effectRef>
-          <a:fontRef idx="minor">
-            <a:schemeClr val="lt1"/>
-          </a:fontRef>
-        </p:style>
+        </p:spPr>
         <p:txBody>
           <a:bodyPr rtlCol="0" anchor="ctr"/>
           <a:lstStyle/>
@@ -5959,22 +5074,7 @@
           <a:ln>
             <a:noFill/>
           </a:ln>
-          <a:effectLst/>
-        </p:spPr>
-        <p:style>
-          <a:lnRef idx="1">
-            <a:schemeClr val="accent1"/>
-          </a:lnRef>
-          <a:fillRef idx="3">
-            <a:schemeClr val="accent1"/>
-          </a:fillRef>
-          <a:effectRef idx="2">
-            <a:schemeClr val="accent1"/>
-          </a:effectRef>
-          <a:fontRef idx="minor">
-            <a:schemeClr val="lt1"/>
-          </a:fontRef>
-        </p:style>
+        </p:spPr>
         <p:txBody>
           <a:bodyPr rtlCol="0" anchor="ctr"/>
           <a:lstStyle/>
@@ -6003,22 +5103,7 @@
           <a:ln>
             <a:noFill/>
           </a:ln>
-          <a:effectLst/>
-        </p:spPr>
-        <p:style>
-          <a:lnRef idx="1">
-            <a:schemeClr val="accent1"/>
-          </a:lnRef>
-          <a:fillRef idx="3">
-            <a:schemeClr val="accent1"/>
-          </a:fillRef>
-          <a:effectRef idx="2">
-            <a:schemeClr val="accent1"/>
-          </a:effectRef>
-          <a:fontRef idx="minor">
-            <a:schemeClr val="lt1"/>
-          </a:fontRef>
-        </p:style>
+        </p:spPr>
         <p:txBody>
           <a:bodyPr rtlCol="0" anchor="ctr"/>
           <a:lstStyle/>
@@ -6047,22 +5132,7 @@
           <a:ln>
             <a:noFill/>
           </a:ln>
-          <a:effectLst/>
-        </p:spPr>
-        <p:style>
-          <a:lnRef idx="1">
-            <a:schemeClr val="accent1"/>
-          </a:lnRef>
-          <a:fillRef idx="3">
-            <a:schemeClr val="accent1"/>
-          </a:fillRef>
-          <a:effectRef idx="2">
-            <a:schemeClr val="accent1"/>
-          </a:effectRef>
-          <a:fontRef idx="minor">
-            <a:schemeClr val="lt1"/>
-          </a:fontRef>
-        </p:style>
+        </p:spPr>
         <p:txBody>
           <a:bodyPr rtlCol="0" anchor="ctr"/>
           <a:lstStyle/>
@@ -6091,22 +5161,7 @@
           <a:ln>
             <a:noFill/>
           </a:ln>
-          <a:effectLst/>
-        </p:spPr>
-        <p:style>
-          <a:lnRef idx="1">
-            <a:schemeClr val="accent1"/>
-          </a:lnRef>
-          <a:fillRef idx="3">
-            <a:schemeClr val="accent1"/>
-          </a:fillRef>
-          <a:effectRef idx="2">
-            <a:schemeClr val="accent1"/>
-          </a:effectRef>
-          <a:fontRef idx="minor">
-            <a:schemeClr val="lt1"/>
-          </a:fontRef>
-        </p:style>
+        </p:spPr>
         <p:txBody>
           <a:bodyPr rtlCol="0" anchor="ctr"/>
           <a:lstStyle/>
@@ -6139,9 +5194,9 @@
           <a:p>
             <a:pPr algn="l"/>
             <a:r>
-              <a:rPr sz="900" b="0">
+              <a:rPr sz="1100" b="1">
                 <a:solidFill>
-                  <a:srgbClr val="555555"/>
+                  <a:srgbClr val="1A1A1A"/>
                 </a:solidFill>
                 <a:latin typeface="Arial"/>
               </a:rPr>
@@ -6186,22 +5241,7 @@
           <a:ln>
             <a:noFill/>
           </a:ln>
-          <a:effectLst/>
-        </p:spPr>
-        <p:style>
-          <a:lnRef idx="1">
-            <a:schemeClr val="accent1"/>
-          </a:lnRef>
-          <a:fillRef idx="3">
-            <a:schemeClr val="accent1"/>
-          </a:fillRef>
-          <a:effectRef idx="2">
-            <a:schemeClr val="accent1"/>
-          </a:effectRef>
-          <a:fontRef idx="minor">
-            <a:schemeClr val="lt1"/>
-          </a:fontRef>
-        </p:style>
+        </p:spPr>
         <p:txBody>
           <a:bodyPr rtlCol="0" anchor="ctr" wrap="none" lIns="57292" rIns="57292" tIns="38195" bIns="38195"/>
           <a:lstStyle/>
@@ -6244,22 +5284,7 @@
           <a:ln>
             <a:noFill/>
           </a:ln>
-          <a:effectLst/>
-        </p:spPr>
-        <p:style>
-          <a:lnRef idx="1">
-            <a:schemeClr val="accent1"/>
-          </a:lnRef>
-          <a:fillRef idx="3">
-            <a:schemeClr val="accent1"/>
-          </a:fillRef>
-          <a:effectRef idx="2">
-            <a:schemeClr val="accent1"/>
-          </a:effectRef>
-          <a:fontRef idx="minor">
-            <a:schemeClr val="lt1"/>
-          </a:fontRef>
-        </p:style>
+        </p:spPr>
         <p:txBody>
           <a:bodyPr rtlCol="0" anchor="ctr" wrap="none" lIns="57292" rIns="57292" tIns="38195" bIns="38195"/>
           <a:lstStyle/>
@@ -6302,22 +5327,7 @@
           <a:ln>
             <a:noFill/>
           </a:ln>
-          <a:effectLst/>
-        </p:spPr>
-        <p:style>
-          <a:lnRef idx="1">
-            <a:schemeClr val="accent1"/>
-          </a:lnRef>
-          <a:fillRef idx="3">
-            <a:schemeClr val="accent1"/>
-          </a:fillRef>
-          <a:effectRef idx="2">
-            <a:schemeClr val="accent1"/>
-          </a:effectRef>
-          <a:fontRef idx="minor">
-            <a:schemeClr val="lt1"/>
-          </a:fontRef>
-        </p:style>
+        </p:spPr>
         <p:txBody>
           <a:bodyPr rtlCol="0" anchor="ctr" wrap="none" lIns="57292" rIns="57292" tIns="38195" bIns="38195"/>
           <a:lstStyle/>
@@ -6360,22 +5370,7 @@
           <a:ln>
             <a:noFill/>
           </a:ln>
-          <a:effectLst/>
-        </p:spPr>
-        <p:style>
-          <a:lnRef idx="1">
-            <a:schemeClr val="accent1"/>
-          </a:lnRef>
-          <a:fillRef idx="3">
-            <a:schemeClr val="accent1"/>
-          </a:fillRef>
-          <a:effectRef idx="2">
-            <a:schemeClr val="accent1"/>
-          </a:effectRef>
-          <a:fontRef idx="minor">
-            <a:schemeClr val="lt1"/>
-          </a:fontRef>
-        </p:style>
+        </p:spPr>
         <p:txBody>
           <a:bodyPr rtlCol="0" anchor="ctr" wrap="none" lIns="57292" rIns="57292" tIns="38195" bIns="38195"/>
           <a:lstStyle/>
@@ -6418,22 +5413,7 @@
           <a:ln>
             <a:noFill/>
           </a:ln>
-          <a:effectLst/>
-        </p:spPr>
-        <p:style>
-          <a:lnRef idx="1">
-            <a:schemeClr val="accent1"/>
-          </a:lnRef>
-          <a:fillRef idx="3">
-            <a:schemeClr val="accent1"/>
-          </a:fillRef>
-          <a:effectRef idx="2">
-            <a:schemeClr val="accent1"/>
-          </a:effectRef>
-          <a:fontRef idx="minor">
-            <a:schemeClr val="lt1"/>
-          </a:fontRef>
-        </p:style>
+        </p:spPr>
         <p:txBody>
           <a:bodyPr rtlCol="0" anchor="ctr" wrap="none" lIns="57292" rIns="57292" tIns="38195" bIns="38195"/>
           <a:lstStyle/>
@@ -6476,22 +5456,7 @@
           <a:ln>
             <a:noFill/>
           </a:ln>
-          <a:effectLst/>
-        </p:spPr>
-        <p:style>
-          <a:lnRef idx="1">
-            <a:schemeClr val="accent1"/>
-          </a:lnRef>
-          <a:fillRef idx="3">
-            <a:schemeClr val="accent1"/>
-          </a:fillRef>
-          <a:effectRef idx="2">
-            <a:schemeClr val="accent1"/>
-          </a:effectRef>
-          <a:fontRef idx="minor">
-            <a:schemeClr val="lt1"/>
-          </a:fontRef>
-        </p:style>
+        </p:spPr>
         <p:txBody>
           <a:bodyPr rtlCol="0" anchor="ctr" wrap="none" lIns="57292" rIns="57292" tIns="38195" bIns="38195"/>
           <a:lstStyle/>
@@ -6534,22 +5499,7 @@
           <a:ln>
             <a:noFill/>
           </a:ln>
-          <a:effectLst/>
-        </p:spPr>
-        <p:style>
-          <a:lnRef idx="1">
-            <a:schemeClr val="accent1"/>
-          </a:lnRef>
-          <a:fillRef idx="3">
-            <a:schemeClr val="accent1"/>
-          </a:fillRef>
-          <a:effectRef idx="2">
-            <a:schemeClr val="accent1"/>
-          </a:effectRef>
-          <a:fontRef idx="minor">
-            <a:schemeClr val="lt1"/>
-          </a:fontRef>
-        </p:style>
+        </p:spPr>
         <p:txBody>
           <a:bodyPr rtlCol="0" anchor="ctr" wrap="none" lIns="57292" rIns="57292" tIns="38195" bIns="38195"/>
           <a:lstStyle/>
@@ -6592,22 +5542,7 @@
           <a:ln>
             <a:noFill/>
           </a:ln>
-          <a:effectLst/>
-        </p:spPr>
-        <p:style>
-          <a:lnRef idx="1">
-            <a:schemeClr val="accent1"/>
-          </a:lnRef>
-          <a:fillRef idx="3">
-            <a:schemeClr val="accent1"/>
-          </a:fillRef>
-          <a:effectRef idx="2">
-            <a:schemeClr val="accent1"/>
-          </a:effectRef>
-          <a:fontRef idx="minor">
-            <a:schemeClr val="lt1"/>
-          </a:fontRef>
-        </p:style>
+        </p:spPr>
         <p:txBody>
           <a:bodyPr rtlCol="0" anchor="ctr" wrap="none" lIns="57292" rIns="57292" tIns="38195" bIns="38195"/>
           <a:lstStyle/>
@@ -6650,22 +5585,7 @@
           <a:ln>
             <a:noFill/>
           </a:ln>
-          <a:effectLst/>
-        </p:spPr>
-        <p:style>
-          <a:lnRef idx="1">
-            <a:schemeClr val="accent1"/>
-          </a:lnRef>
-          <a:fillRef idx="3">
-            <a:schemeClr val="accent1"/>
-          </a:fillRef>
-          <a:effectRef idx="2">
-            <a:schemeClr val="accent1"/>
-          </a:effectRef>
-          <a:fontRef idx="minor">
-            <a:schemeClr val="lt1"/>
-          </a:fontRef>
-        </p:style>
+        </p:spPr>
         <p:txBody>
           <a:bodyPr rtlCol="0" anchor="ctr" wrap="none" lIns="57292" rIns="57292" tIns="38195" bIns="38195"/>
           <a:lstStyle/>
@@ -6708,22 +5628,7 @@
           <a:ln>
             <a:noFill/>
           </a:ln>
-          <a:effectLst/>
-        </p:spPr>
-        <p:style>
-          <a:lnRef idx="1">
-            <a:schemeClr val="accent1"/>
-          </a:lnRef>
-          <a:fillRef idx="3">
-            <a:schemeClr val="accent1"/>
-          </a:fillRef>
-          <a:effectRef idx="2">
-            <a:schemeClr val="accent1"/>
-          </a:effectRef>
-          <a:fontRef idx="minor">
-            <a:schemeClr val="lt1"/>
-          </a:fontRef>
-        </p:style>
+        </p:spPr>
         <p:txBody>
           <a:bodyPr rtlCol="0" anchor="ctr" wrap="none" lIns="57292" rIns="57292" tIns="38195" bIns="38195"/>
           <a:lstStyle/>
@@ -6766,22 +5671,7 @@
           <a:ln>
             <a:noFill/>
           </a:ln>
-          <a:effectLst/>
-        </p:spPr>
-        <p:style>
-          <a:lnRef idx="1">
-            <a:schemeClr val="accent1"/>
-          </a:lnRef>
-          <a:fillRef idx="3">
-            <a:schemeClr val="accent1"/>
-          </a:fillRef>
-          <a:effectRef idx="2">
-            <a:schemeClr val="accent1"/>
-          </a:effectRef>
-          <a:fontRef idx="minor">
-            <a:schemeClr val="lt1"/>
-          </a:fontRef>
-        </p:style>
+        </p:spPr>
         <p:txBody>
           <a:bodyPr rtlCol="0" anchor="ctr" wrap="none" lIns="57292" rIns="57292" tIns="38195" bIns="38195"/>
           <a:lstStyle/>
@@ -6824,22 +5714,7 @@
           <a:ln>
             <a:noFill/>
           </a:ln>
-          <a:effectLst/>
-        </p:spPr>
-        <p:style>
-          <a:lnRef idx="1">
-            <a:schemeClr val="accent1"/>
-          </a:lnRef>
-          <a:fillRef idx="3">
-            <a:schemeClr val="accent1"/>
-          </a:fillRef>
-          <a:effectRef idx="2">
-            <a:schemeClr val="accent1"/>
-          </a:effectRef>
-          <a:fontRef idx="minor">
-            <a:schemeClr val="lt1"/>
-          </a:fontRef>
-        </p:style>
+        </p:spPr>
         <p:txBody>
           <a:bodyPr rtlCol="0" anchor="ctr" wrap="none" lIns="57292" rIns="57292" tIns="38195" bIns="38195"/>
           <a:lstStyle/>
@@ -6882,22 +5757,7 @@
           <a:ln>
             <a:noFill/>
           </a:ln>
-          <a:effectLst/>
-        </p:spPr>
-        <p:style>
-          <a:lnRef idx="1">
-            <a:schemeClr val="accent1"/>
-          </a:lnRef>
-          <a:fillRef idx="3">
-            <a:schemeClr val="accent1"/>
-          </a:fillRef>
-          <a:effectRef idx="2">
-            <a:schemeClr val="accent1"/>
-          </a:effectRef>
-          <a:fontRef idx="minor">
-            <a:schemeClr val="lt1"/>
-          </a:fontRef>
-        </p:style>
+        </p:spPr>
         <p:txBody>
           <a:bodyPr rtlCol="0" anchor="ctr" wrap="none" lIns="57292" rIns="57292" tIns="38195" bIns="38195"/>
           <a:lstStyle/>
@@ -6940,22 +5800,7 @@
           <a:ln>
             <a:noFill/>
           </a:ln>
-          <a:effectLst/>
-        </p:spPr>
-        <p:style>
-          <a:lnRef idx="1">
-            <a:schemeClr val="accent1"/>
-          </a:lnRef>
-          <a:fillRef idx="3">
-            <a:schemeClr val="accent1"/>
-          </a:fillRef>
-          <a:effectRef idx="2">
-            <a:schemeClr val="accent1"/>
-          </a:effectRef>
-          <a:fontRef idx="minor">
-            <a:schemeClr val="lt1"/>
-          </a:fontRef>
-        </p:style>
+        </p:spPr>
         <p:txBody>
           <a:bodyPr rtlCol="0" anchor="ctr" wrap="none" lIns="57292" rIns="57292" tIns="38195" bIns="38195"/>
           <a:lstStyle/>
@@ -6998,22 +5843,7 @@
           <a:ln>
             <a:noFill/>
           </a:ln>
-          <a:effectLst/>
-        </p:spPr>
-        <p:style>
-          <a:lnRef idx="1">
-            <a:schemeClr val="accent1"/>
-          </a:lnRef>
-          <a:fillRef idx="3">
-            <a:schemeClr val="accent1"/>
-          </a:fillRef>
-          <a:effectRef idx="2">
-            <a:schemeClr val="accent1"/>
-          </a:effectRef>
-          <a:fontRef idx="minor">
-            <a:schemeClr val="lt1"/>
-          </a:fontRef>
-        </p:style>
+        </p:spPr>
         <p:txBody>
           <a:bodyPr rtlCol="0" anchor="ctr" wrap="none" lIns="57292" rIns="57292" tIns="38195" bIns="38195"/>
           <a:lstStyle/>
@@ -7056,22 +5886,7 @@
           <a:ln>
             <a:noFill/>
           </a:ln>
-          <a:effectLst/>
-        </p:spPr>
-        <p:style>
-          <a:lnRef idx="1">
-            <a:schemeClr val="accent1"/>
-          </a:lnRef>
-          <a:fillRef idx="3">
-            <a:schemeClr val="accent1"/>
-          </a:fillRef>
-          <a:effectRef idx="2">
-            <a:schemeClr val="accent1"/>
-          </a:effectRef>
-          <a:fontRef idx="minor">
-            <a:schemeClr val="lt1"/>
-          </a:fontRef>
-        </p:style>
+        </p:spPr>
         <p:txBody>
           <a:bodyPr rtlCol="0" anchor="ctr" wrap="none" lIns="57292" rIns="57292" tIns="38195" bIns="38195"/>
           <a:lstStyle/>
@@ -7114,22 +5929,7 @@
           <a:ln>
             <a:noFill/>
           </a:ln>
-          <a:effectLst/>
-        </p:spPr>
-        <p:style>
-          <a:lnRef idx="1">
-            <a:schemeClr val="accent1"/>
-          </a:lnRef>
-          <a:fillRef idx="3">
-            <a:schemeClr val="accent1"/>
-          </a:fillRef>
-          <a:effectRef idx="2">
-            <a:schemeClr val="accent1"/>
-          </a:effectRef>
-          <a:fontRef idx="minor">
-            <a:schemeClr val="lt1"/>
-          </a:fontRef>
-        </p:style>
+        </p:spPr>
         <p:txBody>
           <a:bodyPr rtlCol="0" anchor="ctr" wrap="none" lIns="57292" rIns="57292" tIns="38195" bIns="38195"/>
           <a:lstStyle/>
@@ -7172,22 +5972,7 @@
           <a:ln>
             <a:noFill/>
           </a:ln>
-          <a:effectLst/>
-        </p:spPr>
-        <p:style>
-          <a:lnRef idx="1">
-            <a:schemeClr val="accent1"/>
-          </a:lnRef>
-          <a:fillRef idx="3">
-            <a:schemeClr val="accent1"/>
-          </a:fillRef>
-          <a:effectRef idx="2">
-            <a:schemeClr val="accent1"/>
-          </a:effectRef>
-          <a:fontRef idx="minor">
-            <a:schemeClr val="lt1"/>
-          </a:fontRef>
-        </p:style>
+        </p:spPr>
         <p:txBody>
           <a:bodyPr rtlCol="0" anchor="ctr" wrap="none" lIns="57292" rIns="57292" tIns="38195" bIns="38195"/>
           <a:lstStyle/>
@@ -7232,22 +6017,7 @@
           <a:ln>
             <a:noFill/>
           </a:ln>
-          <a:effectLst/>
-        </p:spPr>
-        <p:style>
-          <a:lnRef idx="1">
-            <a:schemeClr val="accent1"/>
-          </a:lnRef>
-          <a:fillRef idx="3">
-            <a:schemeClr val="accent1"/>
-          </a:fillRef>
-          <a:effectRef idx="2">
-            <a:schemeClr val="accent1"/>
-          </a:effectRef>
-          <a:fontRef idx="minor">
-            <a:schemeClr val="lt1"/>
-          </a:fontRef>
-        </p:style>
+        </p:spPr>
         <p:txBody>
           <a:bodyPr rtlCol="0" anchor="ctr"/>
           <a:lstStyle/>
@@ -7276,22 +6046,7 @@
           <a:ln>
             <a:noFill/>
           </a:ln>
-          <a:effectLst/>
-        </p:spPr>
-        <p:style>
-          <a:lnRef idx="1">
-            <a:schemeClr val="accent1"/>
-          </a:lnRef>
-          <a:fillRef idx="3">
-            <a:schemeClr val="accent1"/>
-          </a:fillRef>
-          <a:effectRef idx="2">
-            <a:schemeClr val="accent1"/>
-          </a:effectRef>
-          <a:fontRef idx="minor">
-            <a:schemeClr val="lt1"/>
-          </a:fontRef>
-        </p:style>
+        </p:spPr>
         <p:txBody>
           <a:bodyPr rtlCol="0" anchor="ctr"/>
           <a:lstStyle/>
@@ -7320,22 +6075,7 @@
           <a:ln>
             <a:noFill/>
           </a:ln>
-          <a:effectLst/>
-        </p:spPr>
-        <p:style>
-          <a:lnRef idx="1">
-            <a:schemeClr val="accent1"/>
-          </a:lnRef>
-          <a:fillRef idx="3">
-            <a:schemeClr val="accent1"/>
-          </a:fillRef>
-          <a:effectRef idx="2">
-            <a:schemeClr val="accent1"/>
-          </a:effectRef>
-          <a:fontRef idx="minor">
-            <a:schemeClr val="lt1"/>
-          </a:fontRef>
-        </p:style>
+        </p:spPr>
         <p:txBody>
           <a:bodyPr rtlCol="0" anchor="ctr"/>
           <a:lstStyle/>
@@ -7364,22 +6104,7 @@
           <a:ln>
             <a:noFill/>
           </a:ln>
-          <a:effectLst/>
-        </p:spPr>
-        <p:style>
-          <a:lnRef idx="1">
-            <a:schemeClr val="accent1"/>
-          </a:lnRef>
-          <a:fillRef idx="3">
-            <a:schemeClr val="accent1"/>
-          </a:fillRef>
-          <a:effectRef idx="2">
-            <a:schemeClr val="accent1"/>
-          </a:effectRef>
-          <a:fontRef idx="minor">
-            <a:schemeClr val="lt1"/>
-          </a:fontRef>
-        </p:style>
+        </p:spPr>
         <p:txBody>
           <a:bodyPr rtlCol="0" anchor="ctr"/>
           <a:lstStyle/>
@@ -7408,22 +6133,7 @@
           <a:ln>
             <a:noFill/>
           </a:ln>
-          <a:effectLst/>
-        </p:spPr>
-        <p:style>
-          <a:lnRef idx="1">
-            <a:schemeClr val="accent1"/>
-          </a:lnRef>
-          <a:fillRef idx="3">
-            <a:schemeClr val="accent1"/>
-          </a:fillRef>
-          <a:effectRef idx="2">
-            <a:schemeClr val="accent1"/>
-          </a:effectRef>
-          <a:fontRef idx="minor">
-            <a:schemeClr val="lt1"/>
-          </a:fontRef>
-        </p:style>
+        </p:spPr>
         <p:txBody>
           <a:bodyPr rtlCol="0" anchor="ctr"/>
           <a:lstStyle/>
@@ -7452,22 +6162,7 @@
           <a:ln>
             <a:noFill/>
           </a:ln>
-          <a:effectLst/>
-        </p:spPr>
-        <p:style>
-          <a:lnRef idx="1">
-            <a:schemeClr val="accent1"/>
-          </a:lnRef>
-          <a:fillRef idx="3">
-            <a:schemeClr val="accent1"/>
-          </a:fillRef>
-          <a:effectRef idx="2">
-            <a:schemeClr val="accent1"/>
-          </a:effectRef>
-          <a:fontRef idx="minor">
-            <a:schemeClr val="lt1"/>
-          </a:fontRef>
-        </p:style>
+        </p:spPr>
         <p:txBody>
           <a:bodyPr rtlCol="0" anchor="ctr"/>
           <a:lstStyle/>
@@ -7496,22 +6191,7 @@
           <a:ln>
             <a:noFill/>
           </a:ln>
-          <a:effectLst/>
-        </p:spPr>
-        <p:style>
-          <a:lnRef idx="1">
-            <a:schemeClr val="accent1"/>
-          </a:lnRef>
-          <a:fillRef idx="3">
-            <a:schemeClr val="accent1"/>
-          </a:fillRef>
-          <a:effectRef idx="2">
-            <a:schemeClr val="accent1"/>
-          </a:effectRef>
-          <a:fontRef idx="minor">
-            <a:schemeClr val="lt1"/>
-          </a:fontRef>
-        </p:style>
+        </p:spPr>
         <p:txBody>
           <a:bodyPr rtlCol="0" anchor="ctr"/>
           <a:lstStyle/>
@@ -7540,22 +6220,7 @@
           <a:ln>
             <a:noFill/>
           </a:ln>
-          <a:effectLst/>
-        </p:spPr>
-        <p:style>
-          <a:lnRef idx="1">
-            <a:schemeClr val="accent1"/>
-          </a:lnRef>
-          <a:fillRef idx="3">
-            <a:schemeClr val="accent1"/>
-          </a:fillRef>
-          <a:effectRef idx="2">
-            <a:schemeClr val="accent1"/>
-          </a:effectRef>
-          <a:fontRef idx="minor">
-            <a:schemeClr val="lt1"/>
-          </a:fontRef>
-        </p:style>
+        </p:spPr>
         <p:txBody>
           <a:bodyPr rtlCol="0" anchor="ctr"/>
           <a:lstStyle/>
@@ -7584,22 +6249,7 @@
           <a:ln>
             <a:noFill/>
           </a:ln>
-          <a:effectLst/>
-        </p:spPr>
-        <p:style>
-          <a:lnRef idx="1">
-            <a:schemeClr val="accent1"/>
-          </a:lnRef>
-          <a:fillRef idx="3">
-            <a:schemeClr val="accent1"/>
-          </a:fillRef>
-          <a:effectRef idx="2">
-            <a:schemeClr val="accent1"/>
-          </a:effectRef>
-          <a:fontRef idx="minor">
-            <a:schemeClr val="lt1"/>
-          </a:fontRef>
-        </p:style>
+        </p:spPr>
         <p:txBody>
           <a:bodyPr rtlCol="0" anchor="ctr"/>
           <a:lstStyle/>
@@ -7628,22 +6278,7 @@
           <a:ln>
             <a:noFill/>
           </a:ln>
-          <a:effectLst/>
-        </p:spPr>
-        <p:style>
-          <a:lnRef idx="1">
-            <a:schemeClr val="accent1"/>
-          </a:lnRef>
-          <a:fillRef idx="3">
-            <a:schemeClr val="accent1"/>
-          </a:fillRef>
-          <a:effectRef idx="2">
-            <a:schemeClr val="accent1"/>
-          </a:effectRef>
-          <a:fontRef idx="minor">
-            <a:schemeClr val="lt1"/>
-          </a:fontRef>
-        </p:style>
+        </p:spPr>
         <p:txBody>
           <a:bodyPr rtlCol="0" anchor="ctr"/>
           <a:lstStyle/>
@@ -7672,22 +6307,7 @@
           <a:ln>
             <a:noFill/>
           </a:ln>
-          <a:effectLst/>
-        </p:spPr>
-        <p:style>
-          <a:lnRef idx="1">
-            <a:schemeClr val="accent1"/>
-          </a:lnRef>
-          <a:fillRef idx="3">
-            <a:schemeClr val="accent1"/>
-          </a:fillRef>
-          <a:effectRef idx="2">
-            <a:schemeClr val="accent1"/>
-          </a:effectRef>
-          <a:fontRef idx="minor">
-            <a:schemeClr val="lt1"/>
-          </a:fontRef>
-        </p:style>
+        </p:spPr>
         <p:txBody>
           <a:bodyPr rtlCol="0" anchor="ctr"/>
           <a:lstStyle/>
@@ -7716,22 +6336,7 @@
           <a:ln>
             <a:noFill/>
           </a:ln>
-          <a:effectLst/>
-        </p:spPr>
-        <p:style>
-          <a:lnRef idx="1">
-            <a:schemeClr val="accent1"/>
-          </a:lnRef>
-          <a:fillRef idx="3">
-            <a:schemeClr val="accent1"/>
-          </a:fillRef>
-          <a:effectRef idx="2">
-            <a:schemeClr val="accent1"/>
-          </a:effectRef>
-          <a:fontRef idx="minor">
-            <a:schemeClr val="lt1"/>
-          </a:fontRef>
-        </p:style>
+        </p:spPr>
         <p:txBody>
           <a:bodyPr rtlCol="0" anchor="ctr"/>
           <a:lstStyle/>
@@ -7760,22 +6365,7 @@
           <a:ln>
             <a:noFill/>
           </a:ln>
-          <a:effectLst/>
-        </p:spPr>
-        <p:style>
-          <a:lnRef idx="1">
-            <a:schemeClr val="accent1"/>
-          </a:lnRef>
-          <a:fillRef idx="3">
-            <a:schemeClr val="accent1"/>
-          </a:fillRef>
-          <a:effectRef idx="2">
-            <a:schemeClr val="accent1"/>
-          </a:effectRef>
-          <a:fontRef idx="minor">
-            <a:schemeClr val="lt1"/>
-          </a:fontRef>
-        </p:style>
+        </p:spPr>
         <p:txBody>
           <a:bodyPr rtlCol="0" anchor="ctr"/>
           <a:lstStyle/>
@@ -7804,22 +6394,7 @@
           <a:ln>
             <a:noFill/>
           </a:ln>
-          <a:effectLst/>
-        </p:spPr>
-        <p:style>
-          <a:lnRef idx="1">
-            <a:schemeClr val="accent1"/>
-          </a:lnRef>
-          <a:fillRef idx="3">
-            <a:schemeClr val="accent1"/>
-          </a:fillRef>
-          <a:effectRef idx="2">
-            <a:schemeClr val="accent1"/>
-          </a:effectRef>
-          <a:fontRef idx="minor">
-            <a:schemeClr val="lt1"/>
-          </a:fontRef>
-        </p:style>
+        </p:spPr>
         <p:txBody>
           <a:bodyPr rtlCol="0" anchor="ctr"/>
           <a:lstStyle/>
@@ -7848,22 +6423,7 @@
           <a:ln>
             <a:noFill/>
           </a:ln>
-          <a:effectLst/>
-        </p:spPr>
-        <p:style>
-          <a:lnRef idx="1">
-            <a:schemeClr val="accent1"/>
-          </a:lnRef>
-          <a:fillRef idx="3">
-            <a:schemeClr val="accent1"/>
-          </a:fillRef>
-          <a:effectRef idx="2">
-            <a:schemeClr val="accent1"/>
-          </a:effectRef>
-          <a:fontRef idx="minor">
-            <a:schemeClr val="lt1"/>
-          </a:fontRef>
-        </p:style>
+        </p:spPr>
         <p:txBody>
           <a:bodyPr rtlCol="0" anchor="ctr"/>
           <a:lstStyle/>
@@ -7892,22 +6452,7 @@
           <a:ln>
             <a:noFill/>
           </a:ln>
-          <a:effectLst/>
-        </p:spPr>
-        <p:style>
-          <a:lnRef idx="1">
-            <a:schemeClr val="accent1"/>
-          </a:lnRef>
-          <a:fillRef idx="3">
-            <a:schemeClr val="accent1"/>
-          </a:fillRef>
-          <a:effectRef idx="2">
-            <a:schemeClr val="accent1"/>
-          </a:effectRef>
-          <a:fontRef idx="minor">
-            <a:schemeClr val="lt1"/>
-          </a:fontRef>
-        </p:style>
+        </p:spPr>
         <p:txBody>
           <a:bodyPr rtlCol="0" anchor="ctr"/>
           <a:lstStyle/>
@@ -7936,22 +6481,7 @@
           <a:ln>
             <a:noFill/>
           </a:ln>
-          <a:effectLst/>
-        </p:spPr>
-        <p:style>
-          <a:lnRef idx="1">
-            <a:schemeClr val="accent1"/>
-          </a:lnRef>
-          <a:fillRef idx="3">
-            <a:schemeClr val="accent1"/>
-          </a:fillRef>
-          <a:effectRef idx="2">
-            <a:schemeClr val="accent1"/>
-          </a:effectRef>
-          <a:fontRef idx="minor">
-            <a:schemeClr val="lt1"/>
-          </a:fontRef>
-        </p:style>
+        </p:spPr>
         <p:txBody>
           <a:bodyPr rtlCol="0" anchor="ctr"/>
           <a:lstStyle/>
@@ -7980,22 +6510,7 @@
           <a:ln>
             <a:noFill/>
           </a:ln>
-          <a:effectLst/>
-        </p:spPr>
-        <p:style>
-          <a:lnRef idx="1">
-            <a:schemeClr val="accent1"/>
-          </a:lnRef>
-          <a:fillRef idx="3">
-            <a:schemeClr val="accent1"/>
-          </a:fillRef>
-          <a:effectRef idx="2">
-            <a:schemeClr val="accent1"/>
-          </a:effectRef>
-          <a:fontRef idx="minor">
-            <a:schemeClr val="lt1"/>
-          </a:fontRef>
-        </p:style>
+        </p:spPr>
         <p:txBody>
           <a:bodyPr rtlCol="0" anchor="ctr"/>
           <a:lstStyle/>
@@ -8024,22 +6539,7 @@
           <a:ln>
             <a:noFill/>
           </a:ln>
-          <a:effectLst/>
-        </p:spPr>
-        <p:style>
-          <a:lnRef idx="1">
-            <a:schemeClr val="accent1"/>
-          </a:lnRef>
-          <a:fillRef idx="3">
-            <a:schemeClr val="accent1"/>
-          </a:fillRef>
-          <a:effectRef idx="2">
-            <a:schemeClr val="accent1"/>
-          </a:effectRef>
-          <a:fontRef idx="minor">
-            <a:schemeClr val="lt1"/>
-          </a:fontRef>
-        </p:style>
+        </p:spPr>
         <p:txBody>
           <a:bodyPr rtlCol="0" anchor="ctr"/>
           <a:lstStyle/>
@@ -8068,22 +6568,7 @@
           <a:ln>
             <a:noFill/>
           </a:ln>
-          <a:effectLst/>
-        </p:spPr>
-        <p:style>
-          <a:lnRef idx="1">
-            <a:schemeClr val="accent1"/>
-          </a:lnRef>
-          <a:fillRef idx="3">
-            <a:schemeClr val="accent1"/>
-          </a:fillRef>
-          <a:effectRef idx="2">
-            <a:schemeClr val="accent1"/>
-          </a:effectRef>
-          <a:fontRef idx="minor">
-            <a:schemeClr val="lt1"/>
-          </a:fontRef>
-        </p:style>
+        </p:spPr>
         <p:txBody>
           <a:bodyPr rtlCol="0" anchor="ctr"/>
           <a:lstStyle/>
@@ -8112,22 +6597,7 @@
           <a:ln>
             <a:noFill/>
           </a:ln>
-          <a:effectLst/>
-        </p:spPr>
-        <p:style>
-          <a:lnRef idx="1">
-            <a:schemeClr val="accent1"/>
-          </a:lnRef>
-          <a:fillRef idx="3">
-            <a:schemeClr val="accent1"/>
-          </a:fillRef>
-          <a:effectRef idx="2">
-            <a:schemeClr val="accent1"/>
-          </a:effectRef>
-          <a:fontRef idx="minor">
-            <a:schemeClr val="lt1"/>
-          </a:fontRef>
-        </p:style>
+        </p:spPr>
         <p:txBody>
           <a:bodyPr rtlCol="0" anchor="ctr"/>
           <a:lstStyle/>
@@ -8156,22 +6626,7 @@
           <a:ln>
             <a:noFill/>
           </a:ln>
-          <a:effectLst/>
-        </p:spPr>
-        <p:style>
-          <a:lnRef idx="1">
-            <a:schemeClr val="accent1"/>
-          </a:lnRef>
-          <a:fillRef idx="3">
-            <a:schemeClr val="accent1"/>
-          </a:fillRef>
-          <a:effectRef idx="2">
-            <a:schemeClr val="accent1"/>
-          </a:effectRef>
-          <a:fontRef idx="minor">
-            <a:schemeClr val="lt1"/>
-          </a:fontRef>
-        </p:style>
+        </p:spPr>
         <p:txBody>
           <a:bodyPr rtlCol="0" anchor="ctr"/>
           <a:lstStyle/>
@@ -8200,22 +6655,7 @@
           <a:ln>
             <a:noFill/>
           </a:ln>
-          <a:effectLst/>
-        </p:spPr>
-        <p:style>
-          <a:lnRef idx="1">
-            <a:schemeClr val="accent1"/>
-          </a:lnRef>
-          <a:fillRef idx="3">
-            <a:schemeClr val="accent1"/>
-          </a:fillRef>
-          <a:effectRef idx="2">
-            <a:schemeClr val="accent1"/>
-          </a:effectRef>
-          <a:fontRef idx="minor">
-            <a:schemeClr val="lt1"/>
-          </a:fontRef>
-        </p:style>
+        </p:spPr>
         <p:txBody>
           <a:bodyPr rtlCol="0" anchor="ctr"/>
           <a:lstStyle/>
@@ -8244,22 +6684,7 @@
           <a:ln>
             <a:noFill/>
           </a:ln>
-          <a:effectLst/>
-        </p:spPr>
-        <p:style>
-          <a:lnRef idx="1">
-            <a:schemeClr val="accent1"/>
-          </a:lnRef>
-          <a:fillRef idx="3">
-            <a:schemeClr val="accent1"/>
-          </a:fillRef>
-          <a:effectRef idx="2">
-            <a:schemeClr val="accent1"/>
-          </a:effectRef>
-          <a:fontRef idx="minor">
-            <a:schemeClr val="lt1"/>
-          </a:fontRef>
-        </p:style>
+        </p:spPr>
         <p:txBody>
           <a:bodyPr rtlCol="0" anchor="ctr"/>
           <a:lstStyle/>
@@ -8288,22 +6713,7 @@
           <a:ln>
             <a:noFill/>
           </a:ln>
-          <a:effectLst/>
-        </p:spPr>
-        <p:style>
-          <a:lnRef idx="1">
-            <a:schemeClr val="accent1"/>
-          </a:lnRef>
-          <a:fillRef idx="3">
-            <a:schemeClr val="accent1"/>
-          </a:fillRef>
-          <a:effectRef idx="2">
-            <a:schemeClr val="accent1"/>
-          </a:effectRef>
-          <a:fontRef idx="minor">
-            <a:schemeClr val="lt1"/>
-          </a:fontRef>
-        </p:style>
+        </p:spPr>
         <p:txBody>
           <a:bodyPr rtlCol="0" anchor="ctr"/>
           <a:lstStyle/>
@@ -8332,22 +6742,7 @@
           <a:ln>
             <a:noFill/>
           </a:ln>
-          <a:effectLst/>
-        </p:spPr>
-        <p:style>
-          <a:lnRef idx="1">
-            <a:schemeClr val="accent1"/>
-          </a:lnRef>
-          <a:fillRef idx="3">
-            <a:schemeClr val="accent1"/>
-          </a:fillRef>
-          <a:effectRef idx="2">
-            <a:schemeClr val="accent1"/>
-          </a:effectRef>
-          <a:fontRef idx="minor">
-            <a:schemeClr val="lt1"/>
-          </a:fontRef>
-        </p:style>
+        </p:spPr>
         <p:txBody>
           <a:bodyPr rtlCol="0" anchor="ctr"/>
           <a:lstStyle/>
@@ -8376,22 +6771,7 @@
           <a:ln>
             <a:noFill/>
           </a:ln>
-          <a:effectLst/>
-        </p:spPr>
-        <p:style>
-          <a:lnRef idx="1">
-            <a:schemeClr val="accent1"/>
-          </a:lnRef>
-          <a:fillRef idx="3">
-            <a:schemeClr val="accent1"/>
-          </a:fillRef>
-          <a:effectRef idx="2">
-            <a:schemeClr val="accent1"/>
-          </a:effectRef>
-          <a:fontRef idx="minor">
-            <a:schemeClr val="lt1"/>
-          </a:fontRef>
-        </p:style>
+        </p:spPr>
         <p:txBody>
           <a:bodyPr rtlCol="0" anchor="ctr"/>
           <a:lstStyle/>
@@ -8420,22 +6800,7 @@
           <a:ln>
             <a:noFill/>
           </a:ln>
-          <a:effectLst/>
-        </p:spPr>
-        <p:style>
-          <a:lnRef idx="1">
-            <a:schemeClr val="accent1"/>
-          </a:lnRef>
-          <a:fillRef idx="3">
-            <a:schemeClr val="accent1"/>
-          </a:fillRef>
-          <a:effectRef idx="2">
-            <a:schemeClr val="accent1"/>
-          </a:effectRef>
-          <a:fontRef idx="minor">
-            <a:schemeClr val="lt1"/>
-          </a:fontRef>
-        </p:style>
+        </p:spPr>
         <p:txBody>
           <a:bodyPr rtlCol="0" anchor="ctr"/>
           <a:lstStyle/>
@@ -8464,22 +6829,7 @@
           <a:ln>
             <a:noFill/>
           </a:ln>
-          <a:effectLst/>
-        </p:spPr>
-        <p:style>
-          <a:lnRef idx="1">
-            <a:schemeClr val="accent1"/>
-          </a:lnRef>
-          <a:fillRef idx="3">
-            <a:schemeClr val="accent1"/>
-          </a:fillRef>
-          <a:effectRef idx="2">
-            <a:schemeClr val="accent1"/>
-          </a:effectRef>
-          <a:fontRef idx="minor">
-            <a:schemeClr val="lt1"/>
-          </a:fontRef>
-        </p:style>
+        </p:spPr>
         <p:txBody>
           <a:bodyPr rtlCol="0" anchor="ctr"/>
           <a:lstStyle/>
@@ -8508,22 +6858,7 @@
           <a:ln>
             <a:noFill/>
           </a:ln>
-          <a:effectLst/>
-        </p:spPr>
-        <p:style>
-          <a:lnRef idx="1">
-            <a:schemeClr val="accent1"/>
-          </a:lnRef>
-          <a:fillRef idx="3">
-            <a:schemeClr val="accent1"/>
-          </a:fillRef>
-          <a:effectRef idx="2">
-            <a:schemeClr val="accent1"/>
-          </a:effectRef>
-          <a:fontRef idx="minor">
-            <a:schemeClr val="lt1"/>
-          </a:fontRef>
-        </p:style>
+        </p:spPr>
         <p:txBody>
           <a:bodyPr rtlCol="0" anchor="ctr"/>
           <a:lstStyle/>
@@ -8552,22 +6887,7 @@
           <a:ln>
             <a:noFill/>
           </a:ln>
-          <a:effectLst/>
-        </p:spPr>
-        <p:style>
-          <a:lnRef idx="1">
-            <a:schemeClr val="accent1"/>
-          </a:lnRef>
-          <a:fillRef idx="3">
-            <a:schemeClr val="accent1"/>
-          </a:fillRef>
-          <a:effectRef idx="2">
-            <a:schemeClr val="accent1"/>
-          </a:effectRef>
-          <a:fontRef idx="minor">
-            <a:schemeClr val="lt1"/>
-          </a:fontRef>
-        </p:style>
+        </p:spPr>
         <p:txBody>
           <a:bodyPr rtlCol="0" anchor="ctr"/>
           <a:lstStyle/>
@@ -8596,22 +6916,7 @@
           <a:ln>
             <a:noFill/>
           </a:ln>
-          <a:effectLst/>
-        </p:spPr>
-        <p:style>
-          <a:lnRef idx="1">
-            <a:schemeClr val="accent1"/>
-          </a:lnRef>
-          <a:fillRef idx="3">
-            <a:schemeClr val="accent1"/>
-          </a:fillRef>
-          <a:effectRef idx="2">
-            <a:schemeClr val="accent1"/>
-          </a:effectRef>
-          <a:fontRef idx="minor">
-            <a:schemeClr val="lt1"/>
-          </a:fontRef>
-        </p:style>
+        </p:spPr>
         <p:txBody>
           <a:bodyPr rtlCol="0" anchor="ctr"/>
           <a:lstStyle/>
@@ -8640,22 +6945,7 @@
           <a:ln>
             <a:noFill/>
           </a:ln>
-          <a:effectLst/>
-        </p:spPr>
-        <p:style>
-          <a:lnRef idx="1">
-            <a:schemeClr val="accent1"/>
-          </a:lnRef>
-          <a:fillRef idx="3">
-            <a:schemeClr val="accent1"/>
-          </a:fillRef>
-          <a:effectRef idx="2">
-            <a:schemeClr val="accent1"/>
-          </a:effectRef>
-          <a:fontRef idx="minor">
-            <a:schemeClr val="lt1"/>
-          </a:fontRef>
-        </p:style>
+        </p:spPr>
         <p:txBody>
           <a:bodyPr rtlCol="0" anchor="ctr"/>
           <a:lstStyle/>
@@ -8684,22 +6974,7 @@
           <a:ln>
             <a:noFill/>
           </a:ln>
-          <a:effectLst/>
-        </p:spPr>
-        <p:style>
-          <a:lnRef idx="1">
-            <a:schemeClr val="accent1"/>
-          </a:lnRef>
-          <a:fillRef idx="3">
-            <a:schemeClr val="accent1"/>
-          </a:fillRef>
-          <a:effectRef idx="2">
-            <a:schemeClr val="accent1"/>
-          </a:effectRef>
-          <a:fontRef idx="minor">
-            <a:schemeClr val="lt1"/>
-          </a:fontRef>
-        </p:style>
+        </p:spPr>
         <p:txBody>
           <a:bodyPr rtlCol="0" anchor="ctr"/>
           <a:lstStyle/>
@@ -8728,22 +7003,7 @@
           <a:ln>
             <a:noFill/>
           </a:ln>
-          <a:effectLst/>
-        </p:spPr>
-        <p:style>
-          <a:lnRef idx="1">
-            <a:schemeClr val="accent1"/>
-          </a:lnRef>
-          <a:fillRef idx="3">
-            <a:schemeClr val="accent1"/>
-          </a:fillRef>
-          <a:effectRef idx="2">
-            <a:schemeClr val="accent1"/>
-          </a:effectRef>
-          <a:fontRef idx="minor">
-            <a:schemeClr val="lt1"/>
-          </a:fontRef>
-        </p:style>
+        </p:spPr>
         <p:txBody>
           <a:bodyPr rtlCol="0" anchor="ctr"/>
           <a:lstStyle/>
@@ -8772,22 +7032,7 @@
           <a:ln>
             <a:noFill/>
           </a:ln>
-          <a:effectLst/>
-        </p:spPr>
-        <p:style>
-          <a:lnRef idx="1">
-            <a:schemeClr val="accent1"/>
-          </a:lnRef>
-          <a:fillRef idx="3">
-            <a:schemeClr val="accent1"/>
-          </a:fillRef>
-          <a:effectRef idx="2">
-            <a:schemeClr val="accent1"/>
-          </a:effectRef>
-          <a:fontRef idx="minor">
-            <a:schemeClr val="lt1"/>
-          </a:fontRef>
-        </p:style>
+        </p:spPr>
         <p:txBody>
           <a:bodyPr rtlCol="0" anchor="ctr"/>
           <a:lstStyle/>
@@ -8816,22 +7061,7 @@
           <a:ln>
             <a:noFill/>
           </a:ln>
-          <a:effectLst/>
-        </p:spPr>
-        <p:style>
-          <a:lnRef idx="1">
-            <a:schemeClr val="accent1"/>
-          </a:lnRef>
-          <a:fillRef idx="3">
-            <a:schemeClr val="accent1"/>
-          </a:fillRef>
-          <a:effectRef idx="2">
-            <a:schemeClr val="accent1"/>
-          </a:effectRef>
-          <a:fontRef idx="minor">
-            <a:schemeClr val="lt1"/>
-          </a:fontRef>
-        </p:style>
+        </p:spPr>
         <p:txBody>
           <a:bodyPr rtlCol="0" anchor="ctr"/>
           <a:lstStyle/>
@@ -8860,22 +7090,7 @@
           <a:ln>
             <a:noFill/>
           </a:ln>
-          <a:effectLst/>
-        </p:spPr>
-        <p:style>
-          <a:lnRef idx="1">
-            <a:schemeClr val="accent1"/>
-          </a:lnRef>
-          <a:fillRef idx="3">
-            <a:schemeClr val="accent1"/>
-          </a:fillRef>
-          <a:effectRef idx="2">
-            <a:schemeClr val="accent1"/>
-          </a:effectRef>
-          <a:fontRef idx="minor">
-            <a:schemeClr val="lt1"/>
-          </a:fontRef>
-        </p:style>
+        </p:spPr>
         <p:txBody>
           <a:bodyPr rtlCol="0" anchor="ctr"/>
           <a:lstStyle/>
@@ -8904,22 +7119,7 @@
           <a:ln>
             <a:noFill/>
           </a:ln>
-          <a:effectLst/>
-        </p:spPr>
-        <p:style>
-          <a:lnRef idx="1">
-            <a:schemeClr val="accent1"/>
-          </a:lnRef>
-          <a:fillRef idx="3">
-            <a:schemeClr val="accent1"/>
-          </a:fillRef>
-          <a:effectRef idx="2">
-            <a:schemeClr val="accent1"/>
-          </a:effectRef>
-          <a:fontRef idx="minor">
-            <a:schemeClr val="lt1"/>
-          </a:fontRef>
-        </p:style>
+        </p:spPr>
         <p:txBody>
           <a:bodyPr rtlCol="0" anchor="ctr"/>
           <a:lstStyle/>
@@ -8948,22 +7148,7 @@
           <a:ln>
             <a:noFill/>
           </a:ln>
-          <a:effectLst/>
-        </p:spPr>
-        <p:style>
-          <a:lnRef idx="1">
-            <a:schemeClr val="accent1"/>
-          </a:lnRef>
-          <a:fillRef idx="3">
-            <a:schemeClr val="accent1"/>
-          </a:fillRef>
-          <a:effectRef idx="2">
-            <a:schemeClr val="accent1"/>
-          </a:effectRef>
-          <a:fontRef idx="minor">
-            <a:schemeClr val="lt1"/>
-          </a:fontRef>
-        </p:style>
+        </p:spPr>
         <p:txBody>
           <a:bodyPr rtlCol="0" anchor="ctr"/>
           <a:lstStyle/>
@@ -8992,22 +7177,7 @@
           <a:ln>
             <a:noFill/>
           </a:ln>
-          <a:effectLst/>
-        </p:spPr>
-        <p:style>
-          <a:lnRef idx="1">
-            <a:schemeClr val="accent1"/>
-          </a:lnRef>
-          <a:fillRef idx="3">
-            <a:schemeClr val="accent1"/>
-          </a:fillRef>
-          <a:effectRef idx="2">
-            <a:schemeClr val="accent1"/>
-          </a:effectRef>
-          <a:fontRef idx="minor">
-            <a:schemeClr val="lt1"/>
-          </a:fontRef>
-        </p:style>
+        </p:spPr>
         <p:txBody>
           <a:bodyPr rtlCol="0" anchor="ctr"/>
           <a:lstStyle/>
@@ -9036,22 +7206,7 @@
           <a:ln>
             <a:noFill/>
           </a:ln>
-          <a:effectLst/>
-        </p:spPr>
-        <p:style>
-          <a:lnRef idx="1">
-            <a:schemeClr val="accent1"/>
-          </a:lnRef>
-          <a:fillRef idx="3">
-            <a:schemeClr val="accent1"/>
-          </a:fillRef>
-          <a:effectRef idx="2">
-            <a:schemeClr val="accent1"/>
-          </a:effectRef>
-          <a:fontRef idx="minor">
-            <a:schemeClr val="lt1"/>
-          </a:fontRef>
-        </p:style>
+        </p:spPr>
         <p:txBody>
           <a:bodyPr rtlCol="0" anchor="ctr"/>
           <a:lstStyle/>
@@ -9080,22 +7235,7 @@
           <a:ln>
             <a:noFill/>
           </a:ln>
-          <a:effectLst/>
-        </p:spPr>
-        <p:style>
-          <a:lnRef idx="1">
-            <a:schemeClr val="accent1"/>
-          </a:lnRef>
-          <a:fillRef idx="3">
-            <a:schemeClr val="accent1"/>
-          </a:fillRef>
-          <a:effectRef idx="2">
-            <a:schemeClr val="accent1"/>
-          </a:effectRef>
-          <a:fontRef idx="minor">
-            <a:schemeClr val="lt1"/>
-          </a:fontRef>
-        </p:style>
+        </p:spPr>
         <p:txBody>
           <a:bodyPr rtlCol="0" anchor="ctr"/>
           <a:lstStyle/>
@@ -9124,22 +7264,7 @@
           <a:ln>
             <a:noFill/>
           </a:ln>
-          <a:effectLst/>
-        </p:spPr>
-        <p:style>
-          <a:lnRef idx="1">
-            <a:schemeClr val="accent1"/>
-          </a:lnRef>
-          <a:fillRef idx="3">
-            <a:schemeClr val="accent1"/>
-          </a:fillRef>
-          <a:effectRef idx="2">
-            <a:schemeClr val="accent1"/>
-          </a:effectRef>
-          <a:fontRef idx="minor">
-            <a:schemeClr val="lt1"/>
-          </a:fontRef>
-        </p:style>
+        </p:spPr>
         <p:txBody>
           <a:bodyPr rtlCol="0" anchor="ctr"/>
           <a:lstStyle/>
@@ -9168,22 +7293,7 @@
           <a:ln>
             <a:noFill/>
           </a:ln>
-          <a:effectLst/>
-        </p:spPr>
-        <p:style>
-          <a:lnRef idx="1">
-            <a:schemeClr val="accent1"/>
-          </a:lnRef>
-          <a:fillRef idx="3">
-            <a:schemeClr val="accent1"/>
-          </a:fillRef>
-          <a:effectRef idx="2">
-            <a:schemeClr val="accent1"/>
-          </a:effectRef>
-          <a:fontRef idx="minor">
-            <a:schemeClr val="lt1"/>
-          </a:fontRef>
-        </p:style>
+        </p:spPr>
         <p:txBody>
           <a:bodyPr rtlCol="0" anchor="ctr"/>
           <a:lstStyle/>
@@ -9216,9 +7326,9 @@
           <a:p>
             <a:pPr algn="l"/>
             <a:r>
-              <a:rPr sz="900" b="0">
+              <a:rPr sz="1100" b="1">
                 <a:solidFill>
-                  <a:srgbClr val="555555"/>
+                  <a:srgbClr val="1A1A1A"/>
                 </a:solidFill>
                 <a:latin typeface="Arial"/>
               </a:rPr>
@@ -9263,22 +7373,7 @@
           <a:ln>
             <a:noFill/>
           </a:ln>
-          <a:effectLst/>
-        </p:spPr>
-        <p:style>
-          <a:lnRef idx="1">
-            <a:schemeClr val="accent1"/>
-          </a:lnRef>
-          <a:fillRef idx="3">
-            <a:schemeClr val="accent1"/>
-          </a:fillRef>
-          <a:effectRef idx="2">
-            <a:schemeClr val="accent1"/>
-          </a:effectRef>
-          <a:fontRef idx="minor">
-            <a:schemeClr val="lt1"/>
-          </a:fontRef>
-        </p:style>
+        </p:spPr>
         <p:txBody>
           <a:bodyPr rtlCol="0" anchor="ctr" wrap="none" lIns="57292" rIns="57292" tIns="38195" bIns="38195"/>
           <a:lstStyle/>
@@ -9321,22 +7416,7 @@
           <a:ln>
             <a:noFill/>
           </a:ln>
-          <a:effectLst/>
-        </p:spPr>
-        <p:style>
-          <a:lnRef idx="1">
-            <a:schemeClr val="accent1"/>
-          </a:lnRef>
-          <a:fillRef idx="3">
-            <a:schemeClr val="accent1"/>
-          </a:fillRef>
-          <a:effectRef idx="2">
-            <a:schemeClr val="accent1"/>
-          </a:effectRef>
-          <a:fontRef idx="minor">
-            <a:schemeClr val="lt1"/>
-          </a:fontRef>
-        </p:style>
+        </p:spPr>
         <p:txBody>
           <a:bodyPr rtlCol="0" anchor="ctr" wrap="none" lIns="57292" rIns="57292" tIns="38195" bIns="38195"/>
           <a:lstStyle/>
@@ -9379,22 +7459,7 @@
           <a:ln>
             <a:noFill/>
           </a:ln>
-          <a:effectLst/>
-        </p:spPr>
-        <p:style>
-          <a:lnRef idx="1">
-            <a:schemeClr val="accent1"/>
-          </a:lnRef>
-          <a:fillRef idx="3">
-            <a:schemeClr val="accent1"/>
-          </a:fillRef>
-          <a:effectRef idx="2">
-            <a:schemeClr val="accent1"/>
-          </a:effectRef>
-          <a:fontRef idx="minor">
-            <a:schemeClr val="lt1"/>
-          </a:fontRef>
-        </p:style>
+        </p:spPr>
         <p:txBody>
           <a:bodyPr rtlCol="0" anchor="ctr" wrap="none" lIns="57292" rIns="57292" tIns="38195" bIns="38195"/>
           <a:lstStyle/>
@@ -9437,22 +7502,7 @@
           <a:ln>
             <a:noFill/>
           </a:ln>
-          <a:effectLst/>
-        </p:spPr>
-        <p:style>
-          <a:lnRef idx="1">
-            <a:schemeClr val="accent1"/>
-          </a:lnRef>
-          <a:fillRef idx="3">
-            <a:schemeClr val="accent1"/>
-          </a:fillRef>
-          <a:effectRef idx="2">
-            <a:schemeClr val="accent1"/>
-          </a:effectRef>
-          <a:fontRef idx="minor">
-            <a:schemeClr val="lt1"/>
-          </a:fontRef>
-        </p:style>
+        </p:spPr>
         <p:txBody>
           <a:bodyPr rtlCol="0" anchor="ctr" wrap="none" lIns="57292" rIns="57292" tIns="38195" bIns="38195"/>
           <a:lstStyle/>
@@ -9495,22 +7545,7 @@
           <a:ln>
             <a:noFill/>
           </a:ln>
-          <a:effectLst/>
-        </p:spPr>
-        <p:style>
-          <a:lnRef idx="1">
-            <a:schemeClr val="accent1"/>
-          </a:lnRef>
-          <a:fillRef idx="3">
-            <a:schemeClr val="accent1"/>
-          </a:fillRef>
-          <a:effectRef idx="2">
-            <a:schemeClr val="accent1"/>
-          </a:effectRef>
-          <a:fontRef idx="minor">
-            <a:schemeClr val="lt1"/>
-          </a:fontRef>
-        </p:style>
+        </p:spPr>
         <p:txBody>
           <a:bodyPr rtlCol="0" anchor="ctr" wrap="none" lIns="57292" rIns="57292" tIns="38195" bIns="38195"/>
           <a:lstStyle/>
@@ -9553,22 +7588,7 @@
           <a:ln>
             <a:noFill/>
           </a:ln>
-          <a:effectLst/>
-        </p:spPr>
-        <p:style>
-          <a:lnRef idx="1">
-            <a:schemeClr val="accent1"/>
-          </a:lnRef>
-          <a:fillRef idx="3">
-            <a:schemeClr val="accent1"/>
-          </a:fillRef>
-          <a:effectRef idx="2">
-            <a:schemeClr val="accent1"/>
-          </a:effectRef>
-          <a:fontRef idx="minor">
-            <a:schemeClr val="lt1"/>
-          </a:fontRef>
-        </p:style>
+        </p:spPr>
         <p:txBody>
           <a:bodyPr rtlCol="0" anchor="ctr" wrap="none" lIns="57292" rIns="57292" tIns="38195" bIns="38195"/>
           <a:lstStyle/>
@@ -9611,22 +7631,7 @@
           <a:ln>
             <a:noFill/>
           </a:ln>
-          <a:effectLst/>
-        </p:spPr>
-        <p:style>
-          <a:lnRef idx="1">
-            <a:schemeClr val="accent1"/>
-          </a:lnRef>
-          <a:fillRef idx="3">
-            <a:schemeClr val="accent1"/>
-          </a:fillRef>
-          <a:effectRef idx="2">
-            <a:schemeClr val="accent1"/>
-          </a:effectRef>
-          <a:fontRef idx="minor">
-            <a:schemeClr val="lt1"/>
-          </a:fontRef>
-        </p:style>
+        </p:spPr>
         <p:txBody>
           <a:bodyPr rtlCol="0" anchor="ctr" wrap="none" lIns="57292" rIns="57292" tIns="38195" bIns="38195"/>
           <a:lstStyle/>
@@ -9669,22 +7674,7 @@
           <a:ln>
             <a:noFill/>
           </a:ln>
-          <a:effectLst/>
-        </p:spPr>
-        <p:style>
-          <a:lnRef idx="1">
-            <a:schemeClr val="accent1"/>
-          </a:lnRef>
-          <a:fillRef idx="3">
-            <a:schemeClr val="accent1"/>
-          </a:fillRef>
-          <a:effectRef idx="2">
-            <a:schemeClr val="accent1"/>
-          </a:effectRef>
-          <a:fontRef idx="minor">
-            <a:schemeClr val="lt1"/>
-          </a:fontRef>
-        </p:style>
+        </p:spPr>
         <p:txBody>
           <a:bodyPr rtlCol="0" anchor="ctr" wrap="none" lIns="57292" rIns="57292" tIns="38195" bIns="38195"/>
           <a:lstStyle/>
@@ -9727,22 +7717,7 @@
           <a:ln>
             <a:noFill/>
           </a:ln>
-          <a:effectLst/>
-        </p:spPr>
-        <p:style>
-          <a:lnRef idx="1">
-            <a:schemeClr val="accent1"/>
-          </a:lnRef>
-          <a:fillRef idx="3">
-            <a:schemeClr val="accent1"/>
-          </a:fillRef>
-          <a:effectRef idx="2">
-            <a:schemeClr val="accent1"/>
-          </a:effectRef>
-          <a:fontRef idx="minor">
-            <a:schemeClr val="lt1"/>
-          </a:fontRef>
-        </p:style>
+        </p:spPr>
         <p:txBody>
           <a:bodyPr rtlCol="0" anchor="ctr" wrap="none" lIns="57292" rIns="57292" tIns="38195" bIns="38195"/>
           <a:lstStyle/>
@@ -9785,22 +7760,7 @@
           <a:ln>
             <a:noFill/>
           </a:ln>
-          <a:effectLst/>
-        </p:spPr>
-        <p:style>
-          <a:lnRef idx="1">
-            <a:schemeClr val="accent1"/>
-          </a:lnRef>
-          <a:fillRef idx="3">
-            <a:schemeClr val="accent1"/>
-          </a:fillRef>
-          <a:effectRef idx="2">
-            <a:schemeClr val="accent1"/>
-          </a:effectRef>
-          <a:fontRef idx="minor">
-            <a:schemeClr val="lt1"/>
-          </a:fontRef>
-        </p:style>
+        </p:spPr>
         <p:txBody>
           <a:bodyPr rtlCol="0" anchor="ctr" wrap="none" lIns="57292" rIns="57292" tIns="38195" bIns="38195"/>
           <a:lstStyle/>
@@ -9843,22 +7803,7 @@
           <a:ln>
             <a:noFill/>
           </a:ln>
-          <a:effectLst/>
-        </p:spPr>
-        <p:style>
-          <a:lnRef idx="1">
-            <a:schemeClr val="accent1"/>
-          </a:lnRef>
-          <a:fillRef idx="3">
-            <a:schemeClr val="accent1"/>
-          </a:fillRef>
-          <a:effectRef idx="2">
-            <a:schemeClr val="accent1"/>
-          </a:effectRef>
-          <a:fontRef idx="minor">
-            <a:schemeClr val="lt1"/>
-          </a:fontRef>
-        </p:style>
+        </p:spPr>
         <p:txBody>
           <a:bodyPr rtlCol="0" anchor="ctr" wrap="none" lIns="57292" rIns="57292" tIns="38195" bIns="38195"/>
           <a:lstStyle/>
@@ -9901,22 +7846,7 @@
           <a:ln>
             <a:noFill/>
           </a:ln>
-          <a:effectLst/>
-        </p:spPr>
-        <p:style>
-          <a:lnRef idx="1">
-            <a:schemeClr val="accent1"/>
-          </a:lnRef>
-          <a:fillRef idx="3">
-            <a:schemeClr val="accent1"/>
-          </a:fillRef>
-          <a:effectRef idx="2">
-            <a:schemeClr val="accent1"/>
-          </a:effectRef>
-          <a:fontRef idx="minor">
-            <a:schemeClr val="lt1"/>
-          </a:fontRef>
-        </p:style>
+        </p:spPr>
         <p:txBody>
           <a:bodyPr rtlCol="0" anchor="ctr" wrap="none" lIns="57292" rIns="57292" tIns="38195" bIns="38195"/>
           <a:lstStyle/>
@@ -9959,22 +7889,7 @@
           <a:ln>
             <a:noFill/>
           </a:ln>
-          <a:effectLst/>
-        </p:spPr>
-        <p:style>
-          <a:lnRef idx="1">
-            <a:schemeClr val="accent1"/>
-          </a:lnRef>
-          <a:fillRef idx="3">
-            <a:schemeClr val="accent1"/>
-          </a:fillRef>
-          <a:effectRef idx="2">
-            <a:schemeClr val="accent1"/>
-          </a:effectRef>
-          <a:fontRef idx="minor">
-            <a:schemeClr val="lt1"/>
-          </a:fontRef>
-        </p:style>
+        </p:spPr>
         <p:txBody>
           <a:bodyPr rtlCol="0" anchor="ctr" wrap="none" lIns="57292" rIns="57292" tIns="38195" bIns="38195"/>
           <a:lstStyle/>
@@ -10017,22 +7932,7 @@
           <a:ln>
             <a:noFill/>
           </a:ln>
-          <a:effectLst/>
-        </p:spPr>
-        <p:style>
-          <a:lnRef idx="1">
-            <a:schemeClr val="accent1"/>
-          </a:lnRef>
-          <a:fillRef idx="3">
-            <a:schemeClr val="accent1"/>
-          </a:fillRef>
-          <a:effectRef idx="2">
-            <a:schemeClr val="accent1"/>
-          </a:effectRef>
-          <a:fontRef idx="minor">
-            <a:schemeClr val="lt1"/>
-          </a:fontRef>
-        </p:style>
+        </p:spPr>
         <p:txBody>
           <a:bodyPr rtlCol="0" anchor="ctr" wrap="none" lIns="57292" rIns="57292" tIns="38195" bIns="38195"/>
           <a:lstStyle/>
@@ -10075,22 +7975,7 @@
           <a:ln>
             <a:noFill/>
           </a:ln>
-          <a:effectLst/>
-        </p:spPr>
-        <p:style>
-          <a:lnRef idx="1">
-            <a:schemeClr val="accent1"/>
-          </a:lnRef>
-          <a:fillRef idx="3">
-            <a:schemeClr val="accent1"/>
-          </a:fillRef>
-          <a:effectRef idx="2">
-            <a:schemeClr val="accent1"/>
-          </a:effectRef>
-          <a:fontRef idx="minor">
-            <a:schemeClr val="lt1"/>
-          </a:fontRef>
-        </p:style>
+        </p:spPr>
         <p:txBody>
           <a:bodyPr rtlCol="0" anchor="ctr" wrap="none" lIns="57292" rIns="57292" tIns="38195" bIns="38195"/>
           <a:lstStyle/>
@@ -10133,22 +8018,7 @@
           <a:ln>
             <a:noFill/>
           </a:ln>
-          <a:effectLst/>
-        </p:spPr>
-        <p:style>
-          <a:lnRef idx="1">
-            <a:schemeClr val="accent1"/>
-          </a:lnRef>
-          <a:fillRef idx="3">
-            <a:schemeClr val="accent1"/>
-          </a:fillRef>
-          <a:effectRef idx="2">
-            <a:schemeClr val="accent1"/>
-          </a:effectRef>
-          <a:fontRef idx="minor">
-            <a:schemeClr val="lt1"/>
-          </a:fontRef>
-        </p:style>
+        </p:spPr>
         <p:txBody>
           <a:bodyPr rtlCol="0" anchor="ctr" wrap="none" lIns="57292" rIns="57292" tIns="38195" bIns="38195"/>
           <a:lstStyle/>
@@ -10191,22 +8061,7 @@
           <a:ln>
             <a:noFill/>
           </a:ln>
-          <a:effectLst/>
-        </p:spPr>
-        <p:style>
-          <a:lnRef idx="1">
-            <a:schemeClr val="accent1"/>
-          </a:lnRef>
-          <a:fillRef idx="3">
-            <a:schemeClr val="accent1"/>
-          </a:fillRef>
-          <a:effectRef idx="2">
-            <a:schemeClr val="accent1"/>
-          </a:effectRef>
-          <a:fontRef idx="minor">
-            <a:schemeClr val="lt1"/>
-          </a:fontRef>
-        </p:style>
+        </p:spPr>
         <p:txBody>
           <a:bodyPr rtlCol="0" anchor="ctr" wrap="none" lIns="57292" rIns="57292" tIns="38195" bIns="38195"/>
           <a:lstStyle/>
@@ -10249,22 +8104,7 @@
           <a:ln>
             <a:noFill/>
           </a:ln>
-          <a:effectLst/>
-        </p:spPr>
-        <p:style>
-          <a:lnRef idx="1">
-            <a:schemeClr val="accent1"/>
-          </a:lnRef>
-          <a:fillRef idx="3">
-            <a:schemeClr val="accent1"/>
-          </a:fillRef>
-          <a:effectRef idx="2">
-            <a:schemeClr val="accent1"/>
-          </a:effectRef>
-          <a:fontRef idx="minor">
-            <a:schemeClr val="lt1"/>
-          </a:fontRef>
-        </p:style>
+        </p:spPr>
         <p:txBody>
           <a:bodyPr rtlCol="0" anchor="ctr" wrap="none" lIns="57292" rIns="57292" tIns="38195" bIns="38195"/>
           <a:lstStyle/>
@@ -10309,22 +8149,7 @@
           <a:ln>
             <a:noFill/>
           </a:ln>
-          <a:effectLst/>
-        </p:spPr>
-        <p:style>
-          <a:lnRef idx="1">
-            <a:schemeClr val="accent1"/>
-          </a:lnRef>
-          <a:fillRef idx="3">
-            <a:schemeClr val="accent1"/>
-          </a:fillRef>
-          <a:effectRef idx="2">
-            <a:schemeClr val="accent1"/>
-          </a:effectRef>
-          <a:fontRef idx="minor">
-            <a:schemeClr val="lt1"/>
-          </a:fontRef>
-        </p:style>
+        </p:spPr>
         <p:txBody>
           <a:bodyPr rtlCol="0" anchor="ctr"/>
           <a:lstStyle/>
@@ -10353,22 +8178,7 @@
           <a:ln>
             <a:noFill/>
           </a:ln>
-          <a:effectLst/>
-        </p:spPr>
-        <p:style>
-          <a:lnRef idx="1">
-            <a:schemeClr val="accent1"/>
-          </a:lnRef>
-          <a:fillRef idx="3">
-            <a:schemeClr val="accent1"/>
-          </a:fillRef>
-          <a:effectRef idx="2">
-            <a:schemeClr val="accent1"/>
-          </a:effectRef>
-          <a:fontRef idx="minor">
-            <a:schemeClr val="lt1"/>
-          </a:fontRef>
-        </p:style>
+        </p:spPr>
         <p:txBody>
           <a:bodyPr rtlCol="0" anchor="ctr"/>
           <a:lstStyle/>
@@ -10397,22 +8207,7 @@
           <a:ln>
             <a:noFill/>
           </a:ln>
-          <a:effectLst/>
-        </p:spPr>
-        <p:style>
-          <a:lnRef idx="1">
-            <a:schemeClr val="accent1"/>
-          </a:lnRef>
-          <a:fillRef idx="3">
-            <a:schemeClr val="accent1"/>
-          </a:fillRef>
-          <a:effectRef idx="2">
-            <a:schemeClr val="accent1"/>
-          </a:effectRef>
-          <a:fontRef idx="minor">
-            <a:schemeClr val="lt1"/>
-          </a:fontRef>
-        </p:style>
+        </p:spPr>
         <p:txBody>
           <a:bodyPr rtlCol="0" anchor="ctr"/>
           <a:lstStyle/>
@@ -10441,22 +8236,7 @@
           <a:ln>
             <a:noFill/>
           </a:ln>
-          <a:effectLst/>
-        </p:spPr>
-        <p:style>
-          <a:lnRef idx="1">
-            <a:schemeClr val="accent1"/>
-          </a:lnRef>
-          <a:fillRef idx="3">
-            <a:schemeClr val="accent1"/>
-          </a:fillRef>
-          <a:effectRef idx="2">
-            <a:schemeClr val="accent1"/>
-          </a:effectRef>
-          <a:fontRef idx="minor">
-            <a:schemeClr val="lt1"/>
-          </a:fontRef>
-        </p:style>
+        </p:spPr>
         <p:txBody>
           <a:bodyPr rtlCol="0" anchor="ctr"/>
           <a:lstStyle/>
@@ -10485,22 +8265,7 @@
           <a:ln>
             <a:noFill/>
           </a:ln>
-          <a:effectLst/>
-        </p:spPr>
-        <p:style>
-          <a:lnRef idx="1">
-            <a:schemeClr val="accent1"/>
-          </a:lnRef>
-          <a:fillRef idx="3">
-            <a:schemeClr val="accent1"/>
-          </a:fillRef>
-          <a:effectRef idx="2">
-            <a:schemeClr val="accent1"/>
-          </a:effectRef>
-          <a:fontRef idx="minor">
-            <a:schemeClr val="lt1"/>
-          </a:fontRef>
-        </p:style>
+        </p:spPr>
         <p:txBody>
           <a:bodyPr rtlCol="0" anchor="ctr"/>
           <a:lstStyle/>
@@ -10529,22 +8294,7 @@
           <a:ln>
             <a:noFill/>
           </a:ln>
-          <a:effectLst/>
-        </p:spPr>
-        <p:style>
-          <a:lnRef idx="1">
-            <a:schemeClr val="accent1"/>
-          </a:lnRef>
-          <a:fillRef idx="3">
-            <a:schemeClr val="accent1"/>
-          </a:fillRef>
-          <a:effectRef idx="2">
-            <a:schemeClr val="accent1"/>
-          </a:effectRef>
-          <a:fontRef idx="minor">
-            <a:schemeClr val="lt1"/>
-          </a:fontRef>
-        </p:style>
+        </p:spPr>
         <p:txBody>
           <a:bodyPr rtlCol="0" anchor="ctr"/>
           <a:lstStyle/>
@@ -10573,22 +8323,7 @@
           <a:ln>
             <a:noFill/>
           </a:ln>
-          <a:effectLst/>
-        </p:spPr>
-        <p:style>
-          <a:lnRef idx="1">
-            <a:schemeClr val="accent1"/>
-          </a:lnRef>
-          <a:fillRef idx="3">
-            <a:schemeClr val="accent1"/>
-          </a:fillRef>
-          <a:effectRef idx="2">
-            <a:schemeClr val="accent1"/>
-          </a:effectRef>
-          <a:fontRef idx="minor">
-            <a:schemeClr val="lt1"/>
-          </a:fontRef>
-        </p:style>
+        </p:spPr>
         <p:txBody>
           <a:bodyPr rtlCol="0" anchor="ctr"/>
           <a:lstStyle/>
@@ -10617,22 +8352,7 @@
           <a:ln>
             <a:noFill/>
           </a:ln>
-          <a:effectLst/>
-        </p:spPr>
-        <p:style>
-          <a:lnRef idx="1">
-            <a:schemeClr val="accent1"/>
-          </a:lnRef>
-          <a:fillRef idx="3">
-            <a:schemeClr val="accent1"/>
-          </a:fillRef>
-          <a:effectRef idx="2">
-            <a:schemeClr val="accent1"/>
-          </a:effectRef>
-          <a:fontRef idx="minor">
-            <a:schemeClr val="lt1"/>
-          </a:fontRef>
-        </p:style>
+        </p:spPr>
         <p:txBody>
           <a:bodyPr rtlCol="0" anchor="ctr"/>
           <a:lstStyle/>
@@ -10661,22 +8381,7 @@
           <a:ln>
             <a:noFill/>
           </a:ln>
-          <a:effectLst/>
-        </p:spPr>
-        <p:style>
-          <a:lnRef idx="1">
-            <a:schemeClr val="accent1"/>
-          </a:lnRef>
-          <a:fillRef idx="3">
-            <a:schemeClr val="accent1"/>
-          </a:fillRef>
-          <a:effectRef idx="2">
-            <a:schemeClr val="accent1"/>
-          </a:effectRef>
-          <a:fontRef idx="minor">
-            <a:schemeClr val="lt1"/>
-          </a:fontRef>
-        </p:style>
+        </p:spPr>
         <p:txBody>
           <a:bodyPr rtlCol="0" anchor="ctr"/>
           <a:lstStyle/>
@@ -10705,22 +8410,7 @@
           <a:ln>
             <a:noFill/>
           </a:ln>
-          <a:effectLst/>
-        </p:spPr>
-        <p:style>
-          <a:lnRef idx="1">
-            <a:schemeClr val="accent1"/>
-          </a:lnRef>
-          <a:fillRef idx="3">
-            <a:schemeClr val="accent1"/>
-          </a:fillRef>
-          <a:effectRef idx="2">
-            <a:schemeClr val="accent1"/>
-          </a:effectRef>
-          <a:fontRef idx="minor">
-            <a:schemeClr val="lt1"/>
-          </a:fontRef>
-        </p:style>
+        </p:spPr>
         <p:txBody>
           <a:bodyPr rtlCol="0" anchor="ctr"/>
           <a:lstStyle/>
@@ -10749,22 +8439,7 @@
           <a:ln>
             <a:noFill/>
           </a:ln>
-          <a:effectLst/>
-        </p:spPr>
-        <p:style>
-          <a:lnRef idx="1">
-            <a:schemeClr val="accent1"/>
-          </a:lnRef>
-          <a:fillRef idx="3">
-            <a:schemeClr val="accent1"/>
-          </a:fillRef>
-          <a:effectRef idx="2">
-            <a:schemeClr val="accent1"/>
-          </a:effectRef>
-          <a:fontRef idx="minor">
-            <a:schemeClr val="lt1"/>
-          </a:fontRef>
-        </p:style>
+        </p:spPr>
         <p:txBody>
           <a:bodyPr rtlCol="0" anchor="ctr"/>
           <a:lstStyle/>
@@ -10793,22 +8468,7 @@
           <a:ln>
             <a:noFill/>
           </a:ln>
-          <a:effectLst/>
-        </p:spPr>
-        <p:style>
-          <a:lnRef idx="1">
-            <a:schemeClr val="accent1"/>
-          </a:lnRef>
-          <a:fillRef idx="3">
-            <a:schemeClr val="accent1"/>
-          </a:fillRef>
-          <a:effectRef idx="2">
-            <a:schemeClr val="accent1"/>
-          </a:effectRef>
-          <a:fontRef idx="minor">
-            <a:schemeClr val="lt1"/>
-          </a:fontRef>
-        </p:style>
+        </p:spPr>
         <p:txBody>
           <a:bodyPr rtlCol="0" anchor="ctr"/>
           <a:lstStyle/>
@@ -10837,22 +8497,7 @@
           <a:ln>
             <a:noFill/>
           </a:ln>
-          <a:effectLst/>
-        </p:spPr>
-        <p:style>
-          <a:lnRef idx="1">
-            <a:schemeClr val="accent1"/>
-          </a:lnRef>
-          <a:fillRef idx="3">
-            <a:schemeClr val="accent1"/>
-          </a:fillRef>
-          <a:effectRef idx="2">
-            <a:schemeClr val="accent1"/>
-          </a:effectRef>
-          <a:fontRef idx="minor">
-            <a:schemeClr val="lt1"/>
-          </a:fontRef>
-        </p:style>
+        </p:spPr>
         <p:txBody>
           <a:bodyPr rtlCol="0" anchor="ctr"/>
           <a:lstStyle/>
@@ -10881,22 +8526,7 @@
           <a:ln>
             <a:noFill/>
           </a:ln>
-          <a:effectLst/>
-        </p:spPr>
-        <p:style>
-          <a:lnRef idx="1">
-            <a:schemeClr val="accent1"/>
-          </a:lnRef>
-          <a:fillRef idx="3">
-            <a:schemeClr val="accent1"/>
-          </a:fillRef>
-          <a:effectRef idx="2">
-            <a:schemeClr val="accent1"/>
-          </a:effectRef>
-          <a:fontRef idx="minor">
-            <a:schemeClr val="lt1"/>
-          </a:fontRef>
-        </p:style>
+        </p:spPr>
         <p:txBody>
           <a:bodyPr rtlCol="0" anchor="ctr"/>
           <a:lstStyle/>
@@ -10925,22 +8555,7 @@
           <a:ln>
             <a:noFill/>
           </a:ln>
-          <a:effectLst/>
-        </p:spPr>
-        <p:style>
-          <a:lnRef idx="1">
-            <a:schemeClr val="accent1"/>
-          </a:lnRef>
-          <a:fillRef idx="3">
-            <a:schemeClr val="accent1"/>
-          </a:fillRef>
-          <a:effectRef idx="2">
-            <a:schemeClr val="accent1"/>
-          </a:effectRef>
-          <a:fontRef idx="minor">
-            <a:schemeClr val="lt1"/>
-          </a:fontRef>
-        </p:style>
+        </p:spPr>
         <p:txBody>
           <a:bodyPr rtlCol="0" anchor="ctr"/>
           <a:lstStyle/>
@@ -10969,22 +8584,7 @@
           <a:ln>
             <a:noFill/>
           </a:ln>
-          <a:effectLst/>
-        </p:spPr>
-        <p:style>
-          <a:lnRef idx="1">
-            <a:schemeClr val="accent1"/>
-          </a:lnRef>
-          <a:fillRef idx="3">
-            <a:schemeClr val="accent1"/>
-          </a:fillRef>
-          <a:effectRef idx="2">
-            <a:schemeClr val="accent1"/>
-          </a:effectRef>
-          <a:fontRef idx="minor">
-            <a:schemeClr val="lt1"/>
-          </a:fontRef>
-        </p:style>
+        </p:spPr>
         <p:txBody>
           <a:bodyPr rtlCol="0" anchor="ctr"/>
           <a:lstStyle/>
@@ -11013,22 +8613,7 @@
           <a:ln>
             <a:noFill/>
           </a:ln>
-          <a:effectLst/>
-        </p:spPr>
-        <p:style>
-          <a:lnRef idx="1">
-            <a:schemeClr val="accent1"/>
-          </a:lnRef>
-          <a:fillRef idx="3">
-            <a:schemeClr val="accent1"/>
-          </a:fillRef>
-          <a:effectRef idx="2">
-            <a:schemeClr val="accent1"/>
-          </a:effectRef>
-          <a:fontRef idx="minor">
-            <a:schemeClr val="lt1"/>
-          </a:fontRef>
-        </p:style>
+        </p:spPr>
         <p:txBody>
           <a:bodyPr rtlCol="0" anchor="ctr"/>
           <a:lstStyle/>
@@ -11057,22 +8642,7 @@
           <a:ln>
             <a:noFill/>
           </a:ln>
-          <a:effectLst/>
-        </p:spPr>
-        <p:style>
-          <a:lnRef idx="1">
-            <a:schemeClr val="accent1"/>
-          </a:lnRef>
-          <a:fillRef idx="3">
-            <a:schemeClr val="accent1"/>
-          </a:fillRef>
-          <a:effectRef idx="2">
-            <a:schemeClr val="accent1"/>
-          </a:effectRef>
-          <a:fontRef idx="minor">
-            <a:schemeClr val="lt1"/>
-          </a:fontRef>
-        </p:style>
+        </p:spPr>
         <p:txBody>
           <a:bodyPr rtlCol="0" anchor="ctr"/>
           <a:lstStyle/>
@@ -11101,22 +8671,7 @@
           <a:ln>
             <a:noFill/>
           </a:ln>
-          <a:effectLst/>
-        </p:spPr>
-        <p:style>
-          <a:lnRef idx="1">
-            <a:schemeClr val="accent1"/>
-          </a:lnRef>
-          <a:fillRef idx="3">
-            <a:schemeClr val="accent1"/>
-          </a:fillRef>
-          <a:effectRef idx="2">
-            <a:schemeClr val="accent1"/>
-          </a:effectRef>
-          <a:fontRef idx="minor">
-            <a:schemeClr val="lt1"/>
-          </a:fontRef>
-        </p:style>
+        </p:spPr>
         <p:txBody>
           <a:bodyPr rtlCol="0" anchor="ctr"/>
           <a:lstStyle/>
@@ -11145,22 +8700,7 @@
           <a:ln>
             <a:noFill/>
           </a:ln>
-          <a:effectLst/>
-        </p:spPr>
-        <p:style>
-          <a:lnRef idx="1">
-            <a:schemeClr val="accent1"/>
-          </a:lnRef>
-          <a:fillRef idx="3">
-            <a:schemeClr val="accent1"/>
-          </a:fillRef>
-          <a:effectRef idx="2">
-            <a:schemeClr val="accent1"/>
-          </a:effectRef>
-          <a:fontRef idx="minor">
-            <a:schemeClr val="lt1"/>
-          </a:fontRef>
-        </p:style>
+        </p:spPr>
         <p:txBody>
           <a:bodyPr rtlCol="0" anchor="ctr"/>
           <a:lstStyle/>
@@ -11189,22 +8729,7 @@
           <a:ln>
             <a:noFill/>
           </a:ln>
-          <a:effectLst/>
-        </p:spPr>
-        <p:style>
-          <a:lnRef idx="1">
-            <a:schemeClr val="accent1"/>
-          </a:lnRef>
-          <a:fillRef idx="3">
-            <a:schemeClr val="accent1"/>
-          </a:fillRef>
-          <a:effectRef idx="2">
-            <a:schemeClr val="accent1"/>
-          </a:effectRef>
-          <a:fontRef idx="minor">
-            <a:schemeClr val="lt1"/>
-          </a:fontRef>
-        </p:style>
+        </p:spPr>
         <p:txBody>
           <a:bodyPr rtlCol="0" anchor="ctr"/>
           <a:lstStyle/>
@@ -11233,22 +8758,7 @@
           <a:ln>
             <a:noFill/>
           </a:ln>
-          <a:effectLst/>
-        </p:spPr>
-        <p:style>
-          <a:lnRef idx="1">
-            <a:schemeClr val="accent1"/>
-          </a:lnRef>
-          <a:fillRef idx="3">
-            <a:schemeClr val="accent1"/>
-          </a:fillRef>
-          <a:effectRef idx="2">
-            <a:schemeClr val="accent1"/>
-          </a:effectRef>
-          <a:fontRef idx="minor">
-            <a:schemeClr val="lt1"/>
-          </a:fontRef>
-        </p:style>
+        </p:spPr>
         <p:txBody>
           <a:bodyPr rtlCol="0" anchor="ctr"/>
           <a:lstStyle/>
@@ -11277,22 +8787,7 @@
           <a:ln>
             <a:noFill/>
           </a:ln>
-          <a:effectLst/>
-        </p:spPr>
-        <p:style>
-          <a:lnRef idx="1">
-            <a:schemeClr val="accent1"/>
-          </a:lnRef>
-          <a:fillRef idx="3">
-            <a:schemeClr val="accent1"/>
-          </a:fillRef>
-          <a:effectRef idx="2">
-            <a:schemeClr val="accent1"/>
-          </a:effectRef>
-          <a:fontRef idx="minor">
-            <a:schemeClr val="lt1"/>
-          </a:fontRef>
-        </p:style>
+        </p:spPr>
         <p:txBody>
           <a:bodyPr rtlCol="0" anchor="ctr"/>
           <a:lstStyle/>
@@ -11321,22 +8816,7 @@
           <a:ln>
             <a:noFill/>
           </a:ln>
-          <a:effectLst/>
-        </p:spPr>
-        <p:style>
-          <a:lnRef idx="1">
-            <a:schemeClr val="accent1"/>
-          </a:lnRef>
-          <a:fillRef idx="3">
-            <a:schemeClr val="accent1"/>
-          </a:fillRef>
-          <a:effectRef idx="2">
-            <a:schemeClr val="accent1"/>
-          </a:effectRef>
-          <a:fontRef idx="minor">
-            <a:schemeClr val="lt1"/>
-          </a:fontRef>
-        </p:style>
+        </p:spPr>
         <p:txBody>
           <a:bodyPr rtlCol="0" anchor="ctr"/>
           <a:lstStyle/>
@@ -11365,22 +8845,7 @@
           <a:ln>
             <a:noFill/>
           </a:ln>
-          <a:effectLst/>
-        </p:spPr>
-        <p:style>
-          <a:lnRef idx="1">
-            <a:schemeClr val="accent1"/>
-          </a:lnRef>
-          <a:fillRef idx="3">
-            <a:schemeClr val="accent1"/>
-          </a:fillRef>
-          <a:effectRef idx="2">
-            <a:schemeClr val="accent1"/>
-          </a:effectRef>
-          <a:fontRef idx="minor">
-            <a:schemeClr val="lt1"/>
-          </a:fontRef>
-        </p:style>
+        </p:spPr>
         <p:txBody>
           <a:bodyPr rtlCol="0" anchor="ctr"/>
           <a:lstStyle/>
@@ -11409,22 +8874,7 @@
           <a:ln>
             <a:noFill/>
           </a:ln>
-          <a:effectLst/>
-        </p:spPr>
-        <p:style>
-          <a:lnRef idx="1">
-            <a:schemeClr val="accent1"/>
-          </a:lnRef>
-          <a:fillRef idx="3">
-            <a:schemeClr val="accent1"/>
-          </a:fillRef>
-          <a:effectRef idx="2">
-            <a:schemeClr val="accent1"/>
-          </a:effectRef>
-          <a:fontRef idx="minor">
-            <a:schemeClr val="lt1"/>
-          </a:fontRef>
-        </p:style>
+        </p:spPr>
         <p:txBody>
           <a:bodyPr rtlCol="0" anchor="ctr"/>
           <a:lstStyle/>
@@ -11453,22 +8903,7 @@
           <a:ln>
             <a:noFill/>
           </a:ln>
-          <a:effectLst/>
-        </p:spPr>
-        <p:style>
-          <a:lnRef idx="1">
-            <a:schemeClr val="accent1"/>
-          </a:lnRef>
-          <a:fillRef idx="3">
-            <a:schemeClr val="accent1"/>
-          </a:fillRef>
-          <a:effectRef idx="2">
-            <a:schemeClr val="accent1"/>
-          </a:effectRef>
-          <a:fontRef idx="minor">
-            <a:schemeClr val="lt1"/>
-          </a:fontRef>
-        </p:style>
+        </p:spPr>
         <p:txBody>
           <a:bodyPr rtlCol="0" anchor="ctr"/>
           <a:lstStyle/>
@@ -11497,22 +8932,7 @@
           <a:ln>
             <a:noFill/>
           </a:ln>
-          <a:effectLst/>
-        </p:spPr>
-        <p:style>
-          <a:lnRef idx="1">
-            <a:schemeClr val="accent1"/>
-          </a:lnRef>
-          <a:fillRef idx="3">
-            <a:schemeClr val="accent1"/>
-          </a:fillRef>
-          <a:effectRef idx="2">
-            <a:schemeClr val="accent1"/>
-          </a:effectRef>
-          <a:fontRef idx="minor">
-            <a:schemeClr val="lt1"/>
-          </a:fontRef>
-        </p:style>
+        </p:spPr>
         <p:txBody>
           <a:bodyPr rtlCol="0" anchor="ctr"/>
           <a:lstStyle/>
@@ -11541,22 +8961,7 @@
           <a:ln>
             <a:noFill/>
           </a:ln>
-          <a:effectLst/>
-        </p:spPr>
-        <p:style>
-          <a:lnRef idx="1">
-            <a:schemeClr val="accent1"/>
-          </a:lnRef>
-          <a:fillRef idx="3">
-            <a:schemeClr val="accent1"/>
-          </a:fillRef>
-          <a:effectRef idx="2">
-            <a:schemeClr val="accent1"/>
-          </a:effectRef>
-          <a:fontRef idx="minor">
-            <a:schemeClr val="lt1"/>
-          </a:fontRef>
-        </p:style>
+        </p:spPr>
         <p:txBody>
           <a:bodyPr rtlCol="0" anchor="ctr"/>
           <a:lstStyle/>
@@ -11585,22 +8990,7 @@
           <a:ln>
             <a:noFill/>
           </a:ln>
-          <a:effectLst/>
-        </p:spPr>
-        <p:style>
-          <a:lnRef idx="1">
-            <a:schemeClr val="accent1"/>
-          </a:lnRef>
-          <a:fillRef idx="3">
-            <a:schemeClr val="accent1"/>
-          </a:fillRef>
-          <a:effectRef idx="2">
-            <a:schemeClr val="accent1"/>
-          </a:effectRef>
-          <a:fontRef idx="minor">
-            <a:schemeClr val="lt1"/>
-          </a:fontRef>
-        </p:style>
+        </p:spPr>
         <p:txBody>
           <a:bodyPr rtlCol="0" anchor="ctr"/>
           <a:lstStyle/>
@@ -11629,22 +9019,7 @@
           <a:ln>
             <a:noFill/>
           </a:ln>
-          <a:effectLst/>
-        </p:spPr>
-        <p:style>
-          <a:lnRef idx="1">
-            <a:schemeClr val="accent1"/>
-          </a:lnRef>
-          <a:fillRef idx="3">
-            <a:schemeClr val="accent1"/>
-          </a:fillRef>
-          <a:effectRef idx="2">
-            <a:schemeClr val="accent1"/>
-          </a:effectRef>
-          <a:fontRef idx="minor">
-            <a:schemeClr val="lt1"/>
-          </a:fontRef>
-        </p:style>
+        </p:spPr>
         <p:txBody>
           <a:bodyPr rtlCol="0" anchor="ctr"/>
           <a:lstStyle/>
@@ -11673,22 +9048,7 @@
           <a:ln>
             <a:noFill/>
           </a:ln>
-          <a:effectLst/>
-        </p:spPr>
-        <p:style>
-          <a:lnRef idx="1">
-            <a:schemeClr val="accent1"/>
-          </a:lnRef>
-          <a:fillRef idx="3">
-            <a:schemeClr val="accent1"/>
-          </a:fillRef>
-          <a:effectRef idx="2">
-            <a:schemeClr val="accent1"/>
-          </a:effectRef>
-          <a:fontRef idx="minor">
-            <a:schemeClr val="lt1"/>
-          </a:fontRef>
-        </p:style>
+        </p:spPr>
         <p:txBody>
           <a:bodyPr rtlCol="0" anchor="ctr"/>
           <a:lstStyle/>
@@ -11717,22 +9077,7 @@
           <a:ln>
             <a:noFill/>
           </a:ln>
-          <a:effectLst/>
-        </p:spPr>
-        <p:style>
-          <a:lnRef idx="1">
-            <a:schemeClr val="accent1"/>
-          </a:lnRef>
-          <a:fillRef idx="3">
-            <a:schemeClr val="accent1"/>
-          </a:fillRef>
-          <a:effectRef idx="2">
-            <a:schemeClr val="accent1"/>
-          </a:effectRef>
-          <a:fontRef idx="minor">
-            <a:schemeClr val="lt1"/>
-          </a:fontRef>
-        </p:style>
+        </p:spPr>
         <p:txBody>
           <a:bodyPr rtlCol="0" anchor="ctr"/>
           <a:lstStyle/>
@@ -11761,22 +9106,7 @@
           <a:ln>
             <a:noFill/>
           </a:ln>
-          <a:effectLst/>
-        </p:spPr>
-        <p:style>
-          <a:lnRef idx="1">
-            <a:schemeClr val="accent1"/>
-          </a:lnRef>
-          <a:fillRef idx="3">
-            <a:schemeClr val="accent1"/>
-          </a:fillRef>
-          <a:effectRef idx="2">
-            <a:schemeClr val="accent1"/>
-          </a:effectRef>
-          <a:fontRef idx="minor">
-            <a:schemeClr val="lt1"/>
-          </a:fontRef>
-        </p:style>
+        </p:spPr>
         <p:txBody>
           <a:bodyPr rtlCol="0" anchor="ctr"/>
           <a:lstStyle/>
@@ -11805,22 +9135,7 @@
           <a:ln>
             <a:noFill/>
           </a:ln>
-          <a:effectLst/>
-        </p:spPr>
-        <p:style>
-          <a:lnRef idx="1">
-            <a:schemeClr val="accent1"/>
-          </a:lnRef>
-          <a:fillRef idx="3">
-            <a:schemeClr val="accent1"/>
-          </a:fillRef>
-          <a:effectRef idx="2">
-            <a:schemeClr val="accent1"/>
-          </a:effectRef>
-          <a:fontRef idx="minor">
-            <a:schemeClr val="lt1"/>
-          </a:fontRef>
-        </p:style>
+        </p:spPr>
         <p:txBody>
           <a:bodyPr rtlCol="0" anchor="ctr"/>
           <a:lstStyle/>
@@ -11849,22 +9164,7 @@
           <a:ln>
             <a:noFill/>
           </a:ln>
-          <a:effectLst/>
-        </p:spPr>
-        <p:style>
-          <a:lnRef idx="1">
-            <a:schemeClr val="accent1"/>
-          </a:lnRef>
-          <a:fillRef idx="3">
-            <a:schemeClr val="accent1"/>
-          </a:fillRef>
-          <a:effectRef idx="2">
-            <a:schemeClr val="accent1"/>
-          </a:effectRef>
-          <a:fontRef idx="minor">
-            <a:schemeClr val="lt1"/>
-          </a:fontRef>
-        </p:style>
+        </p:spPr>
         <p:txBody>
           <a:bodyPr rtlCol="0" anchor="ctr"/>
           <a:lstStyle/>
@@ -11893,22 +9193,7 @@
           <a:ln>
             <a:noFill/>
           </a:ln>
-          <a:effectLst/>
-        </p:spPr>
-        <p:style>
-          <a:lnRef idx="1">
-            <a:schemeClr val="accent1"/>
-          </a:lnRef>
-          <a:fillRef idx="3">
-            <a:schemeClr val="accent1"/>
-          </a:fillRef>
-          <a:effectRef idx="2">
-            <a:schemeClr val="accent1"/>
-          </a:effectRef>
-          <a:fontRef idx="minor">
-            <a:schemeClr val="lt1"/>
-          </a:fontRef>
-        </p:style>
+        </p:spPr>
         <p:txBody>
           <a:bodyPr rtlCol="0" anchor="ctr"/>
           <a:lstStyle/>
@@ -11937,22 +9222,7 @@
           <a:ln>
             <a:noFill/>
           </a:ln>
-          <a:effectLst/>
-        </p:spPr>
-        <p:style>
-          <a:lnRef idx="1">
-            <a:schemeClr val="accent1"/>
-          </a:lnRef>
-          <a:fillRef idx="3">
-            <a:schemeClr val="accent1"/>
-          </a:fillRef>
-          <a:effectRef idx="2">
-            <a:schemeClr val="accent1"/>
-          </a:effectRef>
-          <a:fontRef idx="minor">
-            <a:schemeClr val="lt1"/>
-          </a:fontRef>
-        </p:style>
+        </p:spPr>
         <p:txBody>
           <a:bodyPr rtlCol="0" anchor="ctr"/>
           <a:lstStyle/>
@@ -11981,22 +9251,7 @@
           <a:ln>
             <a:noFill/>
           </a:ln>
-          <a:effectLst/>
-        </p:spPr>
-        <p:style>
-          <a:lnRef idx="1">
-            <a:schemeClr val="accent1"/>
-          </a:lnRef>
-          <a:fillRef idx="3">
-            <a:schemeClr val="accent1"/>
-          </a:fillRef>
-          <a:effectRef idx="2">
-            <a:schemeClr val="accent1"/>
-          </a:effectRef>
-          <a:fontRef idx="minor">
-            <a:schemeClr val="lt1"/>
-          </a:fontRef>
-        </p:style>
+        </p:spPr>
         <p:txBody>
           <a:bodyPr rtlCol="0" anchor="ctr"/>
           <a:lstStyle/>
@@ -12025,22 +9280,7 @@
           <a:ln>
             <a:noFill/>
           </a:ln>
-          <a:effectLst/>
-        </p:spPr>
-        <p:style>
-          <a:lnRef idx="1">
-            <a:schemeClr val="accent1"/>
-          </a:lnRef>
-          <a:fillRef idx="3">
-            <a:schemeClr val="accent1"/>
-          </a:fillRef>
-          <a:effectRef idx="2">
-            <a:schemeClr val="accent1"/>
-          </a:effectRef>
-          <a:fontRef idx="minor">
-            <a:schemeClr val="lt1"/>
-          </a:fontRef>
-        </p:style>
+        </p:spPr>
         <p:txBody>
           <a:bodyPr rtlCol="0" anchor="ctr"/>
           <a:lstStyle/>
@@ -12069,22 +9309,7 @@
           <a:ln>
             <a:noFill/>
           </a:ln>
-          <a:effectLst/>
-        </p:spPr>
-        <p:style>
-          <a:lnRef idx="1">
-            <a:schemeClr val="accent1"/>
-          </a:lnRef>
-          <a:fillRef idx="3">
-            <a:schemeClr val="accent1"/>
-          </a:fillRef>
-          <a:effectRef idx="2">
-            <a:schemeClr val="accent1"/>
-          </a:effectRef>
-          <a:fontRef idx="minor">
-            <a:schemeClr val="lt1"/>
-          </a:fontRef>
-        </p:style>
+        </p:spPr>
         <p:txBody>
           <a:bodyPr rtlCol="0" anchor="ctr"/>
           <a:lstStyle/>
@@ -12113,22 +9338,7 @@
           <a:ln>
             <a:noFill/>
           </a:ln>
-          <a:effectLst/>
-        </p:spPr>
-        <p:style>
-          <a:lnRef idx="1">
-            <a:schemeClr val="accent1"/>
-          </a:lnRef>
-          <a:fillRef idx="3">
-            <a:schemeClr val="accent1"/>
-          </a:fillRef>
-          <a:effectRef idx="2">
-            <a:schemeClr val="accent1"/>
-          </a:effectRef>
-          <a:fontRef idx="minor">
-            <a:schemeClr val="lt1"/>
-          </a:fontRef>
-        </p:style>
+        </p:spPr>
         <p:txBody>
           <a:bodyPr rtlCol="0" anchor="ctr"/>
           <a:lstStyle/>
@@ -12157,22 +9367,7 @@
           <a:ln>
             <a:noFill/>
           </a:ln>
-          <a:effectLst/>
-        </p:spPr>
-        <p:style>
-          <a:lnRef idx="1">
-            <a:schemeClr val="accent1"/>
-          </a:lnRef>
-          <a:fillRef idx="3">
-            <a:schemeClr val="accent1"/>
-          </a:fillRef>
-          <a:effectRef idx="2">
-            <a:schemeClr val="accent1"/>
-          </a:effectRef>
-          <a:fontRef idx="minor">
-            <a:schemeClr val="lt1"/>
-          </a:fontRef>
-        </p:style>
+        </p:spPr>
         <p:txBody>
           <a:bodyPr rtlCol="0" anchor="ctr"/>
           <a:lstStyle/>
@@ -12201,22 +9396,7 @@
           <a:ln>
             <a:noFill/>
           </a:ln>
-          <a:effectLst/>
-        </p:spPr>
-        <p:style>
-          <a:lnRef idx="1">
-            <a:schemeClr val="accent1"/>
-          </a:lnRef>
-          <a:fillRef idx="3">
-            <a:schemeClr val="accent1"/>
-          </a:fillRef>
-          <a:effectRef idx="2">
-            <a:schemeClr val="accent1"/>
-          </a:effectRef>
-          <a:fontRef idx="minor">
-            <a:schemeClr val="lt1"/>
-          </a:fontRef>
-        </p:style>
+        </p:spPr>
         <p:txBody>
           <a:bodyPr rtlCol="0" anchor="ctr"/>
           <a:lstStyle/>
@@ -12245,22 +9425,7 @@
           <a:ln>
             <a:noFill/>
           </a:ln>
-          <a:effectLst/>
-        </p:spPr>
-        <p:style>
-          <a:lnRef idx="1">
-            <a:schemeClr val="accent1"/>
-          </a:lnRef>
-          <a:fillRef idx="3">
-            <a:schemeClr val="accent1"/>
-          </a:fillRef>
-          <a:effectRef idx="2">
-            <a:schemeClr val="accent1"/>
-          </a:effectRef>
-          <a:fontRef idx="minor">
-            <a:schemeClr val="lt1"/>
-          </a:fontRef>
-        </p:style>
+        </p:spPr>
         <p:txBody>
           <a:bodyPr rtlCol="0" anchor="ctr"/>
           <a:lstStyle/>
@@ -12293,9 +9458,9 @@
           <a:p>
             <a:pPr algn="l"/>
             <a:r>
-              <a:rPr sz="900" b="0">
+              <a:rPr sz="1100" b="1">
                 <a:solidFill>
-                  <a:srgbClr val="555555"/>
+                  <a:srgbClr val="1A1A1A"/>
                 </a:solidFill>
                 <a:latin typeface="Arial"/>
               </a:rPr>
@@ -12340,22 +9505,7 @@
           <a:ln>
             <a:noFill/>
           </a:ln>
-          <a:effectLst/>
-        </p:spPr>
-        <p:style>
-          <a:lnRef idx="1">
-            <a:schemeClr val="accent1"/>
-          </a:lnRef>
-          <a:fillRef idx="3">
-            <a:schemeClr val="accent1"/>
-          </a:fillRef>
-          <a:effectRef idx="2">
-            <a:schemeClr val="accent1"/>
-          </a:effectRef>
-          <a:fontRef idx="minor">
-            <a:schemeClr val="lt1"/>
-          </a:fontRef>
-        </p:style>
+        </p:spPr>
         <p:txBody>
           <a:bodyPr rtlCol="0" anchor="ctr" wrap="none" lIns="57292" rIns="57292" tIns="38195" bIns="38195"/>
           <a:lstStyle/>
@@ -12398,22 +9548,7 @@
           <a:ln>
             <a:noFill/>
           </a:ln>
-          <a:effectLst/>
-        </p:spPr>
-        <p:style>
-          <a:lnRef idx="1">
-            <a:schemeClr val="accent1"/>
-          </a:lnRef>
-          <a:fillRef idx="3">
-            <a:schemeClr val="accent1"/>
-          </a:fillRef>
-          <a:effectRef idx="2">
-            <a:schemeClr val="accent1"/>
-          </a:effectRef>
-          <a:fontRef idx="minor">
-            <a:schemeClr val="lt1"/>
-          </a:fontRef>
-        </p:style>
+        </p:spPr>
         <p:txBody>
           <a:bodyPr rtlCol="0" anchor="ctr" wrap="none" lIns="57292" rIns="57292" tIns="38195" bIns="38195"/>
           <a:lstStyle/>
@@ -12456,22 +9591,7 @@
           <a:ln>
             <a:noFill/>
           </a:ln>
-          <a:effectLst/>
-        </p:spPr>
-        <p:style>
-          <a:lnRef idx="1">
-            <a:schemeClr val="accent1"/>
-          </a:lnRef>
-          <a:fillRef idx="3">
-            <a:schemeClr val="accent1"/>
-          </a:fillRef>
-          <a:effectRef idx="2">
-            <a:schemeClr val="accent1"/>
-          </a:effectRef>
-          <a:fontRef idx="minor">
-            <a:schemeClr val="lt1"/>
-          </a:fontRef>
-        </p:style>
+        </p:spPr>
         <p:txBody>
           <a:bodyPr rtlCol="0" anchor="ctr" wrap="none" lIns="57292" rIns="57292" tIns="38195" bIns="38195"/>
           <a:lstStyle/>
@@ -12514,22 +9634,7 @@
           <a:ln>
             <a:noFill/>
           </a:ln>
-          <a:effectLst/>
-        </p:spPr>
-        <p:style>
-          <a:lnRef idx="1">
-            <a:schemeClr val="accent1"/>
-          </a:lnRef>
-          <a:fillRef idx="3">
-            <a:schemeClr val="accent1"/>
-          </a:fillRef>
-          <a:effectRef idx="2">
-            <a:schemeClr val="accent1"/>
-          </a:effectRef>
-          <a:fontRef idx="minor">
-            <a:schemeClr val="lt1"/>
-          </a:fontRef>
-        </p:style>
+        </p:spPr>
         <p:txBody>
           <a:bodyPr rtlCol="0" anchor="ctr" wrap="none" lIns="57292" rIns="57292" tIns="38195" bIns="38195"/>
           <a:lstStyle/>
@@ -12572,22 +9677,7 @@
           <a:ln>
             <a:noFill/>
           </a:ln>
-          <a:effectLst/>
-        </p:spPr>
-        <p:style>
-          <a:lnRef idx="1">
-            <a:schemeClr val="accent1"/>
-          </a:lnRef>
-          <a:fillRef idx="3">
-            <a:schemeClr val="accent1"/>
-          </a:fillRef>
-          <a:effectRef idx="2">
-            <a:schemeClr val="accent1"/>
-          </a:effectRef>
-          <a:fontRef idx="minor">
-            <a:schemeClr val="lt1"/>
-          </a:fontRef>
-        </p:style>
+        </p:spPr>
         <p:txBody>
           <a:bodyPr rtlCol="0" anchor="ctr" wrap="none" lIns="57292" rIns="57292" tIns="38195" bIns="38195"/>
           <a:lstStyle/>
@@ -12630,22 +9720,7 @@
           <a:ln>
             <a:noFill/>
           </a:ln>
-          <a:effectLst/>
-        </p:spPr>
-        <p:style>
-          <a:lnRef idx="1">
-            <a:schemeClr val="accent1"/>
-          </a:lnRef>
-          <a:fillRef idx="3">
-            <a:schemeClr val="accent1"/>
-          </a:fillRef>
-          <a:effectRef idx="2">
-            <a:schemeClr val="accent1"/>
-          </a:effectRef>
-          <a:fontRef idx="minor">
-            <a:schemeClr val="lt1"/>
-          </a:fontRef>
-        </p:style>
+        </p:spPr>
         <p:txBody>
           <a:bodyPr rtlCol="0" anchor="ctr" wrap="none" lIns="57292" rIns="57292" tIns="38195" bIns="38195"/>
           <a:lstStyle/>
@@ -12688,22 +9763,7 @@
           <a:ln>
             <a:noFill/>
           </a:ln>
-          <a:effectLst/>
-        </p:spPr>
-        <p:style>
-          <a:lnRef idx="1">
-            <a:schemeClr val="accent1"/>
-          </a:lnRef>
-          <a:fillRef idx="3">
-            <a:schemeClr val="accent1"/>
-          </a:fillRef>
-          <a:effectRef idx="2">
-            <a:schemeClr val="accent1"/>
-          </a:effectRef>
-          <a:fontRef idx="minor">
-            <a:schemeClr val="lt1"/>
-          </a:fontRef>
-        </p:style>
+        </p:spPr>
         <p:txBody>
           <a:bodyPr rtlCol="0" anchor="ctr" wrap="none" lIns="57292" rIns="57292" tIns="38195" bIns="38195"/>
           <a:lstStyle/>
@@ -12746,22 +9806,7 @@
           <a:ln>
             <a:noFill/>
           </a:ln>
-          <a:effectLst/>
-        </p:spPr>
-        <p:style>
-          <a:lnRef idx="1">
-            <a:schemeClr val="accent1"/>
-          </a:lnRef>
-          <a:fillRef idx="3">
-            <a:schemeClr val="accent1"/>
-          </a:fillRef>
-          <a:effectRef idx="2">
-            <a:schemeClr val="accent1"/>
-          </a:effectRef>
-          <a:fontRef idx="minor">
-            <a:schemeClr val="lt1"/>
-          </a:fontRef>
-        </p:style>
+        </p:spPr>
         <p:txBody>
           <a:bodyPr rtlCol="0" anchor="ctr" wrap="none" lIns="57292" rIns="57292" tIns="38195" bIns="38195"/>
           <a:lstStyle/>
@@ -12804,22 +9849,7 @@
           <a:ln>
             <a:noFill/>
           </a:ln>
-          <a:effectLst/>
-        </p:spPr>
-        <p:style>
-          <a:lnRef idx="1">
-            <a:schemeClr val="accent1"/>
-          </a:lnRef>
-          <a:fillRef idx="3">
-            <a:schemeClr val="accent1"/>
-          </a:fillRef>
-          <a:effectRef idx="2">
-            <a:schemeClr val="accent1"/>
-          </a:effectRef>
-          <a:fontRef idx="minor">
-            <a:schemeClr val="lt1"/>
-          </a:fontRef>
-        </p:style>
+        </p:spPr>
         <p:txBody>
           <a:bodyPr rtlCol="0" anchor="ctr" wrap="none" lIns="57292" rIns="57292" tIns="38195" bIns="38195"/>
           <a:lstStyle/>
@@ -12862,22 +9892,7 @@
           <a:ln>
             <a:noFill/>
           </a:ln>
-          <a:effectLst/>
-        </p:spPr>
-        <p:style>
-          <a:lnRef idx="1">
-            <a:schemeClr val="accent1"/>
-          </a:lnRef>
-          <a:fillRef idx="3">
-            <a:schemeClr val="accent1"/>
-          </a:fillRef>
-          <a:effectRef idx="2">
-            <a:schemeClr val="accent1"/>
-          </a:effectRef>
-          <a:fontRef idx="minor">
-            <a:schemeClr val="lt1"/>
-          </a:fontRef>
-        </p:style>
+        </p:spPr>
         <p:txBody>
           <a:bodyPr rtlCol="0" anchor="ctr" wrap="none" lIns="57292" rIns="57292" tIns="38195" bIns="38195"/>
           <a:lstStyle/>
@@ -12920,22 +9935,7 @@
           <a:ln>
             <a:noFill/>
           </a:ln>
-          <a:effectLst/>
-        </p:spPr>
-        <p:style>
-          <a:lnRef idx="1">
-            <a:schemeClr val="accent1"/>
-          </a:lnRef>
-          <a:fillRef idx="3">
-            <a:schemeClr val="accent1"/>
-          </a:fillRef>
-          <a:effectRef idx="2">
-            <a:schemeClr val="accent1"/>
-          </a:effectRef>
-          <a:fontRef idx="minor">
-            <a:schemeClr val="lt1"/>
-          </a:fontRef>
-        </p:style>
+        </p:spPr>
         <p:txBody>
           <a:bodyPr rtlCol="0" anchor="ctr" wrap="none" lIns="57292" rIns="57292" tIns="38195" bIns="38195"/>
           <a:lstStyle/>
@@ -12978,22 +9978,7 @@
           <a:ln>
             <a:noFill/>
           </a:ln>
-          <a:effectLst/>
-        </p:spPr>
-        <p:style>
-          <a:lnRef idx="1">
-            <a:schemeClr val="accent1"/>
-          </a:lnRef>
-          <a:fillRef idx="3">
-            <a:schemeClr val="accent1"/>
-          </a:fillRef>
-          <a:effectRef idx="2">
-            <a:schemeClr val="accent1"/>
-          </a:effectRef>
-          <a:fontRef idx="minor">
-            <a:schemeClr val="lt1"/>
-          </a:fontRef>
-        </p:style>
+        </p:spPr>
         <p:txBody>
           <a:bodyPr rtlCol="0" anchor="ctr" wrap="none" lIns="57292" rIns="57292" tIns="38195" bIns="38195"/>
           <a:lstStyle/>
@@ -13036,22 +10021,7 @@
           <a:ln>
             <a:noFill/>
           </a:ln>
-          <a:effectLst/>
-        </p:spPr>
-        <p:style>
-          <a:lnRef idx="1">
-            <a:schemeClr val="accent1"/>
-          </a:lnRef>
-          <a:fillRef idx="3">
-            <a:schemeClr val="accent1"/>
-          </a:fillRef>
-          <a:effectRef idx="2">
-            <a:schemeClr val="accent1"/>
-          </a:effectRef>
-          <a:fontRef idx="minor">
-            <a:schemeClr val="lt1"/>
-          </a:fontRef>
-        </p:style>
+        </p:spPr>
         <p:txBody>
           <a:bodyPr rtlCol="0" anchor="ctr" wrap="none" lIns="57292" rIns="57292" tIns="38195" bIns="38195"/>
           <a:lstStyle/>
@@ -13094,22 +10064,7 @@
           <a:ln>
             <a:noFill/>
           </a:ln>
-          <a:effectLst/>
-        </p:spPr>
-        <p:style>
-          <a:lnRef idx="1">
-            <a:schemeClr val="accent1"/>
-          </a:lnRef>
-          <a:fillRef idx="3">
-            <a:schemeClr val="accent1"/>
-          </a:fillRef>
-          <a:effectRef idx="2">
-            <a:schemeClr val="accent1"/>
-          </a:effectRef>
-          <a:fontRef idx="minor">
-            <a:schemeClr val="lt1"/>
-          </a:fontRef>
-        </p:style>
+        </p:spPr>
         <p:txBody>
           <a:bodyPr rtlCol="0" anchor="ctr" wrap="none" lIns="57292" rIns="57292" tIns="38195" bIns="38195"/>
           <a:lstStyle/>
@@ -13152,22 +10107,7 @@
           <a:ln>
             <a:noFill/>
           </a:ln>
-          <a:effectLst/>
-        </p:spPr>
-        <p:style>
-          <a:lnRef idx="1">
-            <a:schemeClr val="accent1"/>
-          </a:lnRef>
-          <a:fillRef idx="3">
-            <a:schemeClr val="accent1"/>
-          </a:fillRef>
-          <a:effectRef idx="2">
-            <a:schemeClr val="accent1"/>
-          </a:effectRef>
-          <a:fontRef idx="minor">
-            <a:schemeClr val="lt1"/>
-          </a:fontRef>
-        </p:style>
+        </p:spPr>
         <p:txBody>
           <a:bodyPr rtlCol="0" anchor="ctr" wrap="none" lIns="57292" rIns="57292" tIns="38195" bIns="38195"/>
           <a:lstStyle/>
@@ -13210,22 +10150,7 @@
           <a:ln>
             <a:noFill/>
           </a:ln>
-          <a:effectLst/>
-        </p:spPr>
-        <p:style>
-          <a:lnRef idx="1">
-            <a:schemeClr val="accent1"/>
-          </a:lnRef>
-          <a:fillRef idx="3">
-            <a:schemeClr val="accent1"/>
-          </a:fillRef>
-          <a:effectRef idx="2">
-            <a:schemeClr val="accent1"/>
-          </a:effectRef>
-          <a:fontRef idx="minor">
-            <a:schemeClr val="lt1"/>
-          </a:fontRef>
-        </p:style>
+        </p:spPr>
         <p:txBody>
           <a:bodyPr rtlCol="0" anchor="ctr" wrap="none" lIns="57292" rIns="57292" tIns="38195" bIns="38195"/>
           <a:lstStyle/>
@@ -13268,22 +10193,7 @@
           <a:ln>
             <a:noFill/>
           </a:ln>
-          <a:effectLst/>
-        </p:spPr>
-        <p:style>
-          <a:lnRef idx="1">
-            <a:schemeClr val="accent1"/>
-          </a:lnRef>
-          <a:fillRef idx="3">
-            <a:schemeClr val="accent1"/>
-          </a:fillRef>
-          <a:effectRef idx="2">
-            <a:schemeClr val="accent1"/>
-          </a:effectRef>
-          <a:fontRef idx="minor">
-            <a:schemeClr val="lt1"/>
-          </a:fontRef>
-        </p:style>
+        </p:spPr>
         <p:txBody>
           <a:bodyPr rtlCol="0" anchor="ctr" wrap="none" lIns="57292" rIns="57292" tIns="38195" bIns="38195"/>
           <a:lstStyle/>
@@ -13326,22 +10236,7 @@
           <a:ln>
             <a:noFill/>
           </a:ln>
-          <a:effectLst/>
-        </p:spPr>
-        <p:style>
-          <a:lnRef idx="1">
-            <a:schemeClr val="accent1"/>
-          </a:lnRef>
-          <a:fillRef idx="3">
-            <a:schemeClr val="accent1"/>
-          </a:fillRef>
-          <a:effectRef idx="2">
-            <a:schemeClr val="accent1"/>
-          </a:effectRef>
-          <a:fontRef idx="minor">
-            <a:schemeClr val="lt1"/>
-          </a:fontRef>
-        </p:style>
+        </p:spPr>
         <p:txBody>
           <a:bodyPr rtlCol="0" anchor="ctr" wrap="none" lIns="57292" rIns="57292" tIns="38195" bIns="38195"/>
           <a:lstStyle/>
@@ -13386,22 +10281,7 @@
           <a:ln>
             <a:noFill/>
           </a:ln>
-          <a:effectLst/>
-        </p:spPr>
-        <p:style>
-          <a:lnRef idx="1">
-            <a:schemeClr val="accent1"/>
-          </a:lnRef>
-          <a:fillRef idx="3">
-            <a:schemeClr val="accent1"/>
-          </a:fillRef>
-          <a:effectRef idx="2">
-            <a:schemeClr val="accent1"/>
-          </a:effectRef>
-          <a:fontRef idx="minor">
-            <a:schemeClr val="lt1"/>
-          </a:fontRef>
-        </p:style>
+        </p:spPr>
         <p:txBody>
           <a:bodyPr rtlCol="0" anchor="ctr"/>
           <a:lstStyle/>
@@ -13430,22 +10310,7 @@
           <a:ln>
             <a:noFill/>
           </a:ln>
-          <a:effectLst/>
-        </p:spPr>
-        <p:style>
-          <a:lnRef idx="1">
-            <a:schemeClr val="accent1"/>
-          </a:lnRef>
-          <a:fillRef idx="3">
-            <a:schemeClr val="accent1"/>
-          </a:fillRef>
-          <a:effectRef idx="2">
-            <a:schemeClr val="accent1"/>
-          </a:effectRef>
-          <a:fontRef idx="minor">
-            <a:schemeClr val="lt1"/>
-          </a:fontRef>
-        </p:style>
+        </p:spPr>
         <p:txBody>
           <a:bodyPr rtlCol="0" anchor="ctr"/>
           <a:lstStyle/>
@@ -13474,22 +10339,7 @@
           <a:ln>
             <a:noFill/>
           </a:ln>
-          <a:effectLst/>
-        </p:spPr>
-        <p:style>
-          <a:lnRef idx="1">
-            <a:schemeClr val="accent1"/>
-          </a:lnRef>
-          <a:fillRef idx="3">
-            <a:schemeClr val="accent1"/>
-          </a:fillRef>
-          <a:effectRef idx="2">
-            <a:schemeClr val="accent1"/>
-          </a:effectRef>
-          <a:fontRef idx="minor">
-            <a:schemeClr val="lt1"/>
-          </a:fontRef>
-        </p:style>
+        </p:spPr>
         <p:txBody>
           <a:bodyPr rtlCol="0" anchor="ctr"/>
           <a:lstStyle/>
@@ -13518,22 +10368,7 @@
           <a:ln>
             <a:noFill/>
           </a:ln>
-          <a:effectLst/>
-        </p:spPr>
-        <p:style>
-          <a:lnRef idx="1">
-            <a:schemeClr val="accent1"/>
-          </a:lnRef>
-          <a:fillRef idx="3">
-            <a:schemeClr val="accent1"/>
-          </a:fillRef>
-          <a:effectRef idx="2">
-            <a:schemeClr val="accent1"/>
-          </a:effectRef>
-          <a:fontRef idx="minor">
-            <a:schemeClr val="lt1"/>
-          </a:fontRef>
-        </p:style>
+        </p:spPr>
         <p:txBody>
           <a:bodyPr rtlCol="0" anchor="ctr"/>
           <a:lstStyle/>
@@ -13562,22 +10397,7 @@
           <a:ln>
             <a:noFill/>
           </a:ln>
-          <a:effectLst/>
-        </p:spPr>
-        <p:style>
-          <a:lnRef idx="1">
-            <a:schemeClr val="accent1"/>
-          </a:lnRef>
-          <a:fillRef idx="3">
-            <a:schemeClr val="accent1"/>
-          </a:fillRef>
-          <a:effectRef idx="2">
-            <a:schemeClr val="accent1"/>
-          </a:effectRef>
-          <a:fontRef idx="minor">
-            <a:schemeClr val="lt1"/>
-          </a:fontRef>
-        </p:style>
+        </p:spPr>
         <p:txBody>
           <a:bodyPr rtlCol="0" anchor="ctr"/>
           <a:lstStyle/>
@@ -13606,22 +10426,7 @@
           <a:ln>
             <a:noFill/>
           </a:ln>
-          <a:effectLst/>
-        </p:spPr>
-        <p:style>
-          <a:lnRef idx="1">
-            <a:schemeClr val="accent1"/>
-          </a:lnRef>
-          <a:fillRef idx="3">
-            <a:schemeClr val="accent1"/>
-          </a:fillRef>
-          <a:effectRef idx="2">
-            <a:schemeClr val="accent1"/>
-          </a:effectRef>
-          <a:fontRef idx="minor">
-            <a:schemeClr val="lt1"/>
-          </a:fontRef>
-        </p:style>
+        </p:spPr>
         <p:txBody>
           <a:bodyPr rtlCol="0" anchor="ctr"/>
           <a:lstStyle/>
@@ -13650,22 +10455,7 @@
           <a:ln>
             <a:noFill/>
           </a:ln>
-          <a:effectLst/>
-        </p:spPr>
-        <p:style>
-          <a:lnRef idx="1">
-            <a:schemeClr val="accent1"/>
-          </a:lnRef>
-          <a:fillRef idx="3">
-            <a:schemeClr val="accent1"/>
-          </a:fillRef>
-          <a:effectRef idx="2">
-            <a:schemeClr val="accent1"/>
-          </a:effectRef>
-          <a:fontRef idx="minor">
-            <a:schemeClr val="lt1"/>
-          </a:fontRef>
-        </p:style>
+        </p:spPr>
         <p:txBody>
           <a:bodyPr rtlCol="0" anchor="ctr"/>
           <a:lstStyle/>
@@ -13694,22 +10484,7 @@
           <a:ln>
             <a:noFill/>
           </a:ln>
-          <a:effectLst/>
-        </p:spPr>
-        <p:style>
-          <a:lnRef idx="1">
-            <a:schemeClr val="accent1"/>
-          </a:lnRef>
-          <a:fillRef idx="3">
-            <a:schemeClr val="accent1"/>
-          </a:fillRef>
-          <a:effectRef idx="2">
-            <a:schemeClr val="accent1"/>
-          </a:effectRef>
-          <a:fontRef idx="minor">
-            <a:schemeClr val="lt1"/>
-          </a:fontRef>
-        </p:style>
+        </p:spPr>
         <p:txBody>
           <a:bodyPr rtlCol="0" anchor="ctr"/>
           <a:lstStyle/>
@@ -13738,22 +10513,7 @@
           <a:ln>
             <a:noFill/>
           </a:ln>
-          <a:effectLst/>
-        </p:spPr>
-        <p:style>
-          <a:lnRef idx="1">
-            <a:schemeClr val="accent1"/>
-          </a:lnRef>
-          <a:fillRef idx="3">
-            <a:schemeClr val="accent1"/>
-          </a:fillRef>
-          <a:effectRef idx="2">
-            <a:schemeClr val="accent1"/>
-          </a:effectRef>
-          <a:fontRef idx="minor">
-            <a:schemeClr val="lt1"/>
-          </a:fontRef>
-        </p:style>
+        </p:spPr>
         <p:txBody>
           <a:bodyPr rtlCol="0" anchor="ctr"/>
           <a:lstStyle/>
@@ -13782,22 +10542,7 @@
           <a:ln>
             <a:noFill/>
           </a:ln>
-          <a:effectLst/>
-        </p:spPr>
-        <p:style>
-          <a:lnRef idx="1">
-            <a:schemeClr val="accent1"/>
-          </a:lnRef>
-          <a:fillRef idx="3">
-            <a:schemeClr val="accent1"/>
-          </a:fillRef>
-          <a:effectRef idx="2">
-            <a:schemeClr val="accent1"/>
-          </a:effectRef>
-          <a:fontRef idx="minor">
-            <a:schemeClr val="lt1"/>
-          </a:fontRef>
-        </p:style>
+        </p:spPr>
         <p:txBody>
           <a:bodyPr rtlCol="0" anchor="ctr"/>
           <a:lstStyle/>
@@ -13826,22 +10571,7 @@
           <a:ln>
             <a:noFill/>
           </a:ln>
-          <a:effectLst/>
-        </p:spPr>
-        <p:style>
-          <a:lnRef idx="1">
-            <a:schemeClr val="accent1"/>
-          </a:lnRef>
-          <a:fillRef idx="3">
-            <a:schemeClr val="accent1"/>
-          </a:fillRef>
-          <a:effectRef idx="2">
-            <a:schemeClr val="accent1"/>
-          </a:effectRef>
-          <a:fontRef idx="minor">
-            <a:schemeClr val="lt1"/>
-          </a:fontRef>
-        </p:style>
+        </p:spPr>
         <p:txBody>
           <a:bodyPr rtlCol="0" anchor="ctr"/>
           <a:lstStyle/>
@@ -13870,22 +10600,7 @@
           <a:ln>
             <a:noFill/>
           </a:ln>
-          <a:effectLst/>
-        </p:spPr>
-        <p:style>
-          <a:lnRef idx="1">
-            <a:schemeClr val="accent1"/>
-          </a:lnRef>
-          <a:fillRef idx="3">
-            <a:schemeClr val="accent1"/>
-          </a:fillRef>
-          <a:effectRef idx="2">
-            <a:schemeClr val="accent1"/>
-          </a:effectRef>
-          <a:fontRef idx="minor">
-            <a:schemeClr val="lt1"/>
-          </a:fontRef>
-        </p:style>
+        </p:spPr>
         <p:txBody>
           <a:bodyPr rtlCol="0" anchor="ctr"/>
           <a:lstStyle/>
@@ -13914,22 +10629,7 @@
           <a:ln>
             <a:noFill/>
           </a:ln>
-          <a:effectLst/>
-        </p:spPr>
-        <p:style>
-          <a:lnRef idx="1">
-            <a:schemeClr val="accent1"/>
-          </a:lnRef>
-          <a:fillRef idx="3">
-            <a:schemeClr val="accent1"/>
-          </a:fillRef>
-          <a:effectRef idx="2">
-            <a:schemeClr val="accent1"/>
-          </a:effectRef>
-          <a:fontRef idx="minor">
-            <a:schemeClr val="lt1"/>
-          </a:fontRef>
-        </p:style>
+        </p:spPr>
         <p:txBody>
           <a:bodyPr rtlCol="0" anchor="ctr"/>
           <a:lstStyle/>
@@ -13958,22 +10658,7 @@
           <a:ln>
             <a:noFill/>
           </a:ln>
-          <a:effectLst/>
-        </p:spPr>
-        <p:style>
-          <a:lnRef idx="1">
-            <a:schemeClr val="accent1"/>
-          </a:lnRef>
-          <a:fillRef idx="3">
-            <a:schemeClr val="accent1"/>
-          </a:fillRef>
-          <a:effectRef idx="2">
-            <a:schemeClr val="accent1"/>
-          </a:effectRef>
-          <a:fontRef idx="minor">
-            <a:schemeClr val="lt1"/>
-          </a:fontRef>
-        </p:style>
+        </p:spPr>
         <p:txBody>
           <a:bodyPr rtlCol="0" anchor="ctr"/>
           <a:lstStyle/>
@@ -14002,22 +10687,7 @@
           <a:ln>
             <a:noFill/>
           </a:ln>
-          <a:effectLst/>
-        </p:spPr>
-        <p:style>
-          <a:lnRef idx="1">
-            <a:schemeClr val="accent1"/>
-          </a:lnRef>
-          <a:fillRef idx="3">
-            <a:schemeClr val="accent1"/>
-          </a:fillRef>
-          <a:effectRef idx="2">
-            <a:schemeClr val="accent1"/>
-          </a:effectRef>
-          <a:fontRef idx="minor">
-            <a:schemeClr val="lt1"/>
-          </a:fontRef>
-        </p:style>
+        </p:spPr>
         <p:txBody>
           <a:bodyPr rtlCol="0" anchor="ctr"/>
           <a:lstStyle/>
@@ -14046,22 +10716,7 @@
           <a:ln>
             <a:noFill/>
           </a:ln>
-          <a:effectLst/>
-        </p:spPr>
-        <p:style>
-          <a:lnRef idx="1">
-            <a:schemeClr val="accent1"/>
-          </a:lnRef>
-          <a:fillRef idx="3">
-            <a:schemeClr val="accent1"/>
-          </a:fillRef>
-          <a:effectRef idx="2">
-            <a:schemeClr val="accent1"/>
-          </a:effectRef>
-          <a:fontRef idx="minor">
-            <a:schemeClr val="lt1"/>
-          </a:fontRef>
-        </p:style>
+        </p:spPr>
         <p:txBody>
           <a:bodyPr rtlCol="0" anchor="ctr"/>
           <a:lstStyle/>
@@ -14090,22 +10745,7 @@
           <a:ln>
             <a:noFill/>
           </a:ln>
-          <a:effectLst/>
-        </p:spPr>
-        <p:style>
-          <a:lnRef idx="1">
-            <a:schemeClr val="accent1"/>
-          </a:lnRef>
-          <a:fillRef idx="3">
-            <a:schemeClr val="accent1"/>
-          </a:fillRef>
-          <a:effectRef idx="2">
-            <a:schemeClr val="accent1"/>
-          </a:effectRef>
-          <a:fontRef idx="minor">
-            <a:schemeClr val="lt1"/>
-          </a:fontRef>
-        </p:style>
+        </p:spPr>
         <p:txBody>
           <a:bodyPr rtlCol="0" anchor="ctr"/>
           <a:lstStyle/>
@@ -14134,22 +10774,7 @@
           <a:ln>
             <a:noFill/>
           </a:ln>
-          <a:effectLst/>
-        </p:spPr>
-        <p:style>
-          <a:lnRef idx="1">
-            <a:schemeClr val="accent1"/>
-          </a:lnRef>
-          <a:fillRef idx="3">
-            <a:schemeClr val="accent1"/>
-          </a:fillRef>
-          <a:effectRef idx="2">
-            <a:schemeClr val="accent1"/>
-          </a:effectRef>
-          <a:fontRef idx="minor">
-            <a:schemeClr val="lt1"/>
-          </a:fontRef>
-        </p:style>
+        </p:spPr>
         <p:txBody>
           <a:bodyPr rtlCol="0" anchor="ctr"/>
           <a:lstStyle/>
@@ -14178,22 +10803,7 @@
           <a:ln>
             <a:noFill/>
           </a:ln>
-          <a:effectLst/>
-        </p:spPr>
-        <p:style>
-          <a:lnRef idx="1">
-            <a:schemeClr val="accent1"/>
-          </a:lnRef>
-          <a:fillRef idx="3">
-            <a:schemeClr val="accent1"/>
-          </a:fillRef>
-          <a:effectRef idx="2">
-            <a:schemeClr val="accent1"/>
-          </a:effectRef>
-          <a:fontRef idx="minor">
-            <a:schemeClr val="lt1"/>
-          </a:fontRef>
-        </p:style>
+        </p:spPr>
         <p:txBody>
           <a:bodyPr rtlCol="0" anchor="ctr"/>
           <a:lstStyle/>
@@ -14222,22 +10832,7 @@
           <a:ln>
             <a:noFill/>
           </a:ln>
-          <a:effectLst/>
-        </p:spPr>
-        <p:style>
-          <a:lnRef idx="1">
-            <a:schemeClr val="accent1"/>
-          </a:lnRef>
-          <a:fillRef idx="3">
-            <a:schemeClr val="accent1"/>
-          </a:fillRef>
-          <a:effectRef idx="2">
-            <a:schemeClr val="accent1"/>
-          </a:effectRef>
-          <a:fontRef idx="minor">
-            <a:schemeClr val="lt1"/>
-          </a:fontRef>
-        </p:style>
+        </p:spPr>
         <p:txBody>
           <a:bodyPr rtlCol="0" anchor="ctr"/>
           <a:lstStyle/>
@@ -14266,22 +10861,7 @@
           <a:ln>
             <a:noFill/>
           </a:ln>
-          <a:effectLst/>
-        </p:spPr>
-        <p:style>
-          <a:lnRef idx="1">
-            <a:schemeClr val="accent1"/>
-          </a:lnRef>
-          <a:fillRef idx="3">
-            <a:schemeClr val="accent1"/>
-          </a:fillRef>
-          <a:effectRef idx="2">
-            <a:schemeClr val="accent1"/>
-          </a:effectRef>
-          <a:fontRef idx="minor">
-            <a:schemeClr val="lt1"/>
-          </a:fontRef>
-        </p:style>
+        </p:spPr>
         <p:txBody>
           <a:bodyPr rtlCol="0" anchor="ctr"/>
           <a:lstStyle/>
@@ -14310,22 +10890,7 @@
           <a:ln>
             <a:noFill/>
           </a:ln>
-          <a:effectLst/>
-        </p:spPr>
-        <p:style>
-          <a:lnRef idx="1">
-            <a:schemeClr val="accent1"/>
-          </a:lnRef>
-          <a:fillRef idx="3">
-            <a:schemeClr val="accent1"/>
-          </a:fillRef>
-          <a:effectRef idx="2">
-            <a:schemeClr val="accent1"/>
-          </a:effectRef>
-          <a:fontRef idx="minor">
-            <a:schemeClr val="lt1"/>
-          </a:fontRef>
-        </p:style>
+        </p:spPr>
         <p:txBody>
           <a:bodyPr rtlCol="0" anchor="ctr"/>
           <a:lstStyle/>
@@ -14354,22 +10919,7 @@
           <a:ln>
             <a:noFill/>
           </a:ln>
-          <a:effectLst/>
-        </p:spPr>
-        <p:style>
-          <a:lnRef idx="1">
-            <a:schemeClr val="accent1"/>
-          </a:lnRef>
-          <a:fillRef idx="3">
-            <a:schemeClr val="accent1"/>
-          </a:fillRef>
-          <a:effectRef idx="2">
-            <a:schemeClr val="accent1"/>
-          </a:effectRef>
-          <a:fontRef idx="minor">
-            <a:schemeClr val="lt1"/>
-          </a:fontRef>
-        </p:style>
+        </p:spPr>
         <p:txBody>
           <a:bodyPr rtlCol="0" anchor="ctr"/>
           <a:lstStyle/>
@@ -14398,22 +10948,7 @@
           <a:ln>
             <a:noFill/>
           </a:ln>
-          <a:effectLst/>
-        </p:spPr>
-        <p:style>
-          <a:lnRef idx="1">
-            <a:schemeClr val="accent1"/>
-          </a:lnRef>
-          <a:fillRef idx="3">
-            <a:schemeClr val="accent1"/>
-          </a:fillRef>
-          <a:effectRef idx="2">
-            <a:schemeClr val="accent1"/>
-          </a:effectRef>
-          <a:fontRef idx="minor">
-            <a:schemeClr val="lt1"/>
-          </a:fontRef>
-        </p:style>
+        </p:spPr>
         <p:txBody>
           <a:bodyPr rtlCol="0" anchor="ctr"/>
           <a:lstStyle/>
@@ -14442,22 +10977,7 @@
           <a:ln>
             <a:noFill/>
           </a:ln>
-          <a:effectLst/>
-        </p:spPr>
-        <p:style>
-          <a:lnRef idx="1">
-            <a:schemeClr val="accent1"/>
-          </a:lnRef>
-          <a:fillRef idx="3">
-            <a:schemeClr val="accent1"/>
-          </a:fillRef>
-          <a:effectRef idx="2">
-            <a:schemeClr val="accent1"/>
-          </a:effectRef>
-          <a:fontRef idx="minor">
-            <a:schemeClr val="lt1"/>
-          </a:fontRef>
-        </p:style>
+        </p:spPr>
         <p:txBody>
           <a:bodyPr rtlCol="0" anchor="ctr"/>
           <a:lstStyle/>
@@ -14486,22 +11006,7 @@
           <a:ln>
             <a:noFill/>
           </a:ln>
-          <a:effectLst/>
-        </p:spPr>
-        <p:style>
-          <a:lnRef idx="1">
-            <a:schemeClr val="accent1"/>
-          </a:lnRef>
-          <a:fillRef idx="3">
-            <a:schemeClr val="accent1"/>
-          </a:fillRef>
-          <a:effectRef idx="2">
-            <a:schemeClr val="accent1"/>
-          </a:effectRef>
-          <a:fontRef idx="minor">
-            <a:schemeClr val="lt1"/>
-          </a:fontRef>
-        </p:style>
+        </p:spPr>
         <p:txBody>
           <a:bodyPr rtlCol="0" anchor="ctr"/>
           <a:lstStyle/>
@@ -14530,22 +11035,7 @@
           <a:ln>
             <a:noFill/>
           </a:ln>
-          <a:effectLst/>
-        </p:spPr>
-        <p:style>
-          <a:lnRef idx="1">
-            <a:schemeClr val="accent1"/>
-          </a:lnRef>
-          <a:fillRef idx="3">
-            <a:schemeClr val="accent1"/>
-          </a:fillRef>
-          <a:effectRef idx="2">
-            <a:schemeClr val="accent1"/>
-          </a:effectRef>
-          <a:fontRef idx="minor">
-            <a:schemeClr val="lt1"/>
-          </a:fontRef>
-        </p:style>
+        </p:spPr>
         <p:txBody>
           <a:bodyPr rtlCol="0" anchor="ctr"/>
           <a:lstStyle/>
@@ -14574,22 +11064,7 @@
           <a:ln>
             <a:noFill/>
           </a:ln>
-          <a:effectLst/>
-        </p:spPr>
-        <p:style>
-          <a:lnRef idx="1">
-            <a:schemeClr val="accent1"/>
-          </a:lnRef>
-          <a:fillRef idx="3">
-            <a:schemeClr val="accent1"/>
-          </a:fillRef>
-          <a:effectRef idx="2">
-            <a:schemeClr val="accent1"/>
-          </a:effectRef>
-          <a:fontRef idx="minor">
-            <a:schemeClr val="lt1"/>
-          </a:fontRef>
-        </p:style>
+        </p:spPr>
         <p:txBody>
           <a:bodyPr rtlCol="0" anchor="ctr"/>
           <a:lstStyle/>
@@ -14618,22 +11093,7 @@
           <a:ln>
             <a:noFill/>
           </a:ln>
-          <a:effectLst/>
-        </p:spPr>
-        <p:style>
-          <a:lnRef idx="1">
-            <a:schemeClr val="accent1"/>
-          </a:lnRef>
-          <a:fillRef idx="3">
-            <a:schemeClr val="accent1"/>
-          </a:fillRef>
-          <a:effectRef idx="2">
-            <a:schemeClr val="accent1"/>
-          </a:effectRef>
-          <a:fontRef idx="minor">
-            <a:schemeClr val="lt1"/>
-          </a:fontRef>
-        </p:style>
+        </p:spPr>
         <p:txBody>
           <a:bodyPr rtlCol="0" anchor="ctr"/>
           <a:lstStyle/>
@@ -14662,22 +11122,7 @@
           <a:ln>
             <a:noFill/>
           </a:ln>
-          <a:effectLst/>
-        </p:spPr>
-        <p:style>
-          <a:lnRef idx="1">
-            <a:schemeClr val="accent1"/>
-          </a:lnRef>
-          <a:fillRef idx="3">
-            <a:schemeClr val="accent1"/>
-          </a:fillRef>
-          <a:effectRef idx="2">
-            <a:schemeClr val="accent1"/>
-          </a:effectRef>
-          <a:fontRef idx="minor">
-            <a:schemeClr val="lt1"/>
-          </a:fontRef>
-        </p:style>
+        </p:spPr>
         <p:txBody>
           <a:bodyPr rtlCol="0" anchor="ctr"/>
           <a:lstStyle/>
@@ -14706,22 +11151,7 @@
           <a:ln>
             <a:noFill/>
           </a:ln>
-          <a:effectLst/>
-        </p:spPr>
-        <p:style>
-          <a:lnRef idx="1">
-            <a:schemeClr val="accent1"/>
-          </a:lnRef>
-          <a:fillRef idx="3">
-            <a:schemeClr val="accent1"/>
-          </a:fillRef>
-          <a:effectRef idx="2">
-            <a:schemeClr val="accent1"/>
-          </a:effectRef>
-          <a:fontRef idx="minor">
-            <a:schemeClr val="lt1"/>
-          </a:fontRef>
-        </p:style>
+        </p:spPr>
         <p:txBody>
           <a:bodyPr rtlCol="0" anchor="ctr"/>
           <a:lstStyle/>
@@ -14750,22 +11180,7 @@
           <a:ln>
             <a:noFill/>
           </a:ln>
-          <a:effectLst/>
-        </p:spPr>
-        <p:style>
-          <a:lnRef idx="1">
-            <a:schemeClr val="accent1"/>
-          </a:lnRef>
-          <a:fillRef idx="3">
-            <a:schemeClr val="accent1"/>
-          </a:fillRef>
-          <a:effectRef idx="2">
-            <a:schemeClr val="accent1"/>
-          </a:effectRef>
-          <a:fontRef idx="minor">
-            <a:schemeClr val="lt1"/>
-          </a:fontRef>
-        </p:style>
+        </p:spPr>
         <p:txBody>
           <a:bodyPr rtlCol="0" anchor="ctr"/>
           <a:lstStyle/>
@@ -14794,22 +11209,7 @@
           <a:ln>
             <a:noFill/>
           </a:ln>
-          <a:effectLst/>
-        </p:spPr>
-        <p:style>
-          <a:lnRef idx="1">
-            <a:schemeClr val="accent1"/>
-          </a:lnRef>
-          <a:fillRef idx="3">
-            <a:schemeClr val="accent1"/>
-          </a:fillRef>
-          <a:effectRef idx="2">
-            <a:schemeClr val="accent1"/>
-          </a:effectRef>
-          <a:fontRef idx="minor">
-            <a:schemeClr val="lt1"/>
-          </a:fontRef>
-        </p:style>
+        </p:spPr>
         <p:txBody>
           <a:bodyPr rtlCol="0" anchor="ctr"/>
           <a:lstStyle/>
@@ -14838,22 +11238,7 @@
           <a:ln>
             <a:noFill/>
           </a:ln>
-          <a:effectLst/>
-        </p:spPr>
-        <p:style>
-          <a:lnRef idx="1">
-            <a:schemeClr val="accent1"/>
-          </a:lnRef>
-          <a:fillRef idx="3">
-            <a:schemeClr val="accent1"/>
-          </a:fillRef>
-          <a:effectRef idx="2">
-            <a:schemeClr val="accent1"/>
-          </a:effectRef>
-          <a:fontRef idx="minor">
-            <a:schemeClr val="lt1"/>
-          </a:fontRef>
-        </p:style>
+        </p:spPr>
         <p:txBody>
           <a:bodyPr rtlCol="0" anchor="ctr"/>
           <a:lstStyle/>
@@ -14882,22 +11267,7 @@
           <a:ln>
             <a:noFill/>
           </a:ln>
-          <a:effectLst/>
-        </p:spPr>
-        <p:style>
-          <a:lnRef idx="1">
-            <a:schemeClr val="accent1"/>
-          </a:lnRef>
-          <a:fillRef idx="3">
-            <a:schemeClr val="accent1"/>
-          </a:fillRef>
-          <a:effectRef idx="2">
-            <a:schemeClr val="accent1"/>
-          </a:effectRef>
-          <a:fontRef idx="minor">
-            <a:schemeClr val="lt1"/>
-          </a:fontRef>
-        </p:style>
+        </p:spPr>
         <p:txBody>
           <a:bodyPr rtlCol="0" anchor="ctr"/>
           <a:lstStyle/>
@@ -14926,22 +11296,7 @@
           <a:ln>
             <a:noFill/>
           </a:ln>
-          <a:effectLst/>
-        </p:spPr>
-        <p:style>
-          <a:lnRef idx="1">
-            <a:schemeClr val="accent1"/>
-          </a:lnRef>
-          <a:fillRef idx="3">
-            <a:schemeClr val="accent1"/>
-          </a:fillRef>
-          <a:effectRef idx="2">
-            <a:schemeClr val="accent1"/>
-          </a:effectRef>
-          <a:fontRef idx="minor">
-            <a:schemeClr val="lt1"/>
-          </a:fontRef>
-        </p:style>
+        </p:spPr>
         <p:txBody>
           <a:bodyPr rtlCol="0" anchor="ctr"/>
           <a:lstStyle/>
@@ -14970,22 +11325,7 @@
           <a:ln>
             <a:noFill/>
           </a:ln>
-          <a:effectLst/>
-        </p:spPr>
-        <p:style>
-          <a:lnRef idx="1">
-            <a:schemeClr val="accent1"/>
-          </a:lnRef>
-          <a:fillRef idx="3">
-            <a:schemeClr val="accent1"/>
-          </a:fillRef>
-          <a:effectRef idx="2">
-            <a:schemeClr val="accent1"/>
-          </a:effectRef>
-          <a:fontRef idx="minor">
-            <a:schemeClr val="lt1"/>
-          </a:fontRef>
-        </p:style>
+        </p:spPr>
         <p:txBody>
           <a:bodyPr rtlCol="0" anchor="ctr"/>
           <a:lstStyle/>
@@ -15014,22 +11354,7 @@
           <a:ln>
             <a:noFill/>
           </a:ln>
-          <a:effectLst/>
-        </p:spPr>
-        <p:style>
-          <a:lnRef idx="1">
-            <a:schemeClr val="accent1"/>
-          </a:lnRef>
-          <a:fillRef idx="3">
-            <a:schemeClr val="accent1"/>
-          </a:fillRef>
-          <a:effectRef idx="2">
-            <a:schemeClr val="accent1"/>
-          </a:effectRef>
-          <a:fontRef idx="minor">
-            <a:schemeClr val="lt1"/>
-          </a:fontRef>
-        </p:style>
+        </p:spPr>
         <p:txBody>
           <a:bodyPr rtlCol="0" anchor="ctr"/>
           <a:lstStyle/>
@@ -15058,22 +11383,7 @@
           <a:ln>
             <a:noFill/>
           </a:ln>
-          <a:effectLst/>
-        </p:spPr>
-        <p:style>
-          <a:lnRef idx="1">
-            <a:schemeClr val="accent1"/>
-          </a:lnRef>
-          <a:fillRef idx="3">
-            <a:schemeClr val="accent1"/>
-          </a:fillRef>
-          <a:effectRef idx="2">
-            <a:schemeClr val="accent1"/>
-          </a:effectRef>
-          <a:fontRef idx="minor">
-            <a:schemeClr val="lt1"/>
-          </a:fontRef>
-        </p:style>
+        </p:spPr>
         <p:txBody>
           <a:bodyPr rtlCol="0" anchor="ctr"/>
           <a:lstStyle/>
@@ -15102,22 +11412,7 @@
           <a:ln>
             <a:noFill/>
           </a:ln>
-          <a:effectLst/>
-        </p:spPr>
-        <p:style>
-          <a:lnRef idx="1">
-            <a:schemeClr val="accent1"/>
-          </a:lnRef>
-          <a:fillRef idx="3">
-            <a:schemeClr val="accent1"/>
-          </a:fillRef>
-          <a:effectRef idx="2">
-            <a:schemeClr val="accent1"/>
-          </a:effectRef>
-          <a:fontRef idx="minor">
-            <a:schemeClr val="lt1"/>
-          </a:fontRef>
-        </p:style>
+        </p:spPr>
         <p:txBody>
           <a:bodyPr rtlCol="0" anchor="ctr"/>
           <a:lstStyle/>
@@ -15146,22 +11441,7 @@
           <a:ln>
             <a:noFill/>
           </a:ln>
-          <a:effectLst/>
-        </p:spPr>
-        <p:style>
-          <a:lnRef idx="1">
-            <a:schemeClr val="accent1"/>
-          </a:lnRef>
-          <a:fillRef idx="3">
-            <a:schemeClr val="accent1"/>
-          </a:fillRef>
-          <a:effectRef idx="2">
-            <a:schemeClr val="accent1"/>
-          </a:effectRef>
-          <a:fontRef idx="minor">
-            <a:schemeClr val="lt1"/>
-          </a:fontRef>
-        </p:style>
+        </p:spPr>
         <p:txBody>
           <a:bodyPr rtlCol="0" anchor="ctr"/>
           <a:lstStyle/>
@@ -15190,22 +11470,7 @@
           <a:ln>
             <a:noFill/>
           </a:ln>
-          <a:effectLst/>
-        </p:spPr>
-        <p:style>
-          <a:lnRef idx="1">
-            <a:schemeClr val="accent1"/>
-          </a:lnRef>
-          <a:fillRef idx="3">
-            <a:schemeClr val="accent1"/>
-          </a:fillRef>
-          <a:effectRef idx="2">
-            <a:schemeClr val="accent1"/>
-          </a:effectRef>
-          <a:fontRef idx="minor">
-            <a:schemeClr val="lt1"/>
-          </a:fontRef>
-        </p:style>
+        </p:spPr>
         <p:txBody>
           <a:bodyPr rtlCol="0" anchor="ctr"/>
           <a:lstStyle/>
@@ -15234,22 +11499,7 @@
           <a:ln>
             <a:noFill/>
           </a:ln>
-          <a:effectLst/>
-        </p:spPr>
-        <p:style>
-          <a:lnRef idx="1">
-            <a:schemeClr val="accent1"/>
-          </a:lnRef>
-          <a:fillRef idx="3">
-            <a:schemeClr val="accent1"/>
-          </a:fillRef>
-          <a:effectRef idx="2">
-            <a:schemeClr val="accent1"/>
-          </a:effectRef>
-          <a:fontRef idx="minor">
-            <a:schemeClr val="lt1"/>
-          </a:fontRef>
-        </p:style>
+        </p:spPr>
         <p:txBody>
           <a:bodyPr rtlCol="0" anchor="ctr"/>
           <a:lstStyle/>
@@ -15278,22 +11528,7 @@
           <a:ln>
             <a:noFill/>
           </a:ln>
-          <a:effectLst/>
-        </p:spPr>
-        <p:style>
-          <a:lnRef idx="1">
-            <a:schemeClr val="accent1"/>
-          </a:lnRef>
-          <a:fillRef idx="3">
-            <a:schemeClr val="accent1"/>
-          </a:fillRef>
-          <a:effectRef idx="2">
-            <a:schemeClr val="accent1"/>
-          </a:effectRef>
-          <a:fontRef idx="minor">
-            <a:schemeClr val="lt1"/>
-          </a:fontRef>
-        </p:style>
+        </p:spPr>
         <p:txBody>
           <a:bodyPr rtlCol="0" anchor="ctr"/>
           <a:lstStyle/>
@@ -15322,22 +11557,7 @@
           <a:ln>
             <a:noFill/>
           </a:ln>
-          <a:effectLst/>
-        </p:spPr>
-        <p:style>
-          <a:lnRef idx="1">
-            <a:schemeClr val="accent1"/>
-          </a:lnRef>
-          <a:fillRef idx="3">
-            <a:schemeClr val="accent1"/>
-          </a:fillRef>
-          <a:effectRef idx="2">
-            <a:schemeClr val="accent1"/>
-          </a:effectRef>
-          <a:fontRef idx="minor">
-            <a:schemeClr val="lt1"/>
-          </a:fontRef>
-        </p:style>
+        </p:spPr>
         <p:txBody>
           <a:bodyPr rtlCol="0" anchor="ctr"/>
           <a:lstStyle/>
@@ -15370,9 +11590,9 @@
           <a:p>
             <a:pPr algn="l"/>
             <a:r>
-              <a:rPr sz="900" b="0">
+              <a:rPr sz="1100" b="1">
                 <a:solidFill>
-                  <a:srgbClr val="555555"/>
+                  <a:srgbClr val="1A1A1A"/>
                 </a:solidFill>
                 <a:latin typeface="Arial"/>
               </a:rPr>

--- a/output/svet-moy-zerkalce-letters.pptx
+++ b/output/svet-moy-zerkalce-letters.pptx
@@ -3099,8 +3099,8 @@
         </p:nvSpPr>
         <p:spPr>
           <a:xfrm>
-            <a:off x="514302" y="400762"/>
-            <a:ext cx="2177131" cy="1684412"/>
+            <a:off x="652311" y="400762"/>
+            <a:ext cx="1563844" cy="2021294"/>
           </a:xfrm>
           <a:prstGeom prst="rect">
             <a:avLst/>
@@ -3111,10 +3111,13 @@
           </a:ln>
         </p:spPr>
         <p:txBody>
-          <a:bodyPr rtlCol="0" anchor="ctr" wrap="none" lIns="57292" rIns="57292" tIns="38195" bIns="38195"/>
+          <a:bodyPr rtlCol="0" anchor="ctr" wrap="none" lIns="70922" rIns="70922" tIns="70922" bIns="70922"/>
           <a:lstStyle/>
           <a:p>
             <a:pPr algn="ctr">
+              <a:lnSpc>
+                <a:spcPct val="100000"/>
+              </a:lnSpc>
               <a:spcBef>
                 <a:spcPts val="0"/>
               </a:spcBef>
@@ -3123,7 +3126,7 @@
               </a:spcAft>
             </a:pPr>
             <a:r>
-              <a:rPr sz="2800" b="1">
+              <a:rPr sz="10410" b="1">
                 <a:solidFill>
                   <a:srgbClr val="1A1A1A"/>
                 </a:solidFill>
@@ -3142,8 +3145,8 @@
         </p:nvSpPr>
         <p:spPr>
           <a:xfrm>
-            <a:off x="2691434" y="400762"/>
-            <a:ext cx="2177131" cy="1684412"/>
+            <a:off x="2216155" y="400762"/>
+            <a:ext cx="1563844" cy="2021294"/>
           </a:xfrm>
           <a:prstGeom prst="rect">
             <a:avLst/>
@@ -3154,10 +3157,13 @@
           </a:ln>
         </p:spPr>
         <p:txBody>
-          <a:bodyPr rtlCol="0" anchor="ctr" wrap="none" lIns="57292" rIns="57292" tIns="38195" bIns="38195"/>
+          <a:bodyPr rtlCol="0" anchor="ctr" wrap="none" lIns="70922" rIns="70922" tIns="70922" bIns="70922"/>
           <a:lstStyle/>
           <a:p>
             <a:pPr algn="ctr">
+              <a:lnSpc>
+                <a:spcPct val="100000"/>
+              </a:lnSpc>
               <a:spcBef>
                 <a:spcPts val="0"/>
               </a:spcBef>
@@ -3166,7 +3172,7 @@
               </a:spcAft>
             </a:pPr>
             <a:r>
-              <a:rPr sz="2800" b="1">
+              <a:rPr sz="10410" b="1">
                 <a:solidFill>
                   <a:srgbClr val="1A1A1A"/>
                 </a:solidFill>
@@ -3185,8 +3191,8 @@
         </p:nvSpPr>
         <p:spPr>
           <a:xfrm>
-            <a:off x="4868565" y="400762"/>
-            <a:ext cx="2177131" cy="1684412"/>
+            <a:off x="3780000" y="400762"/>
+            <a:ext cx="1563844" cy="2021294"/>
           </a:xfrm>
           <a:prstGeom prst="rect">
             <a:avLst/>
@@ -3197,10 +3203,13 @@
           </a:ln>
         </p:spPr>
         <p:txBody>
-          <a:bodyPr rtlCol="0" anchor="ctr" wrap="none" lIns="57292" rIns="57292" tIns="38195" bIns="38195"/>
+          <a:bodyPr rtlCol="0" anchor="ctr" wrap="none" lIns="70922" rIns="70922" tIns="70922" bIns="70922"/>
           <a:lstStyle/>
           <a:p>
             <a:pPr algn="ctr">
+              <a:lnSpc>
+                <a:spcPct val="100000"/>
+              </a:lnSpc>
               <a:spcBef>
                 <a:spcPts val="0"/>
               </a:spcBef>
@@ -3209,7 +3218,7 @@
               </a:spcAft>
             </a:pPr>
             <a:r>
-              <a:rPr sz="2800" b="1">
+              <a:rPr sz="10410" b="1">
                 <a:solidFill>
                   <a:srgbClr val="1A1A1A"/>
                 </a:solidFill>
@@ -3228,8 +3237,8 @@
         </p:nvSpPr>
         <p:spPr>
           <a:xfrm>
-            <a:off x="514302" y="2085175"/>
-            <a:ext cx="2177131" cy="1684412"/>
+            <a:off x="5343844" y="400762"/>
+            <a:ext cx="1563844" cy="2021294"/>
           </a:xfrm>
           <a:prstGeom prst="rect">
             <a:avLst/>
@@ -3240,10 +3249,13 @@
           </a:ln>
         </p:spPr>
         <p:txBody>
-          <a:bodyPr rtlCol="0" anchor="ctr" wrap="none" lIns="57292" rIns="57292" tIns="38195" bIns="38195"/>
+          <a:bodyPr rtlCol="0" anchor="ctr" wrap="none" lIns="70922" rIns="70922" tIns="70922" bIns="70922"/>
           <a:lstStyle/>
           <a:p>
             <a:pPr algn="ctr">
+              <a:lnSpc>
+                <a:spcPct val="100000"/>
+              </a:lnSpc>
               <a:spcBef>
                 <a:spcPts val="0"/>
               </a:spcBef>
@@ -3252,7 +3264,7 @@
               </a:spcAft>
             </a:pPr>
             <a:r>
-              <a:rPr sz="2800" b="1">
+              <a:rPr sz="10410" b="1">
                 <a:solidFill>
                   <a:srgbClr val="1A1A1A"/>
                 </a:solidFill>
@@ -3271,8 +3283,8 @@
         </p:nvSpPr>
         <p:spPr>
           <a:xfrm>
-            <a:off x="2691434" y="2085175"/>
-            <a:ext cx="2177131" cy="1684412"/>
+            <a:off x="652311" y="2422057"/>
+            <a:ext cx="1563844" cy="2021294"/>
           </a:xfrm>
           <a:prstGeom prst="rect">
             <a:avLst/>
@@ -3283,10 +3295,13 @@
           </a:ln>
         </p:spPr>
         <p:txBody>
-          <a:bodyPr rtlCol="0" anchor="ctr" wrap="none" lIns="57292" rIns="57292" tIns="38195" bIns="38195"/>
+          <a:bodyPr rtlCol="0" anchor="ctr" wrap="none" lIns="70922" rIns="70922" tIns="70922" bIns="70922"/>
           <a:lstStyle/>
           <a:p>
             <a:pPr algn="ctr">
+              <a:lnSpc>
+                <a:spcPct val="100000"/>
+              </a:lnSpc>
               <a:spcBef>
                 <a:spcPts val="0"/>
               </a:spcBef>
@@ -3295,7 +3310,7 @@
               </a:spcAft>
             </a:pPr>
             <a:r>
-              <a:rPr sz="2800" b="1">
+              <a:rPr sz="10410" b="1">
                 <a:solidFill>
                   <a:srgbClr val="1A1A1A"/>
                 </a:solidFill>
@@ -3314,8 +3329,8 @@
         </p:nvSpPr>
         <p:spPr>
           <a:xfrm>
-            <a:off x="4868565" y="2085175"/>
-            <a:ext cx="2177131" cy="1684412"/>
+            <a:off x="2216155" y="2422057"/>
+            <a:ext cx="1563844" cy="2021294"/>
           </a:xfrm>
           <a:prstGeom prst="rect">
             <a:avLst/>
@@ -3326,10 +3341,13 @@
           </a:ln>
         </p:spPr>
         <p:txBody>
-          <a:bodyPr rtlCol="0" anchor="ctr" wrap="none" lIns="57292" rIns="57292" tIns="38195" bIns="38195"/>
+          <a:bodyPr rtlCol="0" anchor="ctr" wrap="none" lIns="70922" rIns="70922" tIns="70922" bIns="70922"/>
           <a:lstStyle/>
           <a:p>
             <a:pPr algn="ctr">
+              <a:lnSpc>
+                <a:spcPct val="100000"/>
+              </a:lnSpc>
               <a:spcBef>
                 <a:spcPts val="0"/>
               </a:spcBef>
@@ -3338,7 +3356,7 @@
               </a:spcAft>
             </a:pPr>
             <a:r>
-              <a:rPr sz="2800" b="1">
+              <a:rPr sz="10410" b="1">
                 <a:solidFill>
                   <a:srgbClr val="1A1A1A"/>
                 </a:solidFill>
@@ -3357,8 +3375,8 @@
         </p:nvSpPr>
         <p:spPr>
           <a:xfrm>
-            <a:off x="514302" y="3769587"/>
-            <a:ext cx="2177131" cy="1684412"/>
+            <a:off x="3780000" y="2422057"/>
+            <a:ext cx="1563844" cy="2021294"/>
           </a:xfrm>
           <a:prstGeom prst="rect">
             <a:avLst/>
@@ -3369,10 +3387,13 @@
           </a:ln>
         </p:spPr>
         <p:txBody>
-          <a:bodyPr rtlCol="0" anchor="ctr" wrap="none" lIns="57292" rIns="57292" tIns="38195" bIns="38195"/>
+          <a:bodyPr rtlCol="0" anchor="ctr" wrap="none" lIns="70922" rIns="70922" tIns="70922" bIns="70922"/>
           <a:lstStyle/>
           <a:p>
             <a:pPr algn="ctr">
+              <a:lnSpc>
+                <a:spcPct val="100000"/>
+              </a:lnSpc>
               <a:spcBef>
                 <a:spcPts val="0"/>
               </a:spcBef>
@@ -3381,7 +3402,7 @@
               </a:spcAft>
             </a:pPr>
             <a:r>
-              <a:rPr sz="2800" b="1">
+              <a:rPr sz="10410" b="1">
                 <a:solidFill>
                   <a:srgbClr val="1A1A1A"/>
                 </a:solidFill>
@@ -3400,8 +3421,8 @@
         </p:nvSpPr>
         <p:spPr>
           <a:xfrm>
-            <a:off x="2691434" y="3769587"/>
-            <a:ext cx="2177131" cy="1684412"/>
+            <a:off x="5343844" y="2422057"/>
+            <a:ext cx="1563844" cy="2021294"/>
           </a:xfrm>
           <a:prstGeom prst="rect">
             <a:avLst/>
@@ -3412,10 +3433,13 @@
           </a:ln>
         </p:spPr>
         <p:txBody>
-          <a:bodyPr rtlCol="0" anchor="ctr" wrap="none" lIns="57292" rIns="57292" tIns="38195" bIns="38195"/>
+          <a:bodyPr rtlCol="0" anchor="ctr" wrap="none" lIns="70922" rIns="70922" tIns="70922" bIns="70922"/>
           <a:lstStyle/>
           <a:p>
             <a:pPr algn="ctr">
+              <a:lnSpc>
+                <a:spcPct val="100000"/>
+              </a:lnSpc>
               <a:spcBef>
                 <a:spcPts val="0"/>
               </a:spcBef>
@@ -3424,7 +3448,7 @@
               </a:spcAft>
             </a:pPr>
             <a:r>
-              <a:rPr sz="2800" b="1">
+              <a:rPr sz="10410" b="1">
                 <a:solidFill>
                   <a:srgbClr val="1A1A1A"/>
                 </a:solidFill>
@@ -3443,8 +3467,8 @@
         </p:nvSpPr>
         <p:spPr>
           <a:xfrm>
-            <a:off x="4868565" y="3769587"/>
-            <a:ext cx="2177131" cy="1684412"/>
+            <a:off x="652311" y="4443352"/>
+            <a:ext cx="1563844" cy="2021294"/>
           </a:xfrm>
           <a:prstGeom prst="rect">
             <a:avLst/>
@@ -3455,10 +3479,13 @@
           </a:ln>
         </p:spPr>
         <p:txBody>
-          <a:bodyPr rtlCol="0" anchor="ctr" wrap="none" lIns="57292" rIns="57292" tIns="38195" bIns="38195"/>
+          <a:bodyPr rtlCol="0" anchor="ctr" wrap="none" lIns="70922" rIns="70922" tIns="70922" bIns="70922"/>
           <a:lstStyle/>
           <a:p>
             <a:pPr algn="ctr">
+              <a:lnSpc>
+                <a:spcPct val="100000"/>
+              </a:lnSpc>
               <a:spcBef>
                 <a:spcPts val="0"/>
               </a:spcBef>
@@ -3467,7 +3494,7 @@
               </a:spcAft>
             </a:pPr>
             <a:r>
-              <a:rPr sz="2800" b="1">
+              <a:rPr sz="10410" b="1">
                 <a:solidFill>
                   <a:srgbClr val="1A1A1A"/>
                 </a:solidFill>
@@ -3486,8 +3513,8 @@
         </p:nvSpPr>
         <p:spPr>
           <a:xfrm>
-            <a:off x="514302" y="5454000"/>
-            <a:ext cx="2177131" cy="1684412"/>
+            <a:off x="2216155" y="4443352"/>
+            <a:ext cx="1563844" cy="2021294"/>
           </a:xfrm>
           <a:prstGeom prst="rect">
             <a:avLst/>
@@ -3498,10 +3525,13 @@
           </a:ln>
         </p:spPr>
         <p:txBody>
-          <a:bodyPr rtlCol="0" anchor="ctr" wrap="none" lIns="57292" rIns="57292" tIns="38195" bIns="38195"/>
+          <a:bodyPr rtlCol="0" anchor="ctr" wrap="none" lIns="70922" rIns="70922" tIns="70922" bIns="70922"/>
           <a:lstStyle/>
           <a:p>
             <a:pPr algn="ctr">
+              <a:lnSpc>
+                <a:spcPct val="100000"/>
+              </a:lnSpc>
               <a:spcBef>
                 <a:spcPts val="0"/>
               </a:spcBef>
@@ -3510,7 +3540,7 @@
               </a:spcAft>
             </a:pPr>
             <a:r>
-              <a:rPr sz="2800" b="1">
+              <a:rPr sz="10410" b="1">
                 <a:solidFill>
                   <a:srgbClr val="1A1A1A"/>
                 </a:solidFill>
@@ -3529,8 +3559,8 @@
         </p:nvSpPr>
         <p:spPr>
           <a:xfrm>
-            <a:off x="2691434" y="5454000"/>
-            <a:ext cx="2177131" cy="1684412"/>
+            <a:off x="3780000" y="4443352"/>
+            <a:ext cx="1563844" cy="2021294"/>
           </a:xfrm>
           <a:prstGeom prst="rect">
             <a:avLst/>
@@ -3541,10 +3571,13 @@
           </a:ln>
         </p:spPr>
         <p:txBody>
-          <a:bodyPr rtlCol="0" anchor="ctr" wrap="none" lIns="57292" rIns="57292" tIns="38195" bIns="38195"/>
+          <a:bodyPr rtlCol="0" anchor="ctr" wrap="none" lIns="70922" rIns="70922" tIns="70922" bIns="70922"/>
           <a:lstStyle/>
           <a:p>
             <a:pPr algn="ctr">
+              <a:lnSpc>
+                <a:spcPct val="100000"/>
+              </a:lnSpc>
               <a:spcBef>
                 <a:spcPts val="0"/>
               </a:spcBef>
@@ -3553,7 +3586,7 @@
               </a:spcAft>
             </a:pPr>
             <a:r>
-              <a:rPr sz="2800" b="1">
+              <a:rPr sz="10410" b="1">
                 <a:solidFill>
                   <a:srgbClr val="1A1A1A"/>
                 </a:solidFill>
@@ -3572,8 +3605,8 @@
         </p:nvSpPr>
         <p:spPr>
           <a:xfrm>
-            <a:off x="4868565" y="5454000"/>
-            <a:ext cx="2177131" cy="1684412"/>
+            <a:off x="5343844" y="4443352"/>
+            <a:ext cx="1563844" cy="2021294"/>
           </a:xfrm>
           <a:prstGeom prst="rect">
             <a:avLst/>
@@ -3584,10 +3617,13 @@
           </a:ln>
         </p:spPr>
         <p:txBody>
-          <a:bodyPr rtlCol="0" anchor="ctr" wrap="none" lIns="57292" rIns="57292" tIns="38195" bIns="38195"/>
+          <a:bodyPr rtlCol="0" anchor="ctr" wrap="none" lIns="70922" rIns="70922" tIns="70922" bIns="70922"/>
           <a:lstStyle/>
           <a:p>
             <a:pPr algn="ctr">
+              <a:lnSpc>
+                <a:spcPct val="100000"/>
+              </a:lnSpc>
               <a:spcBef>
                 <a:spcPts val="0"/>
               </a:spcBef>
@@ -3596,7 +3632,7 @@
               </a:spcAft>
             </a:pPr>
             <a:r>
-              <a:rPr sz="2800" b="1">
+              <a:rPr sz="10410" b="1">
                 <a:solidFill>
                   <a:srgbClr val="1A1A1A"/>
                 </a:solidFill>
@@ -3615,8 +3651,8 @@
         </p:nvSpPr>
         <p:spPr>
           <a:xfrm>
-            <a:off x="514302" y="7138412"/>
-            <a:ext cx="2177131" cy="1684412"/>
+            <a:off x="652311" y="6464647"/>
+            <a:ext cx="1563844" cy="2021294"/>
           </a:xfrm>
           <a:prstGeom prst="rect">
             <a:avLst/>
@@ -3627,10 +3663,13 @@
           </a:ln>
         </p:spPr>
         <p:txBody>
-          <a:bodyPr rtlCol="0" anchor="ctr" wrap="none" lIns="57292" rIns="57292" tIns="38195" bIns="38195"/>
+          <a:bodyPr rtlCol="0" anchor="ctr" wrap="none" lIns="70922" rIns="70922" tIns="70922" bIns="70922"/>
           <a:lstStyle/>
           <a:p>
             <a:pPr algn="ctr">
+              <a:lnSpc>
+                <a:spcPct val="100000"/>
+              </a:lnSpc>
               <a:spcBef>
                 <a:spcPts val="0"/>
               </a:spcBef>
@@ -3639,7 +3678,7 @@
               </a:spcAft>
             </a:pPr>
             <a:r>
-              <a:rPr sz="2800" b="1">
+              <a:rPr sz="10410" b="1">
                 <a:solidFill>
                   <a:srgbClr val="1A1A1A"/>
                 </a:solidFill>
@@ -3658,8 +3697,8 @@
         </p:nvSpPr>
         <p:spPr>
           <a:xfrm>
-            <a:off x="2691434" y="7138412"/>
-            <a:ext cx="2177131" cy="1684412"/>
+            <a:off x="2216155" y="6464647"/>
+            <a:ext cx="1563844" cy="2021294"/>
           </a:xfrm>
           <a:prstGeom prst="rect">
             <a:avLst/>
@@ -3670,10 +3709,13 @@
           </a:ln>
         </p:spPr>
         <p:txBody>
-          <a:bodyPr rtlCol="0" anchor="ctr" wrap="none" lIns="57292" rIns="57292" tIns="38195" bIns="38195"/>
+          <a:bodyPr rtlCol="0" anchor="ctr" wrap="none" lIns="70922" rIns="70922" tIns="70922" bIns="70922"/>
           <a:lstStyle/>
           <a:p>
             <a:pPr algn="ctr">
+              <a:lnSpc>
+                <a:spcPct val="100000"/>
+              </a:lnSpc>
               <a:spcBef>
                 <a:spcPts val="0"/>
               </a:spcBef>
@@ -3682,7 +3724,7 @@
               </a:spcAft>
             </a:pPr>
             <a:r>
-              <a:rPr sz="2800" b="1">
+              <a:rPr sz="10410" b="1">
                 <a:solidFill>
                   <a:srgbClr val="1A1A1A"/>
                 </a:solidFill>
@@ -3701,8 +3743,8 @@
         </p:nvSpPr>
         <p:spPr>
           <a:xfrm>
-            <a:off x="4868565" y="7138412"/>
-            <a:ext cx="2177131" cy="1684412"/>
+            <a:off x="3780000" y="6464647"/>
+            <a:ext cx="1563844" cy="2021294"/>
           </a:xfrm>
           <a:prstGeom prst="rect">
             <a:avLst/>
@@ -3713,10 +3755,13 @@
           </a:ln>
         </p:spPr>
         <p:txBody>
-          <a:bodyPr rtlCol="0" anchor="ctr" wrap="none" lIns="57292" rIns="57292" tIns="38195" bIns="38195"/>
+          <a:bodyPr rtlCol="0" anchor="ctr" wrap="none" lIns="70922" rIns="70922" tIns="70922" bIns="70922"/>
           <a:lstStyle/>
           <a:p>
             <a:pPr algn="ctr">
+              <a:lnSpc>
+                <a:spcPct val="100000"/>
+              </a:lnSpc>
               <a:spcBef>
                 <a:spcPts val="0"/>
               </a:spcBef>
@@ -3725,7 +3770,7 @@
               </a:spcAft>
             </a:pPr>
             <a:r>
-              <a:rPr sz="2800" b="1">
+              <a:rPr sz="10410" b="1">
                 <a:solidFill>
                   <a:srgbClr val="1A1A1A"/>
                 </a:solidFill>
@@ -3744,8 +3789,8 @@
         </p:nvSpPr>
         <p:spPr>
           <a:xfrm>
-            <a:off x="514302" y="8822825"/>
-            <a:ext cx="2177131" cy="1684412"/>
+            <a:off x="5343844" y="6464647"/>
+            <a:ext cx="1563844" cy="2021294"/>
           </a:xfrm>
           <a:prstGeom prst="rect">
             <a:avLst/>
@@ -3756,10 +3801,13 @@
           </a:ln>
         </p:spPr>
         <p:txBody>
-          <a:bodyPr rtlCol="0" anchor="ctr" wrap="none" lIns="57292" rIns="57292" tIns="38195" bIns="38195"/>
+          <a:bodyPr rtlCol="0" anchor="ctr" wrap="none" lIns="70922" rIns="70922" tIns="70922" bIns="70922"/>
           <a:lstStyle/>
           <a:p>
             <a:pPr algn="ctr">
+              <a:lnSpc>
+                <a:spcPct val="100000"/>
+              </a:lnSpc>
               <a:spcBef>
                 <a:spcPts val="0"/>
               </a:spcBef>
@@ -3768,7 +3816,7 @@
               </a:spcAft>
             </a:pPr>
             <a:r>
-              <a:rPr sz="2800" b="1">
+              <a:rPr sz="10410" b="1">
                 <a:solidFill>
                   <a:srgbClr val="1A1A1A"/>
                 </a:solidFill>
@@ -3787,8 +3835,8 @@
         </p:nvSpPr>
         <p:spPr>
           <a:xfrm>
-            <a:off x="2691434" y="8822825"/>
-            <a:ext cx="2177131" cy="1684412"/>
+            <a:off x="652311" y="8485942"/>
+            <a:ext cx="1563844" cy="2021294"/>
           </a:xfrm>
           <a:prstGeom prst="rect">
             <a:avLst/>
@@ -3799,10 +3847,13 @@
           </a:ln>
         </p:spPr>
         <p:txBody>
-          <a:bodyPr rtlCol="0" anchor="ctr" wrap="none" lIns="57292" rIns="57292" tIns="38195" bIns="38195"/>
+          <a:bodyPr rtlCol="0" anchor="ctr" wrap="none" lIns="70922" rIns="70922" tIns="70922" bIns="70922"/>
           <a:lstStyle/>
           <a:p>
             <a:pPr algn="ctr">
+              <a:lnSpc>
+                <a:spcPct val="100000"/>
+              </a:lnSpc>
               <a:spcBef>
                 <a:spcPts val="0"/>
               </a:spcBef>
@@ -3811,7 +3862,7 @@
               </a:spcAft>
             </a:pPr>
             <a:r>
-              <a:rPr sz="2800" b="1">
+              <a:rPr sz="10410" b="1">
                 <a:solidFill>
                   <a:srgbClr val="1A1A1A"/>
                 </a:solidFill>
@@ -3830,8 +3881,8 @@
         </p:nvSpPr>
         <p:spPr>
           <a:xfrm>
-            <a:off x="4868565" y="8822825"/>
-            <a:ext cx="2177131" cy="1684412"/>
+            <a:off x="2216155" y="8485942"/>
+            <a:ext cx="1563844" cy="2021294"/>
           </a:xfrm>
           <a:prstGeom prst="rect">
             <a:avLst/>
@@ -3842,10 +3893,13 @@
           </a:ln>
         </p:spPr>
         <p:txBody>
-          <a:bodyPr rtlCol="0" anchor="ctr" wrap="none" lIns="57292" rIns="57292" tIns="38195" bIns="38195"/>
+          <a:bodyPr rtlCol="0" anchor="ctr" wrap="none" lIns="70922" rIns="70922" tIns="70922" bIns="70922"/>
           <a:lstStyle/>
           <a:p>
             <a:pPr algn="ctr">
+              <a:lnSpc>
+                <a:spcPct val="100000"/>
+              </a:lnSpc>
               <a:spcBef>
                 <a:spcPts val="0"/>
               </a:spcBef>
@@ -3854,7 +3908,7 @@
               </a:spcAft>
             </a:pPr>
             <a:r>
-              <a:rPr sz="2800" b="1">
+              <a:rPr sz="10410" b="1">
                 <a:solidFill>
                   <a:srgbClr val="1A1A1A"/>
                 </a:solidFill>
@@ -3873,24 +3927,41 @@
         </p:nvSpPr>
         <p:spPr>
           <a:xfrm>
-            <a:off x="514302" y="396000"/>
-            <a:ext cx="2177131" cy="9525"/>
-          </a:xfrm>
-          <a:prstGeom prst="rect">
-            <a:avLst/>
-          </a:prstGeom>
-          <a:solidFill>
-            <a:srgbClr val="C0C0C0"/>
-          </a:solidFill>
-          <a:ln>
-            <a:noFill/>
-          </a:ln>
-        </p:spPr>
-        <p:txBody>
-          <a:bodyPr rtlCol="0" anchor="ctr"/>
-          <a:lstStyle/>
-          <a:p>
-            <a:pPr algn="ctr"/>
+            <a:off x="3780000" y="8485942"/>
+            <a:ext cx="1563844" cy="2021294"/>
+          </a:xfrm>
+          <a:prstGeom prst="rect">
+            <a:avLst/>
+          </a:prstGeom>
+          <a:noFill/>
+          <a:ln>
+            <a:noFill/>
+          </a:ln>
+        </p:spPr>
+        <p:txBody>
+          <a:bodyPr rtlCol="0" anchor="ctr" wrap="none" lIns="70922" rIns="70922" tIns="70922" bIns="70922"/>
+          <a:lstStyle/>
+          <a:p>
+            <a:pPr algn="ctr">
+              <a:lnSpc>
+                <a:spcPct val="100000"/>
+              </a:lnSpc>
+              <a:spcBef>
+                <a:spcPts val="0"/>
+              </a:spcBef>
+              <a:spcAft>
+                <a:spcPts val="0"/>
+              </a:spcAft>
+            </a:pPr>
+            <a:r>
+              <a:rPr sz="10410" b="1">
+                <a:solidFill>
+                  <a:srgbClr val="1A1A1A"/>
+                </a:solidFill>
+                <a:latin typeface="Arial"/>
+              </a:rPr>
+              <a:t>Ж</a:t>
+            </a:r>
           </a:p>
         </p:txBody>
       </p:sp>
@@ -3902,24 +3973,41 @@
         </p:nvSpPr>
         <p:spPr>
           <a:xfrm>
-            <a:off x="2691434" y="396000"/>
-            <a:ext cx="2177131" cy="9525"/>
-          </a:xfrm>
-          <a:prstGeom prst="rect">
-            <a:avLst/>
-          </a:prstGeom>
-          <a:solidFill>
-            <a:srgbClr val="C0C0C0"/>
-          </a:solidFill>
-          <a:ln>
-            <a:noFill/>
-          </a:ln>
-        </p:spPr>
-        <p:txBody>
-          <a:bodyPr rtlCol="0" anchor="ctr"/>
-          <a:lstStyle/>
-          <a:p>
-            <a:pPr algn="ctr"/>
+            <a:off x="5343844" y="8485942"/>
+            <a:ext cx="1563844" cy="2021294"/>
+          </a:xfrm>
+          <a:prstGeom prst="rect">
+            <a:avLst/>
+          </a:prstGeom>
+          <a:noFill/>
+          <a:ln>
+            <a:noFill/>
+          </a:ln>
+        </p:spPr>
+        <p:txBody>
+          <a:bodyPr rtlCol="0" anchor="ctr" wrap="none" lIns="70922" rIns="70922" tIns="70922" bIns="70922"/>
+          <a:lstStyle/>
+          <a:p>
+            <a:pPr algn="ctr">
+              <a:lnSpc>
+                <a:spcPct val="100000"/>
+              </a:lnSpc>
+              <a:spcBef>
+                <a:spcPts val="0"/>
+              </a:spcBef>
+              <a:spcAft>
+                <a:spcPts val="0"/>
+              </a:spcAft>
+            </a:pPr>
+            <a:r>
+              <a:rPr sz="10410" b="1">
+                <a:solidFill>
+                  <a:srgbClr val="1A1A1A"/>
+                </a:solidFill>
+                <a:latin typeface="Arial"/>
+              </a:rPr>
+              <a:t>З</a:t>
+            </a:r>
           </a:p>
         </p:txBody>
       </p:sp>
@@ -3931,8 +4019,8 @@
         </p:nvSpPr>
         <p:spPr>
           <a:xfrm>
-            <a:off x="4868565" y="396000"/>
-            <a:ext cx="2177131" cy="9525"/>
+            <a:off x="652311" y="396000"/>
+            <a:ext cx="1563844" cy="9525"/>
           </a:xfrm>
           <a:prstGeom prst="rect">
             <a:avLst/>
@@ -3960,8 +4048,8 @@
         </p:nvSpPr>
         <p:spPr>
           <a:xfrm>
-            <a:off x="514302" y="2080412"/>
-            <a:ext cx="2177131" cy="9525"/>
+            <a:off x="2216155" y="396000"/>
+            <a:ext cx="1563844" cy="9525"/>
           </a:xfrm>
           <a:prstGeom prst="rect">
             <a:avLst/>
@@ -3989,8 +4077,8 @@
         </p:nvSpPr>
         <p:spPr>
           <a:xfrm>
-            <a:off x="2691434" y="2080412"/>
-            <a:ext cx="2177131" cy="9525"/>
+            <a:off x="3780000" y="396000"/>
+            <a:ext cx="1563844" cy="9525"/>
           </a:xfrm>
           <a:prstGeom prst="rect">
             <a:avLst/>
@@ -4018,8 +4106,8 @@
         </p:nvSpPr>
         <p:spPr>
           <a:xfrm>
-            <a:off x="4868565" y="2080412"/>
-            <a:ext cx="2177131" cy="9525"/>
+            <a:off x="5343844" y="396000"/>
+            <a:ext cx="1563844" cy="9525"/>
           </a:xfrm>
           <a:prstGeom prst="rect">
             <a:avLst/>
@@ -4047,8 +4135,8 @@
         </p:nvSpPr>
         <p:spPr>
           <a:xfrm>
-            <a:off x="514302" y="3764825"/>
-            <a:ext cx="2177131" cy="9525"/>
+            <a:off x="652311" y="2417295"/>
+            <a:ext cx="1563844" cy="9525"/>
           </a:xfrm>
           <a:prstGeom prst="rect">
             <a:avLst/>
@@ -4076,8 +4164,8 @@
         </p:nvSpPr>
         <p:spPr>
           <a:xfrm>
-            <a:off x="2691434" y="3764825"/>
-            <a:ext cx="2177131" cy="9525"/>
+            <a:off x="2216155" y="2417295"/>
+            <a:ext cx="1563844" cy="9525"/>
           </a:xfrm>
           <a:prstGeom prst="rect">
             <a:avLst/>
@@ -4105,8 +4193,8 @@
         </p:nvSpPr>
         <p:spPr>
           <a:xfrm>
-            <a:off x="4868565" y="3764825"/>
-            <a:ext cx="2177131" cy="9525"/>
+            <a:off x="3780000" y="2417295"/>
+            <a:ext cx="1563844" cy="9525"/>
           </a:xfrm>
           <a:prstGeom prst="rect">
             <a:avLst/>
@@ -4134,8 +4222,8 @@
         </p:nvSpPr>
         <p:spPr>
           <a:xfrm>
-            <a:off x="514302" y="5449237"/>
-            <a:ext cx="2177131" cy="9525"/>
+            <a:off x="5343844" y="2417295"/>
+            <a:ext cx="1563844" cy="9525"/>
           </a:xfrm>
           <a:prstGeom prst="rect">
             <a:avLst/>
@@ -4163,8 +4251,8 @@
         </p:nvSpPr>
         <p:spPr>
           <a:xfrm>
-            <a:off x="2691434" y="5449237"/>
-            <a:ext cx="2177131" cy="9525"/>
+            <a:off x="652311" y="4438590"/>
+            <a:ext cx="1563844" cy="9525"/>
           </a:xfrm>
           <a:prstGeom prst="rect">
             <a:avLst/>
@@ -4192,8 +4280,8 @@
         </p:nvSpPr>
         <p:spPr>
           <a:xfrm>
-            <a:off x="4868565" y="5449237"/>
-            <a:ext cx="2177131" cy="9525"/>
+            <a:off x="2216155" y="4438590"/>
+            <a:ext cx="1563844" cy="9525"/>
           </a:xfrm>
           <a:prstGeom prst="rect">
             <a:avLst/>
@@ -4221,8 +4309,8 @@
         </p:nvSpPr>
         <p:spPr>
           <a:xfrm>
-            <a:off x="514302" y="7133650"/>
-            <a:ext cx="2177131" cy="9525"/>
+            <a:off x="3780000" y="4438590"/>
+            <a:ext cx="1563844" cy="9525"/>
           </a:xfrm>
           <a:prstGeom prst="rect">
             <a:avLst/>
@@ -4250,8 +4338,8 @@
         </p:nvSpPr>
         <p:spPr>
           <a:xfrm>
-            <a:off x="2691434" y="7133650"/>
-            <a:ext cx="2177131" cy="9525"/>
+            <a:off x="5343844" y="4438590"/>
+            <a:ext cx="1563844" cy="9525"/>
           </a:xfrm>
           <a:prstGeom prst="rect">
             <a:avLst/>
@@ -4279,8 +4367,8 @@
         </p:nvSpPr>
         <p:spPr>
           <a:xfrm>
-            <a:off x="4868565" y="7133650"/>
-            <a:ext cx="2177131" cy="9525"/>
+            <a:off x="652311" y="6459884"/>
+            <a:ext cx="1563844" cy="9525"/>
           </a:xfrm>
           <a:prstGeom prst="rect">
             <a:avLst/>
@@ -4308,8 +4396,8 @@
         </p:nvSpPr>
         <p:spPr>
           <a:xfrm>
-            <a:off x="514302" y="8818062"/>
-            <a:ext cx="2177131" cy="9525"/>
+            <a:off x="2216155" y="6459884"/>
+            <a:ext cx="1563844" cy="9525"/>
           </a:xfrm>
           <a:prstGeom prst="rect">
             <a:avLst/>
@@ -4337,8 +4425,8 @@
         </p:nvSpPr>
         <p:spPr>
           <a:xfrm>
-            <a:off x="2691434" y="8818062"/>
-            <a:ext cx="2177131" cy="9525"/>
+            <a:off x="3780000" y="6459884"/>
+            <a:ext cx="1563844" cy="9525"/>
           </a:xfrm>
           <a:prstGeom prst="rect">
             <a:avLst/>
@@ -4366,8 +4454,8 @@
         </p:nvSpPr>
         <p:spPr>
           <a:xfrm>
-            <a:off x="4868565" y="8818062"/>
-            <a:ext cx="2177131" cy="9525"/>
+            <a:off x="5343844" y="6459884"/>
+            <a:ext cx="1563844" cy="9525"/>
           </a:xfrm>
           <a:prstGeom prst="rect">
             <a:avLst/>
@@ -4395,8 +4483,8 @@
         </p:nvSpPr>
         <p:spPr>
           <a:xfrm>
-            <a:off x="514302" y="10502475"/>
-            <a:ext cx="2177131" cy="9525"/>
+            <a:off x="652311" y="8481180"/>
+            <a:ext cx="1563844" cy="9525"/>
           </a:xfrm>
           <a:prstGeom prst="rect">
             <a:avLst/>
@@ -4424,8 +4512,8 @@
         </p:nvSpPr>
         <p:spPr>
           <a:xfrm>
-            <a:off x="2691434" y="10502475"/>
-            <a:ext cx="2177131" cy="9525"/>
+            <a:off x="2216155" y="8481180"/>
+            <a:ext cx="1563844" cy="9525"/>
           </a:xfrm>
           <a:prstGeom prst="rect">
             <a:avLst/>
@@ -4453,8 +4541,8 @@
         </p:nvSpPr>
         <p:spPr>
           <a:xfrm>
-            <a:off x="4868565" y="10502475"/>
-            <a:ext cx="2177131" cy="9525"/>
+            <a:off x="3780000" y="8481180"/>
+            <a:ext cx="1563844" cy="9525"/>
           </a:xfrm>
           <a:prstGeom prst="rect">
             <a:avLst/>
@@ -4482,8 +4570,8 @@
         </p:nvSpPr>
         <p:spPr>
           <a:xfrm>
-            <a:off x="509539" y="400762"/>
-            <a:ext cx="9525" cy="1684412"/>
+            <a:off x="5343844" y="8481180"/>
+            <a:ext cx="1563844" cy="9525"/>
           </a:xfrm>
           <a:prstGeom prst="rect">
             <a:avLst/>
@@ -4511,8 +4599,8 @@
         </p:nvSpPr>
         <p:spPr>
           <a:xfrm>
-            <a:off x="509539" y="2085175"/>
-            <a:ext cx="9525" cy="1684412"/>
+            <a:off x="652311" y="10502475"/>
+            <a:ext cx="1563844" cy="9525"/>
           </a:xfrm>
           <a:prstGeom prst="rect">
             <a:avLst/>
@@ -4540,8 +4628,8 @@
         </p:nvSpPr>
         <p:spPr>
           <a:xfrm>
-            <a:off x="509539" y="3769587"/>
-            <a:ext cx="9525" cy="1684412"/>
+            <a:off x="2216155" y="10502475"/>
+            <a:ext cx="1563844" cy="9525"/>
           </a:xfrm>
           <a:prstGeom prst="rect">
             <a:avLst/>
@@ -4569,8 +4657,8 @@
         </p:nvSpPr>
         <p:spPr>
           <a:xfrm>
-            <a:off x="509539" y="5454000"/>
-            <a:ext cx="9525" cy="1684412"/>
+            <a:off x="3780000" y="10502475"/>
+            <a:ext cx="1563844" cy="9525"/>
           </a:xfrm>
           <a:prstGeom prst="rect">
             <a:avLst/>
@@ -4598,8 +4686,8 @@
         </p:nvSpPr>
         <p:spPr>
           <a:xfrm>
-            <a:off x="509539" y="7138412"/>
-            <a:ext cx="9525" cy="1684412"/>
+            <a:off x="5343844" y="10502475"/>
+            <a:ext cx="1563844" cy="9525"/>
           </a:xfrm>
           <a:prstGeom prst="rect">
             <a:avLst/>
@@ -4627,8 +4715,8 @@
         </p:nvSpPr>
         <p:spPr>
           <a:xfrm>
-            <a:off x="509539" y="8822825"/>
-            <a:ext cx="9525" cy="1684412"/>
+            <a:off x="647549" y="400762"/>
+            <a:ext cx="9525" cy="2021294"/>
           </a:xfrm>
           <a:prstGeom prst="rect">
             <a:avLst/>
@@ -4656,8 +4744,8 @@
         </p:nvSpPr>
         <p:spPr>
           <a:xfrm>
-            <a:off x="2686671" y="400762"/>
-            <a:ext cx="9525" cy="1684412"/>
+            <a:off x="647549" y="2422057"/>
+            <a:ext cx="9525" cy="2021294"/>
           </a:xfrm>
           <a:prstGeom prst="rect">
             <a:avLst/>
@@ -4685,8 +4773,8 @@
         </p:nvSpPr>
         <p:spPr>
           <a:xfrm>
-            <a:off x="2686671" y="2085175"/>
-            <a:ext cx="9525" cy="1684412"/>
+            <a:off x="647549" y="4443352"/>
+            <a:ext cx="9525" cy="2021294"/>
           </a:xfrm>
           <a:prstGeom prst="rect">
             <a:avLst/>
@@ -4714,8 +4802,8 @@
         </p:nvSpPr>
         <p:spPr>
           <a:xfrm>
-            <a:off x="2686671" y="3769587"/>
-            <a:ext cx="9525" cy="1684412"/>
+            <a:off x="647549" y="6464647"/>
+            <a:ext cx="9525" cy="2021294"/>
           </a:xfrm>
           <a:prstGeom prst="rect">
             <a:avLst/>
@@ -4743,8 +4831,8 @@
         </p:nvSpPr>
         <p:spPr>
           <a:xfrm>
-            <a:off x="2686671" y="5454000"/>
-            <a:ext cx="9525" cy="1684412"/>
+            <a:off x="647549" y="8485942"/>
+            <a:ext cx="9525" cy="2021294"/>
           </a:xfrm>
           <a:prstGeom prst="rect">
             <a:avLst/>
@@ -4772,8 +4860,8 @@
         </p:nvSpPr>
         <p:spPr>
           <a:xfrm>
-            <a:off x="2686671" y="7138412"/>
-            <a:ext cx="9525" cy="1684412"/>
+            <a:off x="2211393" y="400762"/>
+            <a:ext cx="9525" cy="2021294"/>
           </a:xfrm>
           <a:prstGeom prst="rect">
             <a:avLst/>
@@ -4801,8 +4889,8 @@
         </p:nvSpPr>
         <p:spPr>
           <a:xfrm>
-            <a:off x="2686671" y="8822825"/>
-            <a:ext cx="9525" cy="1684412"/>
+            <a:off x="2211393" y="2422057"/>
+            <a:ext cx="9525" cy="2021294"/>
           </a:xfrm>
           <a:prstGeom prst="rect">
             <a:avLst/>
@@ -4830,8 +4918,8 @@
         </p:nvSpPr>
         <p:spPr>
           <a:xfrm>
-            <a:off x="4863803" y="400762"/>
-            <a:ext cx="9525" cy="1684412"/>
+            <a:off x="2211393" y="4443352"/>
+            <a:ext cx="9525" cy="2021294"/>
           </a:xfrm>
           <a:prstGeom prst="rect">
             <a:avLst/>
@@ -4859,8 +4947,8 @@
         </p:nvSpPr>
         <p:spPr>
           <a:xfrm>
-            <a:off x="4863803" y="2085175"/>
-            <a:ext cx="9525" cy="1684412"/>
+            <a:off x="2211393" y="6464647"/>
+            <a:ext cx="9525" cy="2021294"/>
           </a:xfrm>
           <a:prstGeom prst="rect">
             <a:avLst/>
@@ -4888,8 +4976,8 @@
         </p:nvSpPr>
         <p:spPr>
           <a:xfrm>
-            <a:off x="4863803" y="3769587"/>
-            <a:ext cx="9525" cy="1684412"/>
+            <a:off x="2211393" y="8485942"/>
+            <a:ext cx="9525" cy="2021294"/>
           </a:xfrm>
           <a:prstGeom prst="rect">
             <a:avLst/>
@@ -4917,8 +5005,8 @@
         </p:nvSpPr>
         <p:spPr>
           <a:xfrm>
-            <a:off x="4863803" y="5454000"/>
-            <a:ext cx="9525" cy="1684412"/>
+            <a:off x="3775237" y="400762"/>
+            <a:ext cx="9525" cy="2021294"/>
           </a:xfrm>
           <a:prstGeom prst="rect">
             <a:avLst/>
@@ -4946,8 +5034,8 @@
         </p:nvSpPr>
         <p:spPr>
           <a:xfrm>
-            <a:off x="4863803" y="7138412"/>
-            <a:ext cx="9525" cy="1684412"/>
+            <a:off x="3775237" y="2422057"/>
+            <a:ext cx="9525" cy="2021294"/>
           </a:xfrm>
           <a:prstGeom prst="rect">
             <a:avLst/>
@@ -4975,8 +5063,8 @@
         </p:nvSpPr>
         <p:spPr>
           <a:xfrm>
-            <a:off x="4863803" y="8822825"/>
-            <a:ext cx="9525" cy="1684412"/>
+            <a:off x="3775237" y="4443352"/>
+            <a:ext cx="9525" cy="2021294"/>
           </a:xfrm>
           <a:prstGeom prst="rect">
             <a:avLst/>
@@ -5004,8 +5092,8 @@
         </p:nvSpPr>
         <p:spPr>
           <a:xfrm>
-            <a:off x="7040935" y="400762"/>
-            <a:ext cx="9525" cy="1684412"/>
+            <a:off x="3775237" y="6464647"/>
+            <a:ext cx="9525" cy="2021294"/>
           </a:xfrm>
           <a:prstGeom prst="rect">
             <a:avLst/>
@@ -5033,8 +5121,8 @@
         </p:nvSpPr>
         <p:spPr>
           <a:xfrm>
-            <a:off x="7040935" y="2085175"/>
-            <a:ext cx="9525" cy="1684412"/>
+            <a:off x="3775237" y="8485942"/>
+            <a:ext cx="9525" cy="2021294"/>
           </a:xfrm>
           <a:prstGeom prst="rect">
             <a:avLst/>
@@ -5062,8 +5150,8 @@
         </p:nvSpPr>
         <p:spPr>
           <a:xfrm>
-            <a:off x="7040935" y="3769587"/>
-            <a:ext cx="9525" cy="1684412"/>
+            <a:off x="5339081" y="400762"/>
+            <a:ext cx="9525" cy="2021294"/>
           </a:xfrm>
           <a:prstGeom prst="rect">
             <a:avLst/>
@@ -5091,8 +5179,8 @@
         </p:nvSpPr>
         <p:spPr>
           <a:xfrm>
-            <a:off x="7040935" y="5454000"/>
-            <a:ext cx="9525" cy="1684412"/>
+            <a:off x="5339081" y="2422057"/>
+            <a:ext cx="9525" cy="2021294"/>
           </a:xfrm>
           <a:prstGeom prst="rect">
             <a:avLst/>
@@ -5120,8 +5208,8 @@
         </p:nvSpPr>
         <p:spPr>
           <a:xfrm>
-            <a:off x="7040935" y="7138412"/>
-            <a:ext cx="9525" cy="1684412"/>
+            <a:off x="5339081" y="4443352"/>
+            <a:ext cx="9525" cy="2021294"/>
           </a:xfrm>
           <a:prstGeom prst="rect">
             <a:avLst/>
@@ -5149,30 +5237,204 @@
         </p:nvSpPr>
         <p:spPr>
           <a:xfrm>
-            <a:off x="7040935" y="8822825"/>
-            <a:ext cx="9525" cy="1684412"/>
-          </a:xfrm>
-          <a:prstGeom prst="rect">
-            <a:avLst/>
-          </a:prstGeom>
-          <a:solidFill>
-            <a:srgbClr val="C0C0C0"/>
-          </a:solidFill>
-          <a:ln>
-            <a:noFill/>
-          </a:ln>
-        </p:spPr>
-        <p:txBody>
-          <a:bodyPr rtlCol="0" anchor="ctr"/>
-          <a:lstStyle/>
-          <a:p>
-            <a:pPr algn="ctr"/>
-          </a:p>
-        </p:txBody>
-      </p:sp>
-      <p:sp>
-        <p:nvSpPr>
-          <p:cNvPr id="65" name="TextBox 64"/>
+            <a:off x="5339081" y="6464647"/>
+            <a:ext cx="9525" cy="2021294"/>
+          </a:xfrm>
+          <a:prstGeom prst="rect">
+            <a:avLst/>
+          </a:prstGeom>
+          <a:solidFill>
+            <a:srgbClr val="C0C0C0"/>
+          </a:solidFill>
+          <a:ln>
+            <a:noFill/>
+          </a:ln>
+        </p:spPr>
+        <p:txBody>
+          <a:bodyPr rtlCol="0" anchor="ctr"/>
+          <a:lstStyle/>
+          <a:p>
+            <a:pPr algn="ctr"/>
+          </a:p>
+        </p:txBody>
+      </p:sp>
+      <p:sp>
+        <p:nvSpPr>
+          <p:cNvPr id="65" name="Rectangle 64"/>
+          <p:cNvSpPr/>
+          <p:nvPr/>
+        </p:nvSpPr>
+        <p:spPr>
+          <a:xfrm>
+            <a:off x="5339081" y="8485942"/>
+            <a:ext cx="9525" cy="2021294"/>
+          </a:xfrm>
+          <a:prstGeom prst="rect">
+            <a:avLst/>
+          </a:prstGeom>
+          <a:solidFill>
+            <a:srgbClr val="C0C0C0"/>
+          </a:solidFill>
+          <a:ln>
+            <a:noFill/>
+          </a:ln>
+        </p:spPr>
+        <p:txBody>
+          <a:bodyPr rtlCol="0" anchor="ctr"/>
+          <a:lstStyle/>
+          <a:p>
+            <a:pPr algn="ctr"/>
+          </a:p>
+        </p:txBody>
+      </p:sp>
+      <p:sp>
+        <p:nvSpPr>
+          <p:cNvPr id="66" name="Rectangle 65"/>
+          <p:cNvSpPr/>
+          <p:nvPr/>
+        </p:nvSpPr>
+        <p:spPr>
+          <a:xfrm>
+            <a:off x="6902925" y="400762"/>
+            <a:ext cx="9525" cy="2021294"/>
+          </a:xfrm>
+          <a:prstGeom prst="rect">
+            <a:avLst/>
+          </a:prstGeom>
+          <a:solidFill>
+            <a:srgbClr val="C0C0C0"/>
+          </a:solidFill>
+          <a:ln>
+            <a:noFill/>
+          </a:ln>
+        </p:spPr>
+        <p:txBody>
+          <a:bodyPr rtlCol="0" anchor="ctr"/>
+          <a:lstStyle/>
+          <a:p>
+            <a:pPr algn="ctr"/>
+          </a:p>
+        </p:txBody>
+      </p:sp>
+      <p:sp>
+        <p:nvSpPr>
+          <p:cNvPr id="67" name="Rectangle 66"/>
+          <p:cNvSpPr/>
+          <p:nvPr/>
+        </p:nvSpPr>
+        <p:spPr>
+          <a:xfrm>
+            <a:off x="6902925" y="2422057"/>
+            <a:ext cx="9525" cy="2021294"/>
+          </a:xfrm>
+          <a:prstGeom prst="rect">
+            <a:avLst/>
+          </a:prstGeom>
+          <a:solidFill>
+            <a:srgbClr val="C0C0C0"/>
+          </a:solidFill>
+          <a:ln>
+            <a:noFill/>
+          </a:ln>
+        </p:spPr>
+        <p:txBody>
+          <a:bodyPr rtlCol="0" anchor="ctr"/>
+          <a:lstStyle/>
+          <a:p>
+            <a:pPr algn="ctr"/>
+          </a:p>
+        </p:txBody>
+      </p:sp>
+      <p:sp>
+        <p:nvSpPr>
+          <p:cNvPr id="68" name="Rectangle 67"/>
+          <p:cNvSpPr/>
+          <p:nvPr/>
+        </p:nvSpPr>
+        <p:spPr>
+          <a:xfrm>
+            <a:off x="6902925" y="4443352"/>
+            <a:ext cx="9525" cy="2021294"/>
+          </a:xfrm>
+          <a:prstGeom prst="rect">
+            <a:avLst/>
+          </a:prstGeom>
+          <a:solidFill>
+            <a:srgbClr val="C0C0C0"/>
+          </a:solidFill>
+          <a:ln>
+            <a:noFill/>
+          </a:ln>
+        </p:spPr>
+        <p:txBody>
+          <a:bodyPr rtlCol="0" anchor="ctr"/>
+          <a:lstStyle/>
+          <a:p>
+            <a:pPr algn="ctr"/>
+          </a:p>
+        </p:txBody>
+      </p:sp>
+      <p:sp>
+        <p:nvSpPr>
+          <p:cNvPr id="69" name="Rectangle 68"/>
+          <p:cNvSpPr/>
+          <p:nvPr/>
+        </p:nvSpPr>
+        <p:spPr>
+          <a:xfrm>
+            <a:off x="6902925" y="6464647"/>
+            <a:ext cx="9525" cy="2021294"/>
+          </a:xfrm>
+          <a:prstGeom prst="rect">
+            <a:avLst/>
+          </a:prstGeom>
+          <a:solidFill>
+            <a:srgbClr val="C0C0C0"/>
+          </a:solidFill>
+          <a:ln>
+            <a:noFill/>
+          </a:ln>
+        </p:spPr>
+        <p:txBody>
+          <a:bodyPr rtlCol="0" anchor="ctr"/>
+          <a:lstStyle/>
+          <a:p>
+            <a:pPr algn="ctr"/>
+          </a:p>
+        </p:txBody>
+      </p:sp>
+      <p:sp>
+        <p:nvSpPr>
+          <p:cNvPr id="70" name="Rectangle 69"/>
+          <p:cNvSpPr/>
+          <p:nvPr/>
+        </p:nvSpPr>
+        <p:spPr>
+          <a:xfrm>
+            <a:off x="6902925" y="8485942"/>
+            <a:ext cx="9525" cy="2021294"/>
+          </a:xfrm>
+          <a:prstGeom prst="rect">
+            <a:avLst/>
+          </a:prstGeom>
+          <a:solidFill>
+            <a:srgbClr val="C0C0C0"/>
+          </a:solidFill>
+          <a:ln>
+            <a:noFill/>
+          </a:ln>
+        </p:spPr>
+        <p:txBody>
+          <a:bodyPr rtlCol="0" anchor="ctr"/>
+          <a:lstStyle/>
+          <a:p>
+            <a:pPr algn="ctr"/>
+          </a:p>
+        </p:txBody>
+      </p:sp>
+      <p:sp>
+        <p:nvSpPr>
+          <p:cNvPr id="71" name="TextBox 70"/>
           <p:cNvSpPr txBox="1"/>
           <p:nvPr/>
         </p:nvSpPr>
@@ -5231,8 +5493,8 @@
         </p:nvSpPr>
         <p:spPr>
           <a:xfrm>
-            <a:off x="514302" y="400762"/>
-            <a:ext cx="2177131" cy="1684412"/>
+            <a:off x="652311" y="400762"/>
+            <a:ext cx="1563844" cy="2021294"/>
           </a:xfrm>
           <a:prstGeom prst="rect">
             <a:avLst/>
@@ -5243,10 +5505,13 @@
           </a:ln>
         </p:spPr>
         <p:txBody>
-          <a:bodyPr rtlCol="0" anchor="ctr" wrap="none" lIns="57292" rIns="57292" tIns="38195" bIns="38195"/>
+          <a:bodyPr rtlCol="0" anchor="ctr" wrap="none" lIns="70922" rIns="70922" tIns="70922" bIns="70922"/>
           <a:lstStyle/>
           <a:p>
             <a:pPr algn="ctr">
+              <a:lnSpc>
+                <a:spcPct val="100000"/>
+              </a:lnSpc>
               <a:spcBef>
                 <a:spcPts val="0"/>
               </a:spcBef>
@@ -5255,50 +5520,7 @@
               </a:spcAft>
             </a:pPr>
             <a:r>
-              <a:rPr sz="2800" b="1">
-                <a:solidFill>
-                  <a:srgbClr val="1A1A1A"/>
-                </a:solidFill>
-                <a:latin typeface="Arial"/>
-              </a:rPr>
-              <a:t>Ж</a:t>
-            </a:r>
-          </a:p>
-        </p:txBody>
-      </p:sp>
-      <p:sp>
-        <p:nvSpPr>
-          <p:cNvPr id="3" name="Rectangle 2"/>
-          <p:cNvSpPr/>
-          <p:nvPr/>
-        </p:nvSpPr>
-        <p:spPr>
-          <a:xfrm>
-            <a:off x="2691434" y="400762"/>
-            <a:ext cx="2177131" cy="1684412"/>
-          </a:xfrm>
-          <a:prstGeom prst="rect">
-            <a:avLst/>
-          </a:prstGeom>
-          <a:noFill/>
-          <a:ln>
-            <a:noFill/>
-          </a:ln>
-        </p:spPr>
-        <p:txBody>
-          <a:bodyPr rtlCol="0" anchor="ctr" wrap="none" lIns="57292" rIns="57292" tIns="38195" bIns="38195"/>
-          <a:lstStyle/>
-          <a:p>
-            <a:pPr algn="ctr">
-              <a:spcBef>
-                <a:spcPts val="0"/>
-              </a:spcBef>
-              <a:spcAft>
-                <a:spcPts val="0"/>
-              </a:spcAft>
-            </a:pPr>
-            <a:r>
-              <a:rPr sz="2800" b="1">
+              <a:rPr sz="10410" b="1">
                 <a:solidFill>
                   <a:srgbClr val="1A1A1A"/>
                 </a:solidFill>
@@ -5311,14 +5533,14 @@
       </p:sp>
       <p:sp>
         <p:nvSpPr>
-          <p:cNvPr id="4" name="Rectangle 3"/>
-          <p:cNvSpPr/>
-          <p:nvPr/>
-        </p:nvSpPr>
-        <p:spPr>
-          <a:xfrm>
-            <a:off x="4868565" y="400762"/>
-            <a:ext cx="2177131" cy="1684412"/>
+          <p:cNvPr id="3" name="Rectangle 2"/>
+          <p:cNvSpPr/>
+          <p:nvPr/>
+        </p:nvSpPr>
+        <p:spPr>
+          <a:xfrm>
+            <a:off x="2216155" y="400762"/>
+            <a:ext cx="1563844" cy="2021294"/>
           </a:xfrm>
           <a:prstGeom prst="rect">
             <a:avLst/>
@@ -5329,10 +5551,13 @@
           </a:ln>
         </p:spPr>
         <p:txBody>
-          <a:bodyPr rtlCol="0" anchor="ctr" wrap="none" lIns="57292" rIns="57292" tIns="38195" bIns="38195"/>
+          <a:bodyPr rtlCol="0" anchor="ctr" wrap="none" lIns="70922" rIns="70922" tIns="70922" bIns="70922"/>
           <a:lstStyle/>
           <a:p>
             <a:pPr algn="ctr">
+              <a:lnSpc>
+                <a:spcPct val="100000"/>
+              </a:lnSpc>
               <a:spcBef>
                 <a:spcPts val="0"/>
               </a:spcBef>
@@ -5341,50 +5566,7 @@
               </a:spcAft>
             </a:pPr>
             <a:r>
-              <a:rPr sz="2800" b="1">
-                <a:solidFill>
-                  <a:srgbClr val="1A1A1A"/>
-                </a:solidFill>
-                <a:latin typeface="Arial"/>
-              </a:rPr>
-              <a:t>З</a:t>
-            </a:r>
-          </a:p>
-        </p:txBody>
-      </p:sp>
-      <p:sp>
-        <p:nvSpPr>
-          <p:cNvPr id="5" name="Rectangle 4"/>
-          <p:cNvSpPr/>
-          <p:nvPr/>
-        </p:nvSpPr>
-        <p:spPr>
-          <a:xfrm>
-            <a:off x="514302" y="2085175"/>
-            <a:ext cx="2177131" cy="1684412"/>
-          </a:xfrm>
-          <a:prstGeom prst="rect">
-            <a:avLst/>
-          </a:prstGeom>
-          <a:noFill/>
-          <a:ln>
-            <a:noFill/>
-          </a:ln>
-        </p:spPr>
-        <p:txBody>
-          <a:bodyPr rtlCol="0" anchor="ctr" wrap="none" lIns="57292" rIns="57292" tIns="38195" bIns="38195"/>
-          <a:lstStyle/>
-          <a:p>
-            <a:pPr algn="ctr">
-              <a:spcBef>
-                <a:spcPts val="0"/>
-              </a:spcBef>
-              <a:spcAft>
-                <a:spcPts val="0"/>
-              </a:spcAft>
-            </a:pPr>
-            <a:r>
-              <a:rPr sz="2800" b="1">
+              <a:rPr sz="10410" b="1">
                 <a:solidFill>
                   <a:srgbClr val="1A1A1A"/>
                 </a:solidFill>
@@ -5397,14 +5579,14 @@
       </p:sp>
       <p:sp>
         <p:nvSpPr>
-          <p:cNvPr id="6" name="Rectangle 5"/>
-          <p:cNvSpPr/>
-          <p:nvPr/>
-        </p:nvSpPr>
-        <p:spPr>
-          <a:xfrm>
-            <a:off x="2691434" y="2085175"/>
-            <a:ext cx="2177131" cy="1684412"/>
+          <p:cNvPr id="4" name="Rectangle 3"/>
+          <p:cNvSpPr/>
+          <p:nvPr/>
+        </p:nvSpPr>
+        <p:spPr>
+          <a:xfrm>
+            <a:off x="3780000" y="400762"/>
+            <a:ext cx="1563844" cy="2021294"/>
           </a:xfrm>
           <a:prstGeom prst="rect">
             <a:avLst/>
@@ -5415,10 +5597,13 @@
           </a:ln>
         </p:spPr>
         <p:txBody>
-          <a:bodyPr rtlCol="0" anchor="ctr" wrap="none" lIns="57292" rIns="57292" tIns="38195" bIns="38195"/>
+          <a:bodyPr rtlCol="0" anchor="ctr" wrap="none" lIns="70922" rIns="70922" tIns="70922" bIns="70922"/>
           <a:lstStyle/>
           <a:p>
             <a:pPr algn="ctr">
+              <a:lnSpc>
+                <a:spcPct val="100000"/>
+              </a:lnSpc>
               <a:spcBef>
                 <a:spcPts val="0"/>
               </a:spcBef>
@@ -5427,7 +5612,7 @@
               </a:spcAft>
             </a:pPr>
             <a:r>
-              <a:rPr sz="2800" b="1">
+              <a:rPr sz="10410" b="1">
                 <a:solidFill>
                   <a:srgbClr val="1A1A1A"/>
                 </a:solidFill>
@@ -5440,14 +5625,14 @@
       </p:sp>
       <p:sp>
         <p:nvSpPr>
-          <p:cNvPr id="7" name="Rectangle 6"/>
-          <p:cNvSpPr/>
-          <p:nvPr/>
-        </p:nvSpPr>
-        <p:spPr>
-          <a:xfrm>
-            <a:off x="4868565" y="2085175"/>
-            <a:ext cx="2177131" cy="1684412"/>
+          <p:cNvPr id="5" name="Rectangle 4"/>
+          <p:cNvSpPr/>
+          <p:nvPr/>
+        </p:nvSpPr>
+        <p:spPr>
+          <a:xfrm>
+            <a:off x="5343844" y="400762"/>
+            <a:ext cx="1563844" cy="2021294"/>
           </a:xfrm>
           <a:prstGeom prst="rect">
             <a:avLst/>
@@ -5458,10 +5643,13 @@
           </a:ln>
         </p:spPr>
         <p:txBody>
-          <a:bodyPr rtlCol="0" anchor="ctr" wrap="none" lIns="57292" rIns="57292" tIns="38195" bIns="38195"/>
+          <a:bodyPr rtlCol="0" anchor="ctr" wrap="none" lIns="70922" rIns="70922" tIns="70922" bIns="70922"/>
           <a:lstStyle/>
           <a:p>
             <a:pPr algn="ctr">
+              <a:lnSpc>
+                <a:spcPct val="100000"/>
+              </a:lnSpc>
               <a:spcBef>
                 <a:spcPts val="0"/>
               </a:spcBef>
@@ -5470,7 +5658,7 @@
               </a:spcAft>
             </a:pPr>
             <a:r>
-              <a:rPr sz="2800" b="1">
+              <a:rPr sz="10410" b="1">
                 <a:solidFill>
                   <a:srgbClr val="1A1A1A"/>
                 </a:solidFill>
@@ -5483,14 +5671,14 @@
       </p:sp>
       <p:sp>
         <p:nvSpPr>
-          <p:cNvPr id="8" name="Rectangle 7"/>
-          <p:cNvSpPr/>
-          <p:nvPr/>
-        </p:nvSpPr>
-        <p:spPr>
-          <a:xfrm>
-            <a:off x="514302" y="3769587"/>
-            <a:ext cx="2177131" cy="1684412"/>
+          <p:cNvPr id="6" name="Rectangle 5"/>
+          <p:cNvSpPr/>
+          <p:nvPr/>
+        </p:nvSpPr>
+        <p:spPr>
+          <a:xfrm>
+            <a:off x="652311" y="2422057"/>
+            <a:ext cx="1563844" cy="2021294"/>
           </a:xfrm>
           <a:prstGeom prst="rect">
             <a:avLst/>
@@ -5501,10 +5689,13 @@
           </a:ln>
         </p:spPr>
         <p:txBody>
-          <a:bodyPr rtlCol="0" anchor="ctr" wrap="none" lIns="57292" rIns="57292" tIns="38195" bIns="38195"/>
+          <a:bodyPr rtlCol="0" anchor="ctr" wrap="none" lIns="70922" rIns="70922" tIns="70922" bIns="70922"/>
           <a:lstStyle/>
           <a:p>
             <a:pPr algn="ctr">
+              <a:lnSpc>
+                <a:spcPct val="100000"/>
+              </a:lnSpc>
               <a:spcBef>
                 <a:spcPts val="0"/>
               </a:spcBef>
@@ -5513,7 +5704,7 @@
               </a:spcAft>
             </a:pPr>
             <a:r>
-              <a:rPr sz="2800" b="1">
+              <a:rPr sz="10410" b="1">
                 <a:solidFill>
                   <a:srgbClr val="1A1A1A"/>
                 </a:solidFill>
@@ -5526,14 +5717,14 @@
       </p:sp>
       <p:sp>
         <p:nvSpPr>
-          <p:cNvPr id="9" name="Rectangle 8"/>
-          <p:cNvSpPr/>
-          <p:nvPr/>
-        </p:nvSpPr>
-        <p:spPr>
-          <a:xfrm>
-            <a:off x="2691434" y="3769587"/>
-            <a:ext cx="2177131" cy="1684412"/>
+          <p:cNvPr id="7" name="Rectangle 6"/>
+          <p:cNvSpPr/>
+          <p:nvPr/>
+        </p:nvSpPr>
+        <p:spPr>
+          <a:xfrm>
+            <a:off x="2216155" y="2422057"/>
+            <a:ext cx="1563844" cy="2021294"/>
           </a:xfrm>
           <a:prstGeom prst="rect">
             <a:avLst/>
@@ -5544,10 +5735,13 @@
           </a:ln>
         </p:spPr>
         <p:txBody>
-          <a:bodyPr rtlCol="0" anchor="ctr" wrap="none" lIns="57292" rIns="57292" tIns="38195" bIns="38195"/>
+          <a:bodyPr rtlCol="0" anchor="ctr" wrap="none" lIns="70922" rIns="70922" tIns="70922" bIns="70922"/>
           <a:lstStyle/>
           <a:p>
             <a:pPr algn="ctr">
+              <a:lnSpc>
+                <a:spcPct val="100000"/>
+              </a:lnSpc>
               <a:spcBef>
                 <a:spcPts val="0"/>
               </a:spcBef>
@@ -5556,7 +5750,7 @@
               </a:spcAft>
             </a:pPr>
             <a:r>
-              <a:rPr sz="2800" b="1">
+              <a:rPr sz="10410" b="1">
                 <a:solidFill>
                   <a:srgbClr val="1A1A1A"/>
                 </a:solidFill>
@@ -5569,14 +5763,14 @@
       </p:sp>
       <p:sp>
         <p:nvSpPr>
-          <p:cNvPr id="10" name="Rectangle 9"/>
-          <p:cNvSpPr/>
-          <p:nvPr/>
-        </p:nvSpPr>
-        <p:spPr>
-          <a:xfrm>
-            <a:off x="4868565" y="3769587"/>
-            <a:ext cx="2177131" cy="1684412"/>
+          <p:cNvPr id="8" name="Rectangle 7"/>
+          <p:cNvSpPr/>
+          <p:nvPr/>
+        </p:nvSpPr>
+        <p:spPr>
+          <a:xfrm>
+            <a:off x="3780000" y="2422057"/>
+            <a:ext cx="1563844" cy="2021294"/>
           </a:xfrm>
           <a:prstGeom prst="rect">
             <a:avLst/>
@@ -5587,10 +5781,13 @@
           </a:ln>
         </p:spPr>
         <p:txBody>
-          <a:bodyPr rtlCol="0" anchor="ctr" wrap="none" lIns="57292" rIns="57292" tIns="38195" bIns="38195"/>
+          <a:bodyPr rtlCol="0" anchor="ctr" wrap="none" lIns="70922" rIns="70922" tIns="70922" bIns="70922"/>
           <a:lstStyle/>
           <a:p>
             <a:pPr algn="ctr">
+              <a:lnSpc>
+                <a:spcPct val="100000"/>
+              </a:lnSpc>
               <a:spcBef>
                 <a:spcPts val="0"/>
               </a:spcBef>
@@ -5599,7 +5796,7 @@
               </a:spcAft>
             </a:pPr>
             <a:r>
-              <a:rPr sz="2800" b="1">
+              <a:rPr sz="10410" b="1">
                 <a:solidFill>
                   <a:srgbClr val="1A1A1A"/>
                 </a:solidFill>
@@ -5612,14 +5809,14 @@
       </p:sp>
       <p:sp>
         <p:nvSpPr>
-          <p:cNvPr id="11" name="Rectangle 10"/>
-          <p:cNvSpPr/>
-          <p:nvPr/>
-        </p:nvSpPr>
-        <p:spPr>
-          <a:xfrm>
-            <a:off x="514302" y="5454000"/>
-            <a:ext cx="2177131" cy="1684412"/>
+          <p:cNvPr id="9" name="Rectangle 8"/>
+          <p:cNvSpPr/>
+          <p:nvPr/>
+        </p:nvSpPr>
+        <p:spPr>
+          <a:xfrm>
+            <a:off x="5343844" y="2422057"/>
+            <a:ext cx="1563844" cy="2021294"/>
           </a:xfrm>
           <a:prstGeom prst="rect">
             <a:avLst/>
@@ -5630,10 +5827,13 @@
           </a:ln>
         </p:spPr>
         <p:txBody>
-          <a:bodyPr rtlCol="0" anchor="ctr" wrap="none" lIns="57292" rIns="57292" tIns="38195" bIns="38195"/>
+          <a:bodyPr rtlCol="0" anchor="ctr" wrap="none" lIns="70922" rIns="70922" tIns="70922" bIns="70922"/>
           <a:lstStyle/>
           <a:p>
             <a:pPr algn="ctr">
+              <a:lnSpc>
+                <a:spcPct val="100000"/>
+              </a:lnSpc>
               <a:spcBef>
                 <a:spcPts val="0"/>
               </a:spcBef>
@@ -5642,7 +5842,7 @@
               </a:spcAft>
             </a:pPr>
             <a:r>
-              <a:rPr sz="2800" b="1">
+              <a:rPr sz="10410" b="1">
                 <a:solidFill>
                   <a:srgbClr val="1A1A1A"/>
                 </a:solidFill>
@@ -5655,14 +5855,14 @@
       </p:sp>
       <p:sp>
         <p:nvSpPr>
-          <p:cNvPr id="12" name="Rectangle 11"/>
-          <p:cNvSpPr/>
-          <p:nvPr/>
-        </p:nvSpPr>
-        <p:spPr>
-          <a:xfrm>
-            <a:off x="2691434" y="5454000"/>
-            <a:ext cx="2177131" cy="1684412"/>
+          <p:cNvPr id="10" name="Rectangle 9"/>
+          <p:cNvSpPr/>
+          <p:nvPr/>
+        </p:nvSpPr>
+        <p:spPr>
+          <a:xfrm>
+            <a:off x="652311" y="4443352"/>
+            <a:ext cx="1563844" cy="2021294"/>
           </a:xfrm>
           <a:prstGeom prst="rect">
             <a:avLst/>
@@ -5673,10 +5873,13 @@
           </a:ln>
         </p:spPr>
         <p:txBody>
-          <a:bodyPr rtlCol="0" anchor="ctr" wrap="none" lIns="57292" rIns="57292" tIns="38195" bIns="38195"/>
+          <a:bodyPr rtlCol="0" anchor="ctr" wrap="none" lIns="70922" rIns="70922" tIns="70922" bIns="70922"/>
           <a:lstStyle/>
           <a:p>
             <a:pPr algn="ctr">
+              <a:lnSpc>
+                <a:spcPct val="100000"/>
+              </a:lnSpc>
               <a:spcBef>
                 <a:spcPts val="0"/>
               </a:spcBef>
@@ -5685,7 +5888,7 @@
               </a:spcAft>
             </a:pPr>
             <a:r>
-              <a:rPr sz="2800" b="1">
+              <a:rPr sz="10410" b="1">
                 <a:solidFill>
                   <a:srgbClr val="1A1A1A"/>
                 </a:solidFill>
@@ -5698,14 +5901,14 @@
       </p:sp>
       <p:sp>
         <p:nvSpPr>
-          <p:cNvPr id="13" name="Rectangle 12"/>
-          <p:cNvSpPr/>
-          <p:nvPr/>
-        </p:nvSpPr>
-        <p:spPr>
-          <a:xfrm>
-            <a:off x="4868565" y="5454000"/>
-            <a:ext cx="2177131" cy="1684412"/>
+          <p:cNvPr id="11" name="Rectangle 10"/>
+          <p:cNvSpPr/>
+          <p:nvPr/>
+        </p:nvSpPr>
+        <p:spPr>
+          <a:xfrm>
+            <a:off x="2216155" y="4443352"/>
+            <a:ext cx="1563844" cy="2021294"/>
           </a:xfrm>
           <a:prstGeom prst="rect">
             <a:avLst/>
@@ -5716,10 +5919,13 @@
           </a:ln>
         </p:spPr>
         <p:txBody>
-          <a:bodyPr rtlCol="0" anchor="ctr" wrap="none" lIns="57292" rIns="57292" tIns="38195" bIns="38195"/>
+          <a:bodyPr rtlCol="0" anchor="ctr" wrap="none" lIns="70922" rIns="70922" tIns="70922" bIns="70922"/>
           <a:lstStyle/>
           <a:p>
             <a:pPr algn="ctr">
+              <a:lnSpc>
+                <a:spcPct val="100000"/>
+              </a:lnSpc>
               <a:spcBef>
                 <a:spcPts val="0"/>
               </a:spcBef>
@@ -5728,7 +5934,7 @@
               </a:spcAft>
             </a:pPr>
             <a:r>
-              <a:rPr sz="2800" b="1">
+              <a:rPr sz="10410" b="1">
                 <a:solidFill>
                   <a:srgbClr val="1A1A1A"/>
                 </a:solidFill>
@@ -5741,14 +5947,14 @@
       </p:sp>
       <p:sp>
         <p:nvSpPr>
-          <p:cNvPr id="14" name="Rectangle 13"/>
-          <p:cNvSpPr/>
-          <p:nvPr/>
-        </p:nvSpPr>
-        <p:spPr>
-          <a:xfrm>
-            <a:off x="514302" y="7138412"/>
-            <a:ext cx="2177131" cy="1684412"/>
+          <p:cNvPr id="12" name="Rectangle 11"/>
+          <p:cNvSpPr/>
+          <p:nvPr/>
+        </p:nvSpPr>
+        <p:spPr>
+          <a:xfrm>
+            <a:off x="3780000" y="4443352"/>
+            <a:ext cx="1563844" cy="2021294"/>
           </a:xfrm>
           <a:prstGeom prst="rect">
             <a:avLst/>
@@ -5759,10 +5965,13 @@
           </a:ln>
         </p:spPr>
         <p:txBody>
-          <a:bodyPr rtlCol="0" anchor="ctr" wrap="none" lIns="57292" rIns="57292" tIns="38195" bIns="38195"/>
+          <a:bodyPr rtlCol="0" anchor="ctr" wrap="none" lIns="70922" rIns="70922" tIns="70922" bIns="70922"/>
           <a:lstStyle/>
           <a:p>
             <a:pPr algn="ctr">
+              <a:lnSpc>
+                <a:spcPct val="100000"/>
+              </a:lnSpc>
               <a:spcBef>
                 <a:spcPts val="0"/>
               </a:spcBef>
@@ -5771,7 +5980,7 @@
               </a:spcAft>
             </a:pPr>
             <a:r>
-              <a:rPr sz="2800" b="1">
+              <a:rPr sz="10410" b="1">
                 <a:solidFill>
                   <a:srgbClr val="1A1A1A"/>
                 </a:solidFill>
@@ -5784,14 +5993,14 @@
       </p:sp>
       <p:sp>
         <p:nvSpPr>
-          <p:cNvPr id="15" name="Rectangle 14"/>
-          <p:cNvSpPr/>
-          <p:nvPr/>
-        </p:nvSpPr>
-        <p:spPr>
-          <a:xfrm>
-            <a:off x="2691434" y="7138412"/>
-            <a:ext cx="2177131" cy="1684412"/>
+          <p:cNvPr id="13" name="Rectangle 12"/>
+          <p:cNvSpPr/>
+          <p:nvPr/>
+        </p:nvSpPr>
+        <p:spPr>
+          <a:xfrm>
+            <a:off x="5343844" y="4443352"/>
+            <a:ext cx="1563844" cy="2021294"/>
           </a:xfrm>
           <a:prstGeom prst="rect">
             <a:avLst/>
@@ -5802,10 +6011,13 @@
           </a:ln>
         </p:spPr>
         <p:txBody>
-          <a:bodyPr rtlCol="0" anchor="ctr" wrap="none" lIns="57292" rIns="57292" tIns="38195" bIns="38195"/>
+          <a:bodyPr rtlCol="0" anchor="ctr" wrap="none" lIns="70922" rIns="70922" tIns="70922" bIns="70922"/>
           <a:lstStyle/>
           <a:p>
             <a:pPr algn="ctr">
+              <a:lnSpc>
+                <a:spcPct val="100000"/>
+              </a:lnSpc>
               <a:spcBef>
                 <a:spcPts val="0"/>
               </a:spcBef>
@@ -5814,7 +6026,7 @@
               </a:spcAft>
             </a:pPr>
             <a:r>
-              <a:rPr sz="2800" b="1">
+              <a:rPr sz="10410" b="1">
                 <a:solidFill>
                   <a:srgbClr val="1A1A1A"/>
                 </a:solidFill>
@@ -5827,14 +6039,14 @@
       </p:sp>
       <p:sp>
         <p:nvSpPr>
-          <p:cNvPr id="16" name="Rectangle 15"/>
-          <p:cNvSpPr/>
-          <p:nvPr/>
-        </p:nvSpPr>
-        <p:spPr>
-          <a:xfrm>
-            <a:off x="4868565" y="7138412"/>
-            <a:ext cx="2177131" cy="1684412"/>
+          <p:cNvPr id="14" name="Rectangle 13"/>
+          <p:cNvSpPr/>
+          <p:nvPr/>
+        </p:nvSpPr>
+        <p:spPr>
+          <a:xfrm>
+            <a:off x="652311" y="6464647"/>
+            <a:ext cx="1563844" cy="2021294"/>
           </a:xfrm>
           <a:prstGeom prst="rect">
             <a:avLst/>
@@ -5845,10 +6057,13 @@
           </a:ln>
         </p:spPr>
         <p:txBody>
-          <a:bodyPr rtlCol="0" anchor="ctr" wrap="none" lIns="57292" rIns="57292" tIns="38195" bIns="38195"/>
+          <a:bodyPr rtlCol="0" anchor="ctr" wrap="none" lIns="70922" rIns="70922" tIns="70922" bIns="70922"/>
           <a:lstStyle/>
           <a:p>
             <a:pPr algn="ctr">
+              <a:lnSpc>
+                <a:spcPct val="100000"/>
+              </a:lnSpc>
               <a:spcBef>
                 <a:spcPts val="0"/>
               </a:spcBef>
@@ -5857,7 +6072,7 @@
               </a:spcAft>
             </a:pPr>
             <a:r>
-              <a:rPr sz="2800" b="1">
+              <a:rPr sz="10410" b="1">
                 <a:solidFill>
                   <a:srgbClr val="1A1A1A"/>
                 </a:solidFill>
@@ -5870,14 +6085,14 @@
       </p:sp>
       <p:sp>
         <p:nvSpPr>
-          <p:cNvPr id="17" name="Rectangle 16"/>
-          <p:cNvSpPr/>
-          <p:nvPr/>
-        </p:nvSpPr>
-        <p:spPr>
-          <a:xfrm>
-            <a:off x="514302" y="8822825"/>
-            <a:ext cx="2177131" cy="1684412"/>
+          <p:cNvPr id="15" name="Rectangle 14"/>
+          <p:cNvSpPr/>
+          <p:nvPr/>
+        </p:nvSpPr>
+        <p:spPr>
+          <a:xfrm>
+            <a:off x="2216155" y="6464647"/>
+            <a:ext cx="1563844" cy="2021294"/>
           </a:xfrm>
           <a:prstGeom prst="rect">
             <a:avLst/>
@@ -5888,10 +6103,13 @@
           </a:ln>
         </p:spPr>
         <p:txBody>
-          <a:bodyPr rtlCol="0" anchor="ctr" wrap="none" lIns="57292" rIns="57292" tIns="38195" bIns="38195"/>
+          <a:bodyPr rtlCol="0" anchor="ctr" wrap="none" lIns="70922" rIns="70922" tIns="70922" bIns="70922"/>
           <a:lstStyle/>
           <a:p>
             <a:pPr algn="ctr">
+              <a:lnSpc>
+                <a:spcPct val="100000"/>
+              </a:lnSpc>
               <a:spcBef>
                 <a:spcPts val="0"/>
               </a:spcBef>
@@ -5900,7 +6118,7 @@
               </a:spcAft>
             </a:pPr>
             <a:r>
-              <a:rPr sz="2800" b="1">
+              <a:rPr sz="10410" b="1">
                 <a:solidFill>
                   <a:srgbClr val="1A1A1A"/>
                 </a:solidFill>
@@ -5913,14 +6131,14 @@
       </p:sp>
       <p:sp>
         <p:nvSpPr>
-          <p:cNvPr id="18" name="Rectangle 17"/>
-          <p:cNvSpPr/>
-          <p:nvPr/>
-        </p:nvSpPr>
-        <p:spPr>
-          <a:xfrm>
-            <a:off x="2691434" y="8822825"/>
-            <a:ext cx="2177131" cy="1684412"/>
+          <p:cNvPr id="16" name="Rectangle 15"/>
+          <p:cNvSpPr/>
+          <p:nvPr/>
+        </p:nvSpPr>
+        <p:spPr>
+          <a:xfrm>
+            <a:off x="3780000" y="6464647"/>
+            <a:ext cx="1563844" cy="2021294"/>
           </a:xfrm>
           <a:prstGeom prst="rect">
             <a:avLst/>
@@ -5931,10 +6149,13 @@
           </a:ln>
         </p:spPr>
         <p:txBody>
-          <a:bodyPr rtlCol="0" anchor="ctr" wrap="none" lIns="57292" rIns="57292" tIns="38195" bIns="38195"/>
+          <a:bodyPr rtlCol="0" anchor="ctr" wrap="none" lIns="70922" rIns="70922" tIns="70922" bIns="70922"/>
           <a:lstStyle/>
           <a:p>
             <a:pPr algn="ctr">
+              <a:lnSpc>
+                <a:spcPct val="100000"/>
+              </a:lnSpc>
               <a:spcBef>
                 <a:spcPts val="0"/>
               </a:spcBef>
@@ -5943,7 +6164,7 @@
               </a:spcAft>
             </a:pPr>
             <a:r>
-              <a:rPr sz="2800" b="1">
+              <a:rPr sz="10410" b="1">
                 <a:solidFill>
                   <a:srgbClr val="1A1A1A"/>
                 </a:solidFill>
@@ -5956,14 +6177,14 @@
       </p:sp>
       <p:sp>
         <p:nvSpPr>
-          <p:cNvPr id="19" name="Rectangle 18"/>
-          <p:cNvSpPr/>
-          <p:nvPr/>
-        </p:nvSpPr>
-        <p:spPr>
-          <a:xfrm>
-            <a:off x="4868565" y="8822825"/>
-            <a:ext cx="2177131" cy="1684412"/>
+          <p:cNvPr id="17" name="Rectangle 16"/>
+          <p:cNvSpPr/>
+          <p:nvPr/>
+        </p:nvSpPr>
+        <p:spPr>
+          <a:xfrm>
+            <a:off x="5343844" y="6464647"/>
+            <a:ext cx="1563844" cy="2021294"/>
           </a:xfrm>
           <a:prstGeom prst="rect">
             <a:avLst/>
@@ -5974,10 +6195,13 @@
           </a:ln>
         </p:spPr>
         <p:txBody>
-          <a:bodyPr rtlCol="0" anchor="ctr" wrap="none" lIns="57292" rIns="57292" tIns="38195" bIns="38195"/>
+          <a:bodyPr rtlCol="0" anchor="ctr" wrap="none" lIns="70922" rIns="70922" tIns="70922" bIns="70922"/>
           <a:lstStyle/>
           <a:p>
             <a:pPr algn="ctr">
+              <a:lnSpc>
+                <a:spcPct val="100000"/>
+              </a:lnSpc>
               <a:spcBef>
                 <a:spcPts val="0"/>
               </a:spcBef>
@@ -5986,7 +6210,7 @@
               </a:spcAft>
             </a:pPr>
             <a:r>
-              <a:rPr sz="2800" b="1">
+              <a:rPr sz="10410" b="1">
                 <a:solidFill>
                   <a:srgbClr val="1A1A1A"/>
                 </a:solidFill>
@@ -5999,30 +6223,139 @@
       </p:sp>
       <p:sp>
         <p:nvSpPr>
+          <p:cNvPr id="18" name="Rectangle 17"/>
+          <p:cNvSpPr/>
+          <p:nvPr/>
+        </p:nvSpPr>
+        <p:spPr>
+          <a:xfrm>
+            <a:off x="652311" y="8485942"/>
+            <a:ext cx="1563844" cy="2021294"/>
+          </a:xfrm>
+          <a:prstGeom prst="rect">
+            <a:avLst/>
+          </a:prstGeom>
+          <a:noFill/>
+          <a:ln>
+            <a:noFill/>
+          </a:ln>
+        </p:spPr>
+        <p:txBody>
+          <a:bodyPr rtlCol="0" anchor="ctr" wrap="none" lIns="70922" rIns="70922" tIns="70922" bIns="70922"/>
+          <a:lstStyle/>
+          <a:p>
+            <a:pPr algn="ctr">
+              <a:lnSpc>
+                <a:spcPct val="100000"/>
+              </a:lnSpc>
+              <a:spcBef>
+                <a:spcPts val="0"/>
+              </a:spcBef>
+              <a:spcAft>
+                <a:spcPts val="0"/>
+              </a:spcAft>
+            </a:pPr>
+            <a:r>
+              <a:rPr sz="10410" b="1">
+                <a:solidFill>
+                  <a:srgbClr val="1A1A1A"/>
+                </a:solidFill>
+                <a:latin typeface="Arial"/>
+              </a:rPr>
+              <a:t>Н</a:t>
+            </a:r>
+          </a:p>
+        </p:txBody>
+      </p:sp>
+      <p:sp>
+        <p:nvSpPr>
+          <p:cNvPr id="19" name="Rectangle 18"/>
+          <p:cNvSpPr/>
+          <p:nvPr/>
+        </p:nvSpPr>
+        <p:spPr>
+          <a:xfrm>
+            <a:off x="2216155" y="8485942"/>
+            <a:ext cx="1563844" cy="2021294"/>
+          </a:xfrm>
+          <a:prstGeom prst="rect">
+            <a:avLst/>
+          </a:prstGeom>
+          <a:noFill/>
+          <a:ln>
+            <a:noFill/>
+          </a:ln>
+        </p:spPr>
+        <p:txBody>
+          <a:bodyPr rtlCol="0" anchor="ctr" wrap="none" lIns="70922" rIns="70922" tIns="70922" bIns="70922"/>
+          <a:lstStyle/>
+          <a:p>
+            <a:pPr algn="ctr">
+              <a:lnSpc>
+                <a:spcPct val="100000"/>
+              </a:lnSpc>
+              <a:spcBef>
+                <a:spcPts val="0"/>
+              </a:spcBef>
+              <a:spcAft>
+                <a:spcPts val="0"/>
+              </a:spcAft>
+            </a:pPr>
+            <a:r>
+              <a:rPr sz="10410" b="1">
+                <a:solidFill>
+                  <a:srgbClr val="1A1A1A"/>
+                </a:solidFill>
+                <a:latin typeface="Arial"/>
+              </a:rPr>
+              <a:t>Н</a:t>
+            </a:r>
+          </a:p>
+        </p:txBody>
+      </p:sp>
+      <p:sp>
+        <p:nvSpPr>
           <p:cNvPr id="20" name="Rectangle 19"/>
           <p:cNvSpPr/>
           <p:nvPr/>
         </p:nvSpPr>
         <p:spPr>
           <a:xfrm>
-            <a:off x="514302" y="396000"/>
-            <a:ext cx="2177131" cy="9525"/>
-          </a:xfrm>
-          <a:prstGeom prst="rect">
-            <a:avLst/>
-          </a:prstGeom>
-          <a:solidFill>
-            <a:srgbClr val="C0C0C0"/>
-          </a:solidFill>
-          <a:ln>
-            <a:noFill/>
-          </a:ln>
-        </p:spPr>
-        <p:txBody>
-          <a:bodyPr rtlCol="0" anchor="ctr"/>
-          <a:lstStyle/>
-          <a:p>
-            <a:pPr algn="ctr"/>
+            <a:off x="3780000" y="8485942"/>
+            <a:ext cx="1563844" cy="2021294"/>
+          </a:xfrm>
+          <a:prstGeom prst="rect">
+            <a:avLst/>
+          </a:prstGeom>
+          <a:noFill/>
+          <a:ln>
+            <a:noFill/>
+          </a:ln>
+        </p:spPr>
+        <p:txBody>
+          <a:bodyPr rtlCol="0" anchor="ctr" wrap="none" lIns="70922" rIns="70922" tIns="70922" bIns="70922"/>
+          <a:lstStyle/>
+          <a:p>
+            <a:pPr algn="ctr">
+              <a:lnSpc>
+                <a:spcPct val="100000"/>
+              </a:lnSpc>
+              <a:spcBef>
+                <a:spcPts val="0"/>
+              </a:spcBef>
+              <a:spcAft>
+                <a:spcPts val="0"/>
+              </a:spcAft>
+            </a:pPr>
+            <a:r>
+              <a:rPr sz="10410" b="1">
+                <a:solidFill>
+                  <a:srgbClr val="1A1A1A"/>
+                </a:solidFill>
+                <a:latin typeface="Arial"/>
+              </a:rPr>
+              <a:t>О</a:t>
+            </a:r>
           </a:p>
         </p:txBody>
       </p:sp>
@@ -6034,24 +6367,41 @@
         </p:nvSpPr>
         <p:spPr>
           <a:xfrm>
-            <a:off x="2691434" y="396000"/>
-            <a:ext cx="2177131" cy="9525"/>
-          </a:xfrm>
-          <a:prstGeom prst="rect">
-            <a:avLst/>
-          </a:prstGeom>
-          <a:solidFill>
-            <a:srgbClr val="C0C0C0"/>
-          </a:solidFill>
-          <a:ln>
-            <a:noFill/>
-          </a:ln>
-        </p:spPr>
-        <p:txBody>
-          <a:bodyPr rtlCol="0" anchor="ctr"/>
-          <a:lstStyle/>
-          <a:p>
-            <a:pPr algn="ctr"/>
+            <a:off x="5343844" y="8485942"/>
+            <a:ext cx="1563844" cy="2021294"/>
+          </a:xfrm>
+          <a:prstGeom prst="rect">
+            <a:avLst/>
+          </a:prstGeom>
+          <a:noFill/>
+          <a:ln>
+            <a:noFill/>
+          </a:ln>
+        </p:spPr>
+        <p:txBody>
+          <a:bodyPr rtlCol="0" anchor="ctr" wrap="none" lIns="70922" rIns="70922" tIns="70922" bIns="70922"/>
+          <a:lstStyle/>
+          <a:p>
+            <a:pPr algn="ctr">
+              <a:lnSpc>
+                <a:spcPct val="100000"/>
+              </a:lnSpc>
+              <a:spcBef>
+                <a:spcPts val="0"/>
+              </a:spcBef>
+              <a:spcAft>
+                <a:spcPts val="0"/>
+              </a:spcAft>
+            </a:pPr>
+            <a:r>
+              <a:rPr sz="10410" b="1">
+                <a:solidFill>
+                  <a:srgbClr val="1A1A1A"/>
+                </a:solidFill>
+                <a:latin typeface="Arial"/>
+              </a:rPr>
+              <a:t>О</a:t>
+            </a:r>
           </a:p>
         </p:txBody>
       </p:sp>
@@ -6063,8 +6413,8 @@
         </p:nvSpPr>
         <p:spPr>
           <a:xfrm>
-            <a:off x="4868565" y="396000"/>
-            <a:ext cx="2177131" cy="9525"/>
+            <a:off x="652311" y="396000"/>
+            <a:ext cx="1563844" cy="9525"/>
           </a:xfrm>
           <a:prstGeom prst="rect">
             <a:avLst/>
@@ -6092,8 +6442,8 @@
         </p:nvSpPr>
         <p:spPr>
           <a:xfrm>
-            <a:off x="514302" y="2080412"/>
-            <a:ext cx="2177131" cy="9525"/>
+            <a:off x="2216155" y="396000"/>
+            <a:ext cx="1563844" cy="9525"/>
           </a:xfrm>
           <a:prstGeom prst="rect">
             <a:avLst/>
@@ -6121,8 +6471,8 @@
         </p:nvSpPr>
         <p:spPr>
           <a:xfrm>
-            <a:off x="2691434" y="2080412"/>
-            <a:ext cx="2177131" cy="9525"/>
+            <a:off x="3780000" y="396000"/>
+            <a:ext cx="1563844" cy="9525"/>
           </a:xfrm>
           <a:prstGeom prst="rect">
             <a:avLst/>
@@ -6150,8 +6500,8 @@
         </p:nvSpPr>
         <p:spPr>
           <a:xfrm>
-            <a:off x="4868565" y="2080412"/>
-            <a:ext cx="2177131" cy="9525"/>
+            <a:off x="5343844" y="396000"/>
+            <a:ext cx="1563844" cy="9525"/>
           </a:xfrm>
           <a:prstGeom prst="rect">
             <a:avLst/>
@@ -6179,8 +6529,8 @@
         </p:nvSpPr>
         <p:spPr>
           <a:xfrm>
-            <a:off x="514302" y="3764825"/>
-            <a:ext cx="2177131" cy="9525"/>
+            <a:off x="652311" y="2417295"/>
+            <a:ext cx="1563844" cy="9525"/>
           </a:xfrm>
           <a:prstGeom prst="rect">
             <a:avLst/>
@@ -6208,8 +6558,8 @@
         </p:nvSpPr>
         <p:spPr>
           <a:xfrm>
-            <a:off x="2691434" y="3764825"/>
-            <a:ext cx="2177131" cy="9525"/>
+            <a:off x="2216155" y="2417295"/>
+            <a:ext cx="1563844" cy="9525"/>
           </a:xfrm>
           <a:prstGeom prst="rect">
             <a:avLst/>
@@ -6237,8 +6587,8 @@
         </p:nvSpPr>
         <p:spPr>
           <a:xfrm>
-            <a:off x="4868565" y="3764825"/>
-            <a:ext cx="2177131" cy="9525"/>
+            <a:off x="3780000" y="2417295"/>
+            <a:ext cx="1563844" cy="9525"/>
           </a:xfrm>
           <a:prstGeom prst="rect">
             <a:avLst/>
@@ -6266,8 +6616,8 @@
         </p:nvSpPr>
         <p:spPr>
           <a:xfrm>
-            <a:off x="514302" y="5449237"/>
-            <a:ext cx="2177131" cy="9525"/>
+            <a:off x="5343844" y="2417295"/>
+            <a:ext cx="1563844" cy="9525"/>
           </a:xfrm>
           <a:prstGeom prst="rect">
             <a:avLst/>
@@ -6295,8 +6645,8 @@
         </p:nvSpPr>
         <p:spPr>
           <a:xfrm>
-            <a:off x="2691434" y="5449237"/>
-            <a:ext cx="2177131" cy="9525"/>
+            <a:off x="652311" y="4438590"/>
+            <a:ext cx="1563844" cy="9525"/>
           </a:xfrm>
           <a:prstGeom prst="rect">
             <a:avLst/>
@@ -6324,8 +6674,8 @@
         </p:nvSpPr>
         <p:spPr>
           <a:xfrm>
-            <a:off x="4868565" y="5449237"/>
-            <a:ext cx="2177131" cy="9525"/>
+            <a:off x="2216155" y="4438590"/>
+            <a:ext cx="1563844" cy="9525"/>
           </a:xfrm>
           <a:prstGeom prst="rect">
             <a:avLst/>
@@ -6353,8 +6703,8 @@
         </p:nvSpPr>
         <p:spPr>
           <a:xfrm>
-            <a:off x="514302" y="7133650"/>
-            <a:ext cx="2177131" cy="9525"/>
+            <a:off x="3780000" y="4438590"/>
+            <a:ext cx="1563844" cy="9525"/>
           </a:xfrm>
           <a:prstGeom prst="rect">
             <a:avLst/>
@@ -6382,8 +6732,8 @@
         </p:nvSpPr>
         <p:spPr>
           <a:xfrm>
-            <a:off x="2691434" y="7133650"/>
-            <a:ext cx="2177131" cy="9525"/>
+            <a:off x="5343844" y="4438590"/>
+            <a:ext cx="1563844" cy="9525"/>
           </a:xfrm>
           <a:prstGeom prst="rect">
             <a:avLst/>
@@ -6411,8 +6761,8 @@
         </p:nvSpPr>
         <p:spPr>
           <a:xfrm>
-            <a:off x="4868565" y="7133650"/>
-            <a:ext cx="2177131" cy="9525"/>
+            <a:off x="652311" y="6459884"/>
+            <a:ext cx="1563844" cy="9525"/>
           </a:xfrm>
           <a:prstGeom prst="rect">
             <a:avLst/>
@@ -6440,8 +6790,8 @@
         </p:nvSpPr>
         <p:spPr>
           <a:xfrm>
-            <a:off x="514302" y="8818062"/>
-            <a:ext cx="2177131" cy="9525"/>
+            <a:off x="2216155" y="6459884"/>
+            <a:ext cx="1563844" cy="9525"/>
           </a:xfrm>
           <a:prstGeom prst="rect">
             <a:avLst/>
@@ -6469,8 +6819,8 @@
         </p:nvSpPr>
         <p:spPr>
           <a:xfrm>
-            <a:off x="2691434" y="8818062"/>
-            <a:ext cx="2177131" cy="9525"/>
+            <a:off x="3780000" y="6459884"/>
+            <a:ext cx="1563844" cy="9525"/>
           </a:xfrm>
           <a:prstGeom prst="rect">
             <a:avLst/>
@@ -6498,8 +6848,8 @@
         </p:nvSpPr>
         <p:spPr>
           <a:xfrm>
-            <a:off x="4868565" y="8818062"/>
-            <a:ext cx="2177131" cy="9525"/>
+            <a:off x="5343844" y="6459884"/>
+            <a:ext cx="1563844" cy="9525"/>
           </a:xfrm>
           <a:prstGeom prst="rect">
             <a:avLst/>
@@ -6527,8 +6877,8 @@
         </p:nvSpPr>
         <p:spPr>
           <a:xfrm>
-            <a:off x="514302" y="10502475"/>
-            <a:ext cx="2177131" cy="9525"/>
+            <a:off x="652311" y="8481180"/>
+            <a:ext cx="1563844" cy="9525"/>
           </a:xfrm>
           <a:prstGeom prst="rect">
             <a:avLst/>
@@ -6556,8 +6906,8 @@
         </p:nvSpPr>
         <p:spPr>
           <a:xfrm>
-            <a:off x="2691434" y="10502475"/>
-            <a:ext cx="2177131" cy="9525"/>
+            <a:off x="2216155" y="8481180"/>
+            <a:ext cx="1563844" cy="9525"/>
           </a:xfrm>
           <a:prstGeom prst="rect">
             <a:avLst/>
@@ -6585,8 +6935,8 @@
         </p:nvSpPr>
         <p:spPr>
           <a:xfrm>
-            <a:off x="4868565" y="10502475"/>
-            <a:ext cx="2177131" cy="9525"/>
+            <a:off x="3780000" y="8481180"/>
+            <a:ext cx="1563844" cy="9525"/>
           </a:xfrm>
           <a:prstGeom prst="rect">
             <a:avLst/>
@@ -6614,8 +6964,8 @@
         </p:nvSpPr>
         <p:spPr>
           <a:xfrm>
-            <a:off x="509539" y="400762"/>
-            <a:ext cx="9525" cy="1684412"/>
+            <a:off x="5343844" y="8481180"/>
+            <a:ext cx="1563844" cy="9525"/>
           </a:xfrm>
           <a:prstGeom prst="rect">
             <a:avLst/>
@@ -6643,8 +6993,8 @@
         </p:nvSpPr>
         <p:spPr>
           <a:xfrm>
-            <a:off x="509539" y="2085175"/>
-            <a:ext cx="9525" cy="1684412"/>
+            <a:off x="652311" y="10502475"/>
+            <a:ext cx="1563844" cy="9525"/>
           </a:xfrm>
           <a:prstGeom prst="rect">
             <a:avLst/>
@@ -6672,8 +7022,8 @@
         </p:nvSpPr>
         <p:spPr>
           <a:xfrm>
-            <a:off x="509539" y="3769587"/>
-            <a:ext cx="9525" cy="1684412"/>
+            <a:off x="2216155" y="10502475"/>
+            <a:ext cx="1563844" cy="9525"/>
           </a:xfrm>
           <a:prstGeom prst="rect">
             <a:avLst/>
@@ -6701,8 +7051,8 @@
         </p:nvSpPr>
         <p:spPr>
           <a:xfrm>
-            <a:off x="509539" y="5454000"/>
-            <a:ext cx="9525" cy="1684412"/>
+            <a:off x="3780000" y="10502475"/>
+            <a:ext cx="1563844" cy="9525"/>
           </a:xfrm>
           <a:prstGeom prst="rect">
             <a:avLst/>
@@ -6730,8 +7080,8 @@
         </p:nvSpPr>
         <p:spPr>
           <a:xfrm>
-            <a:off x="509539" y="7138412"/>
-            <a:ext cx="9525" cy="1684412"/>
+            <a:off x="5343844" y="10502475"/>
+            <a:ext cx="1563844" cy="9525"/>
           </a:xfrm>
           <a:prstGeom prst="rect">
             <a:avLst/>
@@ -6759,8 +7109,8 @@
         </p:nvSpPr>
         <p:spPr>
           <a:xfrm>
-            <a:off x="509539" y="8822825"/>
-            <a:ext cx="9525" cy="1684412"/>
+            <a:off x="647549" y="400762"/>
+            <a:ext cx="9525" cy="2021294"/>
           </a:xfrm>
           <a:prstGeom prst="rect">
             <a:avLst/>
@@ -6788,8 +7138,8 @@
         </p:nvSpPr>
         <p:spPr>
           <a:xfrm>
-            <a:off x="2686671" y="400762"/>
-            <a:ext cx="9525" cy="1684412"/>
+            <a:off x="647549" y="2422057"/>
+            <a:ext cx="9525" cy="2021294"/>
           </a:xfrm>
           <a:prstGeom prst="rect">
             <a:avLst/>
@@ -6817,8 +7167,8 @@
         </p:nvSpPr>
         <p:spPr>
           <a:xfrm>
-            <a:off x="2686671" y="2085175"/>
-            <a:ext cx="9525" cy="1684412"/>
+            <a:off x="647549" y="4443352"/>
+            <a:ext cx="9525" cy="2021294"/>
           </a:xfrm>
           <a:prstGeom prst="rect">
             <a:avLst/>
@@ -6846,8 +7196,8 @@
         </p:nvSpPr>
         <p:spPr>
           <a:xfrm>
-            <a:off x="2686671" y="3769587"/>
-            <a:ext cx="9525" cy="1684412"/>
+            <a:off x="647549" y="6464647"/>
+            <a:ext cx="9525" cy="2021294"/>
           </a:xfrm>
           <a:prstGeom prst="rect">
             <a:avLst/>
@@ -6875,8 +7225,8 @@
         </p:nvSpPr>
         <p:spPr>
           <a:xfrm>
-            <a:off x="2686671" y="5454000"/>
-            <a:ext cx="9525" cy="1684412"/>
+            <a:off x="647549" y="8485942"/>
+            <a:ext cx="9525" cy="2021294"/>
           </a:xfrm>
           <a:prstGeom prst="rect">
             <a:avLst/>
@@ -6904,8 +7254,8 @@
         </p:nvSpPr>
         <p:spPr>
           <a:xfrm>
-            <a:off x="2686671" y="7138412"/>
-            <a:ext cx="9525" cy="1684412"/>
+            <a:off x="2211393" y="400762"/>
+            <a:ext cx="9525" cy="2021294"/>
           </a:xfrm>
           <a:prstGeom prst="rect">
             <a:avLst/>
@@ -6933,8 +7283,8 @@
         </p:nvSpPr>
         <p:spPr>
           <a:xfrm>
-            <a:off x="2686671" y="8822825"/>
-            <a:ext cx="9525" cy="1684412"/>
+            <a:off x="2211393" y="2422057"/>
+            <a:ext cx="9525" cy="2021294"/>
           </a:xfrm>
           <a:prstGeom prst="rect">
             <a:avLst/>
@@ -6962,8 +7312,8 @@
         </p:nvSpPr>
         <p:spPr>
           <a:xfrm>
-            <a:off x="4863803" y="400762"/>
-            <a:ext cx="9525" cy="1684412"/>
+            <a:off x="2211393" y="4443352"/>
+            <a:ext cx="9525" cy="2021294"/>
           </a:xfrm>
           <a:prstGeom prst="rect">
             <a:avLst/>
@@ -6991,8 +7341,8 @@
         </p:nvSpPr>
         <p:spPr>
           <a:xfrm>
-            <a:off x="4863803" y="2085175"/>
-            <a:ext cx="9525" cy="1684412"/>
+            <a:off x="2211393" y="6464647"/>
+            <a:ext cx="9525" cy="2021294"/>
           </a:xfrm>
           <a:prstGeom prst="rect">
             <a:avLst/>
@@ -7020,8 +7370,8 @@
         </p:nvSpPr>
         <p:spPr>
           <a:xfrm>
-            <a:off x="4863803" y="3769587"/>
-            <a:ext cx="9525" cy="1684412"/>
+            <a:off x="2211393" y="8485942"/>
+            <a:ext cx="9525" cy="2021294"/>
           </a:xfrm>
           <a:prstGeom prst="rect">
             <a:avLst/>
@@ -7049,8 +7399,8 @@
         </p:nvSpPr>
         <p:spPr>
           <a:xfrm>
-            <a:off x="4863803" y="5454000"/>
-            <a:ext cx="9525" cy="1684412"/>
+            <a:off x="3775237" y="400762"/>
+            <a:ext cx="9525" cy="2021294"/>
           </a:xfrm>
           <a:prstGeom prst="rect">
             <a:avLst/>
@@ -7078,8 +7428,8 @@
         </p:nvSpPr>
         <p:spPr>
           <a:xfrm>
-            <a:off x="4863803" y="7138412"/>
-            <a:ext cx="9525" cy="1684412"/>
+            <a:off x="3775237" y="2422057"/>
+            <a:ext cx="9525" cy="2021294"/>
           </a:xfrm>
           <a:prstGeom prst="rect">
             <a:avLst/>
@@ -7107,8 +7457,8 @@
         </p:nvSpPr>
         <p:spPr>
           <a:xfrm>
-            <a:off x="4863803" y="8822825"/>
-            <a:ext cx="9525" cy="1684412"/>
+            <a:off x="3775237" y="4443352"/>
+            <a:ext cx="9525" cy="2021294"/>
           </a:xfrm>
           <a:prstGeom prst="rect">
             <a:avLst/>
@@ -7136,8 +7486,8 @@
         </p:nvSpPr>
         <p:spPr>
           <a:xfrm>
-            <a:off x="7040935" y="400762"/>
-            <a:ext cx="9525" cy="1684412"/>
+            <a:off x="3775237" y="6464647"/>
+            <a:ext cx="9525" cy="2021294"/>
           </a:xfrm>
           <a:prstGeom prst="rect">
             <a:avLst/>
@@ -7165,8 +7515,8 @@
         </p:nvSpPr>
         <p:spPr>
           <a:xfrm>
-            <a:off x="7040935" y="2085175"/>
-            <a:ext cx="9525" cy="1684412"/>
+            <a:off x="3775237" y="8485942"/>
+            <a:ext cx="9525" cy="2021294"/>
           </a:xfrm>
           <a:prstGeom prst="rect">
             <a:avLst/>
@@ -7194,8 +7544,8 @@
         </p:nvSpPr>
         <p:spPr>
           <a:xfrm>
-            <a:off x="7040935" y="3769587"/>
-            <a:ext cx="9525" cy="1684412"/>
+            <a:off x="5339081" y="400762"/>
+            <a:ext cx="9525" cy="2021294"/>
           </a:xfrm>
           <a:prstGeom prst="rect">
             <a:avLst/>
@@ -7223,8 +7573,8 @@
         </p:nvSpPr>
         <p:spPr>
           <a:xfrm>
-            <a:off x="7040935" y="5454000"/>
-            <a:ext cx="9525" cy="1684412"/>
+            <a:off x="5339081" y="2422057"/>
+            <a:ext cx="9525" cy="2021294"/>
           </a:xfrm>
           <a:prstGeom prst="rect">
             <a:avLst/>
@@ -7252,8 +7602,8 @@
         </p:nvSpPr>
         <p:spPr>
           <a:xfrm>
-            <a:off x="7040935" y="7138412"/>
-            <a:ext cx="9525" cy="1684412"/>
+            <a:off x="5339081" y="4443352"/>
+            <a:ext cx="9525" cy="2021294"/>
           </a:xfrm>
           <a:prstGeom prst="rect">
             <a:avLst/>
@@ -7281,30 +7631,204 @@
         </p:nvSpPr>
         <p:spPr>
           <a:xfrm>
-            <a:off x="7040935" y="8822825"/>
-            <a:ext cx="9525" cy="1684412"/>
-          </a:xfrm>
-          <a:prstGeom prst="rect">
-            <a:avLst/>
-          </a:prstGeom>
-          <a:solidFill>
-            <a:srgbClr val="C0C0C0"/>
-          </a:solidFill>
-          <a:ln>
-            <a:noFill/>
-          </a:ln>
-        </p:spPr>
-        <p:txBody>
-          <a:bodyPr rtlCol="0" anchor="ctr"/>
-          <a:lstStyle/>
-          <a:p>
-            <a:pPr algn="ctr"/>
-          </a:p>
-        </p:txBody>
-      </p:sp>
-      <p:sp>
-        <p:nvSpPr>
-          <p:cNvPr id="65" name="TextBox 64"/>
+            <a:off x="5339081" y="6464647"/>
+            <a:ext cx="9525" cy="2021294"/>
+          </a:xfrm>
+          <a:prstGeom prst="rect">
+            <a:avLst/>
+          </a:prstGeom>
+          <a:solidFill>
+            <a:srgbClr val="C0C0C0"/>
+          </a:solidFill>
+          <a:ln>
+            <a:noFill/>
+          </a:ln>
+        </p:spPr>
+        <p:txBody>
+          <a:bodyPr rtlCol="0" anchor="ctr"/>
+          <a:lstStyle/>
+          <a:p>
+            <a:pPr algn="ctr"/>
+          </a:p>
+        </p:txBody>
+      </p:sp>
+      <p:sp>
+        <p:nvSpPr>
+          <p:cNvPr id="65" name="Rectangle 64"/>
+          <p:cNvSpPr/>
+          <p:nvPr/>
+        </p:nvSpPr>
+        <p:spPr>
+          <a:xfrm>
+            <a:off x="5339081" y="8485942"/>
+            <a:ext cx="9525" cy="2021294"/>
+          </a:xfrm>
+          <a:prstGeom prst="rect">
+            <a:avLst/>
+          </a:prstGeom>
+          <a:solidFill>
+            <a:srgbClr val="C0C0C0"/>
+          </a:solidFill>
+          <a:ln>
+            <a:noFill/>
+          </a:ln>
+        </p:spPr>
+        <p:txBody>
+          <a:bodyPr rtlCol="0" anchor="ctr"/>
+          <a:lstStyle/>
+          <a:p>
+            <a:pPr algn="ctr"/>
+          </a:p>
+        </p:txBody>
+      </p:sp>
+      <p:sp>
+        <p:nvSpPr>
+          <p:cNvPr id="66" name="Rectangle 65"/>
+          <p:cNvSpPr/>
+          <p:nvPr/>
+        </p:nvSpPr>
+        <p:spPr>
+          <a:xfrm>
+            <a:off x="6902925" y="400762"/>
+            <a:ext cx="9525" cy="2021294"/>
+          </a:xfrm>
+          <a:prstGeom prst="rect">
+            <a:avLst/>
+          </a:prstGeom>
+          <a:solidFill>
+            <a:srgbClr val="C0C0C0"/>
+          </a:solidFill>
+          <a:ln>
+            <a:noFill/>
+          </a:ln>
+        </p:spPr>
+        <p:txBody>
+          <a:bodyPr rtlCol="0" anchor="ctr"/>
+          <a:lstStyle/>
+          <a:p>
+            <a:pPr algn="ctr"/>
+          </a:p>
+        </p:txBody>
+      </p:sp>
+      <p:sp>
+        <p:nvSpPr>
+          <p:cNvPr id="67" name="Rectangle 66"/>
+          <p:cNvSpPr/>
+          <p:nvPr/>
+        </p:nvSpPr>
+        <p:spPr>
+          <a:xfrm>
+            <a:off x="6902925" y="2422057"/>
+            <a:ext cx="9525" cy="2021294"/>
+          </a:xfrm>
+          <a:prstGeom prst="rect">
+            <a:avLst/>
+          </a:prstGeom>
+          <a:solidFill>
+            <a:srgbClr val="C0C0C0"/>
+          </a:solidFill>
+          <a:ln>
+            <a:noFill/>
+          </a:ln>
+        </p:spPr>
+        <p:txBody>
+          <a:bodyPr rtlCol="0" anchor="ctr"/>
+          <a:lstStyle/>
+          <a:p>
+            <a:pPr algn="ctr"/>
+          </a:p>
+        </p:txBody>
+      </p:sp>
+      <p:sp>
+        <p:nvSpPr>
+          <p:cNvPr id="68" name="Rectangle 67"/>
+          <p:cNvSpPr/>
+          <p:nvPr/>
+        </p:nvSpPr>
+        <p:spPr>
+          <a:xfrm>
+            <a:off x="6902925" y="4443352"/>
+            <a:ext cx="9525" cy="2021294"/>
+          </a:xfrm>
+          <a:prstGeom prst="rect">
+            <a:avLst/>
+          </a:prstGeom>
+          <a:solidFill>
+            <a:srgbClr val="C0C0C0"/>
+          </a:solidFill>
+          <a:ln>
+            <a:noFill/>
+          </a:ln>
+        </p:spPr>
+        <p:txBody>
+          <a:bodyPr rtlCol="0" anchor="ctr"/>
+          <a:lstStyle/>
+          <a:p>
+            <a:pPr algn="ctr"/>
+          </a:p>
+        </p:txBody>
+      </p:sp>
+      <p:sp>
+        <p:nvSpPr>
+          <p:cNvPr id="69" name="Rectangle 68"/>
+          <p:cNvSpPr/>
+          <p:nvPr/>
+        </p:nvSpPr>
+        <p:spPr>
+          <a:xfrm>
+            <a:off x="6902925" y="6464647"/>
+            <a:ext cx="9525" cy="2021294"/>
+          </a:xfrm>
+          <a:prstGeom prst="rect">
+            <a:avLst/>
+          </a:prstGeom>
+          <a:solidFill>
+            <a:srgbClr val="C0C0C0"/>
+          </a:solidFill>
+          <a:ln>
+            <a:noFill/>
+          </a:ln>
+        </p:spPr>
+        <p:txBody>
+          <a:bodyPr rtlCol="0" anchor="ctr"/>
+          <a:lstStyle/>
+          <a:p>
+            <a:pPr algn="ctr"/>
+          </a:p>
+        </p:txBody>
+      </p:sp>
+      <p:sp>
+        <p:nvSpPr>
+          <p:cNvPr id="70" name="Rectangle 69"/>
+          <p:cNvSpPr/>
+          <p:nvPr/>
+        </p:nvSpPr>
+        <p:spPr>
+          <a:xfrm>
+            <a:off x="6902925" y="8485942"/>
+            <a:ext cx="9525" cy="2021294"/>
+          </a:xfrm>
+          <a:prstGeom prst="rect">
+            <a:avLst/>
+          </a:prstGeom>
+          <a:solidFill>
+            <a:srgbClr val="C0C0C0"/>
+          </a:solidFill>
+          <a:ln>
+            <a:noFill/>
+          </a:ln>
+        </p:spPr>
+        <p:txBody>
+          <a:bodyPr rtlCol="0" anchor="ctr"/>
+          <a:lstStyle/>
+          <a:p>
+            <a:pPr algn="ctr"/>
+          </a:p>
+        </p:txBody>
+      </p:sp>
+      <p:sp>
+        <p:nvSpPr>
+          <p:cNvPr id="71" name="TextBox 70"/>
           <p:cNvSpPr txBox="1"/>
           <p:nvPr/>
         </p:nvSpPr>
@@ -7363,8 +7887,8 @@
         </p:nvSpPr>
         <p:spPr>
           <a:xfrm>
-            <a:off x="514302" y="400762"/>
-            <a:ext cx="2177131" cy="1684412"/>
+            <a:off x="652311" y="400762"/>
+            <a:ext cx="1563844" cy="2021294"/>
           </a:xfrm>
           <a:prstGeom prst="rect">
             <a:avLst/>
@@ -7375,10 +7899,13 @@
           </a:ln>
         </p:spPr>
         <p:txBody>
-          <a:bodyPr rtlCol="0" anchor="ctr" wrap="none" lIns="57292" rIns="57292" tIns="38195" bIns="38195"/>
+          <a:bodyPr rtlCol="0" anchor="ctr" wrap="none" lIns="70922" rIns="70922" tIns="70922" bIns="70922"/>
           <a:lstStyle/>
           <a:p>
             <a:pPr algn="ctr">
+              <a:lnSpc>
+                <a:spcPct val="100000"/>
+              </a:lnSpc>
               <a:spcBef>
                 <a:spcPts val="0"/>
               </a:spcBef>
@@ -7387,93 +7914,7 @@
               </a:spcAft>
             </a:pPr>
             <a:r>
-              <a:rPr sz="2800" b="1">
-                <a:solidFill>
-                  <a:srgbClr val="1A1A1A"/>
-                </a:solidFill>
-                <a:latin typeface="Arial"/>
-              </a:rPr>
-              <a:t>Н</a:t>
-            </a:r>
-          </a:p>
-        </p:txBody>
-      </p:sp>
-      <p:sp>
-        <p:nvSpPr>
-          <p:cNvPr id="3" name="Rectangle 2"/>
-          <p:cNvSpPr/>
-          <p:nvPr/>
-        </p:nvSpPr>
-        <p:spPr>
-          <a:xfrm>
-            <a:off x="2691434" y="400762"/>
-            <a:ext cx="2177131" cy="1684412"/>
-          </a:xfrm>
-          <a:prstGeom prst="rect">
-            <a:avLst/>
-          </a:prstGeom>
-          <a:noFill/>
-          <a:ln>
-            <a:noFill/>
-          </a:ln>
-        </p:spPr>
-        <p:txBody>
-          <a:bodyPr rtlCol="0" anchor="ctr" wrap="none" lIns="57292" rIns="57292" tIns="38195" bIns="38195"/>
-          <a:lstStyle/>
-          <a:p>
-            <a:pPr algn="ctr">
-              <a:spcBef>
-                <a:spcPts val="0"/>
-              </a:spcBef>
-              <a:spcAft>
-                <a:spcPts val="0"/>
-              </a:spcAft>
-            </a:pPr>
-            <a:r>
-              <a:rPr sz="2800" b="1">
-                <a:solidFill>
-                  <a:srgbClr val="1A1A1A"/>
-                </a:solidFill>
-                <a:latin typeface="Arial"/>
-              </a:rPr>
-              <a:t>Н</a:t>
-            </a:r>
-          </a:p>
-        </p:txBody>
-      </p:sp>
-      <p:sp>
-        <p:nvSpPr>
-          <p:cNvPr id="4" name="Rectangle 3"/>
-          <p:cNvSpPr/>
-          <p:nvPr/>
-        </p:nvSpPr>
-        <p:spPr>
-          <a:xfrm>
-            <a:off x="4868565" y="400762"/>
-            <a:ext cx="2177131" cy="1684412"/>
-          </a:xfrm>
-          <a:prstGeom prst="rect">
-            <a:avLst/>
-          </a:prstGeom>
-          <a:noFill/>
-          <a:ln>
-            <a:noFill/>
-          </a:ln>
-        </p:spPr>
-        <p:txBody>
-          <a:bodyPr rtlCol="0" anchor="ctr" wrap="none" lIns="57292" rIns="57292" tIns="38195" bIns="38195"/>
-          <a:lstStyle/>
-          <a:p>
-            <a:pPr algn="ctr">
-              <a:spcBef>
-                <a:spcPts val="0"/>
-              </a:spcBef>
-              <a:spcAft>
-                <a:spcPts val="0"/>
-              </a:spcAft>
-            </a:pPr>
-            <a:r>
-              <a:rPr sz="2800" b="1">
+              <a:rPr sz="10410" b="1">
                 <a:solidFill>
                   <a:srgbClr val="1A1A1A"/>
                 </a:solidFill>
@@ -7486,14 +7927,14 @@
       </p:sp>
       <p:sp>
         <p:nvSpPr>
-          <p:cNvPr id="5" name="Rectangle 4"/>
-          <p:cNvSpPr/>
-          <p:nvPr/>
-        </p:nvSpPr>
-        <p:spPr>
-          <a:xfrm>
-            <a:off x="514302" y="2085175"/>
-            <a:ext cx="2177131" cy="1684412"/>
+          <p:cNvPr id="3" name="Rectangle 2"/>
+          <p:cNvSpPr/>
+          <p:nvPr/>
+        </p:nvSpPr>
+        <p:spPr>
+          <a:xfrm>
+            <a:off x="2216155" y="400762"/>
+            <a:ext cx="1563844" cy="2021294"/>
           </a:xfrm>
           <a:prstGeom prst="rect">
             <a:avLst/>
@@ -7504,10 +7945,13 @@
           </a:ln>
         </p:spPr>
         <p:txBody>
-          <a:bodyPr rtlCol="0" anchor="ctr" wrap="none" lIns="57292" rIns="57292" tIns="38195" bIns="38195"/>
+          <a:bodyPr rtlCol="0" anchor="ctr" wrap="none" lIns="70922" rIns="70922" tIns="70922" bIns="70922"/>
           <a:lstStyle/>
           <a:p>
             <a:pPr algn="ctr">
+              <a:lnSpc>
+                <a:spcPct val="100000"/>
+              </a:lnSpc>
               <a:spcBef>
                 <a:spcPts val="0"/>
               </a:spcBef>
@@ -7516,7 +7960,7 @@
               </a:spcAft>
             </a:pPr>
             <a:r>
-              <a:rPr sz="2800" b="1">
+              <a:rPr sz="10410" b="1">
                 <a:solidFill>
                   <a:srgbClr val="1A1A1A"/>
                 </a:solidFill>
@@ -7529,14 +7973,14 @@
       </p:sp>
       <p:sp>
         <p:nvSpPr>
-          <p:cNvPr id="6" name="Rectangle 5"/>
-          <p:cNvSpPr/>
-          <p:nvPr/>
-        </p:nvSpPr>
-        <p:spPr>
-          <a:xfrm>
-            <a:off x="2691434" y="2085175"/>
-            <a:ext cx="2177131" cy="1684412"/>
+          <p:cNvPr id="4" name="Rectangle 3"/>
+          <p:cNvSpPr/>
+          <p:nvPr/>
+        </p:nvSpPr>
+        <p:spPr>
+          <a:xfrm>
+            <a:off x="3780000" y="400762"/>
+            <a:ext cx="1563844" cy="2021294"/>
           </a:xfrm>
           <a:prstGeom prst="rect">
             <a:avLst/>
@@ -7547,10 +7991,13 @@
           </a:ln>
         </p:spPr>
         <p:txBody>
-          <a:bodyPr rtlCol="0" anchor="ctr" wrap="none" lIns="57292" rIns="57292" tIns="38195" bIns="38195"/>
+          <a:bodyPr rtlCol="0" anchor="ctr" wrap="none" lIns="70922" rIns="70922" tIns="70922" bIns="70922"/>
           <a:lstStyle/>
           <a:p>
             <a:pPr algn="ctr">
+              <a:lnSpc>
+                <a:spcPct val="100000"/>
+              </a:lnSpc>
               <a:spcBef>
                 <a:spcPts val="0"/>
               </a:spcBef>
@@ -7559,7 +8006,7 @@
               </a:spcAft>
             </a:pPr>
             <a:r>
-              <a:rPr sz="2800" b="1">
+              <a:rPr sz="10410" b="1">
                 <a:solidFill>
                   <a:srgbClr val="1A1A1A"/>
                 </a:solidFill>
@@ -7572,14 +8019,14 @@
       </p:sp>
       <p:sp>
         <p:nvSpPr>
-          <p:cNvPr id="7" name="Rectangle 6"/>
-          <p:cNvSpPr/>
-          <p:nvPr/>
-        </p:nvSpPr>
-        <p:spPr>
-          <a:xfrm>
-            <a:off x="4868565" y="2085175"/>
-            <a:ext cx="2177131" cy="1684412"/>
+          <p:cNvPr id="5" name="Rectangle 4"/>
+          <p:cNvSpPr/>
+          <p:nvPr/>
+        </p:nvSpPr>
+        <p:spPr>
+          <a:xfrm>
+            <a:off x="5343844" y="400762"/>
+            <a:ext cx="1563844" cy="2021294"/>
           </a:xfrm>
           <a:prstGeom prst="rect">
             <a:avLst/>
@@ -7590,10 +8037,13 @@
           </a:ln>
         </p:spPr>
         <p:txBody>
-          <a:bodyPr rtlCol="0" anchor="ctr" wrap="none" lIns="57292" rIns="57292" tIns="38195" bIns="38195"/>
+          <a:bodyPr rtlCol="0" anchor="ctr" wrap="none" lIns="70922" rIns="70922" tIns="70922" bIns="70922"/>
           <a:lstStyle/>
           <a:p>
             <a:pPr algn="ctr">
+              <a:lnSpc>
+                <a:spcPct val="100000"/>
+              </a:lnSpc>
               <a:spcBef>
                 <a:spcPts val="0"/>
               </a:spcBef>
@@ -7602,93 +8052,7 @@
               </a:spcAft>
             </a:pPr>
             <a:r>
-              <a:rPr sz="2800" b="1">
-                <a:solidFill>
-                  <a:srgbClr val="1A1A1A"/>
-                </a:solidFill>
-                <a:latin typeface="Arial"/>
-              </a:rPr>
-              <a:t>О</a:t>
-            </a:r>
-          </a:p>
-        </p:txBody>
-      </p:sp>
-      <p:sp>
-        <p:nvSpPr>
-          <p:cNvPr id="8" name="Rectangle 7"/>
-          <p:cNvSpPr/>
-          <p:nvPr/>
-        </p:nvSpPr>
-        <p:spPr>
-          <a:xfrm>
-            <a:off x="514302" y="3769587"/>
-            <a:ext cx="2177131" cy="1684412"/>
-          </a:xfrm>
-          <a:prstGeom prst="rect">
-            <a:avLst/>
-          </a:prstGeom>
-          <a:noFill/>
-          <a:ln>
-            <a:noFill/>
-          </a:ln>
-        </p:spPr>
-        <p:txBody>
-          <a:bodyPr rtlCol="0" anchor="ctr" wrap="none" lIns="57292" rIns="57292" tIns="38195" bIns="38195"/>
-          <a:lstStyle/>
-          <a:p>
-            <a:pPr algn="ctr">
-              <a:spcBef>
-                <a:spcPts val="0"/>
-              </a:spcBef>
-              <a:spcAft>
-                <a:spcPts val="0"/>
-              </a:spcAft>
-            </a:pPr>
-            <a:r>
-              <a:rPr sz="2800" b="1">
-                <a:solidFill>
-                  <a:srgbClr val="1A1A1A"/>
-                </a:solidFill>
-                <a:latin typeface="Arial"/>
-              </a:rPr>
-              <a:t>О</a:t>
-            </a:r>
-          </a:p>
-        </p:txBody>
-      </p:sp>
-      <p:sp>
-        <p:nvSpPr>
-          <p:cNvPr id="9" name="Rectangle 8"/>
-          <p:cNvSpPr/>
-          <p:nvPr/>
-        </p:nvSpPr>
-        <p:spPr>
-          <a:xfrm>
-            <a:off x="2691434" y="3769587"/>
-            <a:ext cx="2177131" cy="1684412"/>
-          </a:xfrm>
-          <a:prstGeom prst="rect">
-            <a:avLst/>
-          </a:prstGeom>
-          <a:noFill/>
-          <a:ln>
-            <a:noFill/>
-          </a:ln>
-        </p:spPr>
-        <p:txBody>
-          <a:bodyPr rtlCol="0" anchor="ctr" wrap="none" lIns="57292" rIns="57292" tIns="38195" bIns="38195"/>
-          <a:lstStyle/>
-          <a:p>
-            <a:pPr algn="ctr">
-              <a:spcBef>
-                <a:spcPts val="0"/>
-              </a:spcBef>
-              <a:spcAft>
-                <a:spcPts val="0"/>
-              </a:spcAft>
-            </a:pPr>
-            <a:r>
-              <a:rPr sz="2800" b="1">
+              <a:rPr sz="10410" b="1">
                 <a:solidFill>
                   <a:srgbClr val="1A1A1A"/>
                 </a:solidFill>
@@ -7701,14 +8065,14 @@
       </p:sp>
       <p:sp>
         <p:nvSpPr>
-          <p:cNvPr id="10" name="Rectangle 9"/>
-          <p:cNvSpPr/>
-          <p:nvPr/>
-        </p:nvSpPr>
-        <p:spPr>
-          <a:xfrm>
-            <a:off x="4868565" y="3769587"/>
-            <a:ext cx="2177131" cy="1684412"/>
+          <p:cNvPr id="6" name="Rectangle 5"/>
+          <p:cNvSpPr/>
+          <p:nvPr/>
+        </p:nvSpPr>
+        <p:spPr>
+          <a:xfrm>
+            <a:off x="652311" y="2422057"/>
+            <a:ext cx="1563844" cy="2021294"/>
           </a:xfrm>
           <a:prstGeom prst="rect">
             <a:avLst/>
@@ -7719,10 +8083,13 @@
           </a:ln>
         </p:spPr>
         <p:txBody>
-          <a:bodyPr rtlCol="0" anchor="ctr" wrap="none" lIns="57292" rIns="57292" tIns="38195" bIns="38195"/>
+          <a:bodyPr rtlCol="0" anchor="ctr" wrap="none" lIns="70922" rIns="70922" tIns="70922" bIns="70922"/>
           <a:lstStyle/>
           <a:p>
             <a:pPr algn="ctr">
+              <a:lnSpc>
+                <a:spcPct val="100000"/>
+              </a:lnSpc>
               <a:spcBef>
                 <a:spcPts val="0"/>
               </a:spcBef>
@@ -7731,7 +8098,7 @@
               </a:spcAft>
             </a:pPr>
             <a:r>
-              <a:rPr sz="2800" b="1">
+              <a:rPr sz="10410" b="1">
                 <a:solidFill>
                   <a:srgbClr val="1A1A1A"/>
                 </a:solidFill>
@@ -7744,14 +8111,14 @@
       </p:sp>
       <p:sp>
         <p:nvSpPr>
-          <p:cNvPr id="11" name="Rectangle 10"/>
-          <p:cNvSpPr/>
-          <p:nvPr/>
-        </p:nvSpPr>
-        <p:spPr>
-          <a:xfrm>
-            <a:off x="514302" y="5454000"/>
-            <a:ext cx="2177131" cy="1684412"/>
+          <p:cNvPr id="7" name="Rectangle 6"/>
+          <p:cNvSpPr/>
+          <p:nvPr/>
+        </p:nvSpPr>
+        <p:spPr>
+          <a:xfrm>
+            <a:off x="2216155" y="2422057"/>
+            <a:ext cx="1563844" cy="2021294"/>
           </a:xfrm>
           <a:prstGeom prst="rect">
             <a:avLst/>
@@ -7762,10 +8129,13 @@
           </a:ln>
         </p:spPr>
         <p:txBody>
-          <a:bodyPr rtlCol="0" anchor="ctr" wrap="none" lIns="57292" rIns="57292" tIns="38195" bIns="38195"/>
+          <a:bodyPr rtlCol="0" anchor="ctr" wrap="none" lIns="70922" rIns="70922" tIns="70922" bIns="70922"/>
           <a:lstStyle/>
           <a:p>
             <a:pPr algn="ctr">
+              <a:lnSpc>
+                <a:spcPct val="100000"/>
+              </a:lnSpc>
               <a:spcBef>
                 <a:spcPts val="0"/>
               </a:spcBef>
@@ -7774,7 +8144,7 @@
               </a:spcAft>
             </a:pPr>
             <a:r>
-              <a:rPr sz="2800" b="1">
+              <a:rPr sz="10410" b="1">
                 <a:solidFill>
                   <a:srgbClr val="1A1A1A"/>
                 </a:solidFill>
@@ -7787,14 +8157,14 @@
       </p:sp>
       <p:sp>
         <p:nvSpPr>
-          <p:cNvPr id="12" name="Rectangle 11"/>
-          <p:cNvSpPr/>
-          <p:nvPr/>
-        </p:nvSpPr>
-        <p:spPr>
-          <a:xfrm>
-            <a:off x="2691434" y="5454000"/>
-            <a:ext cx="2177131" cy="1684412"/>
+          <p:cNvPr id="8" name="Rectangle 7"/>
+          <p:cNvSpPr/>
+          <p:nvPr/>
+        </p:nvSpPr>
+        <p:spPr>
+          <a:xfrm>
+            <a:off x="3780000" y="2422057"/>
+            <a:ext cx="1563844" cy="2021294"/>
           </a:xfrm>
           <a:prstGeom prst="rect">
             <a:avLst/>
@@ -7805,10 +8175,13 @@
           </a:ln>
         </p:spPr>
         <p:txBody>
-          <a:bodyPr rtlCol="0" anchor="ctr" wrap="none" lIns="57292" rIns="57292" tIns="38195" bIns="38195"/>
+          <a:bodyPr rtlCol="0" anchor="ctr" wrap="none" lIns="70922" rIns="70922" tIns="70922" bIns="70922"/>
           <a:lstStyle/>
           <a:p>
             <a:pPr algn="ctr">
+              <a:lnSpc>
+                <a:spcPct val="100000"/>
+              </a:lnSpc>
               <a:spcBef>
                 <a:spcPts val="0"/>
               </a:spcBef>
@@ -7817,7 +8190,7 @@
               </a:spcAft>
             </a:pPr>
             <a:r>
-              <a:rPr sz="2800" b="1">
+              <a:rPr sz="10410" b="1">
                 <a:solidFill>
                   <a:srgbClr val="1A1A1A"/>
                 </a:solidFill>
@@ -7830,14 +8203,14 @@
       </p:sp>
       <p:sp>
         <p:nvSpPr>
-          <p:cNvPr id="13" name="Rectangle 12"/>
-          <p:cNvSpPr/>
-          <p:nvPr/>
-        </p:nvSpPr>
-        <p:spPr>
-          <a:xfrm>
-            <a:off x="4868565" y="5454000"/>
-            <a:ext cx="2177131" cy="1684412"/>
+          <p:cNvPr id="9" name="Rectangle 8"/>
+          <p:cNvSpPr/>
+          <p:nvPr/>
+        </p:nvSpPr>
+        <p:spPr>
+          <a:xfrm>
+            <a:off x="5343844" y="2422057"/>
+            <a:ext cx="1563844" cy="2021294"/>
           </a:xfrm>
           <a:prstGeom prst="rect">
             <a:avLst/>
@@ -7848,10 +8221,13 @@
           </a:ln>
         </p:spPr>
         <p:txBody>
-          <a:bodyPr rtlCol="0" anchor="ctr" wrap="none" lIns="57292" rIns="57292" tIns="38195" bIns="38195"/>
+          <a:bodyPr rtlCol="0" anchor="ctr" wrap="none" lIns="70922" rIns="70922" tIns="70922" bIns="70922"/>
           <a:lstStyle/>
           <a:p>
             <a:pPr algn="ctr">
+              <a:lnSpc>
+                <a:spcPct val="100000"/>
+              </a:lnSpc>
               <a:spcBef>
                 <a:spcPts val="0"/>
               </a:spcBef>
@@ -7860,7 +8236,7 @@
               </a:spcAft>
             </a:pPr>
             <a:r>
-              <a:rPr sz="2800" b="1">
+              <a:rPr sz="10410" b="1">
                 <a:solidFill>
                   <a:srgbClr val="1A1A1A"/>
                 </a:solidFill>
@@ -7873,14 +8249,14 @@
       </p:sp>
       <p:sp>
         <p:nvSpPr>
-          <p:cNvPr id="14" name="Rectangle 13"/>
-          <p:cNvSpPr/>
-          <p:nvPr/>
-        </p:nvSpPr>
-        <p:spPr>
-          <a:xfrm>
-            <a:off x="514302" y="7138412"/>
-            <a:ext cx="2177131" cy="1684412"/>
+          <p:cNvPr id="10" name="Rectangle 9"/>
+          <p:cNvSpPr/>
+          <p:nvPr/>
+        </p:nvSpPr>
+        <p:spPr>
+          <a:xfrm>
+            <a:off x="652311" y="4443352"/>
+            <a:ext cx="1563844" cy="2021294"/>
           </a:xfrm>
           <a:prstGeom prst="rect">
             <a:avLst/>
@@ -7891,10 +8267,13 @@
           </a:ln>
         </p:spPr>
         <p:txBody>
-          <a:bodyPr rtlCol="0" anchor="ctr" wrap="none" lIns="57292" rIns="57292" tIns="38195" bIns="38195"/>
+          <a:bodyPr rtlCol="0" anchor="ctr" wrap="none" lIns="70922" rIns="70922" tIns="70922" bIns="70922"/>
           <a:lstStyle/>
           <a:p>
             <a:pPr algn="ctr">
+              <a:lnSpc>
+                <a:spcPct val="100000"/>
+              </a:lnSpc>
               <a:spcBef>
                 <a:spcPts val="0"/>
               </a:spcBef>
@@ -7903,7 +8282,7 @@
               </a:spcAft>
             </a:pPr>
             <a:r>
-              <a:rPr sz="2800" b="1">
+              <a:rPr sz="10410" b="1">
                 <a:solidFill>
                   <a:srgbClr val="1A1A1A"/>
                 </a:solidFill>
@@ -7916,14 +8295,14 @@
       </p:sp>
       <p:sp>
         <p:nvSpPr>
-          <p:cNvPr id="15" name="Rectangle 14"/>
-          <p:cNvSpPr/>
-          <p:nvPr/>
-        </p:nvSpPr>
-        <p:spPr>
-          <a:xfrm>
-            <a:off x="2691434" y="7138412"/>
-            <a:ext cx="2177131" cy="1684412"/>
+          <p:cNvPr id="11" name="Rectangle 10"/>
+          <p:cNvSpPr/>
+          <p:nvPr/>
+        </p:nvSpPr>
+        <p:spPr>
+          <a:xfrm>
+            <a:off x="2216155" y="4443352"/>
+            <a:ext cx="1563844" cy="2021294"/>
           </a:xfrm>
           <a:prstGeom prst="rect">
             <a:avLst/>
@@ -7934,10 +8313,13 @@
           </a:ln>
         </p:spPr>
         <p:txBody>
-          <a:bodyPr rtlCol="0" anchor="ctr" wrap="none" lIns="57292" rIns="57292" tIns="38195" bIns="38195"/>
+          <a:bodyPr rtlCol="0" anchor="ctr" wrap="none" lIns="70922" rIns="70922" tIns="70922" bIns="70922"/>
           <a:lstStyle/>
           <a:p>
             <a:pPr algn="ctr">
+              <a:lnSpc>
+                <a:spcPct val="100000"/>
+              </a:lnSpc>
               <a:spcBef>
                 <a:spcPts val="0"/>
               </a:spcBef>
@@ -7946,7 +8328,7 @@
               </a:spcAft>
             </a:pPr>
             <a:r>
-              <a:rPr sz="2800" b="1">
+              <a:rPr sz="10410" b="1">
                 <a:solidFill>
                   <a:srgbClr val="1A1A1A"/>
                 </a:solidFill>
@@ -7959,14 +8341,14 @@
       </p:sp>
       <p:sp>
         <p:nvSpPr>
-          <p:cNvPr id="16" name="Rectangle 15"/>
-          <p:cNvSpPr/>
-          <p:nvPr/>
-        </p:nvSpPr>
-        <p:spPr>
-          <a:xfrm>
-            <a:off x="4868565" y="7138412"/>
-            <a:ext cx="2177131" cy="1684412"/>
+          <p:cNvPr id="12" name="Rectangle 11"/>
+          <p:cNvSpPr/>
+          <p:nvPr/>
+        </p:nvSpPr>
+        <p:spPr>
+          <a:xfrm>
+            <a:off x="3780000" y="4443352"/>
+            <a:ext cx="1563844" cy="2021294"/>
           </a:xfrm>
           <a:prstGeom prst="rect">
             <a:avLst/>
@@ -7977,10 +8359,13 @@
           </a:ln>
         </p:spPr>
         <p:txBody>
-          <a:bodyPr rtlCol="0" anchor="ctr" wrap="none" lIns="57292" rIns="57292" tIns="38195" bIns="38195"/>
+          <a:bodyPr rtlCol="0" anchor="ctr" wrap="none" lIns="70922" rIns="70922" tIns="70922" bIns="70922"/>
           <a:lstStyle/>
           <a:p>
             <a:pPr algn="ctr">
+              <a:lnSpc>
+                <a:spcPct val="100000"/>
+              </a:lnSpc>
               <a:spcBef>
                 <a:spcPts val="0"/>
               </a:spcBef>
@@ -7989,7 +8374,7 @@
               </a:spcAft>
             </a:pPr>
             <a:r>
-              <a:rPr sz="2800" b="1">
+              <a:rPr sz="10410" b="1">
                 <a:solidFill>
                   <a:srgbClr val="1A1A1A"/>
                 </a:solidFill>
@@ -8002,14 +8387,14 @@
       </p:sp>
       <p:sp>
         <p:nvSpPr>
-          <p:cNvPr id="17" name="Rectangle 16"/>
-          <p:cNvSpPr/>
-          <p:nvPr/>
-        </p:nvSpPr>
-        <p:spPr>
-          <a:xfrm>
-            <a:off x="514302" y="8822825"/>
-            <a:ext cx="2177131" cy="1684412"/>
+          <p:cNvPr id="13" name="Rectangle 12"/>
+          <p:cNvSpPr/>
+          <p:nvPr/>
+        </p:nvSpPr>
+        <p:spPr>
+          <a:xfrm>
+            <a:off x="5343844" y="4443352"/>
+            <a:ext cx="1563844" cy="2021294"/>
           </a:xfrm>
           <a:prstGeom prst="rect">
             <a:avLst/>
@@ -8020,10 +8405,13 @@
           </a:ln>
         </p:spPr>
         <p:txBody>
-          <a:bodyPr rtlCol="0" anchor="ctr" wrap="none" lIns="57292" rIns="57292" tIns="38195" bIns="38195"/>
+          <a:bodyPr rtlCol="0" anchor="ctr" wrap="none" lIns="70922" rIns="70922" tIns="70922" bIns="70922"/>
           <a:lstStyle/>
           <a:p>
             <a:pPr algn="ctr">
+              <a:lnSpc>
+                <a:spcPct val="100000"/>
+              </a:lnSpc>
               <a:spcBef>
                 <a:spcPts val="0"/>
               </a:spcBef>
@@ -8032,7 +8420,7 @@
               </a:spcAft>
             </a:pPr>
             <a:r>
-              <a:rPr sz="2800" b="1">
+              <a:rPr sz="10410" b="1">
                 <a:solidFill>
                   <a:srgbClr val="1A1A1A"/>
                 </a:solidFill>
@@ -8045,14 +8433,14 @@
       </p:sp>
       <p:sp>
         <p:nvSpPr>
-          <p:cNvPr id="18" name="Rectangle 17"/>
-          <p:cNvSpPr/>
-          <p:nvPr/>
-        </p:nvSpPr>
-        <p:spPr>
-          <a:xfrm>
-            <a:off x="2691434" y="8822825"/>
-            <a:ext cx="2177131" cy="1684412"/>
+          <p:cNvPr id="14" name="Rectangle 13"/>
+          <p:cNvSpPr/>
+          <p:nvPr/>
+        </p:nvSpPr>
+        <p:spPr>
+          <a:xfrm>
+            <a:off x="652311" y="6464647"/>
+            <a:ext cx="1563844" cy="2021294"/>
           </a:xfrm>
           <a:prstGeom prst="rect">
             <a:avLst/>
@@ -8063,10 +8451,13 @@
           </a:ln>
         </p:spPr>
         <p:txBody>
-          <a:bodyPr rtlCol="0" anchor="ctr" wrap="none" lIns="57292" rIns="57292" tIns="38195" bIns="38195"/>
+          <a:bodyPr rtlCol="0" anchor="ctr" wrap="none" lIns="70922" rIns="70922" tIns="70922" bIns="70922"/>
           <a:lstStyle/>
           <a:p>
             <a:pPr algn="ctr">
+              <a:lnSpc>
+                <a:spcPct val="100000"/>
+              </a:lnSpc>
               <a:spcBef>
                 <a:spcPts val="0"/>
               </a:spcBef>
@@ -8075,7 +8466,7 @@
               </a:spcAft>
             </a:pPr>
             <a:r>
-              <a:rPr sz="2800" b="1">
+              <a:rPr sz="10410" b="1">
                 <a:solidFill>
                   <a:srgbClr val="1A1A1A"/>
                 </a:solidFill>
@@ -8088,14 +8479,14 @@
       </p:sp>
       <p:sp>
         <p:nvSpPr>
-          <p:cNvPr id="19" name="Rectangle 18"/>
-          <p:cNvSpPr/>
-          <p:nvPr/>
-        </p:nvSpPr>
-        <p:spPr>
-          <a:xfrm>
-            <a:off x="4868565" y="8822825"/>
-            <a:ext cx="2177131" cy="1684412"/>
+          <p:cNvPr id="15" name="Rectangle 14"/>
+          <p:cNvSpPr/>
+          <p:nvPr/>
+        </p:nvSpPr>
+        <p:spPr>
+          <a:xfrm>
+            <a:off x="2216155" y="6464647"/>
+            <a:ext cx="1563844" cy="2021294"/>
           </a:xfrm>
           <a:prstGeom prst="rect">
             <a:avLst/>
@@ -8106,10 +8497,13 @@
           </a:ln>
         </p:spPr>
         <p:txBody>
-          <a:bodyPr rtlCol="0" anchor="ctr" wrap="none" lIns="57292" rIns="57292" tIns="38195" bIns="38195"/>
+          <a:bodyPr rtlCol="0" anchor="ctr" wrap="none" lIns="70922" rIns="70922" tIns="70922" bIns="70922"/>
           <a:lstStyle/>
           <a:p>
             <a:pPr algn="ctr">
+              <a:lnSpc>
+                <a:spcPct val="100000"/>
+              </a:lnSpc>
               <a:spcBef>
                 <a:spcPts val="0"/>
               </a:spcBef>
@@ -8118,7 +8512,7 @@
               </a:spcAft>
             </a:pPr>
             <a:r>
-              <a:rPr sz="2800" b="1">
+              <a:rPr sz="10410" b="1">
                 <a:solidFill>
                   <a:srgbClr val="1A1A1A"/>
                 </a:solidFill>
@@ -8131,30 +8525,231 @@
       </p:sp>
       <p:sp>
         <p:nvSpPr>
+          <p:cNvPr id="16" name="Rectangle 15"/>
+          <p:cNvSpPr/>
+          <p:nvPr/>
+        </p:nvSpPr>
+        <p:spPr>
+          <a:xfrm>
+            <a:off x="3780000" y="6464647"/>
+            <a:ext cx="1563844" cy="2021294"/>
+          </a:xfrm>
+          <a:prstGeom prst="rect">
+            <a:avLst/>
+          </a:prstGeom>
+          <a:noFill/>
+          <a:ln>
+            <a:noFill/>
+          </a:ln>
+        </p:spPr>
+        <p:txBody>
+          <a:bodyPr rtlCol="0" anchor="ctr" wrap="none" lIns="70922" rIns="70922" tIns="70922" bIns="70922"/>
+          <a:lstStyle/>
+          <a:p>
+            <a:pPr algn="ctr">
+              <a:lnSpc>
+                <a:spcPct val="100000"/>
+              </a:lnSpc>
+              <a:spcBef>
+                <a:spcPts val="0"/>
+              </a:spcBef>
+              <a:spcAft>
+                <a:spcPts val="0"/>
+              </a:spcAft>
+            </a:pPr>
+            <a:r>
+              <a:rPr sz="10410" b="1">
+                <a:solidFill>
+                  <a:srgbClr val="1A1A1A"/>
+                </a:solidFill>
+                <a:latin typeface="Arial"/>
+              </a:rPr>
+              <a:t>У</a:t>
+            </a:r>
+          </a:p>
+        </p:txBody>
+      </p:sp>
+      <p:sp>
+        <p:nvSpPr>
+          <p:cNvPr id="17" name="Rectangle 16"/>
+          <p:cNvSpPr/>
+          <p:nvPr/>
+        </p:nvSpPr>
+        <p:spPr>
+          <a:xfrm>
+            <a:off x="5343844" y="6464647"/>
+            <a:ext cx="1563844" cy="2021294"/>
+          </a:xfrm>
+          <a:prstGeom prst="rect">
+            <a:avLst/>
+          </a:prstGeom>
+          <a:noFill/>
+          <a:ln>
+            <a:noFill/>
+          </a:ln>
+        </p:spPr>
+        <p:txBody>
+          <a:bodyPr rtlCol="0" anchor="ctr" wrap="none" lIns="70922" rIns="70922" tIns="70922" bIns="70922"/>
+          <a:lstStyle/>
+          <a:p>
+            <a:pPr algn="ctr">
+              <a:lnSpc>
+                <a:spcPct val="100000"/>
+              </a:lnSpc>
+              <a:spcBef>
+                <a:spcPts val="0"/>
+              </a:spcBef>
+              <a:spcAft>
+                <a:spcPts val="0"/>
+              </a:spcAft>
+            </a:pPr>
+            <a:r>
+              <a:rPr sz="10410" b="1">
+                <a:solidFill>
+                  <a:srgbClr val="1A1A1A"/>
+                </a:solidFill>
+                <a:latin typeface="Arial"/>
+              </a:rPr>
+              <a:t>У</a:t>
+            </a:r>
+          </a:p>
+        </p:txBody>
+      </p:sp>
+      <p:sp>
+        <p:nvSpPr>
+          <p:cNvPr id="18" name="Rectangle 17"/>
+          <p:cNvSpPr/>
+          <p:nvPr/>
+        </p:nvSpPr>
+        <p:spPr>
+          <a:xfrm>
+            <a:off x="652311" y="8485942"/>
+            <a:ext cx="1563844" cy="2021294"/>
+          </a:xfrm>
+          <a:prstGeom prst="rect">
+            <a:avLst/>
+          </a:prstGeom>
+          <a:noFill/>
+          <a:ln>
+            <a:noFill/>
+          </a:ln>
+        </p:spPr>
+        <p:txBody>
+          <a:bodyPr rtlCol="0" anchor="ctr" wrap="none" lIns="70922" rIns="70922" tIns="70922" bIns="70922"/>
+          <a:lstStyle/>
+          <a:p>
+            <a:pPr algn="ctr">
+              <a:lnSpc>
+                <a:spcPct val="100000"/>
+              </a:lnSpc>
+              <a:spcBef>
+                <a:spcPts val="0"/>
+              </a:spcBef>
+              <a:spcAft>
+                <a:spcPts val="0"/>
+              </a:spcAft>
+            </a:pPr>
+            <a:r>
+              <a:rPr sz="10410" b="1">
+                <a:solidFill>
+                  <a:srgbClr val="1A1A1A"/>
+                </a:solidFill>
+                <a:latin typeface="Arial"/>
+              </a:rPr>
+              <a:t>Ф</a:t>
+            </a:r>
+          </a:p>
+        </p:txBody>
+      </p:sp>
+      <p:sp>
+        <p:nvSpPr>
+          <p:cNvPr id="19" name="Rectangle 18"/>
+          <p:cNvSpPr/>
+          <p:nvPr/>
+        </p:nvSpPr>
+        <p:spPr>
+          <a:xfrm>
+            <a:off x="2216155" y="8485942"/>
+            <a:ext cx="1563844" cy="2021294"/>
+          </a:xfrm>
+          <a:prstGeom prst="rect">
+            <a:avLst/>
+          </a:prstGeom>
+          <a:noFill/>
+          <a:ln>
+            <a:noFill/>
+          </a:ln>
+        </p:spPr>
+        <p:txBody>
+          <a:bodyPr rtlCol="0" anchor="ctr" wrap="none" lIns="70922" rIns="70922" tIns="70922" bIns="70922"/>
+          <a:lstStyle/>
+          <a:p>
+            <a:pPr algn="ctr">
+              <a:lnSpc>
+                <a:spcPct val="100000"/>
+              </a:lnSpc>
+              <a:spcBef>
+                <a:spcPts val="0"/>
+              </a:spcBef>
+              <a:spcAft>
+                <a:spcPts val="0"/>
+              </a:spcAft>
+            </a:pPr>
+            <a:r>
+              <a:rPr sz="10410" b="1">
+                <a:solidFill>
+                  <a:srgbClr val="1A1A1A"/>
+                </a:solidFill>
+                <a:latin typeface="Arial"/>
+              </a:rPr>
+              <a:t>Х</a:t>
+            </a:r>
+          </a:p>
+        </p:txBody>
+      </p:sp>
+      <p:sp>
+        <p:nvSpPr>
           <p:cNvPr id="20" name="Rectangle 19"/>
           <p:cNvSpPr/>
           <p:nvPr/>
         </p:nvSpPr>
         <p:spPr>
           <a:xfrm>
-            <a:off x="514302" y="396000"/>
-            <a:ext cx="2177131" cy="9525"/>
-          </a:xfrm>
-          <a:prstGeom prst="rect">
-            <a:avLst/>
-          </a:prstGeom>
-          <a:solidFill>
-            <a:srgbClr val="C0C0C0"/>
-          </a:solidFill>
-          <a:ln>
-            <a:noFill/>
-          </a:ln>
-        </p:spPr>
-        <p:txBody>
-          <a:bodyPr rtlCol="0" anchor="ctr"/>
-          <a:lstStyle/>
-          <a:p>
-            <a:pPr algn="ctr"/>
+            <a:off x="3780000" y="8485942"/>
+            <a:ext cx="1563844" cy="2021294"/>
+          </a:xfrm>
+          <a:prstGeom prst="rect">
+            <a:avLst/>
+          </a:prstGeom>
+          <a:noFill/>
+          <a:ln>
+            <a:noFill/>
+          </a:ln>
+        </p:spPr>
+        <p:txBody>
+          <a:bodyPr rtlCol="0" anchor="ctr" wrap="none" lIns="70922" rIns="70922" tIns="70922" bIns="70922"/>
+          <a:lstStyle/>
+          <a:p>
+            <a:pPr algn="ctr">
+              <a:lnSpc>
+                <a:spcPct val="100000"/>
+              </a:lnSpc>
+              <a:spcBef>
+                <a:spcPts val="0"/>
+              </a:spcBef>
+              <a:spcAft>
+                <a:spcPts val="0"/>
+              </a:spcAft>
+            </a:pPr>
+            <a:r>
+              <a:rPr sz="10410" b="1">
+                <a:solidFill>
+                  <a:srgbClr val="1A1A1A"/>
+                </a:solidFill>
+                <a:latin typeface="Arial"/>
+              </a:rPr>
+              <a:t>Ц</a:t>
+            </a:r>
           </a:p>
         </p:txBody>
       </p:sp>
@@ -8166,24 +8761,41 @@
         </p:nvSpPr>
         <p:spPr>
           <a:xfrm>
-            <a:off x="2691434" y="396000"/>
-            <a:ext cx="2177131" cy="9525"/>
-          </a:xfrm>
-          <a:prstGeom prst="rect">
-            <a:avLst/>
-          </a:prstGeom>
-          <a:solidFill>
-            <a:srgbClr val="C0C0C0"/>
-          </a:solidFill>
-          <a:ln>
-            <a:noFill/>
-          </a:ln>
-        </p:spPr>
-        <p:txBody>
-          <a:bodyPr rtlCol="0" anchor="ctr"/>
-          <a:lstStyle/>
-          <a:p>
-            <a:pPr algn="ctr"/>
+            <a:off x="5343844" y="8485942"/>
+            <a:ext cx="1563844" cy="2021294"/>
+          </a:xfrm>
+          <a:prstGeom prst="rect">
+            <a:avLst/>
+          </a:prstGeom>
+          <a:noFill/>
+          <a:ln>
+            <a:noFill/>
+          </a:ln>
+        </p:spPr>
+        <p:txBody>
+          <a:bodyPr rtlCol="0" anchor="ctr" wrap="none" lIns="70922" rIns="70922" tIns="70922" bIns="70922"/>
+          <a:lstStyle/>
+          <a:p>
+            <a:pPr algn="ctr">
+              <a:lnSpc>
+                <a:spcPct val="100000"/>
+              </a:lnSpc>
+              <a:spcBef>
+                <a:spcPts val="0"/>
+              </a:spcBef>
+              <a:spcAft>
+                <a:spcPts val="0"/>
+              </a:spcAft>
+            </a:pPr>
+            <a:r>
+              <a:rPr sz="10410" b="1">
+                <a:solidFill>
+                  <a:srgbClr val="1A1A1A"/>
+                </a:solidFill>
+                <a:latin typeface="Arial"/>
+              </a:rPr>
+              <a:t>Ч</a:t>
+            </a:r>
           </a:p>
         </p:txBody>
       </p:sp>
@@ -8195,8 +8807,8 @@
         </p:nvSpPr>
         <p:spPr>
           <a:xfrm>
-            <a:off x="4868565" y="396000"/>
-            <a:ext cx="2177131" cy="9525"/>
+            <a:off x="652311" y="396000"/>
+            <a:ext cx="1563844" cy="9525"/>
           </a:xfrm>
           <a:prstGeom prst="rect">
             <a:avLst/>
@@ -8224,8 +8836,8 @@
         </p:nvSpPr>
         <p:spPr>
           <a:xfrm>
-            <a:off x="514302" y="2080412"/>
-            <a:ext cx="2177131" cy="9525"/>
+            <a:off x="2216155" y="396000"/>
+            <a:ext cx="1563844" cy="9525"/>
           </a:xfrm>
           <a:prstGeom prst="rect">
             <a:avLst/>
@@ -8253,8 +8865,8 @@
         </p:nvSpPr>
         <p:spPr>
           <a:xfrm>
-            <a:off x="2691434" y="2080412"/>
-            <a:ext cx="2177131" cy="9525"/>
+            <a:off x="3780000" y="396000"/>
+            <a:ext cx="1563844" cy="9525"/>
           </a:xfrm>
           <a:prstGeom prst="rect">
             <a:avLst/>
@@ -8282,8 +8894,8 @@
         </p:nvSpPr>
         <p:spPr>
           <a:xfrm>
-            <a:off x="4868565" y="2080412"/>
-            <a:ext cx="2177131" cy="9525"/>
+            <a:off x="5343844" y="396000"/>
+            <a:ext cx="1563844" cy="9525"/>
           </a:xfrm>
           <a:prstGeom prst="rect">
             <a:avLst/>
@@ -8311,8 +8923,8 @@
         </p:nvSpPr>
         <p:spPr>
           <a:xfrm>
-            <a:off x="514302" y="3764825"/>
-            <a:ext cx="2177131" cy="9525"/>
+            <a:off x="652311" y="2417295"/>
+            <a:ext cx="1563844" cy="9525"/>
           </a:xfrm>
           <a:prstGeom prst="rect">
             <a:avLst/>
@@ -8340,8 +8952,8 @@
         </p:nvSpPr>
         <p:spPr>
           <a:xfrm>
-            <a:off x="2691434" y="3764825"/>
-            <a:ext cx="2177131" cy="9525"/>
+            <a:off x="2216155" y="2417295"/>
+            <a:ext cx="1563844" cy="9525"/>
           </a:xfrm>
           <a:prstGeom prst="rect">
             <a:avLst/>
@@ -8369,8 +8981,8 @@
         </p:nvSpPr>
         <p:spPr>
           <a:xfrm>
-            <a:off x="4868565" y="3764825"/>
-            <a:ext cx="2177131" cy="9525"/>
+            <a:off x="3780000" y="2417295"/>
+            <a:ext cx="1563844" cy="9525"/>
           </a:xfrm>
           <a:prstGeom prst="rect">
             <a:avLst/>
@@ -8398,8 +9010,8 @@
         </p:nvSpPr>
         <p:spPr>
           <a:xfrm>
-            <a:off x="514302" y="5449237"/>
-            <a:ext cx="2177131" cy="9525"/>
+            <a:off x="5343844" y="2417295"/>
+            <a:ext cx="1563844" cy="9525"/>
           </a:xfrm>
           <a:prstGeom prst="rect">
             <a:avLst/>
@@ -8427,8 +9039,8 @@
         </p:nvSpPr>
         <p:spPr>
           <a:xfrm>
-            <a:off x="2691434" y="5449237"/>
-            <a:ext cx="2177131" cy="9525"/>
+            <a:off x="652311" y="4438590"/>
+            <a:ext cx="1563844" cy="9525"/>
           </a:xfrm>
           <a:prstGeom prst="rect">
             <a:avLst/>
@@ -8456,8 +9068,8 @@
         </p:nvSpPr>
         <p:spPr>
           <a:xfrm>
-            <a:off x="4868565" y="5449237"/>
-            <a:ext cx="2177131" cy="9525"/>
+            <a:off x="2216155" y="4438590"/>
+            <a:ext cx="1563844" cy="9525"/>
           </a:xfrm>
           <a:prstGeom prst="rect">
             <a:avLst/>
@@ -8485,8 +9097,8 @@
         </p:nvSpPr>
         <p:spPr>
           <a:xfrm>
-            <a:off x="514302" y="7133650"/>
-            <a:ext cx="2177131" cy="9525"/>
+            <a:off x="3780000" y="4438590"/>
+            <a:ext cx="1563844" cy="9525"/>
           </a:xfrm>
           <a:prstGeom prst="rect">
             <a:avLst/>
@@ -8514,8 +9126,8 @@
         </p:nvSpPr>
         <p:spPr>
           <a:xfrm>
-            <a:off x="2691434" y="7133650"/>
-            <a:ext cx="2177131" cy="9525"/>
+            <a:off x="5343844" y="4438590"/>
+            <a:ext cx="1563844" cy="9525"/>
           </a:xfrm>
           <a:prstGeom prst="rect">
             <a:avLst/>
@@ -8543,8 +9155,8 @@
         </p:nvSpPr>
         <p:spPr>
           <a:xfrm>
-            <a:off x="4868565" y="7133650"/>
-            <a:ext cx="2177131" cy="9525"/>
+            <a:off x="652311" y="6459884"/>
+            <a:ext cx="1563844" cy="9525"/>
           </a:xfrm>
           <a:prstGeom prst="rect">
             <a:avLst/>
@@ -8572,8 +9184,8 @@
         </p:nvSpPr>
         <p:spPr>
           <a:xfrm>
-            <a:off x="514302" y="8818062"/>
-            <a:ext cx="2177131" cy="9525"/>
+            <a:off x="2216155" y="6459884"/>
+            <a:ext cx="1563844" cy="9525"/>
           </a:xfrm>
           <a:prstGeom prst="rect">
             <a:avLst/>
@@ -8601,8 +9213,8 @@
         </p:nvSpPr>
         <p:spPr>
           <a:xfrm>
-            <a:off x="2691434" y="8818062"/>
-            <a:ext cx="2177131" cy="9525"/>
+            <a:off x="3780000" y="6459884"/>
+            <a:ext cx="1563844" cy="9525"/>
           </a:xfrm>
           <a:prstGeom prst="rect">
             <a:avLst/>
@@ -8630,8 +9242,8 @@
         </p:nvSpPr>
         <p:spPr>
           <a:xfrm>
-            <a:off x="4868565" y="8818062"/>
-            <a:ext cx="2177131" cy="9525"/>
+            <a:off x="5343844" y="6459884"/>
+            <a:ext cx="1563844" cy="9525"/>
           </a:xfrm>
           <a:prstGeom prst="rect">
             <a:avLst/>
@@ -8659,8 +9271,8 @@
         </p:nvSpPr>
         <p:spPr>
           <a:xfrm>
-            <a:off x="514302" y="10502475"/>
-            <a:ext cx="2177131" cy="9525"/>
+            <a:off x="652311" y="8481180"/>
+            <a:ext cx="1563844" cy="9525"/>
           </a:xfrm>
           <a:prstGeom prst="rect">
             <a:avLst/>
@@ -8688,8 +9300,8 @@
         </p:nvSpPr>
         <p:spPr>
           <a:xfrm>
-            <a:off x="2691434" y="10502475"/>
-            <a:ext cx="2177131" cy="9525"/>
+            <a:off x="2216155" y="8481180"/>
+            <a:ext cx="1563844" cy="9525"/>
           </a:xfrm>
           <a:prstGeom prst="rect">
             <a:avLst/>
@@ -8717,8 +9329,8 @@
         </p:nvSpPr>
         <p:spPr>
           <a:xfrm>
-            <a:off x="4868565" y="10502475"/>
-            <a:ext cx="2177131" cy="9525"/>
+            <a:off x="3780000" y="8481180"/>
+            <a:ext cx="1563844" cy="9525"/>
           </a:xfrm>
           <a:prstGeom prst="rect">
             <a:avLst/>
@@ -8746,8 +9358,8 @@
         </p:nvSpPr>
         <p:spPr>
           <a:xfrm>
-            <a:off x="509539" y="400762"/>
-            <a:ext cx="9525" cy="1684412"/>
+            <a:off x="5343844" y="8481180"/>
+            <a:ext cx="1563844" cy="9525"/>
           </a:xfrm>
           <a:prstGeom prst="rect">
             <a:avLst/>
@@ -8775,8 +9387,8 @@
         </p:nvSpPr>
         <p:spPr>
           <a:xfrm>
-            <a:off x="509539" y="2085175"/>
-            <a:ext cx="9525" cy="1684412"/>
+            <a:off x="652311" y="10502475"/>
+            <a:ext cx="1563844" cy="9525"/>
           </a:xfrm>
           <a:prstGeom prst="rect">
             <a:avLst/>
@@ -8804,8 +9416,8 @@
         </p:nvSpPr>
         <p:spPr>
           <a:xfrm>
-            <a:off x="509539" y="3769587"/>
-            <a:ext cx="9525" cy="1684412"/>
+            <a:off x="2216155" y="10502475"/>
+            <a:ext cx="1563844" cy="9525"/>
           </a:xfrm>
           <a:prstGeom prst="rect">
             <a:avLst/>
@@ -8833,8 +9445,8 @@
         </p:nvSpPr>
         <p:spPr>
           <a:xfrm>
-            <a:off x="509539" y="5454000"/>
-            <a:ext cx="9525" cy="1684412"/>
+            <a:off x="3780000" y="10502475"/>
+            <a:ext cx="1563844" cy="9525"/>
           </a:xfrm>
           <a:prstGeom prst="rect">
             <a:avLst/>
@@ -8862,8 +9474,8 @@
         </p:nvSpPr>
         <p:spPr>
           <a:xfrm>
-            <a:off x="509539" y="7138412"/>
-            <a:ext cx="9525" cy="1684412"/>
+            <a:off x="5343844" y="10502475"/>
+            <a:ext cx="1563844" cy="9525"/>
           </a:xfrm>
           <a:prstGeom prst="rect">
             <a:avLst/>
@@ -8891,8 +9503,8 @@
         </p:nvSpPr>
         <p:spPr>
           <a:xfrm>
-            <a:off x="509539" y="8822825"/>
-            <a:ext cx="9525" cy="1684412"/>
+            <a:off x="647549" y="400762"/>
+            <a:ext cx="9525" cy="2021294"/>
           </a:xfrm>
           <a:prstGeom prst="rect">
             <a:avLst/>
@@ -8920,8 +9532,8 @@
         </p:nvSpPr>
         <p:spPr>
           <a:xfrm>
-            <a:off x="2686671" y="400762"/>
-            <a:ext cx="9525" cy="1684412"/>
+            <a:off x="647549" y="2422057"/>
+            <a:ext cx="9525" cy="2021294"/>
           </a:xfrm>
           <a:prstGeom prst="rect">
             <a:avLst/>
@@ -8949,8 +9561,8 @@
         </p:nvSpPr>
         <p:spPr>
           <a:xfrm>
-            <a:off x="2686671" y="2085175"/>
-            <a:ext cx="9525" cy="1684412"/>
+            <a:off x="647549" y="4443352"/>
+            <a:ext cx="9525" cy="2021294"/>
           </a:xfrm>
           <a:prstGeom prst="rect">
             <a:avLst/>
@@ -8978,8 +9590,8 @@
         </p:nvSpPr>
         <p:spPr>
           <a:xfrm>
-            <a:off x="2686671" y="3769587"/>
-            <a:ext cx="9525" cy="1684412"/>
+            <a:off x="647549" y="6464647"/>
+            <a:ext cx="9525" cy="2021294"/>
           </a:xfrm>
           <a:prstGeom prst="rect">
             <a:avLst/>
@@ -9007,8 +9619,8 @@
         </p:nvSpPr>
         <p:spPr>
           <a:xfrm>
-            <a:off x="2686671" y="5454000"/>
-            <a:ext cx="9525" cy="1684412"/>
+            <a:off x="647549" y="8485942"/>
+            <a:ext cx="9525" cy="2021294"/>
           </a:xfrm>
           <a:prstGeom prst="rect">
             <a:avLst/>
@@ -9036,8 +9648,8 @@
         </p:nvSpPr>
         <p:spPr>
           <a:xfrm>
-            <a:off x="2686671" y="7138412"/>
-            <a:ext cx="9525" cy="1684412"/>
+            <a:off x="2211393" y="400762"/>
+            <a:ext cx="9525" cy="2021294"/>
           </a:xfrm>
           <a:prstGeom prst="rect">
             <a:avLst/>
@@ -9065,8 +9677,8 @@
         </p:nvSpPr>
         <p:spPr>
           <a:xfrm>
-            <a:off x="2686671" y="8822825"/>
-            <a:ext cx="9525" cy="1684412"/>
+            <a:off x="2211393" y="2422057"/>
+            <a:ext cx="9525" cy="2021294"/>
           </a:xfrm>
           <a:prstGeom prst="rect">
             <a:avLst/>
@@ -9094,8 +9706,8 @@
         </p:nvSpPr>
         <p:spPr>
           <a:xfrm>
-            <a:off x="4863803" y="400762"/>
-            <a:ext cx="9525" cy="1684412"/>
+            <a:off x="2211393" y="4443352"/>
+            <a:ext cx="9525" cy="2021294"/>
           </a:xfrm>
           <a:prstGeom prst="rect">
             <a:avLst/>
@@ -9123,8 +9735,8 @@
         </p:nvSpPr>
         <p:spPr>
           <a:xfrm>
-            <a:off x="4863803" y="2085175"/>
-            <a:ext cx="9525" cy="1684412"/>
+            <a:off x="2211393" y="6464647"/>
+            <a:ext cx="9525" cy="2021294"/>
           </a:xfrm>
           <a:prstGeom prst="rect">
             <a:avLst/>
@@ -9152,8 +9764,8 @@
         </p:nvSpPr>
         <p:spPr>
           <a:xfrm>
-            <a:off x="4863803" y="3769587"/>
-            <a:ext cx="9525" cy="1684412"/>
+            <a:off x="2211393" y="8485942"/>
+            <a:ext cx="9525" cy="2021294"/>
           </a:xfrm>
           <a:prstGeom prst="rect">
             <a:avLst/>
@@ -9181,8 +9793,8 @@
         </p:nvSpPr>
         <p:spPr>
           <a:xfrm>
-            <a:off x="4863803" y="5454000"/>
-            <a:ext cx="9525" cy="1684412"/>
+            <a:off x="3775237" y="400762"/>
+            <a:ext cx="9525" cy="2021294"/>
           </a:xfrm>
           <a:prstGeom prst="rect">
             <a:avLst/>
@@ -9210,8 +9822,8 @@
         </p:nvSpPr>
         <p:spPr>
           <a:xfrm>
-            <a:off x="4863803" y="7138412"/>
-            <a:ext cx="9525" cy="1684412"/>
+            <a:off x="3775237" y="2422057"/>
+            <a:ext cx="9525" cy="2021294"/>
           </a:xfrm>
           <a:prstGeom prst="rect">
             <a:avLst/>
@@ -9239,8 +9851,8 @@
         </p:nvSpPr>
         <p:spPr>
           <a:xfrm>
-            <a:off x="4863803" y="8822825"/>
-            <a:ext cx="9525" cy="1684412"/>
+            <a:off x="3775237" y="4443352"/>
+            <a:ext cx="9525" cy="2021294"/>
           </a:xfrm>
           <a:prstGeom prst="rect">
             <a:avLst/>
@@ -9268,8 +9880,8 @@
         </p:nvSpPr>
         <p:spPr>
           <a:xfrm>
-            <a:off x="7040935" y="400762"/>
-            <a:ext cx="9525" cy="1684412"/>
+            <a:off x="3775237" y="6464647"/>
+            <a:ext cx="9525" cy="2021294"/>
           </a:xfrm>
           <a:prstGeom prst="rect">
             <a:avLst/>
@@ -9297,8 +9909,8 @@
         </p:nvSpPr>
         <p:spPr>
           <a:xfrm>
-            <a:off x="7040935" y="2085175"/>
-            <a:ext cx="9525" cy="1684412"/>
+            <a:off x="3775237" y="8485942"/>
+            <a:ext cx="9525" cy="2021294"/>
           </a:xfrm>
           <a:prstGeom prst="rect">
             <a:avLst/>
@@ -9326,8 +9938,8 @@
         </p:nvSpPr>
         <p:spPr>
           <a:xfrm>
-            <a:off x="7040935" y="3769587"/>
-            <a:ext cx="9525" cy="1684412"/>
+            <a:off x="5339081" y="400762"/>
+            <a:ext cx="9525" cy="2021294"/>
           </a:xfrm>
           <a:prstGeom prst="rect">
             <a:avLst/>
@@ -9355,8 +9967,8 @@
         </p:nvSpPr>
         <p:spPr>
           <a:xfrm>
-            <a:off x="7040935" y="5454000"/>
-            <a:ext cx="9525" cy="1684412"/>
+            <a:off x="5339081" y="2422057"/>
+            <a:ext cx="9525" cy="2021294"/>
           </a:xfrm>
           <a:prstGeom prst="rect">
             <a:avLst/>
@@ -9384,8 +9996,8 @@
         </p:nvSpPr>
         <p:spPr>
           <a:xfrm>
-            <a:off x="7040935" y="7138412"/>
-            <a:ext cx="9525" cy="1684412"/>
+            <a:off x="5339081" y="4443352"/>
+            <a:ext cx="9525" cy="2021294"/>
           </a:xfrm>
           <a:prstGeom prst="rect">
             <a:avLst/>
@@ -9413,30 +10025,204 @@
         </p:nvSpPr>
         <p:spPr>
           <a:xfrm>
-            <a:off x="7040935" y="8822825"/>
-            <a:ext cx="9525" cy="1684412"/>
-          </a:xfrm>
-          <a:prstGeom prst="rect">
-            <a:avLst/>
-          </a:prstGeom>
-          <a:solidFill>
-            <a:srgbClr val="C0C0C0"/>
-          </a:solidFill>
-          <a:ln>
-            <a:noFill/>
-          </a:ln>
-        </p:spPr>
-        <p:txBody>
-          <a:bodyPr rtlCol="0" anchor="ctr"/>
-          <a:lstStyle/>
-          <a:p>
-            <a:pPr algn="ctr"/>
-          </a:p>
-        </p:txBody>
-      </p:sp>
-      <p:sp>
-        <p:nvSpPr>
-          <p:cNvPr id="65" name="TextBox 64"/>
+            <a:off x="5339081" y="6464647"/>
+            <a:ext cx="9525" cy="2021294"/>
+          </a:xfrm>
+          <a:prstGeom prst="rect">
+            <a:avLst/>
+          </a:prstGeom>
+          <a:solidFill>
+            <a:srgbClr val="C0C0C0"/>
+          </a:solidFill>
+          <a:ln>
+            <a:noFill/>
+          </a:ln>
+        </p:spPr>
+        <p:txBody>
+          <a:bodyPr rtlCol="0" anchor="ctr"/>
+          <a:lstStyle/>
+          <a:p>
+            <a:pPr algn="ctr"/>
+          </a:p>
+        </p:txBody>
+      </p:sp>
+      <p:sp>
+        <p:nvSpPr>
+          <p:cNvPr id="65" name="Rectangle 64"/>
+          <p:cNvSpPr/>
+          <p:nvPr/>
+        </p:nvSpPr>
+        <p:spPr>
+          <a:xfrm>
+            <a:off x="5339081" y="8485942"/>
+            <a:ext cx="9525" cy="2021294"/>
+          </a:xfrm>
+          <a:prstGeom prst="rect">
+            <a:avLst/>
+          </a:prstGeom>
+          <a:solidFill>
+            <a:srgbClr val="C0C0C0"/>
+          </a:solidFill>
+          <a:ln>
+            <a:noFill/>
+          </a:ln>
+        </p:spPr>
+        <p:txBody>
+          <a:bodyPr rtlCol="0" anchor="ctr"/>
+          <a:lstStyle/>
+          <a:p>
+            <a:pPr algn="ctr"/>
+          </a:p>
+        </p:txBody>
+      </p:sp>
+      <p:sp>
+        <p:nvSpPr>
+          <p:cNvPr id="66" name="Rectangle 65"/>
+          <p:cNvSpPr/>
+          <p:nvPr/>
+        </p:nvSpPr>
+        <p:spPr>
+          <a:xfrm>
+            <a:off x="6902925" y="400762"/>
+            <a:ext cx="9525" cy="2021294"/>
+          </a:xfrm>
+          <a:prstGeom prst="rect">
+            <a:avLst/>
+          </a:prstGeom>
+          <a:solidFill>
+            <a:srgbClr val="C0C0C0"/>
+          </a:solidFill>
+          <a:ln>
+            <a:noFill/>
+          </a:ln>
+        </p:spPr>
+        <p:txBody>
+          <a:bodyPr rtlCol="0" anchor="ctr"/>
+          <a:lstStyle/>
+          <a:p>
+            <a:pPr algn="ctr"/>
+          </a:p>
+        </p:txBody>
+      </p:sp>
+      <p:sp>
+        <p:nvSpPr>
+          <p:cNvPr id="67" name="Rectangle 66"/>
+          <p:cNvSpPr/>
+          <p:nvPr/>
+        </p:nvSpPr>
+        <p:spPr>
+          <a:xfrm>
+            <a:off x="6902925" y="2422057"/>
+            <a:ext cx="9525" cy="2021294"/>
+          </a:xfrm>
+          <a:prstGeom prst="rect">
+            <a:avLst/>
+          </a:prstGeom>
+          <a:solidFill>
+            <a:srgbClr val="C0C0C0"/>
+          </a:solidFill>
+          <a:ln>
+            <a:noFill/>
+          </a:ln>
+        </p:spPr>
+        <p:txBody>
+          <a:bodyPr rtlCol="0" anchor="ctr"/>
+          <a:lstStyle/>
+          <a:p>
+            <a:pPr algn="ctr"/>
+          </a:p>
+        </p:txBody>
+      </p:sp>
+      <p:sp>
+        <p:nvSpPr>
+          <p:cNvPr id="68" name="Rectangle 67"/>
+          <p:cNvSpPr/>
+          <p:nvPr/>
+        </p:nvSpPr>
+        <p:spPr>
+          <a:xfrm>
+            <a:off x="6902925" y="4443352"/>
+            <a:ext cx="9525" cy="2021294"/>
+          </a:xfrm>
+          <a:prstGeom prst="rect">
+            <a:avLst/>
+          </a:prstGeom>
+          <a:solidFill>
+            <a:srgbClr val="C0C0C0"/>
+          </a:solidFill>
+          <a:ln>
+            <a:noFill/>
+          </a:ln>
+        </p:spPr>
+        <p:txBody>
+          <a:bodyPr rtlCol="0" anchor="ctr"/>
+          <a:lstStyle/>
+          <a:p>
+            <a:pPr algn="ctr"/>
+          </a:p>
+        </p:txBody>
+      </p:sp>
+      <p:sp>
+        <p:nvSpPr>
+          <p:cNvPr id="69" name="Rectangle 68"/>
+          <p:cNvSpPr/>
+          <p:nvPr/>
+        </p:nvSpPr>
+        <p:spPr>
+          <a:xfrm>
+            <a:off x="6902925" y="6464647"/>
+            <a:ext cx="9525" cy="2021294"/>
+          </a:xfrm>
+          <a:prstGeom prst="rect">
+            <a:avLst/>
+          </a:prstGeom>
+          <a:solidFill>
+            <a:srgbClr val="C0C0C0"/>
+          </a:solidFill>
+          <a:ln>
+            <a:noFill/>
+          </a:ln>
+        </p:spPr>
+        <p:txBody>
+          <a:bodyPr rtlCol="0" anchor="ctr"/>
+          <a:lstStyle/>
+          <a:p>
+            <a:pPr algn="ctr"/>
+          </a:p>
+        </p:txBody>
+      </p:sp>
+      <p:sp>
+        <p:nvSpPr>
+          <p:cNvPr id="70" name="Rectangle 69"/>
+          <p:cNvSpPr/>
+          <p:nvPr/>
+        </p:nvSpPr>
+        <p:spPr>
+          <a:xfrm>
+            <a:off x="6902925" y="8485942"/>
+            <a:ext cx="9525" cy="2021294"/>
+          </a:xfrm>
+          <a:prstGeom prst="rect">
+            <a:avLst/>
+          </a:prstGeom>
+          <a:solidFill>
+            <a:srgbClr val="C0C0C0"/>
+          </a:solidFill>
+          <a:ln>
+            <a:noFill/>
+          </a:ln>
+        </p:spPr>
+        <p:txBody>
+          <a:bodyPr rtlCol="0" anchor="ctr"/>
+          <a:lstStyle/>
+          <a:p>
+            <a:pPr algn="ctr"/>
+          </a:p>
+        </p:txBody>
+      </p:sp>
+      <p:sp>
+        <p:nvSpPr>
+          <p:cNvPr id="71" name="TextBox 70"/>
           <p:cNvSpPr txBox="1"/>
           <p:nvPr/>
         </p:nvSpPr>
@@ -9495,8 +10281,8 @@
         </p:nvSpPr>
         <p:spPr>
           <a:xfrm>
-            <a:off x="514302" y="400762"/>
-            <a:ext cx="2177131" cy="1684412"/>
+            <a:off x="652311" y="400762"/>
+            <a:ext cx="1563844" cy="2021294"/>
           </a:xfrm>
           <a:prstGeom prst="rect">
             <a:avLst/>
@@ -9507,10 +10293,13 @@
           </a:ln>
         </p:spPr>
         <p:txBody>
-          <a:bodyPr rtlCol="0" anchor="ctr" wrap="none" lIns="57292" rIns="57292" tIns="38195" bIns="38195"/>
+          <a:bodyPr rtlCol="0" anchor="ctr" wrap="none" lIns="70922" rIns="70922" tIns="70922" bIns="70922"/>
           <a:lstStyle/>
           <a:p>
             <a:pPr algn="ctr">
+              <a:lnSpc>
+                <a:spcPct val="100000"/>
+              </a:lnSpc>
               <a:spcBef>
                 <a:spcPts val="0"/>
               </a:spcBef>
@@ -9519,222 +10308,7 @@
               </a:spcAft>
             </a:pPr>
             <a:r>
-              <a:rPr sz="2800" b="1">
-                <a:solidFill>
-                  <a:srgbClr val="1A1A1A"/>
-                </a:solidFill>
-                <a:latin typeface="Arial"/>
-              </a:rPr>
-              <a:t>У</a:t>
-            </a:r>
-          </a:p>
-        </p:txBody>
-      </p:sp>
-      <p:sp>
-        <p:nvSpPr>
-          <p:cNvPr id="3" name="Rectangle 2"/>
-          <p:cNvSpPr/>
-          <p:nvPr/>
-        </p:nvSpPr>
-        <p:spPr>
-          <a:xfrm>
-            <a:off x="2691434" y="400762"/>
-            <a:ext cx="2177131" cy="1684412"/>
-          </a:xfrm>
-          <a:prstGeom prst="rect">
-            <a:avLst/>
-          </a:prstGeom>
-          <a:noFill/>
-          <a:ln>
-            <a:noFill/>
-          </a:ln>
-        </p:spPr>
-        <p:txBody>
-          <a:bodyPr rtlCol="0" anchor="ctr" wrap="none" lIns="57292" rIns="57292" tIns="38195" bIns="38195"/>
-          <a:lstStyle/>
-          <a:p>
-            <a:pPr algn="ctr">
-              <a:spcBef>
-                <a:spcPts val="0"/>
-              </a:spcBef>
-              <a:spcAft>
-                <a:spcPts val="0"/>
-              </a:spcAft>
-            </a:pPr>
-            <a:r>
-              <a:rPr sz="2800" b="1">
-                <a:solidFill>
-                  <a:srgbClr val="1A1A1A"/>
-                </a:solidFill>
-                <a:latin typeface="Arial"/>
-              </a:rPr>
-              <a:t>У</a:t>
-            </a:r>
-          </a:p>
-        </p:txBody>
-      </p:sp>
-      <p:sp>
-        <p:nvSpPr>
-          <p:cNvPr id="4" name="Rectangle 3"/>
-          <p:cNvSpPr/>
-          <p:nvPr/>
-        </p:nvSpPr>
-        <p:spPr>
-          <a:xfrm>
-            <a:off x="4868565" y="400762"/>
-            <a:ext cx="2177131" cy="1684412"/>
-          </a:xfrm>
-          <a:prstGeom prst="rect">
-            <a:avLst/>
-          </a:prstGeom>
-          <a:noFill/>
-          <a:ln>
-            <a:noFill/>
-          </a:ln>
-        </p:spPr>
-        <p:txBody>
-          <a:bodyPr rtlCol="0" anchor="ctr" wrap="none" lIns="57292" rIns="57292" tIns="38195" bIns="38195"/>
-          <a:lstStyle/>
-          <a:p>
-            <a:pPr algn="ctr">
-              <a:spcBef>
-                <a:spcPts val="0"/>
-              </a:spcBef>
-              <a:spcAft>
-                <a:spcPts val="0"/>
-              </a:spcAft>
-            </a:pPr>
-            <a:r>
-              <a:rPr sz="2800" b="1">
-                <a:solidFill>
-                  <a:srgbClr val="1A1A1A"/>
-                </a:solidFill>
-                <a:latin typeface="Arial"/>
-              </a:rPr>
-              <a:t>Ф</a:t>
-            </a:r>
-          </a:p>
-        </p:txBody>
-      </p:sp>
-      <p:sp>
-        <p:nvSpPr>
-          <p:cNvPr id="5" name="Rectangle 4"/>
-          <p:cNvSpPr/>
-          <p:nvPr/>
-        </p:nvSpPr>
-        <p:spPr>
-          <a:xfrm>
-            <a:off x="514302" y="2085175"/>
-            <a:ext cx="2177131" cy="1684412"/>
-          </a:xfrm>
-          <a:prstGeom prst="rect">
-            <a:avLst/>
-          </a:prstGeom>
-          <a:noFill/>
-          <a:ln>
-            <a:noFill/>
-          </a:ln>
-        </p:spPr>
-        <p:txBody>
-          <a:bodyPr rtlCol="0" anchor="ctr" wrap="none" lIns="57292" rIns="57292" tIns="38195" bIns="38195"/>
-          <a:lstStyle/>
-          <a:p>
-            <a:pPr algn="ctr">
-              <a:spcBef>
-                <a:spcPts val="0"/>
-              </a:spcBef>
-              <a:spcAft>
-                <a:spcPts val="0"/>
-              </a:spcAft>
-            </a:pPr>
-            <a:r>
-              <a:rPr sz="2800" b="1">
-                <a:solidFill>
-                  <a:srgbClr val="1A1A1A"/>
-                </a:solidFill>
-                <a:latin typeface="Arial"/>
-              </a:rPr>
-              <a:t>Х</a:t>
-            </a:r>
-          </a:p>
-        </p:txBody>
-      </p:sp>
-      <p:sp>
-        <p:nvSpPr>
-          <p:cNvPr id="6" name="Rectangle 5"/>
-          <p:cNvSpPr/>
-          <p:nvPr/>
-        </p:nvSpPr>
-        <p:spPr>
-          <a:xfrm>
-            <a:off x="2691434" y="2085175"/>
-            <a:ext cx="2177131" cy="1684412"/>
-          </a:xfrm>
-          <a:prstGeom prst="rect">
-            <a:avLst/>
-          </a:prstGeom>
-          <a:noFill/>
-          <a:ln>
-            <a:noFill/>
-          </a:ln>
-        </p:spPr>
-        <p:txBody>
-          <a:bodyPr rtlCol="0" anchor="ctr" wrap="none" lIns="57292" rIns="57292" tIns="38195" bIns="38195"/>
-          <a:lstStyle/>
-          <a:p>
-            <a:pPr algn="ctr">
-              <a:spcBef>
-                <a:spcPts val="0"/>
-              </a:spcBef>
-              <a:spcAft>
-                <a:spcPts val="0"/>
-              </a:spcAft>
-            </a:pPr>
-            <a:r>
-              <a:rPr sz="2800" b="1">
-                <a:solidFill>
-                  <a:srgbClr val="1A1A1A"/>
-                </a:solidFill>
-                <a:latin typeface="Arial"/>
-              </a:rPr>
-              <a:t>Ц</a:t>
-            </a:r>
-          </a:p>
-        </p:txBody>
-      </p:sp>
-      <p:sp>
-        <p:nvSpPr>
-          <p:cNvPr id="7" name="Rectangle 6"/>
-          <p:cNvSpPr/>
-          <p:nvPr/>
-        </p:nvSpPr>
-        <p:spPr>
-          <a:xfrm>
-            <a:off x="4868565" y="2085175"/>
-            <a:ext cx="2177131" cy="1684412"/>
-          </a:xfrm>
-          <a:prstGeom prst="rect">
-            <a:avLst/>
-          </a:prstGeom>
-          <a:noFill/>
-          <a:ln>
-            <a:noFill/>
-          </a:ln>
-        </p:spPr>
-        <p:txBody>
-          <a:bodyPr rtlCol="0" anchor="ctr" wrap="none" lIns="57292" rIns="57292" tIns="38195" bIns="38195"/>
-          <a:lstStyle/>
-          <a:p>
-            <a:pPr algn="ctr">
-              <a:spcBef>
-                <a:spcPts val="0"/>
-              </a:spcBef>
-              <a:spcAft>
-                <a:spcPts val="0"/>
-              </a:spcAft>
-            </a:pPr>
-            <a:r>
-              <a:rPr sz="2800" b="1">
+              <a:rPr sz="10410" b="1">
                 <a:solidFill>
                   <a:srgbClr val="1A1A1A"/>
                 </a:solidFill>
@@ -9747,14 +10321,14 @@
       </p:sp>
       <p:sp>
         <p:nvSpPr>
-          <p:cNvPr id="8" name="Rectangle 7"/>
-          <p:cNvSpPr/>
-          <p:nvPr/>
-        </p:nvSpPr>
-        <p:spPr>
-          <a:xfrm>
-            <a:off x="514302" y="3769587"/>
-            <a:ext cx="2177131" cy="1684412"/>
+          <p:cNvPr id="3" name="Rectangle 2"/>
+          <p:cNvSpPr/>
+          <p:nvPr/>
+        </p:nvSpPr>
+        <p:spPr>
+          <a:xfrm>
+            <a:off x="2216155" y="400762"/>
+            <a:ext cx="1563844" cy="2021294"/>
           </a:xfrm>
           <a:prstGeom prst="rect">
             <a:avLst/>
@@ -9765,10 +10339,13 @@
           </a:ln>
         </p:spPr>
         <p:txBody>
-          <a:bodyPr rtlCol="0" anchor="ctr" wrap="none" lIns="57292" rIns="57292" tIns="38195" bIns="38195"/>
+          <a:bodyPr rtlCol="0" anchor="ctr" wrap="none" lIns="70922" rIns="70922" tIns="70922" bIns="70922"/>
           <a:lstStyle/>
           <a:p>
             <a:pPr algn="ctr">
+              <a:lnSpc>
+                <a:spcPct val="100000"/>
+              </a:lnSpc>
               <a:spcBef>
                 <a:spcPts val="0"/>
               </a:spcBef>
@@ -9777,50 +10354,7 @@
               </a:spcAft>
             </a:pPr>
             <a:r>
-              <a:rPr sz="2800" b="1">
-                <a:solidFill>
-                  <a:srgbClr val="1A1A1A"/>
-                </a:solidFill>
-                <a:latin typeface="Arial"/>
-              </a:rPr>
-              <a:t>Ч</a:t>
-            </a:r>
-          </a:p>
-        </p:txBody>
-      </p:sp>
-      <p:sp>
-        <p:nvSpPr>
-          <p:cNvPr id="9" name="Rectangle 8"/>
-          <p:cNvSpPr/>
-          <p:nvPr/>
-        </p:nvSpPr>
-        <p:spPr>
-          <a:xfrm>
-            <a:off x="2691434" y="3769587"/>
-            <a:ext cx="2177131" cy="1684412"/>
-          </a:xfrm>
-          <a:prstGeom prst="rect">
-            <a:avLst/>
-          </a:prstGeom>
-          <a:noFill/>
-          <a:ln>
-            <a:noFill/>
-          </a:ln>
-        </p:spPr>
-        <p:txBody>
-          <a:bodyPr rtlCol="0" anchor="ctr" wrap="none" lIns="57292" rIns="57292" tIns="38195" bIns="38195"/>
-          <a:lstStyle/>
-          <a:p>
-            <a:pPr algn="ctr">
-              <a:spcBef>
-                <a:spcPts val="0"/>
-              </a:spcBef>
-              <a:spcAft>
-                <a:spcPts val="0"/>
-              </a:spcAft>
-            </a:pPr>
-            <a:r>
-              <a:rPr sz="2800" b="1">
+              <a:rPr sz="10410" b="1">
                 <a:solidFill>
                   <a:srgbClr val="1A1A1A"/>
                 </a:solidFill>
@@ -9833,14 +10367,14 @@
       </p:sp>
       <p:sp>
         <p:nvSpPr>
-          <p:cNvPr id="10" name="Rectangle 9"/>
-          <p:cNvSpPr/>
-          <p:nvPr/>
-        </p:nvSpPr>
-        <p:spPr>
-          <a:xfrm>
-            <a:off x="4868565" y="3769587"/>
-            <a:ext cx="2177131" cy="1684412"/>
+          <p:cNvPr id="4" name="Rectangle 3"/>
+          <p:cNvSpPr/>
+          <p:nvPr/>
+        </p:nvSpPr>
+        <p:spPr>
+          <a:xfrm>
+            <a:off x="3780000" y="400762"/>
+            <a:ext cx="1563844" cy="2021294"/>
           </a:xfrm>
           <a:prstGeom prst="rect">
             <a:avLst/>
@@ -9851,10 +10385,13 @@
           </a:ln>
         </p:spPr>
         <p:txBody>
-          <a:bodyPr rtlCol="0" anchor="ctr" wrap="none" lIns="57292" rIns="57292" tIns="38195" bIns="38195"/>
+          <a:bodyPr rtlCol="0" anchor="ctr" wrap="none" lIns="70922" rIns="70922" tIns="70922" bIns="70922"/>
           <a:lstStyle/>
           <a:p>
             <a:pPr algn="ctr">
+              <a:lnSpc>
+                <a:spcPct val="100000"/>
+              </a:lnSpc>
               <a:spcBef>
                 <a:spcPts val="0"/>
               </a:spcBef>
@@ -9863,7 +10400,7 @@
               </a:spcAft>
             </a:pPr>
             <a:r>
-              <a:rPr sz="2800" b="1">
+              <a:rPr sz="10410" b="1">
                 <a:solidFill>
                   <a:srgbClr val="1A1A1A"/>
                 </a:solidFill>
@@ -9876,14 +10413,14 @@
       </p:sp>
       <p:sp>
         <p:nvSpPr>
-          <p:cNvPr id="11" name="Rectangle 10"/>
-          <p:cNvSpPr/>
-          <p:nvPr/>
-        </p:nvSpPr>
-        <p:spPr>
-          <a:xfrm>
-            <a:off x="514302" y="5454000"/>
-            <a:ext cx="2177131" cy="1684412"/>
+          <p:cNvPr id="5" name="Rectangle 4"/>
+          <p:cNvSpPr/>
+          <p:nvPr/>
+        </p:nvSpPr>
+        <p:spPr>
+          <a:xfrm>
+            <a:off x="5343844" y="400762"/>
+            <a:ext cx="1563844" cy="2021294"/>
           </a:xfrm>
           <a:prstGeom prst="rect">
             <a:avLst/>
@@ -9894,10 +10431,13 @@
           </a:ln>
         </p:spPr>
         <p:txBody>
-          <a:bodyPr rtlCol="0" anchor="ctr" wrap="none" lIns="57292" rIns="57292" tIns="38195" bIns="38195"/>
+          <a:bodyPr rtlCol="0" anchor="ctr" wrap="none" lIns="70922" rIns="70922" tIns="70922" bIns="70922"/>
           <a:lstStyle/>
           <a:p>
             <a:pPr algn="ctr">
+              <a:lnSpc>
+                <a:spcPct val="100000"/>
+              </a:lnSpc>
               <a:spcBef>
                 <a:spcPts val="0"/>
               </a:spcBef>
@@ -9906,7 +10446,7 @@
               </a:spcAft>
             </a:pPr>
             <a:r>
-              <a:rPr sz="2800" b="1">
+              <a:rPr sz="10410" b="1">
                 <a:solidFill>
                   <a:srgbClr val="1A1A1A"/>
                 </a:solidFill>
@@ -9919,14 +10459,14 @@
       </p:sp>
       <p:sp>
         <p:nvSpPr>
-          <p:cNvPr id="12" name="Rectangle 11"/>
-          <p:cNvSpPr/>
-          <p:nvPr/>
-        </p:nvSpPr>
-        <p:spPr>
-          <a:xfrm>
-            <a:off x="2691434" y="5454000"/>
-            <a:ext cx="2177131" cy="1684412"/>
+          <p:cNvPr id="6" name="Rectangle 5"/>
+          <p:cNvSpPr/>
+          <p:nvPr/>
+        </p:nvSpPr>
+        <p:spPr>
+          <a:xfrm>
+            <a:off x="652311" y="2422057"/>
+            <a:ext cx="1563844" cy="2021294"/>
           </a:xfrm>
           <a:prstGeom prst="rect">
             <a:avLst/>
@@ -9937,10 +10477,13 @@
           </a:ln>
         </p:spPr>
         <p:txBody>
-          <a:bodyPr rtlCol="0" anchor="ctr" wrap="none" lIns="57292" rIns="57292" tIns="38195" bIns="38195"/>
+          <a:bodyPr rtlCol="0" anchor="ctr" wrap="none" lIns="70922" rIns="70922" tIns="70922" bIns="70922"/>
           <a:lstStyle/>
           <a:p>
             <a:pPr algn="ctr">
+              <a:lnSpc>
+                <a:spcPct val="100000"/>
+              </a:lnSpc>
               <a:spcBef>
                 <a:spcPts val="0"/>
               </a:spcBef>
@@ -9949,7 +10492,7 @@
               </a:spcAft>
             </a:pPr>
             <a:r>
-              <a:rPr sz="2800" b="1">
+              <a:rPr sz="10410" b="1">
                 <a:solidFill>
                   <a:srgbClr val="1A1A1A"/>
                 </a:solidFill>
@@ -9962,14 +10505,14 @@
       </p:sp>
       <p:sp>
         <p:nvSpPr>
-          <p:cNvPr id="13" name="Rectangle 12"/>
-          <p:cNvSpPr/>
-          <p:nvPr/>
-        </p:nvSpPr>
-        <p:spPr>
-          <a:xfrm>
-            <a:off x="4868565" y="5454000"/>
-            <a:ext cx="2177131" cy="1684412"/>
+          <p:cNvPr id="7" name="Rectangle 6"/>
+          <p:cNvSpPr/>
+          <p:nvPr/>
+        </p:nvSpPr>
+        <p:spPr>
+          <a:xfrm>
+            <a:off x="2216155" y="2422057"/>
+            <a:ext cx="1563844" cy="2021294"/>
           </a:xfrm>
           <a:prstGeom prst="rect">
             <a:avLst/>
@@ -9980,10 +10523,13 @@
           </a:ln>
         </p:spPr>
         <p:txBody>
-          <a:bodyPr rtlCol="0" anchor="ctr" wrap="none" lIns="57292" rIns="57292" tIns="38195" bIns="38195"/>
+          <a:bodyPr rtlCol="0" anchor="ctr" wrap="none" lIns="70922" rIns="70922" tIns="70922" bIns="70922"/>
           <a:lstStyle/>
           <a:p>
             <a:pPr algn="ctr">
+              <a:lnSpc>
+                <a:spcPct val="100000"/>
+              </a:lnSpc>
               <a:spcBef>
                 <a:spcPts val="0"/>
               </a:spcBef>
@@ -9992,7 +10538,7 @@
               </a:spcAft>
             </a:pPr>
             <a:r>
-              <a:rPr sz="2800" b="1">
+              <a:rPr sz="10410" b="1">
                 <a:solidFill>
                   <a:srgbClr val="1A1A1A"/>
                 </a:solidFill>
@@ -10005,14 +10551,14 @@
       </p:sp>
       <p:sp>
         <p:nvSpPr>
-          <p:cNvPr id="14" name="Rectangle 13"/>
-          <p:cNvSpPr/>
-          <p:nvPr/>
-        </p:nvSpPr>
-        <p:spPr>
-          <a:xfrm>
-            <a:off x="514302" y="7138412"/>
-            <a:ext cx="2177131" cy="1684412"/>
+          <p:cNvPr id="8" name="Rectangle 7"/>
+          <p:cNvSpPr/>
+          <p:nvPr/>
+        </p:nvSpPr>
+        <p:spPr>
+          <a:xfrm>
+            <a:off x="3780000" y="2422057"/>
+            <a:ext cx="1563844" cy="2021294"/>
           </a:xfrm>
           <a:prstGeom prst="rect">
             <a:avLst/>
@@ -10023,10 +10569,13 @@
           </a:ln>
         </p:spPr>
         <p:txBody>
-          <a:bodyPr rtlCol="0" anchor="ctr" wrap="none" lIns="57292" rIns="57292" tIns="38195" bIns="38195"/>
+          <a:bodyPr rtlCol="0" anchor="ctr" wrap="none" lIns="70922" rIns="70922" tIns="70922" bIns="70922"/>
           <a:lstStyle/>
           <a:p>
             <a:pPr algn="ctr">
+              <a:lnSpc>
+                <a:spcPct val="100000"/>
+              </a:lnSpc>
               <a:spcBef>
                 <a:spcPts val="0"/>
               </a:spcBef>
@@ -10035,7 +10584,7 @@
               </a:spcAft>
             </a:pPr>
             <a:r>
-              <a:rPr sz="2800" b="1">
+              <a:rPr sz="10410" b="1">
                 <a:solidFill>
                   <a:srgbClr val="1A1A1A"/>
                 </a:solidFill>
@@ -10048,14 +10597,14 @@
       </p:sp>
       <p:sp>
         <p:nvSpPr>
-          <p:cNvPr id="15" name="Rectangle 14"/>
-          <p:cNvSpPr/>
-          <p:nvPr/>
-        </p:nvSpPr>
-        <p:spPr>
-          <a:xfrm>
-            <a:off x="2691434" y="7138412"/>
-            <a:ext cx="2177131" cy="1684412"/>
+          <p:cNvPr id="9" name="Rectangle 8"/>
+          <p:cNvSpPr/>
+          <p:nvPr/>
+        </p:nvSpPr>
+        <p:spPr>
+          <a:xfrm>
+            <a:off x="5343844" y="2422057"/>
+            <a:ext cx="1563844" cy="2021294"/>
           </a:xfrm>
           <a:prstGeom prst="rect">
             <a:avLst/>
@@ -10066,10 +10615,13 @@
           </a:ln>
         </p:spPr>
         <p:txBody>
-          <a:bodyPr rtlCol="0" anchor="ctr" wrap="none" lIns="57292" rIns="57292" tIns="38195" bIns="38195"/>
+          <a:bodyPr rtlCol="0" anchor="ctr" wrap="none" lIns="70922" rIns="70922" tIns="70922" bIns="70922"/>
           <a:lstStyle/>
           <a:p>
             <a:pPr algn="ctr">
+              <a:lnSpc>
+                <a:spcPct val="100000"/>
+              </a:lnSpc>
               <a:spcBef>
                 <a:spcPts val="0"/>
               </a:spcBef>
@@ -10078,7 +10630,7 @@
               </a:spcAft>
             </a:pPr>
             <a:r>
-              <a:rPr sz="2800" b="1">
+              <a:rPr sz="10410" b="1">
                 <a:solidFill>
                   <a:srgbClr val="1A1A1A"/>
                 </a:solidFill>
@@ -10091,14 +10643,14 @@
       </p:sp>
       <p:sp>
         <p:nvSpPr>
-          <p:cNvPr id="16" name="Rectangle 15"/>
-          <p:cNvSpPr/>
-          <p:nvPr/>
-        </p:nvSpPr>
-        <p:spPr>
-          <a:xfrm>
-            <a:off x="4868565" y="7138412"/>
-            <a:ext cx="2177131" cy="1684412"/>
+          <p:cNvPr id="10" name="Rectangle 9"/>
+          <p:cNvSpPr/>
+          <p:nvPr/>
+        </p:nvSpPr>
+        <p:spPr>
+          <a:xfrm>
+            <a:off x="652311" y="4443352"/>
+            <a:ext cx="1563844" cy="2021294"/>
           </a:xfrm>
           <a:prstGeom prst="rect">
             <a:avLst/>
@@ -10109,10 +10661,13 @@
           </a:ln>
         </p:spPr>
         <p:txBody>
-          <a:bodyPr rtlCol="0" anchor="ctr" wrap="none" lIns="57292" rIns="57292" tIns="38195" bIns="38195"/>
+          <a:bodyPr rtlCol="0" anchor="ctr" wrap="none" lIns="70922" rIns="70922" tIns="70922" bIns="70922"/>
           <a:lstStyle/>
           <a:p>
             <a:pPr algn="ctr">
+              <a:lnSpc>
+                <a:spcPct val="100000"/>
+              </a:lnSpc>
               <a:spcBef>
                 <a:spcPts val="0"/>
               </a:spcBef>
@@ -10121,7 +10676,7 @@
               </a:spcAft>
             </a:pPr>
             <a:r>
-              <a:rPr sz="2800" b="1">
+              <a:rPr sz="10410" b="1">
                 <a:solidFill>
                   <a:srgbClr val="1A1A1A"/>
                 </a:solidFill>
@@ -10134,14 +10689,14 @@
       </p:sp>
       <p:sp>
         <p:nvSpPr>
-          <p:cNvPr id="17" name="Rectangle 16"/>
-          <p:cNvSpPr/>
-          <p:nvPr/>
-        </p:nvSpPr>
-        <p:spPr>
-          <a:xfrm>
-            <a:off x="514302" y="8822825"/>
-            <a:ext cx="2177131" cy="1684412"/>
+          <p:cNvPr id="11" name="Rectangle 10"/>
+          <p:cNvSpPr/>
+          <p:nvPr/>
+        </p:nvSpPr>
+        <p:spPr>
+          <a:xfrm>
+            <a:off x="2216155" y="4443352"/>
+            <a:ext cx="1563844" cy="2021294"/>
           </a:xfrm>
           <a:prstGeom prst="rect">
             <a:avLst/>
@@ -10152,10 +10707,13 @@
           </a:ln>
         </p:spPr>
         <p:txBody>
-          <a:bodyPr rtlCol="0" anchor="ctr" wrap="none" lIns="57292" rIns="57292" tIns="38195" bIns="38195"/>
+          <a:bodyPr rtlCol="0" anchor="ctr" wrap="none" lIns="70922" rIns="70922" tIns="70922" bIns="70922"/>
           <a:lstStyle/>
           <a:p>
             <a:pPr algn="ctr">
+              <a:lnSpc>
+                <a:spcPct val="100000"/>
+              </a:lnSpc>
               <a:spcBef>
                 <a:spcPts val="0"/>
               </a:spcBef>
@@ -10164,7 +10722,7 @@
               </a:spcAft>
             </a:pPr>
             <a:r>
-              <a:rPr sz="2800" b="1">
+              <a:rPr sz="10410" b="1">
                 <a:solidFill>
                   <a:srgbClr val="1A1A1A"/>
                 </a:solidFill>
@@ -10177,14 +10735,14 @@
       </p:sp>
       <p:sp>
         <p:nvSpPr>
-          <p:cNvPr id="18" name="Rectangle 17"/>
-          <p:cNvSpPr/>
-          <p:nvPr/>
-        </p:nvSpPr>
-        <p:spPr>
-          <a:xfrm>
-            <a:off x="2691434" y="8822825"/>
-            <a:ext cx="2177131" cy="1684412"/>
+          <p:cNvPr id="12" name="Rectangle 11"/>
+          <p:cNvSpPr/>
+          <p:nvPr/>
+        </p:nvSpPr>
+        <p:spPr>
+          <a:xfrm>
+            <a:off x="3780000" y="4443352"/>
+            <a:ext cx="1563844" cy="2021294"/>
           </a:xfrm>
           <a:prstGeom prst="rect">
             <a:avLst/>
@@ -10195,10 +10753,13 @@
           </a:ln>
         </p:spPr>
         <p:txBody>
-          <a:bodyPr rtlCol="0" anchor="ctr" wrap="none" lIns="57292" rIns="57292" tIns="38195" bIns="38195"/>
+          <a:bodyPr rtlCol="0" anchor="ctr" wrap="none" lIns="70922" rIns="70922" tIns="70922" bIns="70922"/>
           <a:lstStyle/>
           <a:p>
             <a:pPr algn="ctr">
+              <a:lnSpc>
+                <a:spcPct val="100000"/>
+              </a:lnSpc>
               <a:spcBef>
                 <a:spcPts val="0"/>
               </a:spcBef>
@@ -10207,7 +10768,7 @@
               </a:spcAft>
             </a:pPr>
             <a:r>
-              <a:rPr sz="2800" b="1">
+              <a:rPr sz="10410" b="1">
                 <a:solidFill>
                   <a:srgbClr val="1A1A1A"/>
                 </a:solidFill>
@@ -10220,14 +10781,14 @@
       </p:sp>
       <p:sp>
         <p:nvSpPr>
-          <p:cNvPr id="19" name="Rectangle 18"/>
-          <p:cNvSpPr/>
-          <p:nvPr/>
-        </p:nvSpPr>
-        <p:spPr>
-          <a:xfrm>
-            <a:off x="4868565" y="8822825"/>
-            <a:ext cx="2177131" cy="1684412"/>
+          <p:cNvPr id="13" name="Rectangle 12"/>
+          <p:cNvSpPr/>
+          <p:nvPr/>
+        </p:nvSpPr>
+        <p:spPr>
+          <a:xfrm>
+            <a:off x="5343844" y="4443352"/>
+            <a:ext cx="1563844" cy="2021294"/>
           </a:xfrm>
           <a:prstGeom prst="rect">
             <a:avLst/>
@@ -10238,10 +10799,13 @@
           </a:ln>
         </p:spPr>
         <p:txBody>
-          <a:bodyPr rtlCol="0" anchor="ctr" wrap="none" lIns="57292" rIns="57292" tIns="38195" bIns="38195"/>
+          <a:bodyPr rtlCol="0" anchor="ctr" wrap="none" lIns="70922" rIns="70922" tIns="70922" bIns="70922"/>
           <a:lstStyle/>
           <a:p>
             <a:pPr algn="ctr">
+              <a:lnSpc>
+                <a:spcPct val="100000"/>
+              </a:lnSpc>
               <a:spcBef>
                 <a:spcPts val="0"/>
               </a:spcBef>
@@ -10250,7 +10814,7 @@
               </a:spcAft>
             </a:pPr>
             <a:r>
-              <a:rPr sz="2800" b="1">
+              <a:rPr sz="10410" b="1">
                 <a:solidFill>
                   <a:srgbClr val="1A1A1A"/>
                 </a:solidFill>
@@ -10263,14 +10827,188 @@
       </p:sp>
       <p:sp>
         <p:nvSpPr>
+          <p:cNvPr id="14" name="Rectangle 13"/>
+          <p:cNvSpPr/>
+          <p:nvPr/>
+        </p:nvSpPr>
+        <p:spPr>
+          <a:xfrm>
+            <a:off x="652311" y="396000"/>
+            <a:ext cx="1563844" cy="9525"/>
+          </a:xfrm>
+          <a:prstGeom prst="rect">
+            <a:avLst/>
+          </a:prstGeom>
+          <a:solidFill>
+            <a:srgbClr val="C0C0C0"/>
+          </a:solidFill>
+          <a:ln>
+            <a:noFill/>
+          </a:ln>
+        </p:spPr>
+        <p:txBody>
+          <a:bodyPr rtlCol="0" anchor="ctr"/>
+          <a:lstStyle/>
+          <a:p>
+            <a:pPr algn="ctr"/>
+          </a:p>
+        </p:txBody>
+      </p:sp>
+      <p:sp>
+        <p:nvSpPr>
+          <p:cNvPr id="15" name="Rectangle 14"/>
+          <p:cNvSpPr/>
+          <p:nvPr/>
+        </p:nvSpPr>
+        <p:spPr>
+          <a:xfrm>
+            <a:off x="2216155" y="396000"/>
+            <a:ext cx="1563844" cy="9525"/>
+          </a:xfrm>
+          <a:prstGeom prst="rect">
+            <a:avLst/>
+          </a:prstGeom>
+          <a:solidFill>
+            <a:srgbClr val="C0C0C0"/>
+          </a:solidFill>
+          <a:ln>
+            <a:noFill/>
+          </a:ln>
+        </p:spPr>
+        <p:txBody>
+          <a:bodyPr rtlCol="0" anchor="ctr"/>
+          <a:lstStyle/>
+          <a:p>
+            <a:pPr algn="ctr"/>
+          </a:p>
+        </p:txBody>
+      </p:sp>
+      <p:sp>
+        <p:nvSpPr>
+          <p:cNvPr id="16" name="Rectangle 15"/>
+          <p:cNvSpPr/>
+          <p:nvPr/>
+        </p:nvSpPr>
+        <p:spPr>
+          <a:xfrm>
+            <a:off x="3780000" y="396000"/>
+            <a:ext cx="1563844" cy="9525"/>
+          </a:xfrm>
+          <a:prstGeom prst="rect">
+            <a:avLst/>
+          </a:prstGeom>
+          <a:solidFill>
+            <a:srgbClr val="C0C0C0"/>
+          </a:solidFill>
+          <a:ln>
+            <a:noFill/>
+          </a:ln>
+        </p:spPr>
+        <p:txBody>
+          <a:bodyPr rtlCol="0" anchor="ctr"/>
+          <a:lstStyle/>
+          <a:p>
+            <a:pPr algn="ctr"/>
+          </a:p>
+        </p:txBody>
+      </p:sp>
+      <p:sp>
+        <p:nvSpPr>
+          <p:cNvPr id="17" name="Rectangle 16"/>
+          <p:cNvSpPr/>
+          <p:nvPr/>
+        </p:nvSpPr>
+        <p:spPr>
+          <a:xfrm>
+            <a:off x="5343844" y="396000"/>
+            <a:ext cx="1563844" cy="9525"/>
+          </a:xfrm>
+          <a:prstGeom prst="rect">
+            <a:avLst/>
+          </a:prstGeom>
+          <a:solidFill>
+            <a:srgbClr val="C0C0C0"/>
+          </a:solidFill>
+          <a:ln>
+            <a:noFill/>
+          </a:ln>
+        </p:spPr>
+        <p:txBody>
+          <a:bodyPr rtlCol="0" anchor="ctr"/>
+          <a:lstStyle/>
+          <a:p>
+            <a:pPr algn="ctr"/>
+          </a:p>
+        </p:txBody>
+      </p:sp>
+      <p:sp>
+        <p:nvSpPr>
+          <p:cNvPr id="18" name="Rectangle 17"/>
+          <p:cNvSpPr/>
+          <p:nvPr/>
+        </p:nvSpPr>
+        <p:spPr>
+          <a:xfrm>
+            <a:off x="652311" y="2417295"/>
+            <a:ext cx="1563844" cy="9525"/>
+          </a:xfrm>
+          <a:prstGeom prst="rect">
+            <a:avLst/>
+          </a:prstGeom>
+          <a:solidFill>
+            <a:srgbClr val="C0C0C0"/>
+          </a:solidFill>
+          <a:ln>
+            <a:noFill/>
+          </a:ln>
+        </p:spPr>
+        <p:txBody>
+          <a:bodyPr rtlCol="0" anchor="ctr"/>
+          <a:lstStyle/>
+          <a:p>
+            <a:pPr algn="ctr"/>
+          </a:p>
+        </p:txBody>
+      </p:sp>
+      <p:sp>
+        <p:nvSpPr>
+          <p:cNvPr id="19" name="Rectangle 18"/>
+          <p:cNvSpPr/>
+          <p:nvPr/>
+        </p:nvSpPr>
+        <p:spPr>
+          <a:xfrm>
+            <a:off x="2216155" y="2417295"/>
+            <a:ext cx="1563844" cy="9525"/>
+          </a:xfrm>
+          <a:prstGeom prst="rect">
+            <a:avLst/>
+          </a:prstGeom>
+          <a:solidFill>
+            <a:srgbClr val="C0C0C0"/>
+          </a:solidFill>
+          <a:ln>
+            <a:noFill/>
+          </a:ln>
+        </p:spPr>
+        <p:txBody>
+          <a:bodyPr rtlCol="0" anchor="ctr"/>
+          <a:lstStyle/>
+          <a:p>
+            <a:pPr algn="ctr"/>
+          </a:p>
+        </p:txBody>
+      </p:sp>
+      <p:sp>
+        <p:nvSpPr>
           <p:cNvPr id="20" name="Rectangle 19"/>
           <p:cNvSpPr/>
           <p:nvPr/>
         </p:nvSpPr>
         <p:spPr>
           <a:xfrm>
-            <a:off x="514302" y="396000"/>
-            <a:ext cx="2177131" cy="9525"/>
+            <a:off x="3780000" y="2417295"/>
+            <a:ext cx="1563844" cy="9525"/>
           </a:xfrm>
           <a:prstGeom prst="rect">
             <a:avLst/>
@@ -10298,8 +11036,8 @@
         </p:nvSpPr>
         <p:spPr>
           <a:xfrm>
-            <a:off x="2691434" y="396000"/>
-            <a:ext cx="2177131" cy="9525"/>
+            <a:off x="5343844" y="2417295"/>
+            <a:ext cx="1563844" cy="9525"/>
           </a:xfrm>
           <a:prstGeom prst="rect">
             <a:avLst/>
@@ -10327,8 +11065,8 @@
         </p:nvSpPr>
         <p:spPr>
           <a:xfrm>
-            <a:off x="4868565" y="396000"/>
-            <a:ext cx="2177131" cy="9525"/>
+            <a:off x="652311" y="4438590"/>
+            <a:ext cx="1563844" cy="9525"/>
           </a:xfrm>
           <a:prstGeom prst="rect">
             <a:avLst/>
@@ -10356,8 +11094,8 @@
         </p:nvSpPr>
         <p:spPr>
           <a:xfrm>
-            <a:off x="514302" y="2080412"/>
-            <a:ext cx="2177131" cy="9525"/>
+            <a:off x="2216155" y="4438590"/>
+            <a:ext cx="1563844" cy="9525"/>
           </a:xfrm>
           <a:prstGeom prst="rect">
             <a:avLst/>
@@ -10385,8 +11123,8 @@
         </p:nvSpPr>
         <p:spPr>
           <a:xfrm>
-            <a:off x="2691434" y="2080412"/>
-            <a:ext cx="2177131" cy="9525"/>
+            <a:off x="3780000" y="4438590"/>
+            <a:ext cx="1563844" cy="9525"/>
           </a:xfrm>
           <a:prstGeom prst="rect">
             <a:avLst/>
@@ -10414,8 +11152,8 @@
         </p:nvSpPr>
         <p:spPr>
           <a:xfrm>
-            <a:off x="4868565" y="2080412"/>
-            <a:ext cx="2177131" cy="9525"/>
+            <a:off x="5343844" y="4438590"/>
+            <a:ext cx="1563844" cy="9525"/>
           </a:xfrm>
           <a:prstGeom prst="rect">
             <a:avLst/>
@@ -10443,8 +11181,8 @@
         </p:nvSpPr>
         <p:spPr>
           <a:xfrm>
-            <a:off x="514302" y="3764825"/>
-            <a:ext cx="2177131" cy="9525"/>
+            <a:off x="652311" y="6459884"/>
+            <a:ext cx="1563844" cy="9525"/>
           </a:xfrm>
           <a:prstGeom prst="rect">
             <a:avLst/>
@@ -10472,8 +11210,8 @@
         </p:nvSpPr>
         <p:spPr>
           <a:xfrm>
-            <a:off x="2691434" y="3764825"/>
-            <a:ext cx="2177131" cy="9525"/>
+            <a:off x="2216155" y="6459884"/>
+            <a:ext cx="1563844" cy="9525"/>
           </a:xfrm>
           <a:prstGeom prst="rect">
             <a:avLst/>
@@ -10501,8 +11239,8 @@
         </p:nvSpPr>
         <p:spPr>
           <a:xfrm>
-            <a:off x="4868565" y="3764825"/>
-            <a:ext cx="2177131" cy="9525"/>
+            <a:off x="3780000" y="6459884"/>
+            <a:ext cx="1563844" cy="9525"/>
           </a:xfrm>
           <a:prstGeom prst="rect">
             <a:avLst/>
@@ -10530,8 +11268,8 @@
         </p:nvSpPr>
         <p:spPr>
           <a:xfrm>
-            <a:off x="514302" y="5449237"/>
-            <a:ext cx="2177131" cy="9525"/>
+            <a:off x="5343844" y="6459884"/>
+            <a:ext cx="1563844" cy="9525"/>
           </a:xfrm>
           <a:prstGeom prst="rect">
             <a:avLst/>
@@ -10559,8 +11297,8 @@
         </p:nvSpPr>
         <p:spPr>
           <a:xfrm>
-            <a:off x="2691434" y="5449237"/>
-            <a:ext cx="2177131" cy="9525"/>
+            <a:off x="647549" y="400762"/>
+            <a:ext cx="9525" cy="2021294"/>
           </a:xfrm>
           <a:prstGeom prst="rect">
             <a:avLst/>
@@ -10588,8 +11326,8 @@
         </p:nvSpPr>
         <p:spPr>
           <a:xfrm>
-            <a:off x="4868565" y="5449237"/>
-            <a:ext cx="2177131" cy="9525"/>
+            <a:off x="647549" y="2422057"/>
+            <a:ext cx="9525" cy="2021294"/>
           </a:xfrm>
           <a:prstGeom prst="rect">
             <a:avLst/>
@@ -10617,8 +11355,8 @@
         </p:nvSpPr>
         <p:spPr>
           <a:xfrm>
-            <a:off x="514302" y="7133650"/>
-            <a:ext cx="2177131" cy="9525"/>
+            <a:off x="647549" y="4443352"/>
+            <a:ext cx="9525" cy="2021294"/>
           </a:xfrm>
           <a:prstGeom prst="rect">
             <a:avLst/>
@@ -10646,8 +11384,8 @@
         </p:nvSpPr>
         <p:spPr>
           <a:xfrm>
-            <a:off x="2691434" y="7133650"/>
-            <a:ext cx="2177131" cy="9525"/>
+            <a:off x="2211393" y="400762"/>
+            <a:ext cx="9525" cy="2021294"/>
           </a:xfrm>
           <a:prstGeom prst="rect">
             <a:avLst/>
@@ -10675,8 +11413,8 @@
         </p:nvSpPr>
         <p:spPr>
           <a:xfrm>
-            <a:off x="4868565" y="7133650"/>
-            <a:ext cx="2177131" cy="9525"/>
+            <a:off x="2211393" y="2422057"/>
+            <a:ext cx="9525" cy="2021294"/>
           </a:xfrm>
           <a:prstGeom prst="rect">
             <a:avLst/>
@@ -10704,8 +11442,8 @@
         </p:nvSpPr>
         <p:spPr>
           <a:xfrm>
-            <a:off x="514302" y="8818062"/>
-            <a:ext cx="2177131" cy="9525"/>
+            <a:off x="2211393" y="4443352"/>
+            <a:ext cx="9525" cy="2021294"/>
           </a:xfrm>
           <a:prstGeom prst="rect">
             <a:avLst/>
@@ -10733,8 +11471,8 @@
         </p:nvSpPr>
         <p:spPr>
           <a:xfrm>
-            <a:off x="2691434" y="8818062"/>
-            <a:ext cx="2177131" cy="9525"/>
+            <a:off x="3775237" y="400762"/>
+            <a:ext cx="9525" cy="2021294"/>
           </a:xfrm>
           <a:prstGeom prst="rect">
             <a:avLst/>
@@ -10762,8 +11500,8 @@
         </p:nvSpPr>
         <p:spPr>
           <a:xfrm>
-            <a:off x="4868565" y="8818062"/>
-            <a:ext cx="2177131" cy="9525"/>
+            <a:off x="3775237" y="2422057"/>
+            <a:ext cx="9525" cy="2021294"/>
           </a:xfrm>
           <a:prstGeom prst="rect">
             <a:avLst/>
@@ -10791,8 +11529,8 @@
         </p:nvSpPr>
         <p:spPr>
           <a:xfrm>
-            <a:off x="514302" y="10502475"/>
-            <a:ext cx="2177131" cy="9525"/>
+            <a:off x="3775237" y="4443352"/>
+            <a:ext cx="9525" cy="2021294"/>
           </a:xfrm>
           <a:prstGeom prst="rect">
             <a:avLst/>
@@ -10820,8 +11558,8 @@
         </p:nvSpPr>
         <p:spPr>
           <a:xfrm>
-            <a:off x="2691434" y="10502475"/>
-            <a:ext cx="2177131" cy="9525"/>
+            <a:off x="5339081" y="400762"/>
+            <a:ext cx="9525" cy="2021294"/>
           </a:xfrm>
           <a:prstGeom prst="rect">
             <a:avLst/>
@@ -10849,8 +11587,8 @@
         </p:nvSpPr>
         <p:spPr>
           <a:xfrm>
-            <a:off x="4868565" y="10502475"/>
-            <a:ext cx="2177131" cy="9525"/>
+            <a:off x="5339081" y="2422057"/>
+            <a:ext cx="9525" cy="2021294"/>
           </a:xfrm>
           <a:prstGeom prst="rect">
             <a:avLst/>
@@ -10878,8 +11616,8 @@
         </p:nvSpPr>
         <p:spPr>
           <a:xfrm>
-            <a:off x="509539" y="400762"/>
-            <a:ext cx="9525" cy="1684412"/>
+            <a:off x="5339081" y="4443352"/>
+            <a:ext cx="9525" cy="2021294"/>
           </a:xfrm>
           <a:prstGeom prst="rect">
             <a:avLst/>
@@ -10907,8 +11645,8 @@
         </p:nvSpPr>
         <p:spPr>
           <a:xfrm>
-            <a:off x="509539" y="2085175"/>
-            <a:ext cx="9525" cy="1684412"/>
+            <a:off x="6902925" y="400762"/>
+            <a:ext cx="9525" cy="2021294"/>
           </a:xfrm>
           <a:prstGeom prst="rect">
             <a:avLst/>
@@ -10936,8 +11674,8 @@
         </p:nvSpPr>
         <p:spPr>
           <a:xfrm>
-            <a:off x="509539" y="3769587"/>
-            <a:ext cx="9525" cy="1684412"/>
+            <a:off x="6902925" y="2422057"/>
+            <a:ext cx="9525" cy="2021294"/>
           </a:xfrm>
           <a:prstGeom prst="rect">
             <a:avLst/>
@@ -10965,610 +11703,30 @@
         </p:nvSpPr>
         <p:spPr>
           <a:xfrm>
-            <a:off x="509539" y="5454000"/>
-            <a:ext cx="9525" cy="1684412"/>
-          </a:xfrm>
-          <a:prstGeom prst="rect">
-            <a:avLst/>
-          </a:prstGeom>
-          <a:solidFill>
-            <a:srgbClr val="C0C0C0"/>
-          </a:solidFill>
-          <a:ln>
-            <a:noFill/>
-          </a:ln>
-        </p:spPr>
-        <p:txBody>
-          <a:bodyPr rtlCol="0" anchor="ctr"/>
-          <a:lstStyle/>
-          <a:p>
-            <a:pPr algn="ctr"/>
-          </a:p>
-        </p:txBody>
-      </p:sp>
-      <p:sp>
-        <p:nvSpPr>
-          <p:cNvPr id="45" name="Rectangle 44"/>
-          <p:cNvSpPr/>
-          <p:nvPr/>
-        </p:nvSpPr>
-        <p:spPr>
-          <a:xfrm>
-            <a:off x="509539" y="7138412"/>
-            <a:ext cx="9525" cy="1684412"/>
-          </a:xfrm>
-          <a:prstGeom prst="rect">
-            <a:avLst/>
-          </a:prstGeom>
-          <a:solidFill>
-            <a:srgbClr val="C0C0C0"/>
-          </a:solidFill>
-          <a:ln>
-            <a:noFill/>
-          </a:ln>
-        </p:spPr>
-        <p:txBody>
-          <a:bodyPr rtlCol="0" anchor="ctr"/>
-          <a:lstStyle/>
-          <a:p>
-            <a:pPr algn="ctr"/>
-          </a:p>
-        </p:txBody>
-      </p:sp>
-      <p:sp>
-        <p:nvSpPr>
-          <p:cNvPr id="46" name="Rectangle 45"/>
-          <p:cNvSpPr/>
-          <p:nvPr/>
-        </p:nvSpPr>
-        <p:spPr>
-          <a:xfrm>
-            <a:off x="509539" y="8822825"/>
-            <a:ext cx="9525" cy="1684412"/>
-          </a:xfrm>
-          <a:prstGeom prst="rect">
-            <a:avLst/>
-          </a:prstGeom>
-          <a:solidFill>
-            <a:srgbClr val="C0C0C0"/>
-          </a:solidFill>
-          <a:ln>
-            <a:noFill/>
-          </a:ln>
-        </p:spPr>
-        <p:txBody>
-          <a:bodyPr rtlCol="0" anchor="ctr"/>
-          <a:lstStyle/>
-          <a:p>
-            <a:pPr algn="ctr"/>
-          </a:p>
-        </p:txBody>
-      </p:sp>
-      <p:sp>
-        <p:nvSpPr>
-          <p:cNvPr id="47" name="Rectangle 46"/>
-          <p:cNvSpPr/>
-          <p:nvPr/>
-        </p:nvSpPr>
-        <p:spPr>
-          <a:xfrm>
-            <a:off x="2686671" y="400762"/>
-            <a:ext cx="9525" cy="1684412"/>
-          </a:xfrm>
-          <a:prstGeom prst="rect">
-            <a:avLst/>
-          </a:prstGeom>
-          <a:solidFill>
-            <a:srgbClr val="C0C0C0"/>
-          </a:solidFill>
-          <a:ln>
-            <a:noFill/>
-          </a:ln>
-        </p:spPr>
-        <p:txBody>
-          <a:bodyPr rtlCol="0" anchor="ctr"/>
-          <a:lstStyle/>
-          <a:p>
-            <a:pPr algn="ctr"/>
-          </a:p>
-        </p:txBody>
-      </p:sp>
-      <p:sp>
-        <p:nvSpPr>
-          <p:cNvPr id="48" name="Rectangle 47"/>
-          <p:cNvSpPr/>
-          <p:nvPr/>
-        </p:nvSpPr>
-        <p:spPr>
-          <a:xfrm>
-            <a:off x="2686671" y="2085175"/>
-            <a:ext cx="9525" cy="1684412"/>
-          </a:xfrm>
-          <a:prstGeom prst="rect">
-            <a:avLst/>
-          </a:prstGeom>
-          <a:solidFill>
-            <a:srgbClr val="C0C0C0"/>
-          </a:solidFill>
-          <a:ln>
-            <a:noFill/>
-          </a:ln>
-        </p:spPr>
-        <p:txBody>
-          <a:bodyPr rtlCol="0" anchor="ctr"/>
-          <a:lstStyle/>
-          <a:p>
-            <a:pPr algn="ctr"/>
-          </a:p>
-        </p:txBody>
-      </p:sp>
-      <p:sp>
-        <p:nvSpPr>
-          <p:cNvPr id="49" name="Rectangle 48"/>
-          <p:cNvSpPr/>
-          <p:nvPr/>
-        </p:nvSpPr>
-        <p:spPr>
-          <a:xfrm>
-            <a:off x="2686671" y="3769587"/>
-            <a:ext cx="9525" cy="1684412"/>
-          </a:xfrm>
-          <a:prstGeom prst="rect">
-            <a:avLst/>
-          </a:prstGeom>
-          <a:solidFill>
-            <a:srgbClr val="C0C0C0"/>
-          </a:solidFill>
-          <a:ln>
-            <a:noFill/>
-          </a:ln>
-        </p:spPr>
-        <p:txBody>
-          <a:bodyPr rtlCol="0" anchor="ctr"/>
-          <a:lstStyle/>
-          <a:p>
-            <a:pPr algn="ctr"/>
-          </a:p>
-        </p:txBody>
-      </p:sp>
-      <p:sp>
-        <p:nvSpPr>
-          <p:cNvPr id="50" name="Rectangle 49"/>
-          <p:cNvSpPr/>
-          <p:nvPr/>
-        </p:nvSpPr>
-        <p:spPr>
-          <a:xfrm>
-            <a:off x="2686671" y="5454000"/>
-            <a:ext cx="9525" cy="1684412"/>
-          </a:xfrm>
-          <a:prstGeom prst="rect">
-            <a:avLst/>
-          </a:prstGeom>
-          <a:solidFill>
-            <a:srgbClr val="C0C0C0"/>
-          </a:solidFill>
-          <a:ln>
-            <a:noFill/>
-          </a:ln>
-        </p:spPr>
-        <p:txBody>
-          <a:bodyPr rtlCol="0" anchor="ctr"/>
-          <a:lstStyle/>
-          <a:p>
-            <a:pPr algn="ctr"/>
-          </a:p>
-        </p:txBody>
-      </p:sp>
-      <p:sp>
-        <p:nvSpPr>
-          <p:cNvPr id="51" name="Rectangle 50"/>
-          <p:cNvSpPr/>
-          <p:nvPr/>
-        </p:nvSpPr>
-        <p:spPr>
-          <a:xfrm>
-            <a:off x="2686671" y="7138412"/>
-            <a:ext cx="9525" cy="1684412"/>
-          </a:xfrm>
-          <a:prstGeom prst="rect">
-            <a:avLst/>
-          </a:prstGeom>
-          <a:solidFill>
-            <a:srgbClr val="C0C0C0"/>
-          </a:solidFill>
-          <a:ln>
-            <a:noFill/>
-          </a:ln>
-        </p:spPr>
-        <p:txBody>
-          <a:bodyPr rtlCol="0" anchor="ctr"/>
-          <a:lstStyle/>
-          <a:p>
-            <a:pPr algn="ctr"/>
-          </a:p>
-        </p:txBody>
-      </p:sp>
-      <p:sp>
-        <p:nvSpPr>
-          <p:cNvPr id="52" name="Rectangle 51"/>
-          <p:cNvSpPr/>
-          <p:nvPr/>
-        </p:nvSpPr>
-        <p:spPr>
-          <a:xfrm>
-            <a:off x="2686671" y="8822825"/>
-            <a:ext cx="9525" cy="1684412"/>
-          </a:xfrm>
-          <a:prstGeom prst="rect">
-            <a:avLst/>
-          </a:prstGeom>
-          <a:solidFill>
-            <a:srgbClr val="C0C0C0"/>
-          </a:solidFill>
-          <a:ln>
-            <a:noFill/>
-          </a:ln>
-        </p:spPr>
-        <p:txBody>
-          <a:bodyPr rtlCol="0" anchor="ctr"/>
-          <a:lstStyle/>
-          <a:p>
-            <a:pPr algn="ctr"/>
-          </a:p>
-        </p:txBody>
-      </p:sp>
-      <p:sp>
-        <p:nvSpPr>
-          <p:cNvPr id="53" name="Rectangle 52"/>
-          <p:cNvSpPr/>
-          <p:nvPr/>
-        </p:nvSpPr>
-        <p:spPr>
-          <a:xfrm>
-            <a:off x="4863803" y="400762"/>
-            <a:ext cx="9525" cy="1684412"/>
-          </a:xfrm>
-          <a:prstGeom prst="rect">
-            <a:avLst/>
-          </a:prstGeom>
-          <a:solidFill>
-            <a:srgbClr val="C0C0C0"/>
-          </a:solidFill>
-          <a:ln>
-            <a:noFill/>
-          </a:ln>
-        </p:spPr>
-        <p:txBody>
-          <a:bodyPr rtlCol="0" anchor="ctr"/>
-          <a:lstStyle/>
-          <a:p>
-            <a:pPr algn="ctr"/>
-          </a:p>
-        </p:txBody>
-      </p:sp>
-      <p:sp>
-        <p:nvSpPr>
-          <p:cNvPr id="54" name="Rectangle 53"/>
-          <p:cNvSpPr/>
-          <p:nvPr/>
-        </p:nvSpPr>
-        <p:spPr>
-          <a:xfrm>
-            <a:off x="4863803" y="2085175"/>
-            <a:ext cx="9525" cy="1684412"/>
-          </a:xfrm>
-          <a:prstGeom prst="rect">
-            <a:avLst/>
-          </a:prstGeom>
-          <a:solidFill>
-            <a:srgbClr val="C0C0C0"/>
-          </a:solidFill>
-          <a:ln>
-            <a:noFill/>
-          </a:ln>
-        </p:spPr>
-        <p:txBody>
-          <a:bodyPr rtlCol="0" anchor="ctr"/>
-          <a:lstStyle/>
-          <a:p>
-            <a:pPr algn="ctr"/>
-          </a:p>
-        </p:txBody>
-      </p:sp>
-      <p:sp>
-        <p:nvSpPr>
-          <p:cNvPr id="55" name="Rectangle 54"/>
-          <p:cNvSpPr/>
-          <p:nvPr/>
-        </p:nvSpPr>
-        <p:spPr>
-          <a:xfrm>
-            <a:off x="4863803" y="3769587"/>
-            <a:ext cx="9525" cy="1684412"/>
-          </a:xfrm>
-          <a:prstGeom prst="rect">
-            <a:avLst/>
-          </a:prstGeom>
-          <a:solidFill>
-            <a:srgbClr val="C0C0C0"/>
-          </a:solidFill>
-          <a:ln>
-            <a:noFill/>
-          </a:ln>
-        </p:spPr>
-        <p:txBody>
-          <a:bodyPr rtlCol="0" anchor="ctr"/>
-          <a:lstStyle/>
-          <a:p>
-            <a:pPr algn="ctr"/>
-          </a:p>
-        </p:txBody>
-      </p:sp>
-      <p:sp>
-        <p:nvSpPr>
-          <p:cNvPr id="56" name="Rectangle 55"/>
-          <p:cNvSpPr/>
-          <p:nvPr/>
-        </p:nvSpPr>
-        <p:spPr>
-          <a:xfrm>
-            <a:off x="4863803" y="5454000"/>
-            <a:ext cx="9525" cy="1684412"/>
-          </a:xfrm>
-          <a:prstGeom prst="rect">
-            <a:avLst/>
-          </a:prstGeom>
-          <a:solidFill>
-            <a:srgbClr val="C0C0C0"/>
-          </a:solidFill>
-          <a:ln>
-            <a:noFill/>
-          </a:ln>
-        </p:spPr>
-        <p:txBody>
-          <a:bodyPr rtlCol="0" anchor="ctr"/>
-          <a:lstStyle/>
-          <a:p>
-            <a:pPr algn="ctr"/>
-          </a:p>
-        </p:txBody>
-      </p:sp>
-      <p:sp>
-        <p:nvSpPr>
-          <p:cNvPr id="57" name="Rectangle 56"/>
-          <p:cNvSpPr/>
-          <p:nvPr/>
-        </p:nvSpPr>
-        <p:spPr>
-          <a:xfrm>
-            <a:off x="4863803" y="7138412"/>
-            <a:ext cx="9525" cy="1684412"/>
-          </a:xfrm>
-          <a:prstGeom prst="rect">
-            <a:avLst/>
-          </a:prstGeom>
-          <a:solidFill>
-            <a:srgbClr val="C0C0C0"/>
-          </a:solidFill>
-          <a:ln>
-            <a:noFill/>
-          </a:ln>
-        </p:spPr>
-        <p:txBody>
-          <a:bodyPr rtlCol="0" anchor="ctr"/>
-          <a:lstStyle/>
-          <a:p>
-            <a:pPr algn="ctr"/>
-          </a:p>
-        </p:txBody>
-      </p:sp>
-      <p:sp>
-        <p:nvSpPr>
-          <p:cNvPr id="58" name="Rectangle 57"/>
-          <p:cNvSpPr/>
-          <p:nvPr/>
-        </p:nvSpPr>
-        <p:spPr>
-          <a:xfrm>
-            <a:off x="4863803" y="8822825"/>
-            <a:ext cx="9525" cy="1684412"/>
-          </a:xfrm>
-          <a:prstGeom prst="rect">
-            <a:avLst/>
-          </a:prstGeom>
-          <a:solidFill>
-            <a:srgbClr val="C0C0C0"/>
-          </a:solidFill>
-          <a:ln>
-            <a:noFill/>
-          </a:ln>
-        </p:spPr>
-        <p:txBody>
-          <a:bodyPr rtlCol="0" anchor="ctr"/>
-          <a:lstStyle/>
-          <a:p>
-            <a:pPr algn="ctr"/>
-          </a:p>
-        </p:txBody>
-      </p:sp>
-      <p:sp>
-        <p:nvSpPr>
-          <p:cNvPr id="59" name="Rectangle 58"/>
-          <p:cNvSpPr/>
-          <p:nvPr/>
-        </p:nvSpPr>
-        <p:spPr>
-          <a:xfrm>
-            <a:off x="7040935" y="400762"/>
-            <a:ext cx="9525" cy="1684412"/>
-          </a:xfrm>
-          <a:prstGeom prst="rect">
-            <a:avLst/>
-          </a:prstGeom>
-          <a:solidFill>
-            <a:srgbClr val="C0C0C0"/>
-          </a:solidFill>
-          <a:ln>
-            <a:noFill/>
-          </a:ln>
-        </p:spPr>
-        <p:txBody>
-          <a:bodyPr rtlCol="0" anchor="ctr"/>
-          <a:lstStyle/>
-          <a:p>
-            <a:pPr algn="ctr"/>
-          </a:p>
-        </p:txBody>
-      </p:sp>
-      <p:sp>
-        <p:nvSpPr>
-          <p:cNvPr id="60" name="Rectangle 59"/>
-          <p:cNvSpPr/>
-          <p:nvPr/>
-        </p:nvSpPr>
-        <p:spPr>
-          <a:xfrm>
-            <a:off x="7040935" y="2085175"/>
-            <a:ext cx="9525" cy="1684412"/>
-          </a:xfrm>
-          <a:prstGeom prst="rect">
-            <a:avLst/>
-          </a:prstGeom>
-          <a:solidFill>
-            <a:srgbClr val="C0C0C0"/>
-          </a:solidFill>
-          <a:ln>
-            <a:noFill/>
-          </a:ln>
-        </p:spPr>
-        <p:txBody>
-          <a:bodyPr rtlCol="0" anchor="ctr"/>
-          <a:lstStyle/>
-          <a:p>
-            <a:pPr algn="ctr"/>
-          </a:p>
-        </p:txBody>
-      </p:sp>
-      <p:sp>
-        <p:nvSpPr>
-          <p:cNvPr id="61" name="Rectangle 60"/>
-          <p:cNvSpPr/>
-          <p:nvPr/>
-        </p:nvSpPr>
-        <p:spPr>
-          <a:xfrm>
-            <a:off x="7040935" y="3769587"/>
-            <a:ext cx="9525" cy="1684412"/>
-          </a:xfrm>
-          <a:prstGeom prst="rect">
-            <a:avLst/>
-          </a:prstGeom>
-          <a:solidFill>
-            <a:srgbClr val="C0C0C0"/>
-          </a:solidFill>
-          <a:ln>
-            <a:noFill/>
-          </a:ln>
-        </p:spPr>
-        <p:txBody>
-          <a:bodyPr rtlCol="0" anchor="ctr"/>
-          <a:lstStyle/>
-          <a:p>
-            <a:pPr algn="ctr"/>
-          </a:p>
-        </p:txBody>
-      </p:sp>
-      <p:sp>
-        <p:nvSpPr>
-          <p:cNvPr id="62" name="Rectangle 61"/>
-          <p:cNvSpPr/>
-          <p:nvPr/>
-        </p:nvSpPr>
-        <p:spPr>
-          <a:xfrm>
-            <a:off x="7040935" y="5454000"/>
-            <a:ext cx="9525" cy="1684412"/>
-          </a:xfrm>
-          <a:prstGeom prst="rect">
-            <a:avLst/>
-          </a:prstGeom>
-          <a:solidFill>
-            <a:srgbClr val="C0C0C0"/>
-          </a:solidFill>
-          <a:ln>
-            <a:noFill/>
-          </a:ln>
-        </p:spPr>
-        <p:txBody>
-          <a:bodyPr rtlCol="0" anchor="ctr"/>
-          <a:lstStyle/>
-          <a:p>
-            <a:pPr algn="ctr"/>
-          </a:p>
-        </p:txBody>
-      </p:sp>
-      <p:sp>
-        <p:nvSpPr>
-          <p:cNvPr id="63" name="Rectangle 62"/>
-          <p:cNvSpPr/>
-          <p:nvPr/>
-        </p:nvSpPr>
-        <p:spPr>
-          <a:xfrm>
-            <a:off x="7040935" y="7138412"/>
-            <a:ext cx="9525" cy="1684412"/>
-          </a:xfrm>
-          <a:prstGeom prst="rect">
-            <a:avLst/>
-          </a:prstGeom>
-          <a:solidFill>
-            <a:srgbClr val="C0C0C0"/>
-          </a:solidFill>
-          <a:ln>
-            <a:noFill/>
-          </a:ln>
-        </p:spPr>
-        <p:txBody>
-          <a:bodyPr rtlCol="0" anchor="ctr"/>
-          <a:lstStyle/>
-          <a:p>
-            <a:pPr algn="ctr"/>
-          </a:p>
-        </p:txBody>
-      </p:sp>
-      <p:sp>
-        <p:nvSpPr>
-          <p:cNvPr id="64" name="Rectangle 63"/>
-          <p:cNvSpPr/>
-          <p:nvPr/>
-        </p:nvSpPr>
-        <p:spPr>
-          <a:xfrm>
-            <a:off x="7040935" y="8822825"/>
-            <a:ext cx="9525" cy="1684412"/>
-          </a:xfrm>
-          <a:prstGeom prst="rect">
-            <a:avLst/>
-          </a:prstGeom>
-          <a:solidFill>
-            <a:srgbClr val="C0C0C0"/>
-          </a:solidFill>
-          <a:ln>
-            <a:noFill/>
-          </a:ln>
-        </p:spPr>
-        <p:txBody>
-          <a:bodyPr rtlCol="0" anchor="ctr"/>
-          <a:lstStyle/>
-          <a:p>
-            <a:pPr algn="ctr"/>
-          </a:p>
-        </p:txBody>
-      </p:sp>
-      <p:sp>
-        <p:nvSpPr>
-          <p:cNvPr id="65" name="TextBox 64"/>
+            <a:off x="6902925" y="4443352"/>
+            <a:ext cx="9525" cy="2021294"/>
+          </a:xfrm>
+          <a:prstGeom prst="rect">
+            <a:avLst/>
+          </a:prstGeom>
+          <a:solidFill>
+            <a:srgbClr val="C0C0C0"/>
+          </a:solidFill>
+          <a:ln>
+            <a:noFill/>
+          </a:ln>
+        </p:spPr>
+        <p:txBody>
+          <a:bodyPr rtlCol="0" anchor="ctr"/>
+          <a:lstStyle/>
+          <a:p>
+            <a:pPr algn="ctr"/>
+          </a:p>
+        </p:txBody>
+      </p:sp>
+      <p:sp>
+        <p:nvSpPr>
+          <p:cNvPr id="45" name="TextBox 44"/>
           <p:cNvSpPr txBox="1"/>
           <p:nvPr/>
         </p:nvSpPr>
